--- a/slides/model_layer_mock.pptx
+++ b/slides/model_layer_mock.pptx
@@ -3089,46 +3089,163 @@
         <p:nvPr/>
       </p:nvGrpSpPr>
       <p:grpSpPr/>
-      <p:pic>
-        <p:nvPicPr>
-          <p:cNvPr id="2" name="Picture 1" descr="tpl_bg.png"/>
-          <p:cNvPicPr>
-            <a:picLocks noChangeAspect="1"/>
-          </p:cNvPicPr>
-          <p:nvPr/>
-        </p:nvPicPr>
-        <p:blipFill>
-          <a:blip r:embed="rId2"/>
-          <a:stretch>
-            <a:fillRect/>
-          </a:stretch>
-        </p:blipFill>
-        <p:spPr>
-          <a:xfrm>
-            <a:off x="0" y="0"/>
-            <a:ext cx="12191695" cy="6858000"/>
-          </a:xfrm>
-          <a:prstGeom prst="rect">
-            <a:avLst/>
-          </a:prstGeom>
-        </p:spPr>
-      </p:pic>
-      <p:sp>
-        <p:nvSpPr>
-          <p:cNvPr id="3" name="Rectangle 2"/>
+      <p:sp>
+        <p:nvSpPr>
+          <p:cNvPr id="2" name="TextBox 1"/>
+          <p:cNvSpPr txBox="1"/>
+          <p:nvPr/>
+        </p:nvSpPr>
+        <p:spPr>
+          <a:xfrm>
+            <a:off x="548640" y="384048"/>
+            <a:ext cx="8229600" cy="292608"/>
+          </a:xfrm>
+          <a:prstGeom prst="rect">
+            <a:avLst/>
+          </a:prstGeom>
+          <a:noFill/>
+        </p:spPr>
+        <p:txBody>
+          <a:bodyPr wrap="square" anchor="ctr" lIns="0" tIns="0" rIns="0" bIns="0">
+            <a:noAutofit/>
+          </a:bodyPr>
+          <a:lstStyle/>
+          <a:p>
+            <a:pPr algn="l" latinLnBrk="0">
+              <a:lnSpc>
+                <a:spcPct val="100000"/>
+              </a:lnSpc>
+              <a:spcBef>
+                <a:spcPts val="0"/>
+              </a:spcBef>
+              <a:spcAft>
+                <a:spcPts val="0"/>
+              </a:spcAft>
+            </a:pPr>
+            <a:r>
+              <a:rPr sz="1100" b="1">
+                <a:solidFill>
+                  <a:srgbClr val="C0612C"/>
+                </a:solidFill>
+                <a:latin typeface="Consolas"/>
+                <a:ea typeface="Microsoft YaHei"/>
+                <a:cs typeface="Microsoft YaHei"/>
+              </a:rPr>
+              <a:t>模型层 · 一次完整的候选迭代</a:t>
+            </a:r>
+          </a:p>
+        </p:txBody>
+      </p:sp>
+      <p:sp>
+        <p:nvSpPr>
+          <p:cNvPr id="3" name="TextBox 2"/>
+          <p:cNvSpPr txBox="1"/>
+          <p:nvPr/>
+        </p:nvSpPr>
+        <p:spPr>
+          <a:xfrm>
+            <a:off x="548640" y="731520"/>
+            <a:ext cx="11094415" cy="530352"/>
+          </a:xfrm>
+          <a:prstGeom prst="rect">
+            <a:avLst/>
+          </a:prstGeom>
+          <a:noFill/>
+        </p:spPr>
+        <p:txBody>
+          <a:bodyPr wrap="square" anchor="ctr" lIns="0" tIns="0" rIns="0" bIns="0">
+            <a:noAutofit/>
+          </a:bodyPr>
+          <a:lstStyle/>
+          <a:p>
+            <a:pPr algn="l" latinLnBrk="0">
+              <a:lnSpc>
+                <a:spcPct val="100000"/>
+              </a:lnSpc>
+              <a:spcBef>
+                <a:spcPts val="0"/>
+              </a:spcBef>
+              <a:spcAft>
+                <a:spcPts val="0"/>
+              </a:spcAft>
+            </a:pPr>
+            <a:r>
+              <a:rPr sz="2500" b="1">
+                <a:solidFill>
+                  <a:srgbClr val="16202A"/>
+                </a:solidFill>
+                <a:latin typeface="Microsoft YaHei"/>
+                <a:ea typeface="Microsoft YaHei"/>
+                <a:cs typeface="Microsoft YaHei"/>
+              </a:rPr>
+              <a:t>__ 模型：__ 个候选，__ 个过三道门，交付收益 +__%</a:t>
+            </a:r>
+          </a:p>
+        </p:txBody>
+      </p:sp>
+      <p:sp>
+        <p:nvSpPr>
+          <p:cNvPr id="4" name="TextBox 3"/>
+          <p:cNvSpPr txBox="1"/>
+          <p:nvPr/>
+        </p:nvSpPr>
+        <p:spPr>
+          <a:xfrm>
+            <a:off x="548640" y="1261872"/>
+            <a:ext cx="11094415" cy="329184"/>
+          </a:xfrm>
+          <a:prstGeom prst="rect">
+            <a:avLst/>
+          </a:prstGeom>
+          <a:noFill/>
+        </p:spPr>
+        <p:txBody>
+          <a:bodyPr wrap="square" anchor="ctr" lIns="0" tIns="0" rIns="0" bIns="0">
+            <a:noAutofit/>
+          </a:bodyPr>
+          <a:lstStyle/>
+          <a:p>
+            <a:pPr algn="l" latinLnBrk="0">
+              <a:lnSpc>
+                <a:spcPct val="100000"/>
+              </a:lnSpc>
+              <a:spcBef>
+                <a:spcPts val="0"/>
+              </a:spcBef>
+              <a:spcAft>
+                <a:spcPts val="0"/>
+              </a:spcAft>
+            </a:pPr>
+            <a:r>
+              <a:rPr sz="1300" b="0">
+                <a:solidFill>
+                  <a:srgbClr val="66727F"/>
+                </a:solidFill>
+                <a:latin typeface="Microsoft YaHei"/>
+                <a:ea typeface="Microsoft YaHei"/>
+                <a:cs typeface="Microsoft YaHei"/>
+              </a:rPr>
+              <a:t>候选都从基线分叉、收益不叠加——交付的是 D 阶段独立复验后最好的那一个</a:t>
+            </a:r>
+          </a:p>
+        </p:txBody>
+      </p:sp>
+      <p:sp>
+        <p:nvSpPr>
+          <p:cNvPr id="5" name="Rectangle 4"/>
           <p:cNvSpPr/>
           <p:nvPr/>
         </p:nvSpPr>
         <p:spPr>
           <a:xfrm>
-            <a:off x="548640" y="420624"/>
-            <a:ext cx="50292" cy="237744"/>
+            <a:off x="548640" y="1627632"/>
+            <a:ext cx="11094415" cy="292608"/>
           </a:xfrm>
           <a:prstGeom prst="rect">
             <a:avLst/>
           </a:prstGeom>
           <a:solidFill>
-            <a:srgbClr val="D4147A"/>
+            <a:srgbClr val="F6F7F9"/>
           </a:solidFill>
           <a:ln>
             <a:noFill/>
@@ -3144,14 +3261,14 @@
       </p:sp>
       <p:sp>
         <p:nvSpPr>
-          <p:cNvPr id="4" name="TextBox 3"/>
-          <p:cNvSpPr txBox="1"/>
-          <p:nvPr/>
-        </p:nvSpPr>
-        <p:spPr>
-          <a:xfrm>
-            <a:off x="713232" y="384048"/>
-            <a:ext cx="9427464" cy="292608"/>
+          <p:cNvPr id="6" name="TextBox 5"/>
+          <p:cNvSpPr txBox="1"/>
+          <p:nvPr/>
+        </p:nvSpPr>
+        <p:spPr>
+          <a:xfrm>
+            <a:off x="731520" y="1627632"/>
+            <a:ext cx="10728655" cy="292608"/>
           </a:xfrm>
           <a:prstGeom prst="rect">
             <a:avLst/>
@@ -3176,109 +3293,81 @@
               </a:spcAft>
             </a:pPr>
             <a:r>
-              <a:rPr sz="1100" b="1">
-                <a:solidFill>
-                  <a:srgbClr val="D4147A"/>
+              <a:rPr sz="1000" b="1">
+                <a:solidFill>
+                  <a:srgbClr val="16202A"/>
+                </a:solidFill>
+                <a:latin typeface="Microsoft YaHei"/>
+                <a:ea typeface="Microsoft YaHei"/>
+                <a:cs typeface="Microsoft YaHei"/>
+              </a:rPr>
+              <a:t>冻结口径　</a:t>
+            </a:r>
+            <a:r>
+              <a:rPr sz="950" b="1">
+                <a:solidFill>
+                  <a:srgbClr val="C0612C"/>
                 </a:solidFill>
                 <a:latin typeface="Consolas"/>
                 <a:ea typeface="Microsoft YaHei"/>
                 <a:cs typeface="Microsoft YaHei"/>
               </a:rPr>
-              <a:t>模型层 · 一次完整的候选迭代</a:t>
-            </a:r>
-          </a:p>
-        </p:txBody>
-      </p:sp>
-      <p:sp>
-        <p:nvSpPr>
-          <p:cNvPr id="5" name="TextBox 4"/>
-          <p:cNvSpPr txBox="1"/>
-          <p:nvPr/>
-        </p:nvSpPr>
-        <p:spPr>
-          <a:xfrm>
-            <a:off x="548640" y="731520"/>
-            <a:ext cx="9592056" cy="530352"/>
-          </a:xfrm>
-          <a:prstGeom prst="rect">
-            <a:avLst/>
-          </a:prstGeom>
-          <a:noFill/>
-        </p:spPr>
-        <p:txBody>
-          <a:bodyPr wrap="square" anchor="ctr" lIns="0" tIns="0" rIns="0" bIns="0">
-            <a:noAutofit/>
-          </a:bodyPr>
-          <a:lstStyle/>
-          <a:p>
-            <a:pPr algn="l" latinLnBrk="0">
-              <a:lnSpc>
-                <a:spcPct val="100000"/>
-              </a:lnSpc>
-              <a:spcBef>
-                <a:spcPts val="0"/>
-              </a:spcBef>
-              <a:spcAft>
-                <a:spcPts val="0"/>
-              </a:spcAft>
-            </a:pPr>
-            <a:r>
-              <a:rPr sz="2500" b="1">
-                <a:solidFill>
-                  <a:srgbClr val="0A2B45"/>
+              <a:t>__ · __ 精度 · TP__ · 并发 __ · 输入 __ / 输出 __</a:t>
+            </a:r>
+            <a:r>
+              <a:rPr sz="1000" b="0">
+                <a:solidFill>
+                  <a:srgbClr val="35424F"/>
                 </a:solidFill>
                 <a:latin typeface="Microsoft YaHei"/>
                 <a:ea typeface="Microsoft YaHei"/>
                 <a:cs typeface="Microsoft YaHei"/>
               </a:rPr>
-              <a:t>__ 模型：__ 个候选，__ 个过三道门，交付收益 +__%</a:t>
-            </a:r>
-          </a:p>
-        </p:txBody>
-      </p:sp>
-      <p:sp>
-        <p:nvSpPr>
-          <p:cNvPr id="6" name="TextBox 5"/>
-          <p:cNvSpPr txBox="1"/>
-          <p:nvPr/>
-        </p:nvSpPr>
-        <p:spPr>
-          <a:xfrm>
-            <a:off x="548640" y="1261872"/>
-            <a:ext cx="11094415" cy="329184"/>
-          </a:xfrm>
-          <a:prstGeom prst="rect">
-            <a:avLst/>
-          </a:prstGeom>
-          <a:noFill/>
-        </p:spPr>
-        <p:txBody>
-          <a:bodyPr wrap="square" anchor="ctr" lIns="0" tIns="0" rIns="0" bIns="0">
-            <a:noAutofit/>
-          </a:bodyPr>
-          <a:lstStyle/>
-          <a:p>
-            <a:pPr algn="l" latinLnBrk="0">
-              <a:lnSpc>
-                <a:spcPct val="100000"/>
-              </a:lnSpc>
-              <a:spcBef>
-                <a:spcPts val="0"/>
-              </a:spcBef>
-              <a:spcAft>
-                <a:spcPts val="0"/>
-              </a:spcAft>
-            </a:pPr>
-            <a:r>
-              <a:rPr sz="1300" b="0">
-                <a:solidFill>
-                  <a:srgbClr val="1B4D69"/>
+              <a:t>　主指标 </a:t>
+            </a:r>
+            <a:r>
+              <a:rPr sz="950" b="1">
+                <a:solidFill>
+                  <a:srgbClr val="16202A"/>
+                </a:solidFill>
+                <a:latin typeface="Consolas"/>
+                <a:ea typeface="Microsoft YaHei"/>
+                <a:cs typeface="Microsoft YaHei"/>
+              </a:rPr>
+              <a:t>__</a:t>
+            </a:r>
+            <a:r>
+              <a:rPr sz="1000" b="0">
+                <a:solidFill>
+                  <a:srgbClr val="35424F"/>
                 </a:solidFill>
                 <a:latin typeface="Microsoft YaHei"/>
                 <a:ea typeface="Microsoft YaHei"/>
                 <a:cs typeface="Microsoft YaHei"/>
               </a:rPr>
-              <a:t>候选都从基线分叉、收益不叠加——交付的是 D 阶段独立复验后最好的那一个</a:t>
+              <a:t>　基线 </a:t>
+            </a:r>
+            <a:r>
+              <a:rPr sz="950" b="1">
+                <a:solidFill>
+                  <a:srgbClr val="16202A"/>
+                </a:solidFill>
+                <a:latin typeface="Consolas"/>
+                <a:ea typeface="Microsoft YaHei"/>
+                <a:cs typeface="Microsoft YaHei"/>
+              </a:rPr>
+              <a:t>A 阶段 __ → D 阶段重测 __</a:t>
+            </a:r>
+            <a:r>
+              <a:rPr sz="1000" b="0">
+                <a:solidFill>
+                  <a:srgbClr val="66727F"/>
+                </a:solidFill>
+                <a:latin typeface="Microsoft YaHei"/>
+                <a:ea typeface="Microsoft YaHei"/>
+                <a:cs typeface="Microsoft YaHei"/>
+              </a:rPr>
+              <a:t>　两者之差即设备漂移</a:t>
             </a:r>
           </a:p>
         </p:txBody>
@@ -3291,14 +3380,14 @@
         </p:nvSpPr>
         <p:spPr>
           <a:xfrm>
-            <a:off x="548640" y="1627632"/>
-            <a:ext cx="11094415" cy="292608"/>
+            <a:off x="548640" y="1975104"/>
+            <a:ext cx="6537960" cy="3017520"/>
           </a:xfrm>
           <a:prstGeom prst="rect">
             <a:avLst/>
           </a:prstGeom>
           <a:solidFill>
-            <a:srgbClr val="FFFFFF"/>
+            <a:srgbClr val="F6F7F9"/>
           </a:solidFill>
           <a:ln>
             <a:noFill/>
@@ -3320,148 +3409,6 @@
         </p:nvSpPr>
         <p:spPr>
           <a:xfrm>
-            <a:off x="731520" y="1627632"/>
-            <a:ext cx="10728655" cy="292608"/>
-          </a:xfrm>
-          <a:prstGeom prst="rect">
-            <a:avLst/>
-          </a:prstGeom>
-          <a:noFill/>
-        </p:spPr>
-        <p:txBody>
-          <a:bodyPr wrap="square" anchor="ctr" lIns="0" tIns="0" rIns="0" bIns="0">
-            <a:noAutofit/>
-          </a:bodyPr>
-          <a:lstStyle/>
-          <a:p>
-            <a:pPr algn="l" latinLnBrk="0">
-              <a:lnSpc>
-                <a:spcPct val="100000"/>
-              </a:lnSpc>
-              <a:spcBef>
-                <a:spcPts val="0"/>
-              </a:spcBef>
-              <a:spcAft>
-                <a:spcPts val="0"/>
-              </a:spcAft>
-            </a:pPr>
-            <a:r>
-              <a:rPr sz="1000" b="1">
-                <a:solidFill>
-                  <a:srgbClr val="0A2B45"/>
-                </a:solidFill>
-                <a:latin typeface="Microsoft YaHei"/>
-                <a:ea typeface="Microsoft YaHei"/>
-                <a:cs typeface="Microsoft YaHei"/>
-              </a:rPr>
-              <a:t>冻结口径　</a:t>
-            </a:r>
-            <a:r>
-              <a:rPr sz="950" b="1">
-                <a:solidFill>
-                  <a:srgbClr val="0F62CE"/>
-                </a:solidFill>
-                <a:latin typeface="Consolas"/>
-                <a:ea typeface="Microsoft YaHei"/>
-                <a:cs typeface="Microsoft YaHei"/>
-              </a:rPr>
-              <a:t>__ · __ 精度 · TP__ · 并发 __ · 输入 __ / 输出 __</a:t>
-            </a:r>
-            <a:r>
-              <a:rPr sz="1000" b="0">
-                <a:solidFill>
-                  <a:srgbClr val="1B4D69"/>
-                </a:solidFill>
-                <a:latin typeface="Microsoft YaHei"/>
-                <a:ea typeface="Microsoft YaHei"/>
-                <a:cs typeface="Microsoft YaHei"/>
-              </a:rPr>
-              <a:t>　主指标 </a:t>
-            </a:r>
-            <a:r>
-              <a:rPr sz="950" b="1">
-                <a:solidFill>
-                  <a:srgbClr val="0A2B45"/>
-                </a:solidFill>
-                <a:latin typeface="Consolas"/>
-                <a:ea typeface="Microsoft YaHei"/>
-                <a:cs typeface="Microsoft YaHei"/>
-              </a:rPr>
-              <a:t>__</a:t>
-            </a:r>
-            <a:r>
-              <a:rPr sz="1000" b="0">
-                <a:solidFill>
-                  <a:srgbClr val="1B4D69"/>
-                </a:solidFill>
-                <a:latin typeface="Microsoft YaHei"/>
-                <a:ea typeface="Microsoft YaHei"/>
-                <a:cs typeface="Microsoft YaHei"/>
-              </a:rPr>
-              <a:t>　基线 </a:t>
-            </a:r>
-            <a:r>
-              <a:rPr sz="950" b="1">
-                <a:solidFill>
-                  <a:srgbClr val="0A2B45"/>
-                </a:solidFill>
-                <a:latin typeface="Consolas"/>
-                <a:ea typeface="Microsoft YaHei"/>
-                <a:cs typeface="Microsoft YaHei"/>
-              </a:rPr>
-              <a:t>A 阶段 __ → D 阶段重测 __</a:t>
-            </a:r>
-            <a:r>
-              <a:rPr sz="1000" b="0">
-                <a:solidFill>
-                  <a:srgbClr val="40708B"/>
-                </a:solidFill>
-                <a:latin typeface="Microsoft YaHei"/>
-                <a:ea typeface="Microsoft YaHei"/>
-                <a:cs typeface="Microsoft YaHei"/>
-              </a:rPr>
-              <a:t>　两者之差即设备漂移</a:t>
-            </a:r>
-          </a:p>
-        </p:txBody>
-      </p:sp>
-      <p:sp>
-        <p:nvSpPr>
-          <p:cNvPr id="9" name="Rectangle 8"/>
-          <p:cNvSpPr/>
-          <p:nvPr/>
-        </p:nvSpPr>
-        <p:spPr>
-          <a:xfrm>
-            <a:off x="548640" y="1975104"/>
-            <a:ext cx="6537960" cy="3017520"/>
-          </a:xfrm>
-          <a:prstGeom prst="rect">
-            <a:avLst/>
-          </a:prstGeom>
-          <a:solidFill>
-            <a:srgbClr val="FFFFFF"/>
-          </a:solidFill>
-          <a:ln>
-            <a:noFill/>
-          </a:ln>
-        </p:spPr>
-        <p:txBody>
-          <a:bodyPr rtlCol="0" anchor="ctr"/>
-          <a:lstStyle/>
-          <a:p>
-            <a:pPr algn="ctr"/>
-          </a:p>
-        </p:txBody>
-      </p:sp>
-      <p:sp>
-        <p:nvSpPr>
-          <p:cNvPr id="10" name="TextBox 9"/>
-          <p:cNvSpPr txBox="1"/>
-          <p:nvPr/>
-        </p:nvSpPr>
-        <p:spPr>
-          <a:xfrm>
             <a:off x="749808" y="2029968"/>
             <a:ext cx="2606040" cy="237744"/>
           </a:xfrm>
@@ -3490,7 +3437,7 @@
             <a:r>
               <a:rPr sz="1000" b="1">
                 <a:solidFill>
-                  <a:srgbClr val="0A2B45"/>
+                  <a:srgbClr val="16202A"/>
                 </a:solidFill>
                 <a:latin typeface="Microsoft YaHei"/>
                 <a:ea typeface="Microsoft YaHei"/>
@@ -3501,13 +3448,82 @@
             <a:r>
               <a:rPr sz="1000" b="0">
                 <a:solidFill>
-                  <a:srgbClr val="1B4D69"/>
+                  <a:srgbClr val="35424F"/>
                 </a:solidFill>
                 <a:latin typeface="Microsoft YaHei"/>
                 <a:ea typeface="Microsoft YaHei"/>
                 <a:cs typeface="Microsoft YaHei"/>
               </a:rPr>
               <a:t> = 候选 ÷ 基线 − 1　重复压测取中位</a:t>
+            </a:r>
+          </a:p>
+        </p:txBody>
+      </p:sp>
+      <p:cxnSp>
+        <p:nvCxnSpPr>
+          <p:cNvPr id="9" name="Connector 8"/>
+          <p:cNvCxnSpPr/>
+          <p:nvPr/>
+        </p:nvCxnSpPr>
+        <p:spPr>
+          <a:xfrm>
+            <a:off x="3447288" y="2148840"/>
+            <a:ext cx="237744" cy="0"/>
+          </a:xfrm>
+          <a:prstGeom prst="line">
+            <a:avLst/>
+          </a:prstGeom>
+          <a:ln w="15875">
+            <a:solidFill>
+              <a:srgbClr val="8C96A1"/>
+            </a:solidFill>
+            <a:prstDash val="dash"/>
+          </a:ln>
+        </p:spPr>
+      </p:cxnSp>
+      <p:sp>
+        <p:nvSpPr>
+          <p:cNvPr id="10" name="TextBox 9"/>
+          <p:cNvSpPr txBox="1"/>
+          <p:nvPr/>
+        </p:nvSpPr>
+        <p:spPr>
+          <a:xfrm>
+            <a:off x="3739896" y="2011680"/>
+            <a:ext cx="1078992" cy="274320"/>
+          </a:xfrm>
+          <a:prstGeom prst="rect">
+            <a:avLst/>
+          </a:prstGeom>
+          <a:noFill/>
+        </p:spPr>
+        <p:txBody>
+          <a:bodyPr wrap="square" anchor="ctr" lIns="0" tIns="0" rIns="0" bIns="0">
+            <a:noAutofit/>
+          </a:bodyPr>
+          <a:lstStyle/>
+          <a:p>
+            <a:pPr algn="l" latinLnBrk="0">
+              <a:lnSpc>
+                <a:spcPct val="100000"/>
+              </a:lnSpc>
+              <a:spcBef>
+                <a:spcPts val="0"/>
+              </a:spcBef>
+              <a:spcAft>
+                <a:spcPts val="0"/>
+              </a:spcAft>
+            </a:pPr>
+            <a:r>
+              <a:rPr sz="900" b="0">
+                <a:solidFill>
+                  <a:srgbClr val="66727F"/>
+                </a:solidFill>
+                <a:latin typeface="Microsoft YaHei"/>
+                <a:ea typeface="Microsoft YaHei"/>
+                <a:cs typeface="Microsoft YaHei"/>
+              </a:rPr>
+              <a:t>性能门 +3%</a:t>
             </a:r>
           </a:p>
         </p:txBody>
@@ -3520,7 +3536,7 @@
         </p:nvCxnSpPr>
         <p:spPr>
           <a:xfrm>
-            <a:off x="3447288" y="2148840"/>
+            <a:off x="4937759" y="2148840"/>
             <a:ext cx="237744" cy="0"/>
           </a:xfrm>
           <a:prstGeom prst="line">
@@ -3528,7 +3544,7 @@
           </a:prstGeom>
           <a:ln w="15875">
             <a:solidFill>
-              <a:srgbClr val="0F62CE"/>
+              <a:srgbClr val="C0612C"/>
             </a:solidFill>
             <a:prstDash val="dash"/>
           </a:ln>
@@ -3542,8 +3558,8 @@
         </p:nvSpPr>
         <p:spPr>
           <a:xfrm>
-            <a:off x="3739896" y="2011680"/>
-            <a:ext cx="1078992" cy="274320"/>
+            <a:off x="5230368" y="2011680"/>
+            <a:ext cx="1353312" cy="274320"/>
           </a:xfrm>
           <a:prstGeom prst="rect">
             <a:avLst/>
@@ -3570,13 +3586,13 @@
             <a:r>
               <a:rPr sz="900" b="0">
                 <a:solidFill>
-                  <a:srgbClr val="40708B"/>
+                  <a:srgbClr val="66727F"/>
                 </a:solidFill>
                 <a:latin typeface="Microsoft YaHei"/>
                 <a:ea typeface="Microsoft YaHei"/>
                 <a:cs typeface="Microsoft YaHei"/>
               </a:rPr>
-              <a:t>性能门 +3%</a:t>
+              <a:t>噪声极差 __%</a:t>
             </a:r>
           </a:p>
         </p:txBody>
@@ -3589,17 +3605,16 @@
         </p:nvCxnSpPr>
         <p:spPr>
           <a:xfrm>
-            <a:off x="4937759" y="2148840"/>
-            <a:ext cx="237744" cy="0"/>
+            <a:off x="1188720" y="4197577"/>
+            <a:ext cx="5349240" cy="0"/>
           </a:xfrm>
           <a:prstGeom prst="line">
             <a:avLst/>
           </a:prstGeom>
-          <a:ln w="15875">
+          <a:ln w="9525">
             <a:solidFill>
-              <a:srgbClr val="D4147A"/>
+              <a:srgbClr val="DDE2E7"/>
             </a:solidFill>
-            <a:prstDash val="dash"/>
           </a:ln>
         </p:spPr>
       </p:cxnSp>
@@ -3611,21 +3626,21 @@
         </p:nvSpPr>
         <p:spPr>
           <a:xfrm>
-            <a:off x="5230368" y="2011680"/>
-            <a:ext cx="1353312" cy="274320"/>
-          </a:xfrm>
-          <a:prstGeom prst="rect">
-            <a:avLst/>
-          </a:prstGeom>
-          <a:noFill/>
-        </p:spPr>
-        <p:txBody>
-          <a:bodyPr wrap="square" anchor="ctr" lIns="0" tIns="0" rIns="0" bIns="0">
-            <a:noAutofit/>
-          </a:bodyPr>
-          <a:lstStyle/>
-          <a:p>
-            <a:pPr algn="l" latinLnBrk="0">
+            <a:off x="621792" y="4096993"/>
+            <a:ext cx="457200" cy="201168"/>
+          </a:xfrm>
+          <a:prstGeom prst="rect">
+            <a:avLst/>
+          </a:prstGeom>
+          <a:noFill/>
+        </p:spPr>
+        <p:txBody>
+          <a:bodyPr wrap="square" anchor="ctr" lIns="0" tIns="0" rIns="0" bIns="0">
+            <a:noAutofit/>
+          </a:bodyPr>
+          <a:lstStyle/>
+          <a:p>
+            <a:pPr algn="r" latinLnBrk="0">
               <a:lnSpc>
                 <a:spcPct val="100000"/>
               </a:lnSpc>
@@ -3639,13 +3654,13 @@
             <a:r>
               <a:rPr sz="900" b="0">
                 <a:solidFill>
-                  <a:srgbClr val="40708B"/>
-                </a:solidFill>
-                <a:latin typeface="Microsoft YaHei"/>
-                <a:ea typeface="Microsoft YaHei"/>
-                <a:cs typeface="Microsoft YaHei"/>
-              </a:rPr>
-              <a:t>噪声极差 __%</a:t>
+                  <a:srgbClr val="8C96A1"/>
+                </a:solidFill>
+                <a:latin typeface="Consolas"/>
+                <a:ea typeface="Microsoft YaHei"/>
+                <a:cs typeface="Microsoft YaHei"/>
+              </a:rPr>
+              <a:t>__</a:t>
             </a:r>
           </a:p>
         </p:txBody>
@@ -3658,15 +3673,15 @@
         </p:nvCxnSpPr>
         <p:spPr>
           <a:xfrm>
-            <a:off x="1188720" y="4197577"/>
+            <a:off x="1188720" y="3797166"/>
             <a:ext cx="5349240" cy="0"/>
           </a:xfrm>
           <a:prstGeom prst="line">
             <a:avLst/>
           </a:prstGeom>
-          <a:ln w="9525">
+          <a:ln w="12700">
             <a:solidFill>
-              <a:srgbClr val="CFE3F0"/>
+              <a:srgbClr val="8C96A1"/>
             </a:solidFill>
           </a:ln>
         </p:spPr>
@@ -3679,7 +3694,7 @@
         </p:nvSpPr>
         <p:spPr>
           <a:xfrm>
-            <a:off x="621792" y="4096993"/>
+            <a:off x="621792" y="3696582"/>
             <a:ext cx="457200" cy="201168"/>
           </a:xfrm>
           <a:prstGeom prst="rect">
@@ -3707,13 +3722,13 @@
             <a:r>
               <a:rPr sz="900" b="0">
                 <a:solidFill>
-                  <a:srgbClr val="7FA4BA"/>
-                </a:solidFill>
-                <a:latin typeface="Consolas"/>
-                <a:ea typeface="Microsoft YaHei"/>
-                <a:cs typeface="Microsoft YaHei"/>
-              </a:rPr>
-              <a:t>__</a:t>
+                  <a:srgbClr val="66727F"/>
+                </a:solidFill>
+                <a:latin typeface="Microsoft YaHei"/>
+                <a:ea typeface="Microsoft YaHei"/>
+                <a:cs typeface="Microsoft YaHei"/>
+              </a:rPr>
+              <a:t>基线</a:t>
             </a:r>
           </a:p>
         </p:txBody>
@@ -3726,15 +3741,15 @@
         </p:nvCxnSpPr>
         <p:spPr>
           <a:xfrm>
-            <a:off x="1188720" y="3797166"/>
+            <a:off x="1188720" y="3396755"/>
             <a:ext cx="5349240" cy="0"/>
           </a:xfrm>
           <a:prstGeom prst="line">
             <a:avLst/>
           </a:prstGeom>
-          <a:ln w="12700">
+          <a:ln w="9525">
             <a:solidFill>
-              <a:srgbClr val="7FA4BA"/>
+              <a:srgbClr val="DDE2E7"/>
             </a:solidFill>
           </a:ln>
         </p:spPr>
@@ -3747,7 +3762,7 @@
         </p:nvSpPr>
         <p:spPr>
           <a:xfrm>
-            <a:off x="621792" y="3696582"/>
+            <a:off x="621792" y="3296171"/>
             <a:ext cx="457200" cy="201168"/>
           </a:xfrm>
           <a:prstGeom prst="rect">
@@ -3775,13 +3790,13 @@
             <a:r>
               <a:rPr sz="900" b="0">
                 <a:solidFill>
-                  <a:srgbClr val="40708B"/>
-                </a:solidFill>
-                <a:latin typeface="Microsoft YaHei"/>
-                <a:ea typeface="Microsoft YaHei"/>
-                <a:cs typeface="Microsoft YaHei"/>
-              </a:rPr>
-              <a:t>基线</a:t>
+                  <a:srgbClr val="8C96A1"/>
+                </a:solidFill>
+                <a:latin typeface="Consolas"/>
+                <a:ea typeface="Microsoft YaHei"/>
+                <a:cs typeface="Microsoft YaHei"/>
+              </a:rPr>
+              <a:t>__</a:t>
             </a:r>
           </a:p>
         </p:txBody>
@@ -3794,7 +3809,7 @@
         </p:nvCxnSpPr>
         <p:spPr>
           <a:xfrm>
-            <a:off x="1188720" y="3396755"/>
+            <a:off x="1188720" y="2996344"/>
             <a:ext cx="5349240" cy="0"/>
           </a:xfrm>
           <a:prstGeom prst="line">
@@ -3802,7 +3817,7 @@
           </a:prstGeom>
           <a:ln w="9525">
             <a:solidFill>
-              <a:srgbClr val="CFE3F0"/>
+              <a:srgbClr val="DDE2E7"/>
             </a:solidFill>
           </a:ln>
         </p:spPr>
@@ -3815,7 +3830,7 @@
         </p:nvSpPr>
         <p:spPr>
           <a:xfrm>
-            <a:off x="621792" y="3296171"/>
+            <a:off x="621792" y="2895760"/>
             <a:ext cx="457200" cy="201168"/>
           </a:xfrm>
           <a:prstGeom prst="rect">
@@ -3843,7 +3858,7 @@
             <a:r>
               <a:rPr sz="900" b="0">
                 <a:solidFill>
-                  <a:srgbClr val="7FA4BA"/>
+                  <a:srgbClr val="8C96A1"/>
                 </a:solidFill>
                 <a:latin typeface="Consolas"/>
                 <a:ea typeface="Microsoft YaHei"/>
@@ -3862,7 +3877,7 @@
         </p:nvCxnSpPr>
         <p:spPr>
           <a:xfrm>
-            <a:off x="1188720" y="2996344"/>
+            <a:off x="1188720" y="2595933"/>
             <a:ext cx="5349240" cy="0"/>
           </a:xfrm>
           <a:prstGeom prst="line">
@@ -3870,7 +3885,7 @@
           </a:prstGeom>
           <a:ln w="9525">
             <a:solidFill>
-              <a:srgbClr val="CFE3F0"/>
+              <a:srgbClr val="DDE2E7"/>
             </a:solidFill>
           </a:ln>
         </p:spPr>
@@ -3883,7 +3898,7 @@
         </p:nvSpPr>
         <p:spPr>
           <a:xfrm>
-            <a:off x="621792" y="2895760"/>
+            <a:off x="621792" y="2495349"/>
             <a:ext cx="457200" cy="201168"/>
           </a:xfrm>
           <a:prstGeom prst="rect">
@@ -3911,7 +3926,7 @@
             <a:r>
               <a:rPr sz="900" b="0">
                 <a:solidFill>
-                  <a:srgbClr val="7FA4BA"/>
+                  <a:srgbClr val="8C96A1"/>
                 </a:solidFill>
                 <a:latin typeface="Consolas"/>
                 <a:ea typeface="Microsoft YaHei"/>
@@ -3930,66 +3945,42 @@
         </p:nvCxnSpPr>
         <p:spPr>
           <a:xfrm>
-            <a:off x="1188720" y="2595933"/>
+            <a:off x="1188720" y="3496858"/>
             <a:ext cx="5349240" cy="0"/>
           </a:xfrm>
           <a:prstGeom prst="line">
             <a:avLst/>
           </a:prstGeom>
-          <a:ln w="9525">
+          <a:ln w="12700">
             <a:solidFill>
-              <a:srgbClr val="CFE3F0"/>
+              <a:srgbClr val="8C96A1"/>
             </a:solidFill>
+            <a:prstDash val="dash"/>
           </a:ln>
         </p:spPr>
       </p:cxnSp>
-      <p:sp>
-        <p:nvSpPr>
-          <p:cNvPr id="24" name="TextBox 23"/>
-          <p:cNvSpPr txBox="1"/>
-          <p:nvPr/>
-        </p:nvSpPr>
-        <p:spPr>
-          <a:xfrm>
-            <a:off x="621792" y="2495349"/>
-            <a:ext cx="457200" cy="201168"/>
-          </a:xfrm>
-          <a:prstGeom prst="rect">
-            <a:avLst/>
-          </a:prstGeom>
-          <a:noFill/>
-        </p:spPr>
-        <p:txBody>
-          <a:bodyPr wrap="square" anchor="ctr" lIns="0" tIns="0" rIns="0" bIns="0">
-            <a:noAutofit/>
-          </a:bodyPr>
-          <a:lstStyle/>
-          <a:p>
-            <a:pPr algn="r" latinLnBrk="0">
-              <a:lnSpc>
-                <a:spcPct val="100000"/>
-              </a:lnSpc>
-              <a:spcBef>
-                <a:spcPts val="0"/>
-              </a:spcBef>
-              <a:spcAft>
-                <a:spcPts val="0"/>
-              </a:spcAft>
-            </a:pPr>
-            <a:r>
-              <a:rPr sz="900" b="0">
-                <a:solidFill>
-                  <a:srgbClr val="7FA4BA"/>
-                </a:solidFill>
-                <a:latin typeface="Consolas"/>
-                <a:ea typeface="Microsoft YaHei"/>
-                <a:cs typeface="Microsoft YaHei"/>
-              </a:rPr>
-              <a:t>__</a:t>
-            </a:r>
-          </a:p>
-        </p:txBody>
-      </p:sp>
+      <p:cxnSp>
+        <p:nvCxnSpPr>
+          <p:cNvPr id="24" name="Connector 23"/>
+          <p:cNvCxnSpPr/>
+          <p:nvPr/>
+        </p:nvCxnSpPr>
+        <p:spPr>
+          <a:xfrm>
+            <a:off x="1188720" y="3616981"/>
+            <a:ext cx="5349240" cy="0"/>
+          </a:xfrm>
+          <a:prstGeom prst="line">
+            <a:avLst/>
+          </a:prstGeom>
+          <a:ln w="12700">
+            <a:solidFill>
+              <a:srgbClr val="C0612C"/>
+            </a:solidFill>
+            <a:prstDash val="dash"/>
+          </a:ln>
+        </p:spPr>
+      </p:cxnSp>
       <p:cxnSp>
         <p:nvCxnSpPr>
           <p:cNvPr id="25" name="Connector 24"/>
@@ -3998,7 +3989,7 @@
         </p:nvCxnSpPr>
         <p:spPr>
           <a:xfrm>
-            <a:off x="1188720" y="3496858"/>
+            <a:off x="1188720" y="4297680"/>
             <a:ext cx="5349240" cy="0"/>
           </a:xfrm>
           <a:prstGeom prst="line">
@@ -4006,58 +3997,14 @@
           </a:prstGeom>
           <a:ln w="12700">
             <a:solidFill>
-              <a:srgbClr val="0F62CE"/>
-            </a:solidFill>
-            <a:prstDash val="dash"/>
-          </a:ln>
-        </p:spPr>
-      </p:cxnSp>
-      <p:cxnSp>
-        <p:nvCxnSpPr>
-          <p:cNvPr id="26" name="Connector 25"/>
-          <p:cNvCxnSpPr/>
-          <p:nvPr/>
-        </p:nvCxnSpPr>
-        <p:spPr>
-          <a:xfrm>
-            <a:off x="1188720" y="3616981"/>
-            <a:ext cx="5349240" cy="0"/>
-          </a:xfrm>
-          <a:prstGeom prst="line">
-            <a:avLst/>
-          </a:prstGeom>
-          <a:ln w="12700">
-            <a:solidFill>
-              <a:srgbClr val="D4147A"/>
-            </a:solidFill>
-            <a:prstDash val="dash"/>
-          </a:ln>
-        </p:spPr>
-      </p:cxnSp>
-      <p:cxnSp>
-        <p:nvCxnSpPr>
-          <p:cNvPr id="27" name="Connector 26"/>
-          <p:cNvCxnSpPr/>
-          <p:nvPr/>
-        </p:nvCxnSpPr>
-        <p:spPr>
-          <a:xfrm>
-            <a:off x="1188720" y="4297680"/>
-            <a:ext cx="5349240" cy="0"/>
-          </a:xfrm>
-          <a:prstGeom prst="line">
-            <a:avLst/>
-          </a:prstGeom>
-          <a:ln w="12700">
-            <a:solidFill>
-              <a:srgbClr val="AFCEE1"/>
+              <a:srgbClr val="C5CCD4"/>
             </a:solidFill>
           </a:ln>
         </p:spPr>
       </p:cxnSp>
       <p:sp>
         <p:nvSpPr>
-          <p:cNvPr id="28" name="TextBox 27"/>
+          <p:cNvPr id="26" name="TextBox 25"/>
           <p:cNvSpPr txBox="1"/>
           <p:nvPr/>
         </p:nvSpPr>
@@ -4091,7 +4038,7 @@
             <a:r>
               <a:rPr sz="950" b="0">
                 <a:solidFill>
-                  <a:srgbClr val="40708B"/>
+                  <a:srgbClr val="66727F"/>
                 </a:solidFill>
                 <a:latin typeface="Consolas"/>
                 <a:ea typeface="Microsoft YaHei"/>
@@ -4104,7 +4051,7 @@
       </p:sp>
       <p:sp>
         <p:nvSpPr>
-          <p:cNvPr id="29" name="Oval 28"/>
+          <p:cNvPr id="27" name="Oval 26"/>
           <p:cNvSpPr/>
           <p:nvPr/>
         </p:nvSpPr>
@@ -4117,7 +4064,7 @@
             <a:avLst/>
           </a:prstGeom>
           <a:solidFill>
-            <a:srgbClr val="AFCEE1"/>
+            <a:srgbClr val="C5CCD4"/>
           </a:solidFill>
           <a:ln w="15875">
             <a:solidFill>
@@ -4135,7 +4082,7 @@
       </p:sp>
       <p:sp>
         <p:nvSpPr>
-          <p:cNvPr id="30" name="TextBox 29"/>
+          <p:cNvPr id="28" name="TextBox 27"/>
           <p:cNvSpPr txBox="1"/>
           <p:nvPr/>
         </p:nvSpPr>
@@ -4169,7 +4116,7 @@
             <a:r>
               <a:rPr sz="950" b="1">
                 <a:solidFill>
-                  <a:srgbClr val="7FA4BA"/>
+                  <a:srgbClr val="8C96A1"/>
                 </a:solidFill>
                 <a:latin typeface="Consolas"/>
                 <a:ea typeface="Microsoft YaHei"/>
@@ -4182,7 +4129,7 @@
       </p:sp>
       <p:sp>
         <p:nvSpPr>
-          <p:cNvPr id="31" name="TextBox 30"/>
+          <p:cNvPr id="29" name="TextBox 28"/>
           <p:cNvSpPr txBox="1"/>
           <p:nvPr/>
         </p:nvSpPr>
@@ -4216,7 +4163,7 @@
             <a:r>
               <a:rPr sz="950" b="0">
                 <a:solidFill>
-                  <a:srgbClr val="40708B"/>
+                  <a:srgbClr val="66727F"/>
                 </a:solidFill>
                 <a:latin typeface="Consolas"/>
                 <a:ea typeface="Microsoft YaHei"/>
@@ -4229,7 +4176,7 @@
       </p:sp>
       <p:cxnSp>
         <p:nvCxnSpPr>
-          <p:cNvPr id="32" name="Connector 31"/>
+          <p:cNvPr id="30" name="Connector 29"/>
           <p:cNvCxnSpPr/>
           <p:nvPr/>
         </p:nvCxnSpPr>
@@ -4243,14 +4190,14 @@
           </a:prstGeom>
           <a:ln w="15875">
             <a:solidFill>
-              <a:srgbClr val="AFCEE1"/>
+              <a:srgbClr val="C5CCD4"/>
             </a:solidFill>
           </a:ln>
         </p:spPr>
       </p:cxnSp>
       <p:sp>
         <p:nvSpPr>
-          <p:cNvPr id="33" name="Oval 32"/>
+          <p:cNvPr id="31" name="Oval 30"/>
           <p:cNvSpPr/>
           <p:nvPr/>
         </p:nvSpPr>
@@ -4263,7 +4210,7 @@
             <a:avLst/>
           </a:prstGeom>
           <a:solidFill>
-            <a:srgbClr val="AFCEE1"/>
+            <a:srgbClr val="C5CCD4"/>
           </a:solidFill>
           <a:ln w="15875">
             <a:solidFill>
@@ -4281,7 +4228,7 @@
       </p:sp>
       <p:sp>
         <p:nvSpPr>
-          <p:cNvPr id="34" name="Oval 33"/>
+          <p:cNvPr id="32" name="Oval 31"/>
           <p:cNvSpPr/>
           <p:nvPr/>
         </p:nvSpPr>
@@ -4298,7 +4245,7 @@
           </a:solidFill>
           <a:ln w="22225">
             <a:solidFill>
-              <a:srgbClr val="AFCEE1"/>
+              <a:srgbClr val="C5CCD4"/>
             </a:solidFill>
           </a:ln>
         </p:spPr>
@@ -4312,7 +4259,7 @@
       </p:sp>
       <p:sp>
         <p:nvSpPr>
-          <p:cNvPr id="35" name="TextBox 34"/>
+          <p:cNvPr id="33" name="TextBox 32"/>
           <p:cNvSpPr txBox="1"/>
           <p:nvPr/>
         </p:nvSpPr>
@@ -4346,7 +4293,7 @@
             <a:r>
               <a:rPr sz="950" b="1">
                 <a:solidFill>
-                  <a:srgbClr val="7FA4BA"/>
+                  <a:srgbClr val="8C96A1"/>
                 </a:solidFill>
                 <a:latin typeface="Consolas"/>
                 <a:ea typeface="Microsoft YaHei"/>
@@ -4359,7 +4306,7 @@
       </p:sp>
       <p:sp>
         <p:nvSpPr>
-          <p:cNvPr id="36" name="TextBox 35"/>
+          <p:cNvPr id="34" name="TextBox 33"/>
           <p:cNvSpPr txBox="1"/>
           <p:nvPr/>
         </p:nvSpPr>
@@ -4393,7 +4340,7 @@
             <a:r>
               <a:rPr sz="950" b="0">
                 <a:solidFill>
-                  <a:srgbClr val="40708B"/>
+                  <a:srgbClr val="66727F"/>
                 </a:solidFill>
                 <a:latin typeface="Consolas"/>
                 <a:ea typeface="Microsoft YaHei"/>
@@ -4406,7 +4353,7 @@
       </p:sp>
       <p:cxnSp>
         <p:nvCxnSpPr>
-          <p:cNvPr id="37" name="Connector 36"/>
+          <p:cNvPr id="35" name="Connector 34"/>
           <p:cNvCxnSpPr/>
           <p:nvPr/>
         </p:nvCxnSpPr>
@@ -4420,14 +4367,14 @@
           </a:prstGeom>
           <a:ln w="19050">
             <a:solidFill>
-              <a:srgbClr val="7FA4BA"/>
+              <a:srgbClr val="8C96A1"/>
             </a:solidFill>
           </a:ln>
         </p:spPr>
       </p:cxnSp>
       <p:cxnSp>
         <p:nvCxnSpPr>
-          <p:cNvPr id="38" name="Connector 37"/>
+          <p:cNvPr id="36" name="Connector 35"/>
           <p:cNvCxnSpPr/>
           <p:nvPr/>
         </p:nvCxnSpPr>
@@ -4441,14 +4388,14 @@
           </a:prstGeom>
           <a:ln w="19050">
             <a:solidFill>
-              <a:srgbClr val="7FA4BA"/>
+              <a:srgbClr val="8C96A1"/>
             </a:solidFill>
           </a:ln>
         </p:spPr>
       </p:cxnSp>
       <p:sp>
         <p:nvSpPr>
-          <p:cNvPr id="39" name="TextBox 38"/>
+          <p:cNvPr id="37" name="TextBox 36"/>
           <p:cNvSpPr txBox="1"/>
           <p:nvPr/>
         </p:nvSpPr>
@@ -4482,7 +4429,7 @@
             <a:r>
               <a:rPr sz="900" b="0">
                 <a:solidFill>
-                  <a:srgbClr val="7FA4BA"/>
+                  <a:srgbClr val="8C96A1"/>
                 </a:solidFill>
                 <a:latin typeface="Microsoft YaHei"/>
                 <a:ea typeface="Microsoft YaHei"/>
@@ -4495,7 +4442,7 @@
       </p:sp>
       <p:sp>
         <p:nvSpPr>
-          <p:cNvPr id="40" name="TextBox 39"/>
+          <p:cNvPr id="38" name="TextBox 37"/>
           <p:cNvSpPr txBox="1"/>
           <p:nvPr/>
         </p:nvSpPr>
@@ -4529,7 +4476,7 @@
             <a:r>
               <a:rPr sz="950" b="0">
                 <a:solidFill>
-                  <a:srgbClr val="40708B"/>
+                  <a:srgbClr val="66727F"/>
                 </a:solidFill>
                 <a:latin typeface="Consolas"/>
                 <a:ea typeface="Microsoft YaHei"/>
@@ -4542,7 +4489,7 @@
       </p:sp>
       <p:cxnSp>
         <p:nvCxnSpPr>
-          <p:cNvPr id="41" name="Connector 40"/>
+          <p:cNvPr id="39" name="Connector 38"/>
           <p:cNvCxnSpPr/>
           <p:nvPr/>
         </p:nvCxnSpPr>
@@ -4556,14 +4503,14 @@
           </a:prstGeom>
           <a:ln w="15875">
             <a:solidFill>
-              <a:srgbClr val="AFCEE1"/>
+              <a:srgbClr val="C5CCD4"/>
             </a:solidFill>
           </a:ln>
         </p:spPr>
       </p:cxnSp>
       <p:sp>
         <p:nvSpPr>
-          <p:cNvPr id="42" name="Oval 41"/>
+          <p:cNvPr id="40" name="Oval 39"/>
           <p:cNvSpPr/>
           <p:nvPr/>
         </p:nvSpPr>
@@ -4576,7 +4523,7 @@
             <a:avLst/>
           </a:prstGeom>
           <a:solidFill>
-            <a:srgbClr val="AFCEE1"/>
+            <a:srgbClr val="C5CCD4"/>
           </a:solidFill>
           <a:ln w="15875">
             <a:solidFill>
@@ -4594,7 +4541,7 @@
       </p:sp>
       <p:sp>
         <p:nvSpPr>
-          <p:cNvPr id="43" name="Oval 42"/>
+          <p:cNvPr id="41" name="Oval 40"/>
           <p:cNvSpPr/>
           <p:nvPr/>
         </p:nvSpPr>
@@ -4611,7 +4558,7 @@
           </a:solidFill>
           <a:ln w="22225">
             <a:solidFill>
-              <a:srgbClr val="40708B"/>
+              <a:srgbClr val="66727F"/>
             </a:solidFill>
           </a:ln>
         </p:spPr>
@@ -4625,7 +4572,7 @@
       </p:sp>
       <p:sp>
         <p:nvSpPr>
-          <p:cNvPr id="44" name="TextBox 43"/>
+          <p:cNvPr id="42" name="TextBox 41"/>
           <p:cNvSpPr txBox="1"/>
           <p:nvPr/>
         </p:nvSpPr>
@@ -4659,7 +4606,7 @@
             <a:r>
               <a:rPr sz="950" b="1">
                 <a:solidFill>
-                  <a:srgbClr val="7FA4BA"/>
+                  <a:srgbClr val="8C96A1"/>
                 </a:solidFill>
                 <a:latin typeface="Consolas"/>
                 <a:ea typeface="Microsoft YaHei"/>
@@ -4672,7 +4619,7 @@
       </p:sp>
       <p:sp>
         <p:nvSpPr>
-          <p:cNvPr id="45" name="TextBox 44"/>
+          <p:cNvPr id="43" name="TextBox 42"/>
           <p:cNvSpPr txBox="1"/>
           <p:nvPr/>
         </p:nvSpPr>
@@ -4706,7 +4653,7 @@
             <a:r>
               <a:rPr sz="950" b="1">
                 <a:solidFill>
-                  <a:srgbClr val="1B4D69"/>
+                  <a:srgbClr val="35424F"/>
                 </a:solidFill>
                 <a:latin typeface="Microsoft YaHei"/>
                 <a:ea typeface="Microsoft YaHei"/>
@@ -4719,7 +4666,7 @@
       </p:sp>
       <p:sp>
         <p:nvSpPr>
-          <p:cNvPr id="46" name="TextBox 45"/>
+          <p:cNvPr id="44" name="TextBox 43"/>
           <p:cNvSpPr txBox="1"/>
           <p:nvPr/>
         </p:nvSpPr>
@@ -4753,7 +4700,7 @@
             <a:r>
               <a:rPr sz="950" b="0">
                 <a:solidFill>
-                  <a:srgbClr val="40708B"/>
+                  <a:srgbClr val="66727F"/>
                 </a:solidFill>
                 <a:latin typeface="Consolas"/>
                 <a:ea typeface="Microsoft YaHei"/>
@@ -4766,7 +4713,7 @@
       </p:sp>
       <p:sp>
         <p:nvSpPr>
-          <p:cNvPr id="47" name="Oval 46"/>
+          <p:cNvPr id="45" name="Oval 44"/>
           <p:cNvSpPr/>
           <p:nvPr/>
         </p:nvSpPr>
@@ -4779,7 +4726,7 @@
             <a:avLst/>
           </a:prstGeom>
           <a:solidFill>
-            <a:srgbClr val="AFCEE1"/>
+            <a:srgbClr val="C5CCD4"/>
           </a:solidFill>
           <a:ln w="15875">
             <a:solidFill>
@@ -4797,7 +4744,7 @@
       </p:sp>
       <p:sp>
         <p:nvSpPr>
-          <p:cNvPr id="48" name="TextBox 47"/>
+          <p:cNvPr id="46" name="TextBox 45"/>
           <p:cNvSpPr txBox="1"/>
           <p:nvPr/>
         </p:nvSpPr>
@@ -4831,7 +4778,7 @@
             <a:r>
               <a:rPr sz="950" b="1">
                 <a:solidFill>
-                  <a:srgbClr val="7FA4BA"/>
+                  <a:srgbClr val="8C96A1"/>
                 </a:solidFill>
                 <a:latin typeface="Consolas"/>
                 <a:ea typeface="Microsoft YaHei"/>
@@ -4844,7 +4791,7 @@
       </p:sp>
       <p:sp>
         <p:nvSpPr>
-          <p:cNvPr id="49" name="Rectangle 48"/>
+          <p:cNvPr id="47" name="Rectangle 46"/>
           <p:cNvSpPr/>
           <p:nvPr/>
         </p:nvSpPr>
@@ -4857,7 +4804,7 @@
             <a:avLst/>
           </a:prstGeom>
           <a:solidFill>
-            <a:srgbClr val="FBD9E9"/>
+            <a:srgbClr val="F8EADF"/>
           </a:solidFill>
           <a:ln>
             <a:noFill/>
@@ -4873,7 +4820,7 @@
       </p:sp>
       <p:sp>
         <p:nvSpPr>
-          <p:cNvPr id="50" name="TextBox 49"/>
+          <p:cNvPr id="48" name="TextBox 47"/>
           <p:cNvSpPr txBox="1"/>
           <p:nvPr/>
         </p:nvSpPr>
@@ -4907,7 +4854,7 @@
             <a:r>
               <a:rPr sz="850" b="1">
                 <a:solidFill>
-                  <a:srgbClr val="D4147A"/>
+                  <a:srgbClr val="C0612C"/>
                 </a:solidFill>
                 <a:latin typeface="Microsoft YaHei"/>
                 <a:ea typeface="Microsoft YaHei"/>
@@ -4920,7 +4867,7 @@
       </p:sp>
       <p:sp>
         <p:nvSpPr>
-          <p:cNvPr id="51" name="TextBox 50"/>
+          <p:cNvPr id="49" name="TextBox 48"/>
           <p:cNvSpPr txBox="1"/>
           <p:nvPr/>
         </p:nvSpPr>
@@ -4954,7 +4901,7 @@
             <a:r>
               <a:rPr sz="900" b="0">
                 <a:solidFill>
-                  <a:srgbClr val="7FA4BA"/>
+                  <a:srgbClr val="8C96A1"/>
                 </a:solidFill>
                 <a:latin typeface="Microsoft YaHei"/>
                 <a:ea typeface="Microsoft YaHei"/>
@@ -4965,7 +4912,7 @@
             <a:r>
               <a:rPr sz="900" b="0">
                 <a:solidFill>
-                  <a:srgbClr val="40708B"/>
+                  <a:srgbClr val="66727F"/>
                 </a:solidFill>
                 <a:latin typeface="Microsoft YaHei"/>
                 <a:ea typeface="Microsoft YaHei"/>
@@ -4976,7 +4923,7 @@
             <a:r>
               <a:rPr sz="900" b="0">
                 <a:solidFill>
-                  <a:srgbClr val="7FA4BA"/>
+                  <a:srgbClr val="8C96A1"/>
                 </a:solidFill>
                 <a:latin typeface="Microsoft YaHei"/>
                 <a:ea typeface="Microsoft YaHei"/>
@@ -4987,7 +4934,7 @@
             <a:r>
               <a:rPr sz="900" b="0">
                 <a:solidFill>
-                  <a:srgbClr val="40708B"/>
+                  <a:srgbClr val="66727F"/>
                 </a:solidFill>
                 <a:latin typeface="Microsoft YaHei"/>
                 <a:ea typeface="Microsoft YaHei"/>
@@ -4998,7 +4945,7 @@
             <a:r>
               <a:rPr sz="900" b="0">
                 <a:solidFill>
-                  <a:srgbClr val="7FA4BA"/>
+                  <a:srgbClr val="8C96A1"/>
                 </a:solidFill>
                 <a:latin typeface="Microsoft YaHei"/>
                 <a:ea typeface="Microsoft YaHei"/>
@@ -5009,7 +4956,7 @@
             <a:r>
               <a:rPr sz="900" b="0">
                 <a:solidFill>
-                  <a:srgbClr val="40708B"/>
+                  <a:srgbClr val="66727F"/>
                 </a:solidFill>
                 <a:latin typeface="Microsoft YaHei"/>
                 <a:ea typeface="Microsoft YaHei"/>
@@ -5022,7 +4969,7 @@
       </p:sp>
       <p:sp>
         <p:nvSpPr>
-          <p:cNvPr id="52" name="Rectangle 51"/>
+          <p:cNvPr id="50" name="Rectangle 49"/>
           <p:cNvSpPr/>
           <p:nvPr/>
         </p:nvSpPr>
@@ -5035,7 +4982,7 @@
             <a:avLst/>
           </a:prstGeom>
           <a:solidFill>
-            <a:srgbClr val="FFFFFF"/>
+            <a:srgbClr val="F6F7F9"/>
           </a:solidFill>
           <a:ln>
             <a:noFill/>
@@ -5051,7 +4998,7 @@
       </p:sp>
       <p:sp>
         <p:nvSpPr>
-          <p:cNvPr id="53" name="TextBox 52"/>
+          <p:cNvPr id="51" name="TextBox 50"/>
           <p:cNvSpPr txBox="1"/>
           <p:nvPr/>
         </p:nvSpPr>
@@ -5085,7 +5032,7 @@
             <a:r>
               <a:rPr sz="1250" b="1">
                 <a:solidFill>
-                  <a:srgbClr val="0A2B45"/>
+                  <a:srgbClr val="16202A"/>
                 </a:solidFill>
                 <a:latin typeface="Microsoft YaHei"/>
                 <a:ea typeface="Microsoft YaHei"/>
@@ -5096,7 +5043,7 @@
             <a:r>
               <a:rPr sz="1000" b="0">
                 <a:solidFill>
-                  <a:srgbClr val="40708B"/>
+                  <a:srgbClr val="66727F"/>
                 </a:solidFill>
                 <a:latin typeface="Microsoft YaHei"/>
                 <a:ea typeface="Microsoft YaHei"/>
@@ -5109,7 +5056,7 @@
       </p:sp>
       <p:sp>
         <p:nvSpPr>
-          <p:cNvPr id="54" name="TextBox 53"/>
+          <p:cNvPr id="52" name="TextBox 51"/>
           <p:cNvSpPr txBox="1"/>
           <p:nvPr/>
         </p:nvSpPr>
@@ -5143,7 +5090,7 @@
             <a:r>
               <a:rPr sz="900" b="0">
                 <a:solidFill>
-                  <a:srgbClr val="7FA4BA"/>
+                  <a:srgbClr val="8C96A1"/>
                 </a:solidFill>
                 <a:latin typeface="Microsoft YaHei"/>
                 <a:ea typeface="Microsoft YaHei"/>
@@ -5156,7 +5103,7 @@
       </p:sp>
       <p:sp>
         <p:nvSpPr>
-          <p:cNvPr id="55" name="TextBox 54"/>
+          <p:cNvPr id="53" name="TextBox 52"/>
           <p:cNvSpPr txBox="1"/>
           <p:nvPr/>
         </p:nvSpPr>
@@ -5190,7 +5137,7 @@
             <a:r>
               <a:rPr sz="900" b="0">
                 <a:solidFill>
-                  <a:srgbClr val="7FA4BA"/>
+                  <a:srgbClr val="8C96A1"/>
                 </a:solidFill>
                 <a:latin typeface="Microsoft YaHei"/>
                 <a:ea typeface="Microsoft YaHei"/>
@@ -5203,7 +5150,7 @@
       </p:sp>
       <p:sp>
         <p:nvSpPr>
-          <p:cNvPr id="56" name="TextBox 55"/>
+          <p:cNvPr id="54" name="TextBox 53"/>
           <p:cNvSpPr txBox="1"/>
           <p:nvPr/>
         </p:nvSpPr>
@@ -5237,7 +5184,7 @@
             <a:r>
               <a:rPr sz="900" b="0">
                 <a:solidFill>
-                  <a:srgbClr val="7FA4BA"/>
+                  <a:srgbClr val="8C96A1"/>
                 </a:solidFill>
                 <a:latin typeface="Microsoft YaHei"/>
                 <a:ea typeface="Microsoft YaHei"/>
@@ -5250,7 +5197,7 @@
       </p:sp>
       <p:sp>
         <p:nvSpPr>
-          <p:cNvPr id="57" name="TextBox 56"/>
+          <p:cNvPr id="55" name="TextBox 54"/>
           <p:cNvSpPr txBox="1"/>
           <p:nvPr/>
         </p:nvSpPr>
@@ -5284,7 +5231,7 @@
             <a:r>
               <a:rPr sz="900" b="0">
                 <a:solidFill>
-                  <a:srgbClr val="7FA4BA"/>
+                  <a:srgbClr val="8C96A1"/>
                 </a:solidFill>
                 <a:latin typeface="Microsoft YaHei"/>
                 <a:ea typeface="Microsoft YaHei"/>
@@ -5297,7 +5244,7 @@
       </p:sp>
       <p:cxnSp>
         <p:nvCxnSpPr>
-          <p:cNvPr id="58" name="Connector 57"/>
+          <p:cNvPr id="56" name="Connector 55"/>
           <p:cNvCxnSpPr/>
           <p:nvPr/>
         </p:nvCxnSpPr>
@@ -5311,14 +5258,14 @@
           </a:prstGeom>
           <a:ln w="9525">
             <a:solidFill>
-              <a:srgbClr val="CFE3F0"/>
+              <a:srgbClr val="DDE2E7"/>
             </a:solidFill>
           </a:ln>
         </p:spPr>
       </p:cxnSp>
       <p:sp>
         <p:nvSpPr>
-          <p:cNvPr id="59" name="Rectangle 58"/>
+          <p:cNvPr id="57" name="Rectangle 56"/>
           <p:cNvSpPr/>
           <p:nvPr/>
         </p:nvSpPr>
@@ -5331,7 +5278,7 @@
             <a:avLst/>
           </a:prstGeom>
           <a:solidFill>
-            <a:srgbClr val="DEEDFA"/>
+            <a:srgbClr val="EEF1F4"/>
           </a:solidFill>
           <a:ln>
             <a:noFill/>
@@ -5347,7 +5294,7 @@
       </p:sp>
       <p:sp>
         <p:nvSpPr>
-          <p:cNvPr id="60" name="TextBox 59"/>
+          <p:cNvPr id="58" name="TextBox 57"/>
           <p:cNvSpPr txBox="1"/>
           <p:nvPr/>
         </p:nvSpPr>
@@ -5381,7 +5328,7 @@
             <a:r>
               <a:rPr sz="950" b="1">
                 <a:solidFill>
-                  <a:srgbClr val="40708B"/>
+                  <a:srgbClr val="66727F"/>
                 </a:solidFill>
                 <a:latin typeface="Consolas"/>
                 <a:ea typeface="Microsoft YaHei"/>
@@ -5394,7 +5341,7 @@
       </p:sp>
       <p:sp>
         <p:nvSpPr>
-          <p:cNvPr id="61" name="TextBox 60"/>
+          <p:cNvPr id="59" name="TextBox 58"/>
           <p:cNvSpPr txBox="1"/>
           <p:nvPr/>
         </p:nvSpPr>
@@ -5428,7 +5375,7 @@
             <a:r>
               <a:rPr sz="950" b="0">
                 <a:solidFill>
-                  <a:srgbClr val="1B4D69"/>
+                  <a:srgbClr val="35424F"/>
                 </a:solidFill>
                 <a:latin typeface="Microsoft YaHei"/>
                 <a:ea typeface="Microsoft YaHei"/>
@@ -5441,7 +5388,7 @@
       </p:sp>
       <p:sp>
         <p:nvSpPr>
-          <p:cNvPr id="62" name="TextBox 61"/>
+          <p:cNvPr id="60" name="TextBox 59"/>
           <p:cNvSpPr txBox="1"/>
           <p:nvPr/>
         </p:nvSpPr>
@@ -5475,7 +5422,7 @@
             <a:r>
               <a:rPr sz="950" b="0">
                 <a:solidFill>
-                  <a:srgbClr val="7FA4BA"/>
+                  <a:srgbClr val="8C96A1"/>
                 </a:solidFill>
                 <a:latin typeface="Consolas"/>
                 <a:ea typeface="Microsoft YaHei"/>
@@ -5488,7 +5435,7 @@
       </p:sp>
       <p:sp>
         <p:nvSpPr>
-          <p:cNvPr id="63" name="TextBox 62"/>
+          <p:cNvPr id="61" name="TextBox 60"/>
           <p:cNvSpPr txBox="1"/>
           <p:nvPr/>
         </p:nvSpPr>
@@ -5522,7 +5469,7 @@
             <a:r>
               <a:rPr sz="950" b="0">
                 <a:solidFill>
-                  <a:srgbClr val="7FA4BA"/>
+                  <a:srgbClr val="8C96A1"/>
                 </a:solidFill>
                 <a:latin typeface="Consolas"/>
                 <a:ea typeface="Microsoft YaHei"/>
@@ -5535,7 +5482,7 @@
       </p:sp>
       <p:sp>
         <p:nvSpPr>
-          <p:cNvPr id="64" name="TextBox 63"/>
+          <p:cNvPr id="62" name="TextBox 61"/>
           <p:cNvSpPr txBox="1"/>
           <p:nvPr/>
         </p:nvSpPr>
@@ -5569,7 +5516,7 @@
             <a:r>
               <a:rPr sz="950" b="0">
                 <a:solidFill>
-                  <a:srgbClr val="7FA4BA"/>
+                  <a:srgbClr val="8C96A1"/>
                 </a:solidFill>
                 <a:latin typeface="Microsoft YaHei"/>
                 <a:ea typeface="Microsoft YaHei"/>
@@ -5582,7 +5529,7 @@
       </p:sp>
       <p:sp>
         <p:nvSpPr>
-          <p:cNvPr id="65" name="TextBox 64"/>
+          <p:cNvPr id="63" name="TextBox 62"/>
           <p:cNvSpPr txBox="1"/>
           <p:nvPr/>
         </p:nvSpPr>
@@ -5616,7 +5563,7 @@
             <a:r>
               <a:rPr sz="950" b="1">
                 <a:solidFill>
-                  <a:srgbClr val="40708B"/>
+                  <a:srgbClr val="66727F"/>
                 </a:solidFill>
                 <a:latin typeface="Consolas"/>
                 <a:ea typeface="Microsoft YaHei"/>
@@ -5629,7 +5576,7 @@
       </p:sp>
       <p:sp>
         <p:nvSpPr>
-          <p:cNvPr id="66" name="TextBox 65"/>
+          <p:cNvPr id="64" name="TextBox 63"/>
           <p:cNvSpPr txBox="1"/>
           <p:nvPr/>
         </p:nvSpPr>
@@ -5663,7 +5610,7 @@
             <a:r>
               <a:rPr sz="950" b="0">
                 <a:solidFill>
-                  <a:srgbClr val="1B4D69"/>
+                  <a:srgbClr val="35424F"/>
                 </a:solidFill>
                 <a:latin typeface="Microsoft YaHei"/>
                 <a:ea typeface="Microsoft YaHei"/>
@@ -5676,7 +5623,7 @@
       </p:sp>
       <p:sp>
         <p:nvSpPr>
-          <p:cNvPr id="67" name="TextBox 66"/>
+          <p:cNvPr id="65" name="TextBox 64"/>
           <p:cNvSpPr txBox="1"/>
           <p:nvPr/>
         </p:nvSpPr>
@@ -5710,7 +5657,7 @@
             <a:r>
               <a:rPr sz="950" b="0">
                 <a:solidFill>
-                  <a:srgbClr val="7FA4BA"/>
+                  <a:srgbClr val="8C96A1"/>
                 </a:solidFill>
                 <a:latin typeface="Consolas"/>
                 <a:ea typeface="Microsoft YaHei"/>
@@ -5723,7 +5670,7 @@
       </p:sp>
       <p:sp>
         <p:nvSpPr>
-          <p:cNvPr id="68" name="TextBox 67"/>
+          <p:cNvPr id="66" name="TextBox 65"/>
           <p:cNvSpPr txBox="1"/>
           <p:nvPr/>
         </p:nvSpPr>
@@ -5757,7 +5704,7 @@
             <a:r>
               <a:rPr sz="950" b="0">
                 <a:solidFill>
-                  <a:srgbClr val="7FA4BA"/>
+                  <a:srgbClr val="8C96A1"/>
                 </a:solidFill>
                 <a:latin typeface="Consolas"/>
                 <a:ea typeface="Microsoft YaHei"/>
@@ -5770,7 +5717,7 @@
       </p:sp>
       <p:sp>
         <p:nvSpPr>
-          <p:cNvPr id="69" name="TextBox 68"/>
+          <p:cNvPr id="67" name="TextBox 66"/>
           <p:cNvSpPr txBox="1"/>
           <p:nvPr/>
         </p:nvSpPr>
@@ -5804,7 +5751,7 @@
             <a:r>
               <a:rPr sz="950" b="0">
                 <a:solidFill>
-                  <a:srgbClr val="7FA4BA"/>
+                  <a:srgbClr val="8C96A1"/>
                 </a:solidFill>
                 <a:latin typeface="Microsoft YaHei"/>
                 <a:ea typeface="Microsoft YaHei"/>
@@ -5817,7 +5764,7 @@
       </p:sp>
       <p:sp>
         <p:nvSpPr>
-          <p:cNvPr id="70" name="TextBox 69"/>
+          <p:cNvPr id="68" name="TextBox 67"/>
           <p:cNvSpPr txBox="1"/>
           <p:nvPr/>
         </p:nvSpPr>
@@ -5851,7 +5798,7 @@
             <a:r>
               <a:rPr sz="950" b="1">
                 <a:solidFill>
-                  <a:srgbClr val="40708B"/>
+                  <a:srgbClr val="66727F"/>
                 </a:solidFill>
                 <a:latin typeface="Consolas"/>
                 <a:ea typeface="Microsoft YaHei"/>
@@ -5864,7 +5811,7 @@
       </p:sp>
       <p:sp>
         <p:nvSpPr>
-          <p:cNvPr id="71" name="TextBox 70"/>
+          <p:cNvPr id="69" name="TextBox 68"/>
           <p:cNvSpPr txBox="1"/>
           <p:nvPr/>
         </p:nvSpPr>
@@ -5898,7 +5845,7 @@
             <a:r>
               <a:rPr sz="950" b="0">
                 <a:solidFill>
-                  <a:srgbClr val="1B4D69"/>
+                  <a:srgbClr val="35424F"/>
                 </a:solidFill>
                 <a:latin typeface="Microsoft YaHei"/>
                 <a:ea typeface="Microsoft YaHei"/>
@@ -5911,7 +5858,7 @@
       </p:sp>
       <p:sp>
         <p:nvSpPr>
-          <p:cNvPr id="72" name="TextBox 71"/>
+          <p:cNvPr id="70" name="TextBox 69"/>
           <p:cNvSpPr txBox="1"/>
           <p:nvPr/>
         </p:nvSpPr>
@@ -5945,7 +5892,7 @@
             <a:r>
               <a:rPr sz="950" b="0">
                 <a:solidFill>
-                  <a:srgbClr val="7FA4BA"/>
+                  <a:srgbClr val="8C96A1"/>
                 </a:solidFill>
                 <a:latin typeface="Consolas"/>
                 <a:ea typeface="Microsoft YaHei"/>
@@ -5958,7 +5905,7 @@
       </p:sp>
       <p:sp>
         <p:nvSpPr>
-          <p:cNvPr id="73" name="TextBox 72"/>
+          <p:cNvPr id="71" name="TextBox 70"/>
           <p:cNvSpPr txBox="1"/>
           <p:nvPr/>
         </p:nvSpPr>
@@ -5992,7 +5939,7 @@
             <a:r>
               <a:rPr sz="950" b="0">
                 <a:solidFill>
-                  <a:srgbClr val="7FA4BA"/>
+                  <a:srgbClr val="8C96A1"/>
                 </a:solidFill>
                 <a:latin typeface="Consolas"/>
                 <a:ea typeface="Microsoft YaHei"/>
@@ -6005,7 +5952,7 @@
       </p:sp>
       <p:sp>
         <p:nvSpPr>
-          <p:cNvPr id="74" name="TextBox 73"/>
+          <p:cNvPr id="72" name="TextBox 71"/>
           <p:cNvSpPr txBox="1"/>
           <p:nvPr/>
         </p:nvSpPr>
@@ -6039,7 +5986,7 @@
             <a:r>
               <a:rPr sz="950" b="0">
                 <a:solidFill>
-                  <a:srgbClr val="7FA4BA"/>
+                  <a:srgbClr val="8C96A1"/>
                 </a:solidFill>
                 <a:latin typeface="Microsoft YaHei"/>
                 <a:ea typeface="Microsoft YaHei"/>
@@ -6052,7 +5999,7 @@
       </p:sp>
       <p:sp>
         <p:nvSpPr>
-          <p:cNvPr id="75" name="TextBox 74"/>
+          <p:cNvPr id="73" name="TextBox 72"/>
           <p:cNvSpPr txBox="1"/>
           <p:nvPr/>
         </p:nvSpPr>
@@ -6086,7 +6033,7 @@
             <a:r>
               <a:rPr sz="950" b="1">
                 <a:solidFill>
-                  <a:srgbClr val="40708B"/>
+                  <a:srgbClr val="66727F"/>
                 </a:solidFill>
                 <a:latin typeface="Consolas"/>
                 <a:ea typeface="Microsoft YaHei"/>
@@ -6099,7 +6046,7 @@
       </p:sp>
       <p:sp>
         <p:nvSpPr>
-          <p:cNvPr id="76" name="TextBox 75"/>
+          <p:cNvPr id="74" name="TextBox 73"/>
           <p:cNvSpPr txBox="1"/>
           <p:nvPr/>
         </p:nvSpPr>
@@ -6133,7 +6080,7 @@
             <a:r>
               <a:rPr sz="950" b="0">
                 <a:solidFill>
-                  <a:srgbClr val="1B4D69"/>
+                  <a:srgbClr val="35424F"/>
                 </a:solidFill>
                 <a:latin typeface="Microsoft YaHei"/>
                 <a:ea typeface="Microsoft YaHei"/>
@@ -6146,7 +6093,7 @@
       </p:sp>
       <p:sp>
         <p:nvSpPr>
-          <p:cNvPr id="77" name="TextBox 76"/>
+          <p:cNvPr id="75" name="TextBox 74"/>
           <p:cNvSpPr txBox="1"/>
           <p:nvPr/>
         </p:nvSpPr>
@@ -6180,7 +6127,7 @@
             <a:r>
               <a:rPr sz="950" b="0">
                 <a:solidFill>
-                  <a:srgbClr val="7FA4BA"/>
+                  <a:srgbClr val="8C96A1"/>
                 </a:solidFill>
                 <a:latin typeface="Consolas"/>
                 <a:ea typeface="Microsoft YaHei"/>
@@ -6193,7 +6140,7 @@
       </p:sp>
       <p:sp>
         <p:nvSpPr>
-          <p:cNvPr id="78" name="TextBox 77"/>
+          <p:cNvPr id="76" name="TextBox 75"/>
           <p:cNvSpPr txBox="1"/>
           <p:nvPr/>
         </p:nvSpPr>
@@ -6227,7 +6174,7 @@
             <a:r>
               <a:rPr sz="950" b="0">
                 <a:solidFill>
-                  <a:srgbClr val="7FA4BA"/>
+                  <a:srgbClr val="8C96A1"/>
                 </a:solidFill>
                 <a:latin typeface="Consolas"/>
                 <a:ea typeface="Microsoft YaHei"/>
@@ -6240,7 +6187,7 @@
       </p:sp>
       <p:sp>
         <p:nvSpPr>
-          <p:cNvPr id="79" name="TextBox 78"/>
+          <p:cNvPr id="77" name="TextBox 76"/>
           <p:cNvSpPr txBox="1"/>
           <p:nvPr/>
         </p:nvSpPr>
@@ -6274,7 +6221,7 @@
             <a:r>
               <a:rPr sz="950" b="0">
                 <a:solidFill>
-                  <a:srgbClr val="7FA4BA"/>
+                  <a:srgbClr val="8C96A1"/>
                 </a:solidFill>
                 <a:latin typeface="Microsoft YaHei"/>
                 <a:ea typeface="Microsoft YaHei"/>
@@ -6287,7 +6234,7 @@
       </p:sp>
       <p:sp>
         <p:nvSpPr>
-          <p:cNvPr id="80" name="Rectangle 79"/>
+          <p:cNvPr id="78" name="Rectangle 77"/>
           <p:cNvSpPr/>
           <p:nvPr/>
         </p:nvSpPr>
@@ -6300,7 +6247,7 @@
             <a:avLst/>
           </a:prstGeom>
           <a:solidFill>
-            <a:srgbClr val="C9E1FC"/>
+            <a:srgbClr val="F8EADF"/>
           </a:solidFill>
           <a:ln>
             <a:noFill/>
@@ -6316,7 +6263,7 @@
       </p:sp>
       <p:sp>
         <p:nvSpPr>
-          <p:cNvPr id="81" name="TextBox 80"/>
+          <p:cNvPr id="79" name="TextBox 78"/>
           <p:cNvSpPr txBox="1"/>
           <p:nvPr/>
         </p:nvSpPr>
@@ -6350,7 +6297,7 @@
             <a:r>
               <a:rPr sz="950" b="1">
                 <a:solidFill>
-                  <a:srgbClr val="40708B"/>
+                  <a:srgbClr val="66727F"/>
                 </a:solidFill>
                 <a:latin typeface="Consolas"/>
                 <a:ea typeface="Microsoft YaHei"/>
@@ -6363,7 +6310,7 @@
       </p:sp>
       <p:sp>
         <p:nvSpPr>
-          <p:cNvPr id="82" name="TextBox 81"/>
+          <p:cNvPr id="80" name="TextBox 79"/>
           <p:cNvSpPr txBox="1"/>
           <p:nvPr/>
         </p:nvSpPr>
@@ -6397,7 +6344,7 @@
             <a:r>
               <a:rPr sz="950" b="0">
                 <a:solidFill>
-                  <a:srgbClr val="0A2B45"/>
+                  <a:srgbClr val="16202A"/>
                 </a:solidFill>
                 <a:latin typeface="Microsoft YaHei"/>
                 <a:ea typeface="Microsoft YaHei"/>
@@ -6410,7 +6357,7 @@
       </p:sp>
       <p:sp>
         <p:nvSpPr>
-          <p:cNvPr id="83" name="TextBox 82"/>
+          <p:cNvPr id="81" name="TextBox 80"/>
           <p:cNvSpPr txBox="1"/>
           <p:nvPr/>
         </p:nvSpPr>
@@ -6444,7 +6391,7 @@
             <a:r>
               <a:rPr sz="950" b="0">
                 <a:solidFill>
-                  <a:srgbClr val="7FA4BA"/>
+                  <a:srgbClr val="8C96A1"/>
                 </a:solidFill>
                 <a:latin typeface="Consolas"/>
                 <a:ea typeface="Microsoft YaHei"/>
@@ -6457,7 +6404,7 @@
       </p:sp>
       <p:sp>
         <p:nvSpPr>
-          <p:cNvPr id="84" name="TextBox 83"/>
+          <p:cNvPr id="82" name="TextBox 81"/>
           <p:cNvSpPr txBox="1"/>
           <p:nvPr/>
         </p:nvSpPr>
@@ -6491,7 +6438,7 @@
             <a:r>
               <a:rPr sz="950" b="0">
                 <a:solidFill>
-                  <a:srgbClr val="7FA4BA"/>
+                  <a:srgbClr val="8C96A1"/>
                 </a:solidFill>
                 <a:latin typeface="Consolas"/>
                 <a:ea typeface="Microsoft YaHei"/>
@@ -6504,7 +6451,7 @@
       </p:sp>
       <p:sp>
         <p:nvSpPr>
-          <p:cNvPr id="85" name="TextBox 84"/>
+          <p:cNvPr id="83" name="TextBox 82"/>
           <p:cNvSpPr txBox="1"/>
           <p:nvPr/>
         </p:nvSpPr>
@@ -6538,7 +6485,7 @@
             <a:r>
               <a:rPr sz="950" b="1">
                 <a:solidFill>
-                  <a:srgbClr val="1B4D69"/>
+                  <a:srgbClr val="35424F"/>
                 </a:solidFill>
                 <a:latin typeface="Microsoft YaHei"/>
                 <a:ea typeface="Microsoft YaHei"/>
@@ -6551,7 +6498,7 @@
       </p:sp>
       <p:sp>
         <p:nvSpPr>
-          <p:cNvPr id="86" name="TextBox 85"/>
+          <p:cNvPr id="84" name="TextBox 83"/>
           <p:cNvSpPr txBox="1"/>
           <p:nvPr/>
         </p:nvSpPr>
@@ -6585,7 +6532,7 @@
             <a:r>
               <a:rPr sz="950" b="1">
                 <a:solidFill>
-                  <a:srgbClr val="40708B"/>
+                  <a:srgbClr val="66727F"/>
                 </a:solidFill>
                 <a:latin typeface="Consolas"/>
                 <a:ea typeface="Microsoft YaHei"/>
@@ -6598,7 +6545,7 @@
       </p:sp>
       <p:sp>
         <p:nvSpPr>
-          <p:cNvPr id="87" name="TextBox 86"/>
+          <p:cNvPr id="85" name="TextBox 84"/>
           <p:cNvSpPr txBox="1"/>
           <p:nvPr/>
         </p:nvSpPr>
@@ -6632,7 +6579,7 @@
             <a:r>
               <a:rPr sz="950" b="0">
                 <a:solidFill>
-                  <a:srgbClr val="1B4D69"/>
+                  <a:srgbClr val="35424F"/>
                 </a:solidFill>
                 <a:latin typeface="Microsoft YaHei"/>
                 <a:ea typeface="Microsoft YaHei"/>
@@ -6645,7 +6592,7 @@
       </p:sp>
       <p:sp>
         <p:nvSpPr>
-          <p:cNvPr id="88" name="TextBox 87"/>
+          <p:cNvPr id="86" name="TextBox 85"/>
           <p:cNvSpPr txBox="1"/>
           <p:nvPr/>
         </p:nvSpPr>
@@ -6679,7 +6626,7 @@
             <a:r>
               <a:rPr sz="950" b="0">
                 <a:solidFill>
-                  <a:srgbClr val="7FA4BA"/>
+                  <a:srgbClr val="8C96A1"/>
                 </a:solidFill>
                 <a:latin typeface="Consolas"/>
                 <a:ea typeface="Microsoft YaHei"/>
@@ -6692,7 +6639,7 @@
       </p:sp>
       <p:sp>
         <p:nvSpPr>
-          <p:cNvPr id="89" name="TextBox 88"/>
+          <p:cNvPr id="87" name="TextBox 86"/>
           <p:cNvSpPr txBox="1"/>
           <p:nvPr/>
         </p:nvSpPr>
@@ -6726,7 +6673,7 @@
             <a:r>
               <a:rPr sz="950" b="0">
                 <a:solidFill>
-                  <a:srgbClr val="7FA4BA"/>
+                  <a:srgbClr val="8C96A1"/>
                 </a:solidFill>
                 <a:latin typeface="Consolas"/>
                 <a:ea typeface="Microsoft YaHei"/>
@@ -6739,7 +6686,7 @@
       </p:sp>
       <p:sp>
         <p:nvSpPr>
-          <p:cNvPr id="90" name="TextBox 89"/>
+          <p:cNvPr id="88" name="TextBox 87"/>
           <p:cNvSpPr txBox="1"/>
           <p:nvPr/>
         </p:nvSpPr>
@@ -6773,7 +6720,7 @@
             <a:r>
               <a:rPr sz="950" b="0">
                 <a:solidFill>
-                  <a:srgbClr val="7FA4BA"/>
+                  <a:srgbClr val="8C96A1"/>
                 </a:solidFill>
                 <a:latin typeface="Microsoft YaHei"/>
                 <a:ea typeface="Microsoft YaHei"/>
@@ -6786,7 +6733,7 @@
       </p:sp>
       <p:sp>
         <p:nvSpPr>
-          <p:cNvPr id="91" name="TextBox 90"/>
+          <p:cNvPr id="89" name="TextBox 88"/>
           <p:cNvSpPr txBox="1"/>
           <p:nvPr/>
         </p:nvSpPr>
@@ -6820,7 +6767,7 @@
             <a:r>
               <a:rPr sz="1150" b="1">
                 <a:solidFill>
-                  <a:srgbClr val="0A2B45"/>
+                  <a:srgbClr val="16202A"/>
                 </a:solidFill>
                 <a:latin typeface="Microsoft YaHei"/>
                 <a:ea typeface="Microsoft YaHei"/>
@@ -6844,7 +6791,7 @@
             <a:r>
               <a:rPr sz="950" b="0">
                 <a:solidFill>
-                  <a:srgbClr val="40708B"/>
+                  <a:srgbClr val="66727F"/>
                 </a:solidFill>
                 <a:latin typeface="Microsoft YaHei"/>
                 <a:ea typeface="Microsoft YaHei"/>
@@ -6868,7 +6815,7 @@
             <a:r>
               <a:rPr sz="950" b="0">
                 <a:solidFill>
-                  <a:srgbClr val="40708B"/>
+                  <a:srgbClr val="66727F"/>
                 </a:solidFill>
                 <a:latin typeface="Microsoft YaHei"/>
                 <a:ea typeface="Microsoft YaHei"/>
@@ -6881,7 +6828,7 @@
       </p:sp>
       <p:sp>
         <p:nvSpPr>
-          <p:cNvPr id="92" name="Rectangle 91"/>
+          <p:cNvPr id="90" name="Rectangle 89"/>
           <p:cNvSpPr/>
           <p:nvPr/>
         </p:nvSpPr>
@@ -6898,7 +6845,7 @@
           </a:solidFill>
           <a:ln w="9525">
             <a:solidFill>
-              <a:srgbClr val="CFE3F0"/>
+              <a:srgbClr val="DDE2E7"/>
             </a:solidFill>
           </a:ln>
         </p:spPr>
@@ -6912,7 +6859,7 @@
       </p:sp>
       <p:sp>
         <p:nvSpPr>
-          <p:cNvPr id="93" name="TextBox 92"/>
+          <p:cNvPr id="91" name="TextBox 90"/>
           <p:cNvSpPr txBox="1"/>
           <p:nvPr/>
         </p:nvSpPr>
@@ -6946,7 +6893,7 @@
             <a:r>
               <a:rPr sz="950" b="0">
                 <a:solidFill>
-                  <a:srgbClr val="40708B"/>
+                  <a:srgbClr val="66727F"/>
                 </a:solidFill>
                 <a:latin typeface="Microsoft YaHei"/>
                 <a:ea typeface="Microsoft YaHei"/>
@@ -6959,7 +6906,7 @@
       </p:sp>
       <p:sp>
         <p:nvSpPr>
-          <p:cNvPr id="94" name="TextBox 93"/>
+          <p:cNvPr id="92" name="TextBox 91"/>
           <p:cNvSpPr txBox="1"/>
           <p:nvPr/>
         </p:nvSpPr>
@@ -6993,7 +6940,7 @@
             <a:r>
               <a:rPr sz="1500" b="1">
                 <a:solidFill>
-                  <a:srgbClr val="7FA4BA"/>
+                  <a:srgbClr val="8C96A1"/>
                 </a:solidFill>
                 <a:latin typeface="Consolas"/>
                 <a:ea typeface="Microsoft YaHei"/>
@@ -7006,7 +6953,7 @@
       </p:sp>
       <p:sp>
         <p:nvSpPr>
-          <p:cNvPr id="95" name="TextBox 94"/>
+          <p:cNvPr id="93" name="TextBox 92"/>
           <p:cNvSpPr txBox="1"/>
           <p:nvPr/>
         </p:nvSpPr>
@@ -7040,7 +6987,7 @@
             <a:r>
               <a:rPr sz="850" b="0">
                 <a:solidFill>
-                  <a:srgbClr val="7FA4BA"/>
+                  <a:srgbClr val="8C96A1"/>
                 </a:solidFill>
                 <a:latin typeface="Microsoft YaHei"/>
                 <a:ea typeface="Microsoft YaHei"/>
@@ -7053,7 +7000,7 @@
       </p:sp>
       <p:sp>
         <p:nvSpPr>
-          <p:cNvPr id="96" name="Rectangle 95"/>
+          <p:cNvPr id="94" name="Rectangle 93"/>
           <p:cNvSpPr/>
           <p:nvPr/>
         </p:nvSpPr>
@@ -7070,7 +7017,7 @@
           </a:solidFill>
           <a:ln w="9525">
             <a:solidFill>
-              <a:srgbClr val="CFE3F0"/>
+              <a:srgbClr val="DDE2E7"/>
             </a:solidFill>
           </a:ln>
         </p:spPr>
@@ -7084,7 +7031,7 @@
       </p:sp>
       <p:sp>
         <p:nvSpPr>
-          <p:cNvPr id="97" name="TextBox 96"/>
+          <p:cNvPr id="95" name="TextBox 94"/>
           <p:cNvSpPr txBox="1"/>
           <p:nvPr/>
         </p:nvSpPr>
@@ -7118,7 +7065,7 @@
             <a:r>
               <a:rPr sz="950" b="0">
                 <a:solidFill>
-                  <a:srgbClr val="40708B"/>
+                  <a:srgbClr val="66727F"/>
                 </a:solidFill>
                 <a:latin typeface="Microsoft YaHei"/>
                 <a:ea typeface="Microsoft YaHei"/>
@@ -7131,7 +7078,7 @@
       </p:sp>
       <p:sp>
         <p:nvSpPr>
-          <p:cNvPr id="98" name="TextBox 97"/>
+          <p:cNvPr id="96" name="TextBox 95"/>
           <p:cNvSpPr txBox="1"/>
           <p:nvPr/>
         </p:nvSpPr>
@@ -7165,7 +7112,7 @@
             <a:r>
               <a:rPr sz="1500" b="1">
                 <a:solidFill>
-                  <a:srgbClr val="7FA4BA"/>
+                  <a:srgbClr val="8C96A1"/>
                 </a:solidFill>
                 <a:latin typeface="Consolas"/>
                 <a:ea typeface="Microsoft YaHei"/>
@@ -7178,7 +7125,7 @@
       </p:sp>
       <p:sp>
         <p:nvSpPr>
-          <p:cNvPr id="99" name="TextBox 98"/>
+          <p:cNvPr id="97" name="TextBox 96"/>
           <p:cNvSpPr txBox="1"/>
           <p:nvPr/>
         </p:nvSpPr>
@@ -7212,7 +7159,7 @@
             <a:r>
               <a:rPr sz="850" b="0">
                 <a:solidFill>
-                  <a:srgbClr val="7FA4BA"/>
+                  <a:srgbClr val="8C96A1"/>
                 </a:solidFill>
                 <a:latin typeface="Microsoft YaHei"/>
                 <a:ea typeface="Microsoft YaHei"/>
@@ -7225,7 +7172,7 @@
       </p:sp>
       <p:sp>
         <p:nvSpPr>
-          <p:cNvPr id="100" name="Rectangle 99"/>
+          <p:cNvPr id="98" name="Rectangle 97"/>
           <p:cNvSpPr/>
           <p:nvPr/>
         </p:nvSpPr>
@@ -7242,7 +7189,7 @@
           </a:solidFill>
           <a:ln w="9525">
             <a:solidFill>
-              <a:srgbClr val="CFE3F0"/>
+              <a:srgbClr val="DDE2E7"/>
             </a:solidFill>
           </a:ln>
         </p:spPr>
@@ -7256,7 +7203,7 @@
       </p:sp>
       <p:sp>
         <p:nvSpPr>
-          <p:cNvPr id="101" name="TextBox 100"/>
+          <p:cNvPr id="99" name="TextBox 98"/>
           <p:cNvSpPr txBox="1"/>
           <p:nvPr/>
         </p:nvSpPr>
@@ -7290,7 +7237,7 @@
             <a:r>
               <a:rPr sz="950" b="0">
                 <a:solidFill>
-                  <a:srgbClr val="40708B"/>
+                  <a:srgbClr val="66727F"/>
                 </a:solidFill>
                 <a:latin typeface="Microsoft YaHei"/>
                 <a:ea typeface="Microsoft YaHei"/>
@@ -7303,7 +7250,7 @@
       </p:sp>
       <p:sp>
         <p:nvSpPr>
-          <p:cNvPr id="102" name="TextBox 101"/>
+          <p:cNvPr id="100" name="TextBox 99"/>
           <p:cNvSpPr txBox="1"/>
           <p:nvPr/>
         </p:nvSpPr>
@@ -7337,7 +7284,7 @@
             <a:r>
               <a:rPr sz="1500" b="1">
                 <a:solidFill>
-                  <a:srgbClr val="7FA4BA"/>
+                  <a:srgbClr val="8C96A1"/>
                 </a:solidFill>
                 <a:latin typeface="Consolas"/>
                 <a:ea typeface="Microsoft YaHei"/>
@@ -7350,7 +7297,7 @@
       </p:sp>
       <p:sp>
         <p:nvSpPr>
-          <p:cNvPr id="103" name="TextBox 102"/>
+          <p:cNvPr id="101" name="TextBox 100"/>
           <p:cNvSpPr txBox="1"/>
           <p:nvPr/>
         </p:nvSpPr>
@@ -7384,7 +7331,7 @@
             <a:r>
               <a:rPr sz="850" b="0">
                 <a:solidFill>
-                  <a:srgbClr val="7FA4BA"/>
+                  <a:srgbClr val="8C96A1"/>
                 </a:solidFill>
                 <a:latin typeface="Microsoft YaHei"/>
                 <a:ea typeface="Microsoft YaHei"/>
@@ -7397,7 +7344,7 @@
       </p:sp>
       <p:sp>
         <p:nvSpPr>
-          <p:cNvPr id="104" name="Rectangle 103"/>
+          <p:cNvPr id="102" name="Rectangle 101"/>
           <p:cNvSpPr/>
           <p:nvPr/>
         </p:nvSpPr>
@@ -7414,7 +7361,7 @@
           </a:solidFill>
           <a:ln w="9525">
             <a:solidFill>
-              <a:srgbClr val="CFE3F0"/>
+              <a:srgbClr val="DDE2E7"/>
             </a:solidFill>
           </a:ln>
         </p:spPr>
@@ -7428,7 +7375,7 @@
       </p:sp>
       <p:sp>
         <p:nvSpPr>
-          <p:cNvPr id="105" name="TextBox 104"/>
+          <p:cNvPr id="103" name="TextBox 102"/>
           <p:cNvSpPr txBox="1"/>
           <p:nvPr/>
         </p:nvSpPr>
@@ -7462,7 +7409,7 @@
             <a:r>
               <a:rPr sz="950" b="0">
                 <a:solidFill>
-                  <a:srgbClr val="40708B"/>
+                  <a:srgbClr val="66727F"/>
                 </a:solidFill>
                 <a:latin typeface="Microsoft YaHei"/>
                 <a:ea typeface="Microsoft YaHei"/>
@@ -7475,7 +7422,7 @@
       </p:sp>
       <p:sp>
         <p:nvSpPr>
-          <p:cNvPr id="106" name="TextBox 105"/>
+          <p:cNvPr id="104" name="TextBox 103"/>
           <p:cNvSpPr txBox="1"/>
           <p:nvPr/>
         </p:nvSpPr>
@@ -7509,7 +7456,7 @@
             <a:r>
               <a:rPr sz="1500" b="1">
                 <a:solidFill>
-                  <a:srgbClr val="7FA4BA"/>
+                  <a:srgbClr val="8C96A1"/>
                 </a:solidFill>
                 <a:latin typeface="Consolas"/>
                 <a:ea typeface="Microsoft YaHei"/>
@@ -7522,7 +7469,7 @@
       </p:sp>
       <p:sp>
         <p:nvSpPr>
-          <p:cNvPr id="107" name="TextBox 106"/>
+          <p:cNvPr id="105" name="TextBox 104"/>
           <p:cNvSpPr txBox="1"/>
           <p:nvPr/>
         </p:nvSpPr>
@@ -7556,7 +7503,7 @@
             <a:r>
               <a:rPr sz="850" b="0">
                 <a:solidFill>
-                  <a:srgbClr val="7FA4BA"/>
+                  <a:srgbClr val="8C96A1"/>
                 </a:solidFill>
                 <a:latin typeface="Microsoft YaHei"/>
                 <a:ea typeface="Microsoft YaHei"/>
@@ -7569,7 +7516,7 @@
       </p:sp>
       <p:sp>
         <p:nvSpPr>
-          <p:cNvPr id="108" name="Rectangle 107"/>
+          <p:cNvPr id="106" name="Rectangle 105"/>
           <p:cNvSpPr/>
           <p:nvPr/>
         </p:nvSpPr>
@@ -7586,7 +7533,7 @@
           </a:solidFill>
           <a:ln w="9525">
             <a:solidFill>
-              <a:srgbClr val="CFE3F0"/>
+              <a:srgbClr val="DDE2E7"/>
             </a:solidFill>
           </a:ln>
         </p:spPr>
@@ -7600,7 +7547,7 @@
       </p:sp>
       <p:sp>
         <p:nvSpPr>
-          <p:cNvPr id="109" name="TextBox 108"/>
+          <p:cNvPr id="107" name="TextBox 106"/>
           <p:cNvSpPr txBox="1"/>
           <p:nvPr/>
         </p:nvSpPr>
@@ -7634,7 +7581,7 @@
             <a:r>
               <a:rPr sz="950" b="0">
                 <a:solidFill>
-                  <a:srgbClr val="40708B"/>
+                  <a:srgbClr val="66727F"/>
                 </a:solidFill>
                 <a:latin typeface="Microsoft YaHei"/>
                 <a:ea typeface="Microsoft YaHei"/>
@@ -7647,7 +7594,7 @@
       </p:sp>
       <p:sp>
         <p:nvSpPr>
-          <p:cNvPr id="110" name="TextBox 109"/>
+          <p:cNvPr id="108" name="TextBox 107"/>
           <p:cNvSpPr txBox="1"/>
           <p:nvPr/>
         </p:nvSpPr>
@@ -7681,7 +7628,7 @@
             <a:r>
               <a:rPr sz="1500" b="1">
                 <a:solidFill>
-                  <a:srgbClr val="7FA4BA"/>
+                  <a:srgbClr val="8C96A1"/>
                 </a:solidFill>
                 <a:latin typeface="Consolas"/>
                 <a:ea typeface="Microsoft YaHei"/>
@@ -7694,7 +7641,7 @@
       </p:sp>
       <p:sp>
         <p:nvSpPr>
-          <p:cNvPr id="111" name="TextBox 110"/>
+          <p:cNvPr id="109" name="TextBox 108"/>
           <p:cNvSpPr txBox="1"/>
           <p:nvPr/>
         </p:nvSpPr>
@@ -7728,7 +7675,7 @@
             <a:r>
               <a:rPr sz="850" b="0">
                 <a:solidFill>
-                  <a:srgbClr val="7FA4BA"/>
+                  <a:srgbClr val="8C96A1"/>
                 </a:solidFill>
                 <a:latin typeface="Microsoft YaHei"/>
                 <a:ea typeface="Microsoft YaHei"/>
@@ -7741,7 +7688,7 @@
       </p:sp>
       <p:sp>
         <p:nvSpPr>
-          <p:cNvPr id="112" name="Rectangle 111"/>
+          <p:cNvPr id="110" name="Rectangle 109"/>
           <p:cNvSpPr/>
           <p:nvPr/>
         </p:nvSpPr>
@@ -7754,7 +7701,7 @@
             <a:avLst/>
           </a:prstGeom>
           <a:solidFill>
-            <a:srgbClr val="C9E1FC"/>
+            <a:srgbClr val="F8EADF"/>
           </a:solidFill>
           <a:ln>
             <a:noFill/>
@@ -7770,7 +7717,7 @@
       </p:sp>
       <p:sp>
         <p:nvSpPr>
-          <p:cNvPr id="113" name="Rectangle 112"/>
+          <p:cNvPr id="111" name="Rectangle 110"/>
           <p:cNvSpPr/>
           <p:nvPr/>
         </p:nvSpPr>
@@ -7783,7 +7730,7 @@
             <a:avLst/>
           </a:prstGeom>
           <a:solidFill>
-            <a:srgbClr val="0F62CE"/>
+            <a:srgbClr val="C0612C"/>
           </a:solidFill>
           <a:ln>
             <a:noFill/>
@@ -7799,7 +7746,7 @@
       </p:sp>
       <p:sp>
         <p:nvSpPr>
-          <p:cNvPr id="114" name="TextBox 113"/>
+          <p:cNvPr id="112" name="TextBox 111"/>
           <p:cNvSpPr txBox="1"/>
           <p:nvPr/>
         </p:nvSpPr>
@@ -7833,7 +7780,7 @@
             <a:r>
               <a:rPr sz="1200" b="1">
                 <a:solidFill>
-                  <a:srgbClr val="0F62CE"/>
+                  <a:srgbClr val="C0612C"/>
                 </a:solidFill>
                 <a:latin typeface="Consolas"/>
                 <a:ea typeface="Microsoft YaHei"/>
@@ -7844,7 +7791,7 @@
             <a:r>
               <a:rPr sz="1600" b="1">
                 <a:solidFill>
-                  <a:srgbClr val="0A2B45"/>
+                  <a:srgbClr val="16202A"/>
                 </a:solidFill>
                 <a:latin typeface="Microsoft YaHei"/>
                 <a:ea typeface="Microsoft YaHei"/>
@@ -7857,7 +7804,7 @@
       </p:sp>
       <p:sp>
         <p:nvSpPr>
-          <p:cNvPr id="115" name="TextBox 114"/>
+          <p:cNvPr id="113" name="TextBox 112"/>
           <p:cNvSpPr txBox="1"/>
           <p:nvPr/>
         </p:nvSpPr>
@@ -7891,7 +7838,7 @@
             <a:r>
               <a:rPr sz="1000" b="1">
                 <a:solidFill>
-                  <a:srgbClr val="D4147A"/>
+                  <a:srgbClr val="C0612C"/>
                 </a:solidFill>
                 <a:latin typeface="Microsoft YaHei"/>
                 <a:ea typeface="Microsoft YaHei"/>
@@ -7902,7 +7849,7 @@
             <a:r>
               <a:rPr sz="1000" b="0">
                 <a:solidFill>
-                  <a:srgbClr val="40708B"/>
+                  <a:srgbClr val="66727F"/>
                 </a:solidFill>
                 <a:latin typeface="Microsoft YaHei"/>
                 <a:ea typeface="Microsoft YaHei"/>
@@ -7931,46 +7878,163 @@
         <p:nvPr/>
       </p:nvGrpSpPr>
       <p:grpSpPr/>
-      <p:pic>
-        <p:nvPicPr>
-          <p:cNvPr id="2" name="Picture 1" descr="tpl_bg.png"/>
-          <p:cNvPicPr>
-            <a:picLocks noChangeAspect="1"/>
-          </p:cNvPicPr>
-          <p:nvPr/>
-        </p:nvPicPr>
-        <p:blipFill>
-          <a:blip r:embed="rId2"/>
-          <a:stretch>
-            <a:fillRect/>
-          </a:stretch>
-        </p:blipFill>
-        <p:spPr>
-          <a:xfrm>
-            <a:off x="0" y="0"/>
-            <a:ext cx="12191695" cy="6858000"/>
-          </a:xfrm>
-          <a:prstGeom prst="rect">
-            <a:avLst/>
-          </a:prstGeom>
-        </p:spPr>
-      </p:pic>
-      <p:sp>
-        <p:nvSpPr>
-          <p:cNvPr id="3" name="Rectangle 2"/>
+      <p:sp>
+        <p:nvSpPr>
+          <p:cNvPr id="2" name="TextBox 1"/>
+          <p:cNvSpPr txBox="1"/>
+          <p:nvPr/>
+        </p:nvSpPr>
+        <p:spPr>
+          <a:xfrm>
+            <a:off x="548640" y="384048"/>
+            <a:ext cx="8229600" cy="292608"/>
+          </a:xfrm>
+          <a:prstGeom prst="rect">
+            <a:avLst/>
+          </a:prstGeom>
+          <a:noFill/>
+        </p:spPr>
+        <p:txBody>
+          <a:bodyPr wrap="square" anchor="ctr" lIns="0" tIns="0" rIns="0" bIns="0">
+            <a:noAutofit/>
+          </a:bodyPr>
+          <a:lstStyle/>
+          <a:p>
+            <a:pPr algn="l" latinLnBrk="0">
+              <a:lnSpc>
+                <a:spcPct val="100000"/>
+              </a:lnSpc>
+              <a:spcBef>
+                <a:spcPts val="0"/>
+              </a:spcBef>
+              <a:spcAft>
+                <a:spcPts val="0"/>
+              </a:spcAft>
+            </a:pPr>
+            <a:r>
+              <a:rPr sz="1100" b="1">
+                <a:solidFill>
+                  <a:srgbClr val="C0612C"/>
+                </a:solidFill>
+                <a:latin typeface="Consolas"/>
+                <a:ea typeface="Microsoft YaHei"/>
+                <a:cs typeface="Microsoft YaHei"/>
+              </a:rPr>
+              <a:t>模型层 · roofline 定位</a:t>
+            </a:r>
+          </a:p>
+        </p:txBody>
+      </p:sp>
+      <p:sp>
+        <p:nvSpPr>
+          <p:cNvPr id="3" name="TextBox 2"/>
+          <p:cNvSpPr txBox="1"/>
+          <p:nvPr/>
+        </p:nvSpPr>
+        <p:spPr>
+          <a:xfrm>
+            <a:off x="548640" y="731520"/>
+            <a:ext cx="11094415" cy="530352"/>
+          </a:xfrm>
+          <a:prstGeom prst="rect">
+            <a:avLst/>
+          </a:prstGeom>
+          <a:noFill/>
+        </p:spPr>
+        <p:txBody>
+          <a:bodyPr wrap="square" anchor="ctr" lIns="0" tIns="0" rIns="0" bIns="0">
+            <a:noAutofit/>
+          </a:bodyPr>
+          <a:lstStyle/>
+          <a:p>
+            <a:pPr algn="l" latinLnBrk="0">
+              <a:lnSpc>
+                <a:spcPct val="100000"/>
+              </a:lnSpc>
+              <a:spcBef>
+                <a:spcPts val="0"/>
+              </a:spcBef>
+              <a:spcAft>
+                <a:spcPts val="0"/>
+              </a:spcAft>
+            </a:pPr>
+            <a:r>
+              <a:rPr sz="2500" b="1">
+                <a:solidFill>
+                  <a:srgbClr val="16202A"/>
+                </a:solidFill>
+                <a:latin typeface="Microsoft YaHei"/>
+                <a:ea typeface="Microsoft YaHei"/>
+                <a:cs typeface="Microsoft YaHei"/>
+              </a:rPr>
+              <a:t>整步耗时里，谁贴着上界，谁还有空间</a:t>
+            </a:r>
+          </a:p>
+        </p:txBody>
+      </p:sp>
+      <p:sp>
+        <p:nvSpPr>
+          <p:cNvPr id="4" name="TextBox 3"/>
+          <p:cNvSpPr txBox="1"/>
+          <p:nvPr/>
+        </p:nvSpPr>
+        <p:spPr>
+          <a:xfrm>
+            <a:off x="548640" y="1261872"/>
+            <a:ext cx="11094415" cy="329184"/>
+          </a:xfrm>
+          <a:prstGeom prst="rect">
+            <a:avLst/>
+          </a:prstGeom>
+          <a:noFill/>
+        </p:spPr>
+        <p:txBody>
+          <a:bodyPr wrap="square" anchor="ctr" lIns="0" tIns="0" rIns="0" bIns="0">
+            <a:noAutofit/>
+          </a:bodyPr>
+          <a:lstStyle/>
+          <a:p>
+            <a:pPr algn="l" latinLnBrk="0">
+              <a:lnSpc>
+                <a:spcPct val="100000"/>
+              </a:lnSpc>
+              <a:spcBef>
+                <a:spcPts val="0"/>
+              </a:spcBef>
+              <a:spcAft>
+                <a:spcPts val="0"/>
+              </a:spcAft>
+            </a:pPr>
+            <a:r>
+              <a:rPr sz="1300" b="0">
+                <a:solidFill>
+                  <a:srgbClr val="66727F"/>
+                </a:solidFill>
+                <a:latin typeface="Microsoft YaHei"/>
+                <a:ea typeface="Microsoft YaHei"/>
+                <a:cs typeface="Microsoft YaHei"/>
+              </a:rPr>
+              <a:t>用 B 阶段的 Trace 把各类算子放上同一张 roofline——只用来选下一轮的方向</a:t>
+            </a:r>
+          </a:p>
+        </p:txBody>
+      </p:sp>
+      <p:sp>
+        <p:nvSpPr>
+          <p:cNvPr id="5" name="Rectangle 4"/>
           <p:cNvSpPr/>
           <p:nvPr/>
         </p:nvSpPr>
         <p:spPr>
           <a:xfrm>
-            <a:off x="548640" y="420624"/>
-            <a:ext cx="50292" cy="237744"/>
+            <a:off x="548640" y="1627632"/>
+            <a:ext cx="11094415" cy="292608"/>
           </a:xfrm>
           <a:prstGeom prst="rect">
             <a:avLst/>
           </a:prstGeom>
           <a:solidFill>
-            <a:srgbClr val="D4147A"/>
+            <a:srgbClr val="F6F7F9"/>
           </a:solidFill>
           <a:ln>
             <a:noFill/>
@@ -7986,14 +8050,14 @@
       </p:sp>
       <p:sp>
         <p:nvSpPr>
-          <p:cNvPr id="4" name="TextBox 3"/>
-          <p:cNvSpPr txBox="1"/>
-          <p:nvPr/>
-        </p:nvSpPr>
-        <p:spPr>
-          <a:xfrm>
-            <a:off x="713232" y="384048"/>
-            <a:ext cx="9427464" cy="292608"/>
+          <p:cNvPr id="6" name="TextBox 5"/>
+          <p:cNvSpPr txBox="1"/>
+          <p:nvPr/>
+        </p:nvSpPr>
+        <p:spPr>
+          <a:xfrm>
+            <a:off x="731520" y="1627632"/>
+            <a:ext cx="10728655" cy="292608"/>
           </a:xfrm>
           <a:prstGeom prst="rect">
             <a:avLst/>
@@ -8018,109 +8082,103 @@
               </a:spcAft>
             </a:pPr>
             <a:r>
-              <a:rPr sz="1100" b="1">
-                <a:solidFill>
-                  <a:srgbClr val="D4147A"/>
+              <a:rPr sz="1000" b="1">
+                <a:solidFill>
+                  <a:srgbClr val="16202A"/>
+                </a:solidFill>
+                <a:latin typeface="Microsoft YaHei"/>
+                <a:ea typeface="Microsoft YaHei"/>
+                <a:cs typeface="Microsoft YaHei"/>
+              </a:rPr>
+              <a:t>卡常数　</a:t>
+            </a:r>
+            <a:r>
+              <a:rPr sz="950" b="1">
+                <a:solidFill>
+                  <a:srgbClr val="C0612C"/>
                 </a:solidFill>
                 <a:latin typeface="Consolas"/>
                 <a:ea typeface="Microsoft YaHei"/>
                 <a:cs typeface="Microsoft YaHei"/>
               </a:rPr>
-              <a:t>模型层 · roofline 定位</a:t>
-            </a:r>
-          </a:p>
-        </p:txBody>
-      </p:sp>
-      <p:sp>
-        <p:nvSpPr>
-          <p:cNvPr id="5" name="TextBox 4"/>
-          <p:cNvSpPr txBox="1"/>
-          <p:nvPr/>
-        </p:nvSpPr>
-        <p:spPr>
-          <a:xfrm>
-            <a:off x="548640" y="731520"/>
-            <a:ext cx="9592056" cy="530352"/>
-          </a:xfrm>
-          <a:prstGeom prst="rect">
-            <a:avLst/>
-          </a:prstGeom>
-          <a:noFill/>
-        </p:spPr>
-        <p:txBody>
-          <a:bodyPr wrap="square" anchor="ctr" lIns="0" tIns="0" rIns="0" bIns="0">
-            <a:noAutofit/>
-          </a:bodyPr>
-          <a:lstStyle/>
-          <a:p>
-            <a:pPr algn="l" latinLnBrk="0">
-              <a:lnSpc>
-                <a:spcPct val="100000"/>
-              </a:lnSpc>
-              <a:spcBef>
-                <a:spcPts val="0"/>
-              </a:spcBef>
-              <a:spcAft>
-                <a:spcPts val="0"/>
-              </a:spcAft>
-            </a:pPr>
-            <a:r>
-              <a:rPr sz="2500" b="1">
-                <a:solidFill>
-                  <a:srgbClr val="0A2B45"/>
+              <a:t>峰值算力 __ TFLOPS（__ 精度）</a:t>
+            </a:r>
+            <a:r>
+              <a:rPr sz="1000" b="0">
+                <a:solidFill>
+                  <a:srgbClr val="C5CCD4"/>
                 </a:solidFill>
                 <a:latin typeface="Microsoft YaHei"/>
                 <a:ea typeface="Microsoft YaHei"/>
                 <a:cs typeface="Microsoft YaHei"/>
               </a:rPr>
-              <a:t>整步耗时里，谁贴着上界，谁还有空间</a:t>
-            </a:r>
-          </a:p>
-        </p:txBody>
-      </p:sp>
-      <p:sp>
-        <p:nvSpPr>
-          <p:cNvPr id="6" name="TextBox 5"/>
-          <p:cNvSpPr txBox="1"/>
-          <p:nvPr/>
-        </p:nvSpPr>
-        <p:spPr>
-          <a:xfrm>
-            <a:off x="548640" y="1261872"/>
-            <a:ext cx="11094415" cy="329184"/>
-          </a:xfrm>
-          <a:prstGeom prst="rect">
-            <a:avLst/>
-          </a:prstGeom>
-          <a:noFill/>
-        </p:spPr>
-        <p:txBody>
-          <a:bodyPr wrap="square" anchor="ctr" lIns="0" tIns="0" rIns="0" bIns="0">
-            <a:noAutofit/>
-          </a:bodyPr>
-          <a:lstStyle/>
-          <a:p>
-            <a:pPr algn="l" latinLnBrk="0">
-              <a:lnSpc>
-                <a:spcPct val="100000"/>
-              </a:lnSpc>
-              <a:spcBef>
-                <a:spcPts val="0"/>
-              </a:spcBef>
-              <a:spcAft>
-                <a:spcPts val="0"/>
-              </a:spcAft>
-            </a:pPr>
-            <a:r>
-              <a:rPr sz="1300" b="0">
-                <a:solidFill>
-                  <a:srgbClr val="1B4D69"/>
+              <a:t>　|　</a:t>
+            </a:r>
+            <a:r>
+              <a:rPr sz="950" b="1">
+                <a:solidFill>
+                  <a:srgbClr val="C0612C"/>
+                </a:solidFill>
+                <a:latin typeface="Consolas"/>
+                <a:ea typeface="Microsoft YaHei"/>
+                <a:cs typeface="Microsoft YaHei"/>
+              </a:rPr>
+              <a:t>实测带宽 __ GB/s</a:t>
+            </a:r>
+            <a:r>
+              <a:rPr sz="1000" b="0">
+                <a:solidFill>
+                  <a:srgbClr val="C5CCD4"/>
                 </a:solidFill>
                 <a:latin typeface="Microsoft YaHei"/>
                 <a:ea typeface="Microsoft YaHei"/>
                 <a:cs typeface="Microsoft YaHei"/>
               </a:rPr>
-              <a:t>用 B 阶段的 Trace 把各类算子放上同一张 roofline——只用来选下一轮的方向</a:t>
+              <a:t>　|　</a:t>
+            </a:r>
+            <a:r>
+              <a:rPr sz="950" b="1">
+                <a:solidFill>
+                  <a:srgbClr val="16202A"/>
+                </a:solidFill>
+                <a:latin typeface="Consolas"/>
+                <a:ea typeface="Microsoft YaHei"/>
+                <a:cs typeface="Microsoft YaHei"/>
+              </a:rPr>
+              <a:t>拐点 __ FLOP/Byte</a:t>
+            </a:r>
+            <a:r>
+              <a:rPr sz="1000" b="0">
+                <a:solidFill>
+                  <a:srgbClr val="C5CCD4"/>
+                </a:solidFill>
+                <a:latin typeface="Microsoft YaHei"/>
+                <a:ea typeface="Microsoft YaHei"/>
+                <a:cs typeface="Microsoft YaHei"/>
+              </a:rPr>
+              <a:t>　|　</a:t>
+            </a:r>
+            <a:r>
+              <a:rPr sz="950" b="1">
+                <a:solidFill>
+                  <a:srgbClr val="16202A"/>
+                </a:solidFill>
+                <a:latin typeface="Consolas"/>
+                <a:ea typeface="Microsoft YaHei"/>
+                <a:cs typeface="Microsoft YaHei"/>
+              </a:rPr>
+              <a:t>工作点 并发 __ · 输入 __ / 输出 __</a:t>
+            </a:r>
+            <a:r>
+              <a:rPr sz="1000" b="0">
+                <a:solidFill>
+                  <a:srgbClr val="66727F"/>
+                </a:solidFill>
+                <a:latin typeface="Microsoft YaHei"/>
+                <a:ea typeface="Microsoft YaHei"/>
+                <a:cs typeface="Microsoft YaHei"/>
+              </a:rPr>
+              <a:t>　常数用探针实测值</a:t>
             </a:r>
           </a:p>
         </p:txBody>
@@ -8133,14 +8191,14 @@
         </p:nvSpPr>
         <p:spPr>
           <a:xfrm>
-            <a:off x="548640" y="1627632"/>
-            <a:ext cx="11094415" cy="292608"/>
+            <a:off x="548640" y="1975104"/>
+            <a:ext cx="7315200" cy="3602736"/>
           </a:xfrm>
           <a:prstGeom prst="rect">
             <a:avLst/>
           </a:prstGeom>
           <a:solidFill>
-            <a:srgbClr val="FFFFFF"/>
+            <a:srgbClr val="F6F7F9"/>
           </a:solidFill>
           <a:ln>
             <a:noFill/>
@@ -8162,170 +8220,6 @@
         </p:nvSpPr>
         <p:spPr>
           <a:xfrm>
-            <a:off x="731520" y="1627632"/>
-            <a:ext cx="10728655" cy="292608"/>
-          </a:xfrm>
-          <a:prstGeom prst="rect">
-            <a:avLst/>
-          </a:prstGeom>
-          <a:noFill/>
-        </p:spPr>
-        <p:txBody>
-          <a:bodyPr wrap="square" anchor="ctr" lIns="0" tIns="0" rIns="0" bIns="0">
-            <a:noAutofit/>
-          </a:bodyPr>
-          <a:lstStyle/>
-          <a:p>
-            <a:pPr algn="l" latinLnBrk="0">
-              <a:lnSpc>
-                <a:spcPct val="100000"/>
-              </a:lnSpc>
-              <a:spcBef>
-                <a:spcPts val="0"/>
-              </a:spcBef>
-              <a:spcAft>
-                <a:spcPts val="0"/>
-              </a:spcAft>
-            </a:pPr>
-            <a:r>
-              <a:rPr sz="1000" b="1">
-                <a:solidFill>
-                  <a:srgbClr val="0A2B45"/>
-                </a:solidFill>
-                <a:latin typeface="Microsoft YaHei"/>
-                <a:ea typeface="Microsoft YaHei"/>
-                <a:cs typeface="Microsoft YaHei"/>
-              </a:rPr>
-              <a:t>卡常数　</a:t>
-            </a:r>
-            <a:r>
-              <a:rPr sz="950" b="1">
-                <a:solidFill>
-                  <a:srgbClr val="0F62CE"/>
-                </a:solidFill>
-                <a:latin typeface="Consolas"/>
-                <a:ea typeface="Microsoft YaHei"/>
-                <a:cs typeface="Microsoft YaHei"/>
-              </a:rPr>
-              <a:t>峰值算力 __ TFLOPS（__ 精度）</a:t>
-            </a:r>
-            <a:r>
-              <a:rPr sz="1000" b="0">
-                <a:solidFill>
-                  <a:srgbClr val="AFCEE1"/>
-                </a:solidFill>
-                <a:latin typeface="Microsoft YaHei"/>
-                <a:ea typeface="Microsoft YaHei"/>
-                <a:cs typeface="Microsoft YaHei"/>
-              </a:rPr>
-              <a:t>　|　</a:t>
-            </a:r>
-            <a:r>
-              <a:rPr sz="950" b="1">
-                <a:solidFill>
-                  <a:srgbClr val="0F62CE"/>
-                </a:solidFill>
-                <a:latin typeface="Consolas"/>
-                <a:ea typeface="Microsoft YaHei"/>
-                <a:cs typeface="Microsoft YaHei"/>
-              </a:rPr>
-              <a:t>实测带宽 __ GB/s</a:t>
-            </a:r>
-            <a:r>
-              <a:rPr sz="1000" b="0">
-                <a:solidFill>
-                  <a:srgbClr val="AFCEE1"/>
-                </a:solidFill>
-                <a:latin typeface="Microsoft YaHei"/>
-                <a:ea typeface="Microsoft YaHei"/>
-                <a:cs typeface="Microsoft YaHei"/>
-              </a:rPr>
-              <a:t>　|　</a:t>
-            </a:r>
-            <a:r>
-              <a:rPr sz="950" b="1">
-                <a:solidFill>
-                  <a:srgbClr val="0A2B45"/>
-                </a:solidFill>
-                <a:latin typeface="Consolas"/>
-                <a:ea typeface="Microsoft YaHei"/>
-                <a:cs typeface="Microsoft YaHei"/>
-              </a:rPr>
-              <a:t>拐点 __ FLOP/Byte</a:t>
-            </a:r>
-            <a:r>
-              <a:rPr sz="1000" b="0">
-                <a:solidFill>
-                  <a:srgbClr val="AFCEE1"/>
-                </a:solidFill>
-                <a:latin typeface="Microsoft YaHei"/>
-                <a:ea typeface="Microsoft YaHei"/>
-                <a:cs typeface="Microsoft YaHei"/>
-              </a:rPr>
-              <a:t>　|　</a:t>
-            </a:r>
-            <a:r>
-              <a:rPr sz="950" b="1">
-                <a:solidFill>
-                  <a:srgbClr val="0A2B45"/>
-                </a:solidFill>
-                <a:latin typeface="Consolas"/>
-                <a:ea typeface="Microsoft YaHei"/>
-                <a:cs typeface="Microsoft YaHei"/>
-              </a:rPr>
-              <a:t>工作点 并发 __ · 输入 __ / 输出 __</a:t>
-            </a:r>
-            <a:r>
-              <a:rPr sz="1000" b="0">
-                <a:solidFill>
-                  <a:srgbClr val="40708B"/>
-                </a:solidFill>
-                <a:latin typeface="Microsoft YaHei"/>
-                <a:ea typeface="Microsoft YaHei"/>
-                <a:cs typeface="Microsoft YaHei"/>
-              </a:rPr>
-              <a:t>　常数用探针实测值</a:t>
-            </a:r>
-          </a:p>
-        </p:txBody>
-      </p:sp>
-      <p:sp>
-        <p:nvSpPr>
-          <p:cNvPr id="9" name="Rectangle 8"/>
-          <p:cNvSpPr/>
-          <p:nvPr/>
-        </p:nvSpPr>
-        <p:spPr>
-          <a:xfrm>
-            <a:off x="548640" y="1975104"/>
-            <a:ext cx="7315200" cy="3602736"/>
-          </a:xfrm>
-          <a:prstGeom prst="rect">
-            <a:avLst/>
-          </a:prstGeom>
-          <a:solidFill>
-            <a:srgbClr val="FFFFFF"/>
-          </a:solidFill>
-          <a:ln>
-            <a:noFill/>
-          </a:ln>
-        </p:spPr>
-        <p:txBody>
-          <a:bodyPr rtlCol="0" anchor="ctr"/>
-          <a:lstStyle/>
-          <a:p>
-            <a:pPr algn="ctr"/>
-          </a:p>
-        </p:txBody>
-      </p:sp>
-      <p:sp>
-        <p:nvSpPr>
-          <p:cNvPr id="10" name="TextBox 9"/>
-          <p:cNvSpPr txBox="1"/>
-          <p:nvPr/>
-        </p:nvSpPr>
-        <p:spPr>
-          <a:xfrm>
             <a:off x="749808" y="2029968"/>
             <a:ext cx="3566160" cy="237744"/>
           </a:xfrm>
@@ -8354,7 +8248,7 @@
             <a:r>
               <a:rPr sz="1000" b="1">
                 <a:solidFill>
-                  <a:srgbClr val="0A2B45"/>
+                  <a:srgbClr val="16202A"/>
                 </a:solidFill>
                 <a:latin typeface="Microsoft YaHei"/>
                 <a:ea typeface="Microsoft YaHei"/>
@@ -8365,13 +8259,81 @@
             <a:r>
               <a:rPr sz="1000" b="0">
                 <a:solidFill>
-                  <a:srgbClr val="1B4D69"/>
+                  <a:srgbClr val="35424F"/>
                 </a:solidFill>
                 <a:latin typeface="Microsoft YaHei"/>
                 <a:ea typeface="Microsoft YaHei"/>
                 <a:cs typeface="Microsoft YaHei"/>
               </a:rPr>
               <a:t> = min(峰值算力, 实测带宽 × 算术强度)</a:t>
+            </a:r>
+          </a:p>
+        </p:txBody>
+      </p:sp>
+      <p:cxnSp>
+        <p:nvCxnSpPr>
+          <p:cNvPr id="9" name="Connector 8"/>
+          <p:cNvCxnSpPr/>
+          <p:nvPr/>
+        </p:nvCxnSpPr>
+        <p:spPr>
+          <a:xfrm>
+            <a:off x="4407407" y="2148840"/>
+            <a:ext cx="237744" cy="0"/>
+          </a:xfrm>
+          <a:prstGeom prst="line">
+            <a:avLst/>
+          </a:prstGeom>
+          <a:ln w="15875">
+            <a:solidFill>
+              <a:srgbClr val="C0612C"/>
+            </a:solidFill>
+          </a:ln>
+        </p:spPr>
+      </p:cxnSp>
+      <p:sp>
+        <p:nvSpPr>
+          <p:cNvPr id="10" name="TextBox 9"/>
+          <p:cNvSpPr txBox="1"/>
+          <p:nvPr/>
+        </p:nvSpPr>
+        <p:spPr>
+          <a:xfrm>
+            <a:off x="4700016" y="2011680"/>
+            <a:ext cx="1261872" cy="274320"/>
+          </a:xfrm>
+          <a:prstGeom prst="rect">
+            <a:avLst/>
+          </a:prstGeom>
+          <a:noFill/>
+        </p:spPr>
+        <p:txBody>
+          <a:bodyPr wrap="square" anchor="ctr" lIns="0" tIns="0" rIns="0" bIns="0">
+            <a:noAutofit/>
+          </a:bodyPr>
+          <a:lstStyle/>
+          <a:p>
+            <a:pPr algn="l" latinLnBrk="0">
+              <a:lnSpc>
+                <a:spcPct val="100000"/>
+              </a:lnSpc>
+              <a:spcBef>
+                <a:spcPts val="0"/>
+              </a:spcBef>
+              <a:spcAft>
+                <a:spcPts val="0"/>
+              </a:spcAft>
+            </a:pPr>
+            <a:r>
+              <a:rPr sz="900" b="0">
+                <a:solidFill>
+                  <a:srgbClr val="66727F"/>
+                </a:solidFill>
+                <a:latin typeface="Microsoft YaHei"/>
+                <a:ea typeface="Microsoft YaHei"/>
+                <a:cs typeface="Microsoft YaHei"/>
+              </a:rPr>
+              <a:t>访存受限段（斜线）</a:t>
             </a:r>
           </a:p>
         </p:txBody>
@@ -8384,7 +8346,7 @@
         </p:nvCxnSpPr>
         <p:spPr>
           <a:xfrm>
-            <a:off x="4407407" y="2148840"/>
+            <a:off x="6016752" y="2148840"/>
             <a:ext cx="237744" cy="0"/>
           </a:xfrm>
           <a:prstGeom prst="line">
@@ -8392,7 +8354,7 @@
           </a:prstGeom>
           <a:ln w="15875">
             <a:solidFill>
-              <a:srgbClr val="D4147A"/>
+              <a:srgbClr val="3F63A8"/>
             </a:solidFill>
           </a:ln>
         </p:spPr>
@@ -8405,7 +8367,7 @@
         </p:nvSpPr>
         <p:spPr>
           <a:xfrm>
-            <a:off x="4700016" y="2011680"/>
+            <a:off x="6309360" y="2011680"/>
             <a:ext cx="1261872" cy="274320"/>
           </a:xfrm>
           <a:prstGeom prst="rect">
@@ -8433,13 +8395,13 @@
             <a:r>
               <a:rPr sz="900" b="0">
                 <a:solidFill>
-                  <a:srgbClr val="40708B"/>
+                  <a:srgbClr val="66727F"/>
                 </a:solidFill>
                 <a:latin typeface="Microsoft YaHei"/>
                 <a:ea typeface="Microsoft YaHei"/>
                 <a:cs typeface="Microsoft YaHei"/>
               </a:rPr>
-              <a:t>访存受限段（斜线）</a:t>
+              <a:t>算力受限段（平台）</a:t>
             </a:r>
           </a:p>
         </p:txBody>
@@ -8452,15 +8414,15 @@
         </p:nvCxnSpPr>
         <p:spPr>
           <a:xfrm>
-            <a:off x="6016752" y="2148840"/>
-            <a:ext cx="237744" cy="0"/>
+            <a:off x="1389888" y="4499810"/>
+            <a:ext cx="5879592" cy="0"/>
           </a:xfrm>
           <a:prstGeom prst="line">
             <a:avLst/>
           </a:prstGeom>
-          <a:ln w="15875">
+          <a:ln w="9525">
             <a:solidFill>
-              <a:srgbClr val="0F62CE"/>
+              <a:srgbClr val="DDE2E7"/>
             </a:solidFill>
           </a:ln>
         </p:spPr>
@@ -8473,21 +8435,21 @@
         </p:nvSpPr>
         <p:spPr>
           <a:xfrm>
-            <a:off x="6309360" y="2011680"/>
-            <a:ext cx="1261872" cy="274320"/>
-          </a:xfrm>
-          <a:prstGeom prst="rect">
-            <a:avLst/>
-          </a:prstGeom>
-          <a:noFill/>
-        </p:spPr>
-        <p:txBody>
-          <a:bodyPr wrap="square" anchor="ctr" lIns="0" tIns="0" rIns="0" bIns="0">
-            <a:noAutofit/>
-          </a:bodyPr>
-          <a:lstStyle/>
-          <a:p>
-            <a:pPr algn="l" latinLnBrk="0">
+            <a:off x="786384" y="4399226"/>
+            <a:ext cx="493776" cy="201168"/>
+          </a:xfrm>
+          <a:prstGeom prst="rect">
+            <a:avLst/>
+          </a:prstGeom>
+          <a:noFill/>
+        </p:spPr>
+        <p:txBody>
+          <a:bodyPr wrap="square" anchor="ctr" lIns="0" tIns="0" rIns="0" bIns="0">
+            <a:noAutofit/>
+          </a:bodyPr>
+          <a:lstStyle/>
+          <a:p>
+            <a:pPr algn="r" latinLnBrk="0">
               <a:lnSpc>
                 <a:spcPct val="100000"/>
               </a:lnSpc>
@@ -8501,13 +8463,13 @@
             <a:r>
               <a:rPr sz="900" b="0">
                 <a:solidFill>
-                  <a:srgbClr val="40708B"/>
-                </a:solidFill>
-                <a:latin typeface="Microsoft YaHei"/>
-                <a:ea typeface="Microsoft YaHei"/>
-                <a:cs typeface="Microsoft YaHei"/>
-              </a:rPr>
-              <a:t>算力受限段（平台）</a:t>
+                  <a:srgbClr val="8C96A1"/>
+                </a:solidFill>
+                <a:latin typeface="Consolas"/>
+                <a:ea typeface="Microsoft YaHei"/>
+                <a:cs typeface="Microsoft YaHei"/>
+              </a:rPr>
+              <a:t>__</a:t>
             </a:r>
           </a:p>
         </p:txBody>
@@ -8520,7 +8482,7 @@
         </p:nvCxnSpPr>
         <p:spPr>
           <a:xfrm>
-            <a:off x="1389888" y="4499810"/>
+            <a:off x="1389888" y="4037797"/>
             <a:ext cx="5879592" cy="0"/>
           </a:xfrm>
           <a:prstGeom prst="line">
@@ -8528,7 +8490,7 @@
           </a:prstGeom>
           <a:ln w="9525">
             <a:solidFill>
-              <a:srgbClr val="CFE3F0"/>
+              <a:srgbClr val="DDE2E7"/>
             </a:solidFill>
           </a:ln>
         </p:spPr>
@@ -8541,7 +8503,7 @@
         </p:nvSpPr>
         <p:spPr>
           <a:xfrm>
-            <a:off x="786384" y="4399226"/>
+            <a:off x="786384" y="3937213"/>
             <a:ext cx="493776" cy="201168"/>
           </a:xfrm>
           <a:prstGeom prst="rect">
@@ -8569,7 +8531,7 @@
             <a:r>
               <a:rPr sz="900" b="0">
                 <a:solidFill>
-                  <a:srgbClr val="7FA4BA"/>
+                  <a:srgbClr val="8C96A1"/>
                 </a:solidFill>
                 <a:latin typeface="Consolas"/>
                 <a:ea typeface="Microsoft YaHei"/>
@@ -8588,7 +8550,7 @@
         </p:nvCxnSpPr>
         <p:spPr>
           <a:xfrm>
-            <a:off x="1389888" y="4037797"/>
+            <a:off x="1389888" y="3575785"/>
             <a:ext cx="5879592" cy="0"/>
           </a:xfrm>
           <a:prstGeom prst="line">
@@ -8596,7 +8558,7 @@
           </a:prstGeom>
           <a:ln w="9525">
             <a:solidFill>
-              <a:srgbClr val="CFE3F0"/>
+              <a:srgbClr val="DDE2E7"/>
             </a:solidFill>
           </a:ln>
         </p:spPr>
@@ -8609,7 +8571,7 @@
         </p:nvSpPr>
         <p:spPr>
           <a:xfrm>
-            <a:off x="786384" y="3937213"/>
+            <a:off x="786384" y="3475201"/>
             <a:ext cx="493776" cy="201168"/>
           </a:xfrm>
           <a:prstGeom prst="rect">
@@ -8637,7 +8599,7 @@
             <a:r>
               <a:rPr sz="900" b="0">
                 <a:solidFill>
-                  <a:srgbClr val="7FA4BA"/>
+                  <a:srgbClr val="8C96A1"/>
                 </a:solidFill>
                 <a:latin typeface="Consolas"/>
                 <a:ea typeface="Microsoft YaHei"/>
@@ -8656,7 +8618,7 @@
         </p:nvCxnSpPr>
         <p:spPr>
           <a:xfrm>
-            <a:off x="1389888" y="3575785"/>
+            <a:off x="1389888" y="3113772"/>
             <a:ext cx="5879592" cy="0"/>
           </a:xfrm>
           <a:prstGeom prst="line">
@@ -8664,7 +8626,7 @@
           </a:prstGeom>
           <a:ln w="9525">
             <a:solidFill>
-              <a:srgbClr val="CFE3F0"/>
+              <a:srgbClr val="DDE2E7"/>
             </a:solidFill>
           </a:ln>
         </p:spPr>
@@ -8677,7 +8639,7 @@
         </p:nvSpPr>
         <p:spPr>
           <a:xfrm>
-            <a:off x="786384" y="3475201"/>
+            <a:off x="786384" y="3013188"/>
             <a:ext cx="493776" cy="201168"/>
           </a:xfrm>
           <a:prstGeom prst="rect">
@@ -8705,7 +8667,7 @@
             <a:r>
               <a:rPr sz="900" b="0">
                 <a:solidFill>
-                  <a:srgbClr val="7FA4BA"/>
+                  <a:srgbClr val="8C96A1"/>
                 </a:solidFill>
                 <a:latin typeface="Consolas"/>
                 <a:ea typeface="Microsoft YaHei"/>
@@ -8724,7 +8686,7 @@
         </p:nvCxnSpPr>
         <p:spPr>
           <a:xfrm>
-            <a:off x="1389888" y="3113772"/>
+            <a:off x="1389888" y="2651760"/>
             <a:ext cx="5879592" cy="0"/>
           </a:xfrm>
           <a:prstGeom prst="line">
@@ -8732,7 +8694,7 @@
           </a:prstGeom>
           <a:ln w="9525">
             <a:solidFill>
-              <a:srgbClr val="CFE3F0"/>
+              <a:srgbClr val="DDE2E7"/>
             </a:solidFill>
           </a:ln>
         </p:spPr>
@@ -8745,7 +8707,7 @@
         </p:nvSpPr>
         <p:spPr>
           <a:xfrm>
-            <a:off x="786384" y="3013188"/>
+            <a:off x="786384" y="2551176"/>
             <a:ext cx="493776" cy="201168"/>
           </a:xfrm>
           <a:prstGeom prst="rect">
@@ -8773,7 +8735,7 @@
             <a:r>
               <a:rPr sz="900" b="0">
                 <a:solidFill>
-                  <a:srgbClr val="7FA4BA"/>
+                  <a:srgbClr val="8C96A1"/>
                 </a:solidFill>
                 <a:latin typeface="Consolas"/>
                 <a:ea typeface="Microsoft YaHei"/>
@@ -8792,74 +8754,6 @@
         </p:nvCxnSpPr>
         <p:spPr>
           <a:xfrm>
-            <a:off x="1389888" y="2651760"/>
-            <a:ext cx="5879592" cy="0"/>
-          </a:xfrm>
-          <a:prstGeom prst="line">
-            <a:avLst/>
-          </a:prstGeom>
-          <a:ln w="9525">
-            <a:solidFill>
-              <a:srgbClr val="CFE3F0"/>
-            </a:solidFill>
-          </a:ln>
-        </p:spPr>
-      </p:cxnSp>
-      <p:sp>
-        <p:nvSpPr>
-          <p:cNvPr id="24" name="TextBox 23"/>
-          <p:cNvSpPr txBox="1"/>
-          <p:nvPr/>
-        </p:nvSpPr>
-        <p:spPr>
-          <a:xfrm>
-            <a:off x="786384" y="2551176"/>
-            <a:ext cx="493776" cy="201168"/>
-          </a:xfrm>
-          <a:prstGeom prst="rect">
-            <a:avLst/>
-          </a:prstGeom>
-          <a:noFill/>
-        </p:spPr>
-        <p:txBody>
-          <a:bodyPr wrap="square" anchor="ctr" lIns="0" tIns="0" rIns="0" bIns="0">
-            <a:noAutofit/>
-          </a:bodyPr>
-          <a:lstStyle/>
-          <a:p>
-            <a:pPr algn="r" latinLnBrk="0">
-              <a:lnSpc>
-                <a:spcPct val="100000"/>
-              </a:lnSpc>
-              <a:spcBef>
-                <a:spcPts val="0"/>
-              </a:spcBef>
-              <a:spcAft>
-                <a:spcPts val="0"/>
-              </a:spcAft>
-            </a:pPr>
-            <a:r>
-              <a:rPr sz="900" b="0">
-                <a:solidFill>
-                  <a:srgbClr val="7FA4BA"/>
-                </a:solidFill>
-                <a:latin typeface="Consolas"/>
-                <a:ea typeface="Microsoft YaHei"/>
-                <a:cs typeface="Microsoft YaHei"/>
-              </a:rPr>
-              <a:t>__</a:t>
-            </a:r>
-          </a:p>
-        </p:txBody>
-      </p:sp>
-      <p:cxnSp>
-        <p:nvCxnSpPr>
-          <p:cNvPr id="25" name="Connector 24"/>
-          <p:cNvCxnSpPr/>
-          <p:nvPr/>
-        </p:nvCxnSpPr>
-        <p:spPr>
-          <a:xfrm>
             <a:off x="1389888" y="4846320"/>
             <a:ext cx="5879592" cy="0"/>
           </a:xfrm>
@@ -8868,14 +8762,14 @@
           </a:prstGeom>
           <a:ln w="12700">
             <a:solidFill>
-              <a:srgbClr val="AFCEE1"/>
+              <a:srgbClr val="C5CCD4"/>
             </a:solidFill>
           </a:ln>
         </p:spPr>
       </p:cxnSp>
       <p:cxnSp>
         <p:nvCxnSpPr>
-          <p:cNvPr id="26" name="Connector 25"/>
+          <p:cNvPr id="24" name="Connector 23"/>
           <p:cNvCxnSpPr/>
           <p:nvPr/>
         </p:nvCxnSpPr>
@@ -8889,14 +8783,14 @@
           </a:prstGeom>
           <a:ln w="12700">
             <a:solidFill>
-              <a:srgbClr val="AFCEE1"/>
+              <a:srgbClr val="C5CCD4"/>
             </a:solidFill>
           </a:ln>
         </p:spPr>
       </p:cxnSp>
       <p:sp>
         <p:nvSpPr>
-          <p:cNvPr id="27" name="TextBox 26"/>
+          <p:cNvPr id="25" name="TextBox 24"/>
           <p:cNvSpPr txBox="1"/>
           <p:nvPr/>
         </p:nvSpPr>
@@ -8930,7 +8824,7 @@
             <a:r>
               <a:rPr sz="950" b="0">
                 <a:solidFill>
-                  <a:srgbClr val="7FA4BA"/>
+                  <a:srgbClr val="8C96A1"/>
                 </a:solidFill>
                 <a:latin typeface="Consolas"/>
                 <a:ea typeface="Microsoft YaHei"/>
@@ -8943,7 +8837,7 @@
       </p:sp>
       <p:sp>
         <p:nvSpPr>
-          <p:cNvPr id="28" name="TextBox 27"/>
+          <p:cNvPr id="26" name="TextBox 25"/>
           <p:cNvSpPr txBox="1"/>
           <p:nvPr/>
         </p:nvSpPr>
@@ -8977,7 +8871,7 @@
             <a:r>
               <a:rPr sz="950" b="0">
                 <a:solidFill>
-                  <a:srgbClr val="7FA4BA"/>
+                  <a:srgbClr val="8C96A1"/>
                 </a:solidFill>
                 <a:latin typeface="Consolas"/>
                 <a:ea typeface="Microsoft YaHei"/>
@@ -8990,7 +8884,7 @@
       </p:sp>
       <p:sp>
         <p:nvSpPr>
-          <p:cNvPr id="29" name="TextBox 28"/>
+          <p:cNvPr id="27" name="TextBox 26"/>
           <p:cNvSpPr txBox="1"/>
           <p:nvPr/>
         </p:nvSpPr>
@@ -9024,7 +8918,7 @@
             <a:r>
               <a:rPr sz="950" b="0">
                 <a:solidFill>
-                  <a:srgbClr val="7FA4BA"/>
+                  <a:srgbClr val="8C96A1"/>
                 </a:solidFill>
                 <a:latin typeface="Consolas"/>
                 <a:ea typeface="Microsoft YaHei"/>
@@ -9037,7 +8931,7 @@
       </p:sp>
       <p:sp>
         <p:nvSpPr>
-          <p:cNvPr id="30" name="TextBox 29"/>
+          <p:cNvPr id="28" name="TextBox 27"/>
           <p:cNvSpPr txBox="1"/>
           <p:nvPr/>
         </p:nvSpPr>
@@ -9071,7 +8965,7 @@
             <a:r>
               <a:rPr sz="950" b="0">
                 <a:solidFill>
-                  <a:srgbClr val="7FA4BA"/>
+                  <a:srgbClr val="8C96A1"/>
                 </a:solidFill>
                 <a:latin typeface="Consolas"/>
                 <a:ea typeface="Microsoft YaHei"/>
@@ -9084,7 +8978,7 @@
       </p:sp>
       <p:sp>
         <p:nvSpPr>
-          <p:cNvPr id="31" name="TextBox 30"/>
+          <p:cNvPr id="29" name="TextBox 28"/>
           <p:cNvSpPr txBox="1"/>
           <p:nvPr/>
         </p:nvSpPr>
@@ -9118,7 +9012,7 @@
             <a:r>
               <a:rPr sz="950" b="0">
                 <a:solidFill>
-                  <a:srgbClr val="7FA4BA"/>
+                  <a:srgbClr val="8C96A1"/>
                 </a:solidFill>
                 <a:latin typeface="Consolas"/>
                 <a:ea typeface="Microsoft YaHei"/>
@@ -9131,7 +9025,7 @@
       </p:sp>
       <p:sp>
         <p:nvSpPr>
-          <p:cNvPr id="32" name="TextBox 31"/>
+          <p:cNvPr id="30" name="TextBox 29"/>
           <p:cNvSpPr txBox="1"/>
           <p:nvPr/>
         </p:nvSpPr>
@@ -9165,7 +9059,7 @@
             <a:r>
               <a:rPr sz="950" b="0">
                 <a:solidFill>
-                  <a:srgbClr val="7FA4BA"/>
+                  <a:srgbClr val="8C96A1"/>
                 </a:solidFill>
                 <a:latin typeface="Consolas"/>
                 <a:ea typeface="Microsoft YaHei"/>
@@ -9178,7 +9072,7 @@
       </p:sp>
       <p:sp>
         <p:nvSpPr>
-          <p:cNvPr id="33" name="TextBox 32"/>
+          <p:cNvPr id="31" name="TextBox 30"/>
           <p:cNvSpPr txBox="1"/>
           <p:nvPr/>
         </p:nvSpPr>
@@ -9212,7 +9106,7 @@
             <a:r>
               <a:rPr sz="950" b="0">
                 <a:solidFill>
-                  <a:srgbClr val="7FA4BA"/>
+                  <a:srgbClr val="8C96A1"/>
                 </a:solidFill>
                 <a:latin typeface="Consolas"/>
                 <a:ea typeface="Microsoft YaHei"/>
@@ -9225,7 +9119,7 @@
       </p:sp>
       <p:sp>
         <p:nvSpPr>
-          <p:cNvPr id="34" name="TextBox 33"/>
+          <p:cNvPr id="32" name="TextBox 31"/>
           <p:cNvSpPr txBox="1"/>
           <p:nvPr/>
         </p:nvSpPr>
@@ -9259,7 +9153,7 @@
             <a:r>
               <a:rPr sz="950" b="0">
                 <a:solidFill>
-                  <a:srgbClr val="7FA4BA"/>
+                  <a:srgbClr val="8C96A1"/>
                 </a:solidFill>
                 <a:latin typeface="Consolas"/>
                 <a:ea typeface="Microsoft YaHei"/>
@@ -9272,7 +9166,7 @@
       </p:sp>
       <p:cxnSp>
         <p:nvCxnSpPr>
-          <p:cNvPr id="35" name="Connector 34"/>
+          <p:cNvPr id="33" name="Connector 32"/>
           <p:cNvCxnSpPr/>
           <p:nvPr/>
         </p:nvCxnSpPr>
@@ -9286,14 +9180,14 @@
           </a:prstGeom>
           <a:ln w="25400">
             <a:solidFill>
-              <a:srgbClr val="D4147A"/>
+              <a:srgbClr val="C0612C"/>
             </a:solidFill>
           </a:ln>
         </p:spPr>
       </p:cxnSp>
       <p:cxnSp>
         <p:nvCxnSpPr>
-          <p:cNvPr id="36" name="Connector 35"/>
+          <p:cNvPr id="34" name="Connector 33"/>
           <p:cNvCxnSpPr/>
           <p:nvPr/>
         </p:nvCxnSpPr>
@@ -9307,14 +9201,14 @@
           </a:prstGeom>
           <a:ln w="25400">
             <a:solidFill>
-              <a:srgbClr val="0F62CE"/>
+              <a:srgbClr val="3F63A8"/>
             </a:solidFill>
           </a:ln>
         </p:spPr>
       </p:cxnSp>
       <p:sp>
         <p:nvSpPr>
-          <p:cNvPr id="37" name="Oval 36"/>
+          <p:cNvPr id="35" name="Oval 34"/>
           <p:cNvSpPr/>
           <p:nvPr/>
         </p:nvSpPr>
@@ -9327,7 +9221,7 @@
             <a:avLst/>
           </a:prstGeom>
           <a:solidFill>
-            <a:srgbClr val="0A2B45"/>
+            <a:srgbClr val="16202A"/>
           </a:solidFill>
           <a:ln w="15875">
             <a:solidFill>
@@ -9345,7 +9239,7 @@
       </p:sp>
       <p:sp>
         <p:nvSpPr>
-          <p:cNvPr id="38" name="TextBox 37"/>
+          <p:cNvPr id="36" name="TextBox 35"/>
           <p:cNvSpPr txBox="1"/>
           <p:nvPr/>
         </p:nvSpPr>
@@ -9379,7 +9273,7 @@
             <a:r>
               <a:rPr sz="900" b="1">
                 <a:solidFill>
-                  <a:srgbClr val="0A2B45"/>
+                  <a:srgbClr val="16202A"/>
                 </a:solidFill>
                 <a:latin typeface="Microsoft YaHei"/>
                 <a:ea typeface="Microsoft YaHei"/>
@@ -9392,7 +9286,7 @@
       </p:sp>
       <p:sp>
         <p:nvSpPr>
-          <p:cNvPr id="39" name="Oval 38"/>
+          <p:cNvPr id="37" name="Oval 36"/>
           <p:cNvSpPr/>
           <p:nvPr/>
         </p:nvSpPr>
@@ -9405,7 +9299,7 @@
             <a:avLst/>
           </a:prstGeom>
           <a:solidFill>
-            <a:srgbClr val="AFCEE1"/>
+            <a:srgbClr val="C5CCD4"/>
           </a:solidFill>
           <a:ln w="15875">
             <a:solidFill>
@@ -9423,7 +9317,7 @@
       </p:sp>
       <p:sp>
         <p:nvSpPr>
-          <p:cNvPr id="40" name="TextBox 39"/>
+          <p:cNvPr id="38" name="TextBox 37"/>
           <p:cNvSpPr txBox="1"/>
           <p:nvPr/>
         </p:nvSpPr>
@@ -9457,7 +9351,7 @@
             <a:r>
               <a:rPr sz="900" b="1">
                 <a:solidFill>
-                  <a:srgbClr val="1B4D69"/>
+                  <a:srgbClr val="35424F"/>
                 </a:solidFill>
                 <a:latin typeface="Microsoft YaHei"/>
                 <a:ea typeface="Microsoft YaHei"/>
@@ -9470,7 +9364,7 @@
       </p:sp>
       <p:sp>
         <p:nvSpPr>
-          <p:cNvPr id="41" name="Oval 40"/>
+          <p:cNvPr id="39" name="Oval 38"/>
           <p:cNvSpPr/>
           <p:nvPr/>
         </p:nvSpPr>
@@ -9483,7 +9377,7 @@
             <a:avLst/>
           </a:prstGeom>
           <a:solidFill>
-            <a:srgbClr val="AFCEE1"/>
+            <a:srgbClr val="C5CCD4"/>
           </a:solidFill>
           <a:ln w="15875">
             <a:solidFill>
@@ -9501,7 +9395,7 @@
       </p:sp>
       <p:sp>
         <p:nvSpPr>
-          <p:cNvPr id="42" name="TextBox 41"/>
+          <p:cNvPr id="40" name="TextBox 39"/>
           <p:cNvSpPr txBox="1"/>
           <p:nvPr/>
         </p:nvSpPr>
@@ -9535,7 +9429,7 @@
             <a:r>
               <a:rPr sz="900" b="1">
                 <a:solidFill>
-                  <a:srgbClr val="1B4D69"/>
+                  <a:srgbClr val="35424F"/>
                 </a:solidFill>
                 <a:latin typeface="Microsoft YaHei"/>
                 <a:ea typeface="Microsoft YaHei"/>
@@ -9548,7 +9442,7 @@
       </p:sp>
       <p:sp>
         <p:nvSpPr>
-          <p:cNvPr id="43" name="Oval 42"/>
+          <p:cNvPr id="41" name="Oval 40"/>
           <p:cNvSpPr/>
           <p:nvPr/>
         </p:nvSpPr>
@@ -9561,7 +9455,7 @@
             <a:avLst/>
           </a:prstGeom>
           <a:solidFill>
-            <a:srgbClr val="AFCEE1"/>
+            <a:srgbClr val="C5CCD4"/>
           </a:solidFill>
           <a:ln w="15875">
             <a:solidFill>
@@ -9579,7 +9473,7 @@
       </p:sp>
       <p:sp>
         <p:nvSpPr>
-          <p:cNvPr id="44" name="TextBox 43"/>
+          <p:cNvPr id="42" name="TextBox 41"/>
           <p:cNvSpPr txBox="1"/>
           <p:nvPr/>
         </p:nvSpPr>
@@ -9613,7 +9507,7 @@
             <a:r>
               <a:rPr sz="900" b="1">
                 <a:solidFill>
-                  <a:srgbClr val="1B4D69"/>
+                  <a:srgbClr val="35424F"/>
                 </a:solidFill>
                 <a:latin typeface="Microsoft YaHei"/>
                 <a:ea typeface="Microsoft YaHei"/>
@@ -9626,7 +9520,7 @@
       </p:sp>
       <p:cxnSp>
         <p:nvCxnSpPr>
-          <p:cNvPr id="45" name="Connector 44"/>
+          <p:cNvPr id="43" name="Connector 42"/>
           <p:cNvCxnSpPr/>
           <p:nvPr/>
         </p:nvCxnSpPr>
@@ -9640,7 +9534,7 @@
           </a:prstGeom>
           <a:ln w="15875">
             <a:solidFill>
-              <a:srgbClr val="7FA4BA"/>
+              <a:srgbClr val="8C96A1"/>
             </a:solidFill>
             <a:tailEnd type="triangle" w="med" len="med"/>
           </a:ln>
@@ -9648,7 +9542,7 @@
       </p:cxnSp>
       <p:sp>
         <p:nvSpPr>
-          <p:cNvPr id="46" name="TextBox 45"/>
+          <p:cNvPr id="44" name="TextBox 43"/>
           <p:cNvSpPr txBox="1"/>
           <p:nvPr/>
         </p:nvSpPr>
@@ -9682,7 +9576,7 @@
             <a:r>
               <a:rPr sz="900" b="0">
                 <a:solidFill>
-                  <a:srgbClr val="40708B"/>
+                  <a:srgbClr val="66727F"/>
                 </a:solidFill>
                 <a:latin typeface="Microsoft YaHei"/>
                 <a:ea typeface="Microsoft YaHei"/>
@@ -9695,7 +9589,7 @@
       </p:sp>
       <p:sp>
         <p:nvSpPr>
-          <p:cNvPr id="47" name="Oval 46"/>
+          <p:cNvPr id="45" name="Oval 44"/>
           <p:cNvSpPr/>
           <p:nvPr/>
         </p:nvSpPr>
@@ -9712,7 +9606,7 @@
           </a:solidFill>
           <a:ln w="22225">
             <a:solidFill>
-              <a:srgbClr val="AFCEE1"/>
+              <a:srgbClr val="C5CCD4"/>
             </a:solidFill>
           </a:ln>
         </p:spPr>
@@ -9726,7 +9620,7 @@
       </p:sp>
       <p:sp>
         <p:nvSpPr>
-          <p:cNvPr id="48" name="TextBox 47"/>
+          <p:cNvPr id="46" name="TextBox 45"/>
           <p:cNvSpPr txBox="1"/>
           <p:nvPr/>
         </p:nvSpPr>
@@ -9760,7 +9654,7 @@
             <a:r>
               <a:rPr sz="900" b="1">
                 <a:solidFill>
-                  <a:srgbClr val="1B4D69"/>
+                  <a:srgbClr val="35424F"/>
                 </a:solidFill>
                 <a:latin typeface="Microsoft YaHei"/>
                 <a:ea typeface="Microsoft YaHei"/>
@@ -9773,7 +9667,7 @@
       </p:sp>
       <p:sp>
         <p:nvSpPr>
-          <p:cNvPr id="49" name="Oval 48"/>
+          <p:cNvPr id="47" name="Oval 46"/>
           <p:cNvSpPr/>
           <p:nvPr/>
         </p:nvSpPr>
@@ -9790,7 +9684,7 @@
           </a:solidFill>
           <a:ln w="22225">
             <a:solidFill>
-              <a:srgbClr val="AFCEE1"/>
+              <a:srgbClr val="C5CCD4"/>
             </a:solidFill>
           </a:ln>
         </p:spPr>
@@ -9804,7 +9698,7 @@
       </p:sp>
       <p:sp>
         <p:nvSpPr>
-          <p:cNvPr id="50" name="TextBox 49"/>
+          <p:cNvPr id="48" name="TextBox 47"/>
           <p:cNvSpPr txBox="1"/>
           <p:nvPr/>
         </p:nvSpPr>
@@ -9838,7 +9732,7 @@
             <a:r>
               <a:rPr sz="900" b="1">
                 <a:solidFill>
-                  <a:srgbClr val="1B4D69"/>
+                  <a:srgbClr val="35424F"/>
                 </a:solidFill>
                 <a:latin typeface="Microsoft YaHei"/>
                 <a:ea typeface="Microsoft YaHei"/>
@@ -9851,7 +9745,7 @@
       </p:sp>
       <p:sp>
         <p:nvSpPr>
-          <p:cNvPr id="51" name="TextBox 50"/>
+          <p:cNvPr id="49" name="TextBox 48"/>
           <p:cNvSpPr txBox="1"/>
           <p:nvPr/>
         </p:nvSpPr>
@@ -9885,7 +9779,7 @@
             <a:r>
               <a:rPr sz="900" b="0">
                 <a:solidFill>
-                  <a:srgbClr val="7FA4BA"/>
+                  <a:srgbClr val="8C96A1"/>
                 </a:solidFill>
                 <a:latin typeface="Microsoft YaHei"/>
                 <a:ea typeface="Microsoft YaHei"/>
@@ -9896,7 +9790,7 @@
             <a:r>
               <a:rPr sz="900" b="0">
                 <a:solidFill>
-                  <a:srgbClr val="40708B"/>
+                  <a:srgbClr val="66727F"/>
                 </a:solidFill>
                 <a:latin typeface="Microsoft YaHei"/>
                 <a:ea typeface="Microsoft YaHei"/>
@@ -9907,7 +9801,7 @@
             <a:r>
               <a:rPr sz="900" b="0">
                 <a:solidFill>
-                  <a:srgbClr val="7FA4BA"/>
+                  <a:srgbClr val="8C96A1"/>
                 </a:solidFill>
                 <a:latin typeface="Microsoft YaHei"/>
                 <a:ea typeface="Microsoft YaHei"/>
@@ -9918,7 +9812,7 @@
             <a:r>
               <a:rPr sz="900" b="0">
                 <a:solidFill>
-                  <a:srgbClr val="40708B"/>
+                  <a:srgbClr val="66727F"/>
                 </a:solidFill>
                 <a:latin typeface="Microsoft YaHei"/>
                 <a:ea typeface="Microsoft YaHei"/>
@@ -9929,7 +9823,7 @@
             <a:r>
               <a:rPr sz="900" b="0">
                 <a:solidFill>
-                  <a:srgbClr val="40708B"/>
+                  <a:srgbClr val="66727F"/>
                 </a:solidFill>
                 <a:latin typeface="Microsoft YaHei"/>
                 <a:ea typeface="Microsoft YaHei"/>
@@ -9942,7 +9836,7 @@
       </p:sp>
       <p:sp>
         <p:nvSpPr>
-          <p:cNvPr id="52" name="Rectangle 51"/>
+          <p:cNvPr id="50" name="Rectangle 49"/>
           <p:cNvSpPr/>
           <p:nvPr/>
         </p:nvSpPr>
@@ -9955,7 +9849,7 @@
             <a:avLst/>
           </a:prstGeom>
           <a:solidFill>
-            <a:srgbClr val="FBD9E9"/>
+            <a:srgbClr val="F8EADF"/>
           </a:solidFill>
           <a:ln>
             <a:noFill/>
@@ -9971,7 +9865,7 @@
       </p:sp>
       <p:sp>
         <p:nvSpPr>
-          <p:cNvPr id="53" name="TextBox 52"/>
+          <p:cNvPr id="51" name="TextBox 50"/>
           <p:cNvSpPr txBox="1"/>
           <p:nvPr/>
         </p:nvSpPr>
@@ -10005,7 +9899,7 @@
             <a:r>
               <a:rPr sz="850" b="1">
                 <a:solidFill>
-                  <a:srgbClr val="D4147A"/>
+                  <a:srgbClr val="C0612C"/>
                 </a:solidFill>
                 <a:latin typeface="Microsoft YaHei"/>
                 <a:ea typeface="Microsoft YaHei"/>
@@ -10018,7 +9912,7 @@
       </p:sp>
       <p:sp>
         <p:nvSpPr>
-          <p:cNvPr id="54" name="Rectangle 53"/>
+          <p:cNvPr id="52" name="Rectangle 51"/>
           <p:cNvSpPr/>
           <p:nvPr/>
         </p:nvSpPr>
@@ -10031,7 +9925,7 @@
             <a:avLst/>
           </a:prstGeom>
           <a:solidFill>
-            <a:srgbClr val="FFFFFF"/>
+            <a:srgbClr val="F6F7F9"/>
           </a:solidFill>
           <a:ln>
             <a:noFill/>
@@ -10047,7 +9941,7 @@
       </p:sp>
       <p:sp>
         <p:nvSpPr>
-          <p:cNvPr id="55" name="TextBox 54"/>
+          <p:cNvPr id="53" name="TextBox 52"/>
           <p:cNvSpPr txBox="1"/>
           <p:nvPr/>
         </p:nvSpPr>
@@ -10081,7 +9975,7 @@
             <a:r>
               <a:rPr sz="1250" b="1">
                 <a:solidFill>
-                  <a:srgbClr val="0A2B45"/>
+                  <a:srgbClr val="16202A"/>
                 </a:solidFill>
                 <a:latin typeface="Microsoft YaHei"/>
                 <a:ea typeface="Microsoft YaHei"/>
@@ -10092,7 +9986,7 @@
             <a:r>
               <a:rPr sz="1000" b="0">
                 <a:solidFill>
-                  <a:srgbClr val="40708B"/>
+                  <a:srgbClr val="66727F"/>
                 </a:solidFill>
                 <a:latin typeface="Microsoft YaHei"/>
                 <a:ea typeface="Microsoft YaHei"/>
@@ -10105,7 +9999,7 @@
       </p:sp>
       <p:sp>
         <p:nvSpPr>
-          <p:cNvPr id="56" name="TextBox 55"/>
+          <p:cNvPr id="54" name="TextBox 53"/>
           <p:cNvSpPr txBox="1"/>
           <p:nvPr/>
         </p:nvSpPr>
@@ -10139,7 +10033,7 @@
             <a:r>
               <a:rPr sz="900" b="0">
                 <a:solidFill>
-                  <a:srgbClr val="7FA4BA"/>
+                  <a:srgbClr val="8C96A1"/>
                 </a:solidFill>
                 <a:latin typeface="Microsoft YaHei"/>
                 <a:ea typeface="Microsoft YaHei"/>
@@ -10152,7 +10046,7 @@
       </p:sp>
       <p:sp>
         <p:nvSpPr>
-          <p:cNvPr id="57" name="TextBox 56"/>
+          <p:cNvPr id="55" name="TextBox 54"/>
           <p:cNvSpPr txBox="1"/>
           <p:nvPr/>
         </p:nvSpPr>
@@ -10186,7 +10080,7 @@
             <a:r>
               <a:rPr sz="900" b="0">
                 <a:solidFill>
-                  <a:srgbClr val="7FA4BA"/>
+                  <a:srgbClr val="8C96A1"/>
                 </a:solidFill>
                 <a:latin typeface="Microsoft YaHei"/>
                 <a:ea typeface="Microsoft YaHei"/>
@@ -10199,7 +10093,7 @@
       </p:sp>
       <p:sp>
         <p:nvSpPr>
-          <p:cNvPr id="58" name="TextBox 57"/>
+          <p:cNvPr id="56" name="TextBox 55"/>
           <p:cNvSpPr txBox="1"/>
           <p:nvPr/>
         </p:nvSpPr>
@@ -10233,7 +10127,7 @@
             <a:r>
               <a:rPr sz="900" b="0">
                 <a:solidFill>
-                  <a:srgbClr val="7FA4BA"/>
+                  <a:srgbClr val="8C96A1"/>
                 </a:solidFill>
                 <a:latin typeface="Microsoft YaHei"/>
                 <a:ea typeface="Microsoft YaHei"/>
@@ -10246,7 +10140,7 @@
       </p:sp>
       <p:sp>
         <p:nvSpPr>
-          <p:cNvPr id="59" name="TextBox 58"/>
+          <p:cNvPr id="57" name="TextBox 56"/>
           <p:cNvSpPr txBox="1"/>
           <p:nvPr/>
         </p:nvSpPr>
@@ -10280,7 +10174,7 @@
             <a:r>
               <a:rPr sz="900" b="0">
                 <a:solidFill>
-                  <a:srgbClr val="7FA4BA"/>
+                  <a:srgbClr val="8C96A1"/>
                 </a:solidFill>
                 <a:latin typeface="Microsoft YaHei"/>
                 <a:ea typeface="Microsoft YaHei"/>
@@ -10293,7 +10187,7 @@
       </p:sp>
       <p:sp>
         <p:nvSpPr>
-          <p:cNvPr id="60" name="TextBox 59"/>
+          <p:cNvPr id="58" name="TextBox 57"/>
           <p:cNvSpPr txBox="1"/>
           <p:nvPr/>
         </p:nvSpPr>
@@ -10327,7 +10221,7 @@
             <a:r>
               <a:rPr sz="900" b="0">
                 <a:solidFill>
-                  <a:srgbClr val="7FA4BA"/>
+                  <a:srgbClr val="8C96A1"/>
                 </a:solidFill>
                 <a:latin typeface="Microsoft YaHei"/>
                 <a:ea typeface="Microsoft YaHei"/>
@@ -10340,7 +10234,7 @@
       </p:sp>
       <p:cxnSp>
         <p:nvCxnSpPr>
-          <p:cNvPr id="61" name="Connector 60"/>
+          <p:cNvPr id="59" name="Connector 58"/>
           <p:cNvCxnSpPr/>
           <p:nvPr/>
         </p:nvCxnSpPr>
@@ -10354,14 +10248,14 @@
           </a:prstGeom>
           <a:ln w="9525">
             <a:solidFill>
-              <a:srgbClr val="CFE3F0"/>
+              <a:srgbClr val="DDE2E7"/>
             </a:solidFill>
           </a:ln>
         </p:spPr>
       </p:cxnSp>
       <p:sp>
         <p:nvSpPr>
-          <p:cNvPr id="62" name="TextBox 61"/>
+          <p:cNvPr id="60" name="TextBox 59"/>
           <p:cNvSpPr txBox="1"/>
           <p:nvPr/>
         </p:nvSpPr>
@@ -10395,7 +10289,7 @@
             <a:r>
               <a:rPr sz="950" b="0">
                 <a:solidFill>
-                  <a:srgbClr val="1B4D69"/>
+                  <a:srgbClr val="35424F"/>
                 </a:solidFill>
                 <a:latin typeface="Microsoft YaHei"/>
                 <a:ea typeface="Microsoft YaHei"/>
@@ -10408,7 +10302,7 @@
       </p:sp>
       <p:sp>
         <p:nvSpPr>
-          <p:cNvPr id="63" name="TextBox 62"/>
+          <p:cNvPr id="61" name="TextBox 60"/>
           <p:cNvSpPr txBox="1"/>
           <p:nvPr/>
         </p:nvSpPr>
@@ -10442,7 +10336,7 @@
             <a:r>
               <a:rPr sz="950" b="0">
                 <a:solidFill>
-                  <a:srgbClr val="7FA4BA"/>
+                  <a:srgbClr val="8C96A1"/>
                 </a:solidFill>
                 <a:latin typeface="Consolas"/>
                 <a:ea typeface="Microsoft YaHei"/>
@@ -10455,7 +10349,7 @@
       </p:sp>
       <p:sp>
         <p:nvSpPr>
-          <p:cNvPr id="64" name="TextBox 63"/>
+          <p:cNvPr id="62" name="TextBox 61"/>
           <p:cNvSpPr txBox="1"/>
           <p:nvPr/>
         </p:nvSpPr>
@@ -10489,7 +10383,7 @@
             <a:r>
               <a:rPr sz="950" b="0">
                 <a:solidFill>
-                  <a:srgbClr val="7FA4BA"/>
+                  <a:srgbClr val="8C96A1"/>
                 </a:solidFill>
                 <a:latin typeface="Consolas"/>
                 <a:ea typeface="Microsoft YaHei"/>
@@ -10502,7 +10396,7 @@
       </p:sp>
       <p:sp>
         <p:nvSpPr>
-          <p:cNvPr id="65" name="TextBox 64"/>
+          <p:cNvPr id="63" name="TextBox 62"/>
           <p:cNvSpPr txBox="1"/>
           <p:nvPr/>
         </p:nvSpPr>
@@ -10536,7 +10430,7 @@
             <a:r>
               <a:rPr sz="950" b="0">
                 <a:solidFill>
-                  <a:srgbClr val="7FA4BA"/>
+                  <a:srgbClr val="8C96A1"/>
                 </a:solidFill>
                 <a:latin typeface="Consolas"/>
                 <a:ea typeface="Microsoft YaHei"/>
@@ -10549,7 +10443,7 @@
       </p:sp>
       <p:sp>
         <p:nvSpPr>
-          <p:cNvPr id="66" name="TextBox 65"/>
+          <p:cNvPr id="64" name="TextBox 63"/>
           <p:cNvSpPr txBox="1"/>
           <p:nvPr/>
         </p:nvSpPr>
@@ -10583,7 +10477,7 @@
             <a:r>
               <a:rPr sz="950" b="0">
                 <a:solidFill>
-                  <a:srgbClr val="7FA4BA"/>
+                  <a:srgbClr val="8C96A1"/>
                 </a:solidFill>
                 <a:latin typeface="Consolas"/>
                 <a:ea typeface="Microsoft YaHei"/>
@@ -10596,7 +10490,7 @@
       </p:sp>
       <p:sp>
         <p:nvSpPr>
-          <p:cNvPr id="67" name="TextBox 66"/>
+          <p:cNvPr id="65" name="TextBox 64"/>
           <p:cNvSpPr txBox="1"/>
           <p:nvPr/>
         </p:nvSpPr>
@@ -10630,7 +10524,7 @@
             <a:r>
               <a:rPr sz="950" b="0">
                 <a:solidFill>
-                  <a:srgbClr val="1B4D69"/>
+                  <a:srgbClr val="35424F"/>
                 </a:solidFill>
                 <a:latin typeface="Microsoft YaHei"/>
                 <a:ea typeface="Microsoft YaHei"/>
@@ -10643,7 +10537,7 @@
       </p:sp>
       <p:sp>
         <p:nvSpPr>
-          <p:cNvPr id="68" name="TextBox 67"/>
+          <p:cNvPr id="66" name="TextBox 65"/>
           <p:cNvSpPr txBox="1"/>
           <p:nvPr/>
         </p:nvSpPr>
@@ -10677,7 +10571,7 @@
             <a:r>
               <a:rPr sz="950" b="0">
                 <a:solidFill>
-                  <a:srgbClr val="7FA4BA"/>
+                  <a:srgbClr val="8C96A1"/>
                 </a:solidFill>
                 <a:latin typeface="Consolas"/>
                 <a:ea typeface="Microsoft YaHei"/>
@@ -10690,7 +10584,7 @@
       </p:sp>
       <p:sp>
         <p:nvSpPr>
-          <p:cNvPr id="69" name="TextBox 68"/>
+          <p:cNvPr id="67" name="TextBox 66"/>
           <p:cNvSpPr txBox="1"/>
           <p:nvPr/>
         </p:nvSpPr>
@@ -10724,7 +10618,7 @@
             <a:r>
               <a:rPr sz="950" b="0">
                 <a:solidFill>
-                  <a:srgbClr val="7FA4BA"/>
+                  <a:srgbClr val="8C96A1"/>
                 </a:solidFill>
                 <a:latin typeface="Consolas"/>
                 <a:ea typeface="Microsoft YaHei"/>
@@ -10737,7 +10631,7 @@
       </p:sp>
       <p:sp>
         <p:nvSpPr>
-          <p:cNvPr id="70" name="TextBox 69"/>
+          <p:cNvPr id="68" name="TextBox 67"/>
           <p:cNvSpPr txBox="1"/>
           <p:nvPr/>
         </p:nvSpPr>
@@ -10771,7 +10665,7 @@
             <a:r>
               <a:rPr sz="950" b="0">
                 <a:solidFill>
-                  <a:srgbClr val="7FA4BA"/>
+                  <a:srgbClr val="8C96A1"/>
                 </a:solidFill>
                 <a:latin typeface="Consolas"/>
                 <a:ea typeface="Microsoft YaHei"/>
@@ -10784,7 +10678,7 @@
       </p:sp>
       <p:sp>
         <p:nvSpPr>
-          <p:cNvPr id="71" name="TextBox 70"/>
+          <p:cNvPr id="69" name="TextBox 68"/>
           <p:cNvSpPr txBox="1"/>
           <p:nvPr/>
         </p:nvSpPr>
@@ -10818,7 +10712,7 @@
             <a:r>
               <a:rPr sz="950" b="0">
                 <a:solidFill>
-                  <a:srgbClr val="7FA4BA"/>
+                  <a:srgbClr val="8C96A1"/>
                 </a:solidFill>
                 <a:latin typeface="Consolas"/>
                 <a:ea typeface="Microsoft YaHei"/>
@@ -10831,7 +10725,7 @@
       </p:sp>
       <p:sp>
         <p:nvSpPr>
-          <p:cNvPr id="72" name="Rectangle 71"/>
+          <p:cNvPr id="70" name="Rectangle 69"/>
           <p:cNvSpPr/>
           <p:nvPr/>
         </p:nvSpPr>
@@ -10844,7 +10738,7 @@
             <a:avLst/>
           </a:prstGeom>
           <a:solidFill>
-            <a:srgbClr val="C9E1FC"/>
+            <a:srgbClr val="F8EADF"/>
           </a:solidFill>
           <a:ln>
             <a:noFill/>
@@ -10860,7 +10754,7 @@
       </p:sp>
       <p:sp>
         <p:nvSpPr>
-          <p:cNvPr id="73" name="TextBox 72"/>
+          <p:cNvPr id="71" name="TextBox 70"/>
           <p:cNvSpPr txBox="1"/>
           <p:nvPr/>
         </p:nvSpPr>
@@ -10894,7 +10788,7 @@
             <a:r>
               <a:rPr sz="950" b="0">
                 <a:solidFill>
-                  <a:srgbClr val="0A2B45"/>
+                  <a:srgbClr val="16202A"/>
                 </a:solidFill>
                 <a:latin typeface="Microsoft YaHei"/>
                 <a:ea typeface="Microsoft YaHei"/>
@@ -10907,7 +10801,7 @@
       </p:sp>
       <p:sp>
         <p:nvSpPr>
-          <p:cNvPr id="74" name="TextBox 73"/>
+          <p:cNvPr id="72" name="TextBox 71"/>
           <p:cNvSpPr txBox="1"/>
           <p:nvPr/>
         </p:nvSpPr>
@@ -10941,7 +10835,7 @@
             <a:r>
               <a:rPr sz="950" b="0">
                 <a:solidFill>
-                  <a:srgbClr val="7FA4BA"/>
+                  <a:srgbClr val="8C96A1"/>
                 </a:solidFill>
                 <a:latin typeface="Consolas"/>
                 <a:ea typeface="Microsoft YaHei"/>
@@ -10954,7 +10848,7 @@
       </p:sp>
       <p:sp>
         <p:nvSpPr>
-          <p:cNvPr id="75" name="TextBox 74"/>
+          <p:cNvPr id="73" name="TextBox 72"/>
           <p:cNvSpPr txBox="1"/>
           <p:nvPr/>
         </p:nvSpPr>
@@ -10988,7 +10882,7 @@
             <a:r>
               <a:rPr sz="950" b="0">
                 <a:solidFill>
-                  <a:srgbClr val="7FA4BA"/>
+                  <a:srgbClr val="8C96A1"/>
                 </a:solidFill>
                 <a:latin typeface="Consolas"/>
                 <a:ea typeface="Microsoft YaHei"/>
@@ -11001,7 +10895,7 @@
       </p:sp>
       <p:sp>
         <p:nvSpPr>
-          <p:cNvPr id="76" name="TextBox 75"/>
+          <p:cNvPr id="74" name="TextBox 73"/>
           <p:cNvSpPr txBox="1"/>
           <p:nvPr/>
         </p:nvSpPr>
@@ -11035,7 +10929,7 @@
             <a:r>
               <a:rPr sz="950" b="0">
                 <a:solidFill>
-                  <a:srgbClr val="7FA4BA"/>
+                  <a:srgbClr val="8C96A1"/>
                 </a:solidFill>
                 <a:latin typeface="Consolas"/>
                 <a:ea typeface="Microsoft YaHei"/>
@@ -11048,7 +10942,7 @@
       </p:sp>
       <p:sp>
         <p:nvSpPr>
-          <p:cNvPr id="77" name="TextBox 76"/>
+          <p:cNvPr id="75" name="TextBox 74"/>
           <p:cNvSpPr txBox="1"/>
           <p:nvPr/>
         </p:nvSpPr>
@@ -11082,7 +10976,7 @@
             <a:r>
               <a:rPr sz="950" b="0">
                 <a:solidFill>
-                  <a:srgbClr val="7FA4BA"/>
+                  <a:srgbClr val="8C96A1"/>
                 </a:solidFill>
                 <a:latin typeface="Consolas"/>
                 <a:ea typeface="Microsoft YaHei"/>
@@ -11095,7 +10989,7 @@
       </p:sp>
       <p:sp>
         <p:nvSpPr>
-          <p:cNvPr id="78" name="TextBox 77"/>
+          <p:cNvPr id="76" name="TextBox 75"/>
           <p:cNvSpPr txBox="1"/>
           <p:nvPr/>
         </p:nvSpPr>
@@ -11129,7 +11023,7 @@
             <a:r>
               <a:rPr sz="950" b="0">
                 <a:solidFill>
-                  <a:srgbClr val="1B4D69"/>
+                  <a:srgbClr val="35424F"/>
                 </a:solidFill>
                 <a:latin typeface="Microsoft YaHei"/>
                 <a:ea typeface="Microsoft YaHei"/>
@@ -11142,7 +11036,7 @@
       </p:sp>
       <p:sp>
         <p:nvSpPr>
-          <p:cNvPr id="79" name="TextBox 78"/>
+          <p:cNvPr id="77" name="TextBox 76"/>
           <p:cNvSpPr txBox="1"/>
           <p:nvPr/>
         </p:nvSpPr>
@@ -11176,7 +11070,7 @@
             <a:r>
               <a:rPr sz="950" b="0">
                 <a:solidFill>
-                  <a:srgbClr val="7FA4BA"/>
+                  <a:srgbClr val="8C96A1"/>
                 </a:solidFill>
                 <a:latin typeface="Consolas"/>
                 <a:ea typeface="Microsoft YaHei"/>
@@ -11189,7 +11083,7 @@
       </p:sp>
       <p:sp>
         <p:nvSpPr>
-          <p:cNvPr id="80" name="TextBox 79"/>
+          <p:cNvPr id="78" name="TextBox 77"/>
           <p:cNvSpPr txBox="1"/>
           <p:nvPr/>
         </p:nvSpPr>
@@ -11223,7 +11117,7 @@
             <a:r>
               <a:rPr sz="950" b="0">
                 <a:solidFill>
-                  <a:srgbClr val="7FA4BA"/>
+                  <a:srgbClr val="8C96A1"/>
                 </a:solidFill>
                 <a:latin typeface="Consolas"/>
                 <a:ea typeface="Microsoft YaHei"/>
@@ -11236,7 +11130,7 @@
       </p:sp>
       <p:sp>
         <p:nvSpPr>
-          <p:cNvPr id="81" name="TextBox 80"/>
+          <p:cNvPr id="79" name="TextBox 78"/>
           <p:cNvSpPr txBox="1"/>
           <p:nvPr/>
         </p:nvSpPr>
@@ -11270,7 +11164,7 @@
             <a:r>
               <a:rPr sz="950" b="0">
                 <a:solidFill>
-                  <a:srgbClr val="7FA4BA"/>
+                  <a:srgbClr val="8C96A1"/>
                 </a:solidFill>
                 <a:latin typeface="Consolas"/>
                 <a:ea typeface="Microsoft YaHei"/>
@@ -11283,7 +11177,7 @@
       </p:sp>
       <p:sp>
         <p:nvSpPr>
-          <p:cNvPr id="82" name="TextBox 81"/>
+          <p:cNvPr id="80" name="TextBox 79"/>
           <p:cNvSpPr txBox="1"/>
           <p:nvPr/>
         </p:nvSpPr>
@@ -11317,7 +11211,7 @@
             <a:r>
               <a:rPr sz="950" b="0">
                 <a:solidFill>
-                  <a:srgbClr val="7FA4BA"/>
+                  <a:srgbClr val="8C96A1"/>
                 </a:solidFill>
                 <a:latin typeface="Consolas"/>
                 <a:ea typeface="Microsoft YaHei"/>
@@ -11330,7 +11224,7 @@
       </p:sp>
       <p:sp>
         <p:nvSpPr>
-          <p:cNvPr id="83" name="TextBox 82"/>
+          <p:cNvPr id="81" name="TextBox 80"/>
           <p:cNvSpPr txBox="1"/>
           <p:nvPr/>
         </p:nvSpPr>
@@ -11364,7 +11258,7 @@
             <a:r>
               <a:rPr sz="950" b="0">
                 <a:solidFill>
-                  <a:srgbClr val="1B4D69"/>
+                  <a:srgbClr val="35424F"/>
                 </a:solidFill>
                 <a:latin typeface="Microsoft YaHei"/>
                 <a:ea typeface="Microsoft YaHei"/>
@@ -11377,7 +11271,7 @@
       </p:sp>
       <p:sp>
         <p:nvSpPr>
-          <p:cNvPr id="84" name="TextBox 83"/>
+          <p:cNvPr id="82" name="TextBox 81"/>
           <p:cNvSpPr txBox="1"/>
           <p:nvPr/>
         </p:nvSpPr>
@@ -11411,7 +11305,7 @@
             <a:r>
               <a:rPr sz="950" b="0">
                 <a:solidFill>
-                  <a:srgbClr val="7FA4BA"/>
+                  <a:srgbClr val="8C96A1"/>
                 </a:solidFill>
                 <a:latin typeface="Consolas"/>
                 <a:ea typeface="Microsoft YaHei"/>
@@ -11424,7 +11318,7 @@
       </p:sp>
       <p:sp>
         <p:nvSpPr>
-          <p:cNvPr id="85" name="TextBox 84"/>
+          <p:cNvPr id="83" name="TextBox 82"/>
           <p:cNvSpPr txBox="1"/>
           <p:nvPr/>
         </p:nvSpPr>
@@ -11458,7 +11352,7 @@
             <a:r>
               <a:rPr sz="950" b="0">
                 <a:solidFill>
-                  <a:srgbClr val="7FA4BA"/>
+                  <a:srgbClr val="8C96A1"/>
                 </a:solidFill>
                 <a:latin typeface="Consolas"/>
                 <a:ea typeface="Microsoft YaHei"/>
@@ -11471,7 +11365,7 @@
       </p:sp>
       <p:sp>
         <p:nvSpPr>
-          <p:cNvPr id="86" name="TextBox 85"/>
+          <p:cNvPr id="84" name="TextBox 83"/>
           <p:cNvSpPr txBox="1"/>
           <p:nvPr/>
         </p:nvSpPr>
@@ -11505,7 +11399,7 @@
             <a:r>
               <a:rPr sz="950" b="0">
                 <a:solidFill>
-                  <a:srgbClr val="7FA4BA"/>
+                  <a:srgbClr val="8C96A1"/>
                 </a:solidFill>
                 <a:latin typeface="Consolas"/>
                 <a:ea typeface="Microsoft YaHei"/>
@@ -11518,7 +11412,7 @@
       </p:sp>
       <p:sp>
         <p:nvSpPr>
-          <p:cNvPr id="87" name="TextBox 86"/>
+          <p:cNvPr id="85" name="TextBox 84"/>
           <p:cNvSpPr txBox="1"/>
           <p:nvPr/>
         </p:nvSpPr>
@@ -11552,7 +11446,7 @@
             <a:r>
               <a:rPr sz="950" b="0">
                 <a:solidFill>
-                  <a:srgbClr val="7FA4BA"/>
+                  <a:srgbClr val="8C96A1"/>
                 </a:solidFill>
                 <a:latin typeface="Consolas"/>
                 <a:ea typeface="Microsoft YaHei"/>
@@ -11565,7 +11459,7 @@
       </p:sp>
       <p:sp>
         <p:nvSpPr>
-          <p:cNvPr id="88" name="TextBox 87"/>
+          <p:cNvPr id="86" name="TextBox 85"/>
           <p:cNvSpPr txBox="1"/>
           <p:nvPr/>
         </p:nvSpPr>
@@ -11599,7 +11493,7 @@
             <a:r>
               <a:rPr sz="950" b="0">
                 <a:solidFill>
-                  <a:srgbClr val="1B4D69"/>
+                  <a:srgbClr val="35424F"/>
                 </a:solidFill>
                 <a:latin typeface="Microsoft YaHei"/>
                 <a:ea typeface="Microsoft YaHei"/>
@@ -11612,7 +11506,7 @@
       </p:sp>
       <p:sp>
         <p:nvSpPr>
-          <p:cNvPr id="89" name="TextBox 88"/>
+          <p:cNvPr id="87" name="TextBox 86"/>
           <p:cNvSpPr txBox="1"/>
           <p:nvPr/>
         </p:nvSpPr>
@@ -11646,7 +11540,7 @@
             <a:r>
               <a:rPr sz="950" b="0">
                 <a:solidFill>
-                  <a:srgbClr val="7FA4BA"/>
+                  <a:srgbClr val="8C96A1"/>
                 </a:solidFill>
                 <a:latin typeface="Consolas"/>
                 <a:ea typeface="Microsoft YaHei"/>
@@ -11659,7 +11553,7 @@
       </p:sp>
       <p:sp>
         <p:nvSpPr>
-          <p:cNvPr id="90" name="TextBox 89"/>
+          <p:cNvPr id="88" name="TextBox 87"/>
           <p:cNvSpPr txBox="1"/>
           <p:nvPr/>
         </p:nvSpPr>
@@ -11693,7 +11587,7 @@
             <a:r>
               <a:rPr sz="950" b="0">
                 <a:solidFill>
-                  <a:srgbClr val="7FA4BA"/>
+                  <a:srgbClr val="8C96A1"/>
                 </a:solidFill>
                 <a:latin typeface="Consolas"/>
                 <a:ea typeface="Microsoft YaHei"/>
@@ -11706,7 +11600,7 @@
       </p:sp>
       <p:sp>
         <p:nvSpPr>
-          <p:cNvPr id="91" name="TextBox 90"/>
+          <p:cNvPr id="89" name="TextBox 88"/>
           <p:cNvSpPr txBox="1"/>
           <p:nvPr/>
         </p:nvSpPr>
@@ -11740,7 +11634,7 @@
             <a:r>
               <a:rPr sz="950" b="0">
                 <a:solidFill>
-                  <a:srgbClr val="7FA4BA"/>
+                  <a:srgbClr val="8C96A1"/>
                 </a:solidFill>
                 <a:latin typeface="Consolas"/>
                 <a:ea typeface="Microsoft YaHei"/>
@@ -11753,7 +11647,7 @@
       </p:sp>
       <p:sp>
         <p:nvSpPr>
-          <p:cNvPr id="92" name="TextBox 91"/>
+          <p:cNvPr id="90" name="TextBox 89"/>
           <p:cNvSpPr txBox="1"/>
           <p:nvPr/>
         </p:nvSpPr>
@@ -11787,7 +11681,7 @@
             <a:r>
               <a:rPr sz="950" b="0">
                 <a:solidFill>
-                  <a:srgbClr val="7FA4BA"/>
+                  <a:srgbClr val="8C96A1"/>
                 </a:solidFill>
                 <a:latin typeface="Consolas"/>
                 <a:ea typeface="Microsoft YaHei"/>
@@ -11800,7 +11694,7 @@
       </p:sp>
       <p:sp>
         <p:nvSpPr>
-          <p:cNvPr id="93" name="TextBox 92"/>
+          <p:cNvPr id="91" name="TextBox 90"/>
           <p:cNvSpPr txBox="1"/>
           <p:nvPr/>
         </p:nvSpPr>
@@ -11834,7 +11728,7 @@
             <a:r>
               <a:rPr sz="950" b="0">
                 <a:solidFill>
-                  <a:srgbClr val="40708B"/>
+                  <a:srgbClr val="66727F"/>
                 </a:solidFill>
                 <a:latin typeface="Microsoft YaHei"/>
                 <a:ea typeface="Microsoft YaHei"/>
@@ -11858,7 +11752,7 @@
             <a:r>
               <a:rPr sz="950" b="0">
                 <a:solidFill>
-                  <a:srgbClr val="40708B"/>
+                  <a:srgbClr val="66727F"/>
                 </a:solidFill>
                 <a:latin typeface="Microsoft YaHei"/>
                 <a:ea typeface="Microsoft YaHei"/>
@@ -11882,7 +11776,7 @@
             <a:r>
               <a:rPr sz="950" b="0">
                 <a:solidFill>
-                  <a:srgbClr val="40708B"/>
+                  <a:srgbClr val="66727F"/>
                 </a:solidFill>
                 <a:latin typeface="Microsoft YaHei"/>
                 <a:ea typeface="Microsoft YaHei"/>
@@ -11895,7 +11789,7 @@
       </p:sp>
       <p:sp>
         <p:nvSpPr>
-          <p:cNvPr id="94" name="Rectangle 93"/>
+          <p:cNvPr id="92" name="Rectangle 91"/>
           <p:cNvSpPr/>
           <p:nvPr/>
         </p:nvSpPr>
@@ -11908,7 +11802,7 @@
             <a:avLst/>
           </a:prstGeom>
           <a:solidFill>
-            <a:srgbClr val="C9E1FC"/>
+            <a:srgbClr val="F8EADF"/>
           </a:solidFill>
           <a:ln>
             <a:noFill/>
@@ -11924,7 +11818,7 @@
       </p:sp>
       <p:sp>
         <p:nvSpPr>
-          <p:cNvPr id="95" name="Rectangle 94"/>
+          <p:cNvPr id="93" name="Rectangle 92"/>
           <p:cNvSpPr/>
           <p:nvPr/>
         </p:nvSpPr>
@@ -11937,7 +11831,7 @@
             <a:avLst/>
           </a:prstGeom>
           <a:solidFill>
-            <a:srgbClr val="0F62CE"/>
+            <a:srgbClr val="C0612C"/>
           </a:solidFill>
           <a:ln>
             <a:noFill/>
@@ -11953,7 +11847,7 @@
       </p:sp>
       <p:sp>
         <p:nvSpPr>
-          <p:cNvPr id="96" name="TextBox 95"/>
+          <p:cNvPr id="94" name="TextBox 93"/>
           <p:cNvSpPr txBox="1"/>
           <p:nvPr/>
         </p:nvSpPr>
@@ -11987,7 +11881,7 @@
             <a:r>
               <a:rPr sz="1200" b="1">
                 <a:solidFill>
-                  <a:srgbClr val="0F62CE"/>
+                  <a:srgbClr val="C0612C"/>
                 </a:solidFill>
                 <a:latin typeface="Consolas"/>
                 <a:ea typeface="Microsoft YaHei"/>
@@ -11998,7 +11892,7 @@
             <a:r>
               <a:rPr sz="1600" b="1">
                 <a:solidFill>
-                  <a:srgbClr val="0A2B45"/>
+                  <a:srgbClr val="16202A"/>
                 </a:solidFill>
                 <a:latin typeface="Microsoft YaHei"/>
                 <a:ea typeface="Microsoft YaHei"/>
@@ -12011,7 +11905,7 @@
       </p:sp>
       <p:sp>
         <p:nvSpPr>
-          <p:cNvPr id="97" name="TextBox 96"/>
+          <p:cNvPr id="95" name="TextBox 94"/>
           <p:cNvSpPr txBox="1"/>
           <p:nvPr/>
         </p:nvSpPr>
@@ -12045,7 +11939,7 @@
             <a:r>
               <a:rPr sz="1000" b="1">
                 <a:solidFill>
-                  <a:srgbClr val="D4147A"/>
+                  <a:srgbClr val="C0612C"/>
                 </a:solidFill>
                 <a:latin typeface="Microsoft YaHei"/>
                 <a:ea typeface="Microsoft YaHei"/>
@@ -12056,7 +11950,7 @@
             <a:r>
               <a:rPr sz="1000" b="0">
                 <a:solidFill>
-                  <a:srgbClr val="40708B"/>
+                  <a:srgbClr val="66727F"/>
                 </a:solidFill>
                 <a:latin typeface="Microsoft YaHei"/>
                 <a:ea typeface="Microsoft YaHei"/>

--- a/slides/model_layer_mock.pptx
+++ b/slides/model_layer_mock.pptx
@@ -3178,7 +3178,7 @@
                 <a:ea typeface="Microsoft YaHei"/>
                 <a:cs typeface="Microsoft YaHei"/>
               </a:rPr>
-              <a:t>__ 模型：__ 个候选，__ 个过三道门，交付收益 +__%</a:t>
+              <a:t>30B-A3B 单卡：10 个候选，5 个过三道门，峰值吞吐 +37%</a:t>
             </a:r>
           </a:p>
         </p:txBody>
@@ -3225,7 +3225,7 @@
                 <a:ea typeface="Microsoft YaHei"/>
                 <a:cs typeface="Microsoft YaHei"/>
               </a:rPr>
-              <a:t>候选都从基线分叉、收益不叠加——交付的是 D 阶段独立复验后最好的那一个</a:t>
+              <a:t>判定全部来自 M100 真机——数值不对、更慢的当场挡掉，占比太小的不接线</a:t>
             </a:r>
           </a:p>
         </p:txBody>
@@ -3312,62 +3312,29 @@
                 <a:ea typeface="Microsoft YaHei"/>
                 <a:cs typeface="Microsoft YaHei"/>
               </a:rPr>
-              <a:t>__ · __ 精度 · TP__ · 并发 __ · 输入 __ / 输出 __</a:t>
+              <a:t>Qwen3-VL-30B-A3B-Instruct-channel-fp8</a:t>
+            </a:r>
+            <a:r>
+              <a:rPr sz="950" b="0">
+                <a:solidFill>
+                  <a:srgbClr val="35424F"/>
+                </a:solidFill>
+                <a:latin typeface="Microsoft YaHei"/>
+                <a:ea typeface="Microsoft YaHei"/>
+                <a:cs typeface="Microsoft YaHei"/>
+              </a:rPr>
+              <a:t>　128 专家 / top-8 · 48 层 · M100 单卡 TP1 · qsx8_lever2 env · 1K/1K · CG-on + overlap-on</a:t>
             </a:r>
             <a:r>
               <a:rPr sz="1000" b="0">
                 <a:solidFill>
-                  <a:srgbClr val="35424F"/>
+                  <a:srgbClr val="66727F"/>
                 </a:solidFill>
                 <a:latin typeface="Microsoft YaHei"/>
                 <a:ea typeface="Microsoft YaHei"/>
                 <a:cs typeface="Microsoft YaHei"/>
               </a:rPr>
-              <a:t>　主指标 </a:t>
-            </a:r>
-            <a:r>
-              <a:rPr sz="950" b="1">
-                <a:solidFill>
-                  <a:srgbClr val="16202A"/>
-                </a:solidFill>
-                <a:latin typeface="Consolas"/>
-                <a:ea typeface="Microsoft YaHei"/>
-                <a:cs typeface="Microsoft YaHei"/>
-              </a:rPr>
-              <a:t>__</a:t>
-            </a:r>
-            <a:r>
-              <a:rPr sz="1000" b="0">
-                <a:solidFill>
-                  <a:srgbClr val="35424F"/>
-                </a:solidFill>
-                <a:latin typeface="Microsoft YaHei"/>
-                <a:ea typeface="Microsoft YaHei"/>
-                <a:cs typeface="Microsoft YaHei"/>
-              </a:rPr>
-              <a:t>　基线 </a:t>
-            </a:r>
-            <a:r>
-              <a:rPr sz="950" b="1">
-                <a:solidFill>
-                  <a:srgbClr val="16202A"/>
-                </a:solidFill>
-                <a:latin typeface="Consolas"/>
-                <a:ea typeface="Microsoft YaHei"/>
-                <a:cs typeface="Microsoft YaHei"/>
-              </a:rPr>
-              <a:t>A 阶段 __ → D 阶段重测 __</a:t>
-            </a:r>
-            <a:r>
-              <a:rPr sz="1000" b="0">
-                <a:solidFill>
-                  <a:srgbClr val="66727F"/>
-                </a:solidFill>
-                <a:latin typeface="Microsoft YaHei"/>
-                <a:ea typeface="Microsoft YaHei"/>
-                <a:cs typeface="Microsoft YaHei"/>
-              </a:rPr>
-              <a:t>　两者之差即设备漂移</a:t>
+              <a:t>　主指标 持续输出 tok/s</a:t>
             </a:r>
           </a:p>
         </p:txBody>
@@ -3381,7 +3348,7 @@
         <p:spPr>
           <a:xfrm>
             <a:off x="548640" y="1975104"/>
-            <a:ext cx="6537960" cy="3017520"/>
+            <a:ext cx="2743200" cy="3017520"/>
           </a:xfrm>
           <a:prstGeom prst="rect">
             <a:avLst/>
@@ -3409,8 +3376,8 @@
         </p:nvSpPr>
         <p:spPr>
           <a:xfrm>
-            <a:off x="749808" y="2029968"/>
-            <a:ext cx="2606040" cy="237744"/>
+            <a:off x="749808" y="2048256"/>
+            <a:ext cx="2340864" cy="256032"/>
           </a:xfrm>
           <a:prstGeom prst="rect">
             <a:avLst/>
@@ -3435,7 +3402,7 @@
               </a:spcAft>
             </a:pPr>
             <a:r>
-              <a:rPr sz="1000" b="1">
+              <a:rPr sz="1250" b="1">
                 <a:solidFill>
                   <a:srgbClr val="16202A"/>
                 </a:solidFill>
@@ -3443,54 +3410,346 @@
                 <a:ea typeface="Microsoft YaHei"/>
                 <a:cs typeface="Microsoft YaHei"/>
               </a:rPr>
-              <a:t>收益</a:t>
+              <a:t>峰值吞吐</a:t>
             </a:r>
             <a:r>
               <a:rPr sz="1000" b="0">
                 <a:solidFill>
+                  <a:srgbClr val="66727F"/>
+                </a:solidFill>
+                <a:latin typeface="Microsoft YaHei"/>
+                <a:ea typeface="Microsoft YaHei"/>
+                <a:cs typeface="Microsoft YaHei"/>
+              </a:rPr>
+              <a:t>　持续输出 tok/s</a:t>
+            </a:r>
+          </a:p>
+        </p:txBody>
+      </p:sp>
+      <p:sp>
+        <p:nvSpPr>
+          <p:cNvPr id="9" name="TextBox 8"/>
+          <p:cNvSpPr txBox="1"/>
+          <p:nvPr/>
+        </p:nvSpPr>
+        <p:spPr>
+          <a:xfrm>
+            <a:off x="749808" y="2340864"/>
+            <a:ext cx="2340864" cy="475488"/>
+          </a:xfrm>
+          <a:prstGeom prst="rect">
+            <a:avLst/>
+          </a:prstGeom>
+          <a:noFill/>
+        </p:spPr>
+        <p:txBody>
+          <a:bodyPr wrap="square" anchor="ctr" lIns="0" tIns="0" rIns="0" bIns="0">
+            <a:noAutofit/>
+          </a:bodyPr>
+          <a:lstStyle/>
+          <a:p>
+            <a:pPr algn="l" latinLnBrk="0">
+              <a:lnSpc>
+                <a:spcPct val="100000"/>
+              </a:lnSpc>
+              <a:spcBef>
+                <a:spcPts val="0"/>
+              </a:spcBef>
+              <a:spcAft>
+                <a:spcPts val="0"/>
+              </a:spcAft>
+            </a:pPr>
+            <a:r>
+              <a:rPr sz="2800" b="1">
+                <a:solidFill>
+                  <a:srgbClr val="3F63A8"/>
+                </a:solidFill>
+                <a:latin typeface="Arial"/>
+                <a:ea typeface="Microsoft YaHei"/>
+                <a:cs typeface="Microsoft YaHei"/>
+              </a:rPr>
+              <a:t>+37%</a:t>
+            </a:r>
+          </a:p>
+        </p:txBody>
+      </p:sp>
+      <p:sp>
+        <p:nvSpPr>
+          <p:cNvPr id="10" name="Rectangle 9"/>
+          <p:cNvSpPr/>
+          <p:nvPr/>
+        </p:nvSpPr>
+        <p:spPr>
+          <a:xfrm>
+            <a:off x="1005840" y="3416165"/>
+            <a:ext cx="640080" cy="918090"/>
+          </a:xfrm>
+          <a:prstGeom prst="rect">
+            <a:avLst/>
+          </a:prstGeom>
+          <a:solidFill>
+            <a:srgbClr val="C5CCD4"/>
+          </a:solidFill>
+          <a:ln>
+            <a:noFill/>
+          </a:ln>
+        </p:spPr>
+        <p:txBody>
+          <a:bodyPr rtlCol="0" anchor="ctr"/>
+          <a:lstStyle/>
+          <a:p>
+            <a:pPr algn="ctr"/>
+          </a:p>
+        </p:txBody>
+      </p:sp>
+      <p:sp>
+        <p:nvSpPr>
+          <p:cNvPr id="11" name="TextBox 10"/>
+          <p:cNvSpPr txBox="1"/>
+          <p:nvPr/>
+        </p:nvSpPr>
+        <p:spPr>
+          <a:xfrm>
+            <a:off x="777240" y="3160133"/>
+            <a:ext cx="1097280" cy="219456"/>
+          </a:xfrm>
+          <a:prstGeom prst="rect">
+            <a:avLst/>
+          </a:prstGeom>
+          <a:noFill/>
+        </p:spPr>
+        <p:txBody>
+          <a:bodyPr wrap="square" anchor="ctr" lIns="0" tIns="0" rIns="0" bIns="0">
+            <a:noAutofit/>
+          </a:bodyPr>
+          <a:lstStyle/>
+          <a:p>
+            <a:pPr algn="ctr" latinLnBrk="0">
+              <a:lnSpc>
+                <a:spcPct val="100000"/>
+              </a:lnSpc>
+              <a:spcBef>
+                <a:spcPts val="0"/>
+              </a:spcBef>
+              <a:spcAft>
+                <a:spcPts val="0"/>
+              </a:spcAft>
+            </a:pPr>
+            <a:r>
+              <a:rPr sz="1150" b="1">
+                <a:solidFill>
+                  <a:srgbClr val="16202A"/>
+                </a:solidFill>
+                <a:latin typeface="Arial"/>
+                <a:ea typeface="Microsoft YaHei"/>
+                <a:cs typeface="Microsoft YaHei"/>
+              </a:rPr>
+              <a:t>1370</a:t>
+            </a:r>
+          </a:p>
+        </p:txBody>
+      </p:sp>
+      <p:sp>
+        <p:nvSpPr>
+          <p:cNvPr id="12" name="TextBox 11"/>
+          <p:cNvSpPr txBox="1"/>
+          <p:nvPr/>
+        </p:nvSpPr>
+        <p:spPr>
+          <a:xfrm>
+            <a:off x="777240" y="4398264"/>
+            <a:ext cx="1097280" cy="201168"/>
+          </a:xfrm>
+          <a:prstGeom prst="rect">
+            <a:avLst/>
+          </a:prstGeom>
+          <a:noFill/>
+        </p:spPr>
+        <p:txBody>
+          <a:bodyPr wrap="square" anchor="ctr" lIns="0" tIns="0" rIns="0" bIns="0">
+            <a:noAutofit/>
+          </a:bodyPr>
+          <a:lstStyle/>
+          <a:p>
+            <a:pPr algn="ctr" latinLnBrk="0">
+              <a:lnSpc>
+                <a:spcPct val="100000"/>
+              </a:lnSpc>
+              <a:spcBef>
+                <a:spcPts val="0"/>
+              </a:spcBef>
+              <a:spcAft>
+                <a:spcPts val="0"/>
+              </a:spcAft>
+            </a:pPr>
+            <a:r>
+              <a:rPr sz="950" b="0">
+                <a:solidFill>
                   <a:srgbClr val="35424F"/>
                 </a:solidFill>
                 <a:latin typeface="Microsoft YaHei"/>
                 <a:ea typeface="Microsoft YaHei"/>
                 <a:cs typeface="Microsoft YaHei"/>
               </a:rPr>
-              <a:t> = 候选 ÷ 基线 − 1　重复压测取中位</a:t>
+              <a:t>基线</a:t>
+            </a:r>
+          </a:p>
+        </p:txBody>
+      </p:sp>
+      <p:sp>
+        <p:nvSpPr>
+          <p:cNvPr id="13" name="Rectangle 12"/>
+          <p:cNvSpPr/>
+          <p:nvPr/>
+        </p:nvSpPr>
+        <p:spPr>
+          <a:xfrm>
+            <a:off x="2194560" y="3072384"/>
+            <a:ext cx="640080" cy="1261872"/>
+          </a:xfrm>
+          <a:prstGeom prst="rect">
+            <a:avLst/>
+          </a:prstGeom>
+          <a:solidFill>
+            <a:srgbClr val="3F63A8"/>
+          </a:solidFill>
+          <a:ln>
+            <a:noFill/>
+          </a:ln>
+        </p:spPr>
+        <p:txBody>
+          <a:bodyPr rtlCol="0" anchor="ctr"/>
+          <a:lstStyle/>
+          <a:p>
+            <a:pPr algn="ctr"/>
+          </a:p>
+        </p:txBody>
+      </p:sp>
+      <p:sp>
+        <p:nvSpPr>
+          <p:cNvPr id="14" name="TextBox 13"/>
+          <p:cNvSpPr txBox="1"/>
+          <p:nvPr/>
+        </p:nvSpPr>
+        <p:spPr>
+          <a:xfrm>
+            <a:off x="1965960" y="2816352"/>
+            <a:ext cx="1097280" cy="219456"/>
+          </a:xfrm>
+          <a:prstGeom prst="rect">
+            <a:avLst/>
+          </a:prstGeom>
+          <a:noFill/>
+        </p:spPr>
+        <p:txBody>
+          <a:bodyPr wrap="square" anchor="ctr" lIns="0" tIns="0" rIns="0" bIns="0">
+            <a:noAutofit/>
+          </a:bodyPr>
+          <a:lstStyle/>
+          <a:p>
+            <a:pPr algn="ctr" latinLnBrk="0">
+              <a:lnSpc>
+                <a:spcPct val="100000"/>
+              </a:lnSpc>
+              <a:spcBef>
+                <a:spcPts val="0"/>
+              </a:spcBef>
+              <a:spcAft>
+                <a:spcPts val="0"/>
+              </a:spcAft>
+            </a:pPr>
+            <a:r>
+              <a:rPr sz="1150" b="1">
+                <a:solidFill>
+                  <a:srgbClr val="16202A"/>
+                </a:solidFill>
+                <a:latin typeface="Arial"/>
+                <a:ea typeface="Microsoft YaHei"/>
+                <a:cs typeface="Microsoft YaHei"/>
+              </a:rPr>
+              <a:t>1883</a:t>
+            </a:r>
+          </a:p>
+        </p:txBody>
+      </p:sp>
+      <p:sp>
+        <p:nvSpPr>
+          <p:cNvPr id="15" name="TextBox 14"/>
+          <p:cNvSpPr txBox="1"/>
+          <p:nvPr/>
+        </p:nvSpPr>
+        <p:spPr>
+          <a:xfrm>
+            <a:off x="1965960" y="4398264"/>
+            <a:ext cx="1097280" cy="201168"/>
+          </a:xfrm>
+          <a:prstGeom prst="rect">
+            <a:avLst/>
+          </a:prstGeom>
+          <a:noFill/>
+        </p:spPr>
+        <p:txBody>
+          <a:bodyPr wrap="square" anchor="ctr" lIns="0" tIns="0" rIns="0" bIns="0">
+            <a:noAutofit/>
+          </a:bodyPr>
+          <a:lstStyle/>
+          <a:p>
+            <a:pPr algn="ctr" latinLnBrk="0">
+              <a:lnSpc>
+                <a:spcPct val="100000"/>
+              </a:lnSpc>
+              <a:spcBef>
+                <a:spcPts val="0"/>
+              </a:spcBef>
+              <a:spcAft>
+                <a:spcPts val="0"/>
+              </a:spcAft>
+            </a:pPr>
+            <a:r>
+              <a:rPr sz="950" b="0">
+                <a:solidFill>
+                  <a:srgbClr val="35424F"/>
+                </a:solidFill>
+                <a:latin typeface="Microsoft YaHei"/>
+                <a:ea typeface="Microsoft YaHei"/>
+                <a:cs typeface="Microsoft YaHei"/>
+              </a:rPr>
+              <a:t>交付</a:t>
             </a:r>
           </a:p>
         </p:txBody>
       </p:sp>
       <p:cxnSp>
         <p:nvCxnSpPr>
-          <p:cNvPr id="9" name="Connector 8"/>
+          <p:cNvPr id="16" name="Connector 15"/>
           <p:cNvCxnSpPr/>
           <p:nvPr/>
         </p:nvCxnSpPr>
         <p:spPr>
           <a:xfrm>
-            <a:off x="3447288" y="2148840"/>
-            <a:ext cx="237744" cy="0"/>
+            <a:off x="822959" y="4334256"/>
+            <a:ext cx="2194561" cy="0"/>
           </a:xfrm>
           <a:prstGeom prst="line">
             <a:avLst/>
           </a:prstGeom>
-          <a:ln w="15875">
+          <a:ln w="12700">
             <a:solidFill>
-              <a:srgbClr val="8C96A1"/>
+              <a:srgbClr val="C5CCD4"/>
             </a:solidFill>
-            <a:prstDash val="dash"/>
           </a:ln>
         </p:spPr>
       </p:cxnSp>
       <p:sp>
         <p:nvSpPr>
-          <p:cNvPr id="10" name="TextBox 9"/>
-          <p:cNvSpPr txBox="1"/>
-          <p:nvPr/>
-        </p:nvSpPr>
-        <p:spPr>
-          <a:xfrm>
-            <a:off x="3739896" y="2011680"/>
-            <a:ext cx="1078992" cy="274320"/>
+          <p:cNvPr id="17" name="TextBox 16"/>
+          <p:cNvSpPr txBox="1"/>
+          <p:nvPr/>
+        </p:nvSpPr>
+        <p:spPr>
+          <a:xfrm>
+            <a:off x="749808" y="4681728"/>
+            <a:ext cx="2340864" cy="219456"/>
           </a:xfrm>
           <a:prstGeom prst="rect">
             <a:avLst/>
@@ -3523,90 +3782,296 @@
                 <a:ea typeface="Microsoft YaHei"/>
                 <a:cs typeface="Microsoft YaHei"/>
               </a:rPr>
-              <a:t>性能门 +3%</a:t>
+              <a:t>基线峰值在 c128，1K/1K</a:t>
+            </a:r>
+          </a:p>
+        </p:txBody>
+      </p:sp>
+      <p:sp>
+        <p:nvSpPr>
+          <p:cNvPr id="18" name="Rectangle 17"/>
+          <p:cNvSpPr/>
+          <p:nvPr/>
+        </p:nvSpPr>
+        <p:spPr>
+          <a:xfrm>
+            <a:off x="3474720" y="1975104"/>
+            <a:ext cx="8168335" cy="3017520"/>
+          </a:xfrm>
+          <a:prstGeom prst="rect">
+            <a:avLst/>
+          </a:prstGeom>
+          <a:solidFill>
+            <a:srgbClr val="F6F7F9"/>
+          </a:solidFill>
+          <a:ln>
+            <a:noFill/>
+          </a:ln>
+        </p:spPr>
+        <p:txBody>
+          <a:bodyPr rtlCol="0" anchor="ctr"/>
+          <a:lstStyle/>
+          <a:p>
+            <a:pPr algn="ctr"/>
+          </a:p>
+        </p:txBody>
+      </p:sp>
+      <p:sp>
+        <p:nvSpPr>
+          <p:cNvPr id="19" name="TextBox 18"/>
+          <p:cNvSpPr txBox="1"/>
+          <p:nvPr/>
+        </p:nvSpPr>
+        <p:spPr>
+          <a:xfrm>
+            <a:off x="3675888" y="2048256"/>
+            <a:ext cx="7765999" cy="256032"/>
+          </a:xfrm>
+          <a:prstGeom prst="rect">
+            <a:avLst/>
+          </a:prstGeom>
+          <a:noFill/>
+        </p:spPr>
+        <p:txBody>
+          <a:bodyPr wrap="square" anchor="ctr" lIns="0" tIns="0" rIns="0" bIns="0">
+            <a:noAutofit/>
+          </a:bodyPr>
+          <a:lstStyle/>
+          <a:p>
+            <a:pPr algn="l" latinLnBrk="0">
+              <a:lnSpc>
+                <a:spcPct val="100000"/>
+              </a:lnSpc>
+              <a:spcBef>
+                <a:spcPts val="0"/>
+              </a:spcBef>
+              <a:spcAft>
+                <a:spcPts val="0"/>
+              </a:spcAft>
+            </a:pPr>
+            <a:r>
+              <a:rPr sz="1250" b="1">
+                <a:solidFill>
+                  <a:srgbClr val="16202A"/>
+                </a:solidFill>
+                <a:latin typeface="Microsoft YaHei"/>
+                <a:ea typeface="Microsoft YaHei"/>
+                <a:cs typeface="Microsoft YaHei"/>
+              </a:rPr>
+              <a:t>候选明细</a:t>
+            </a:r>
+            <a:r>
+              <a:rPr sz="1000" b="0">
+                <a:solidFill>
+                  <a:srgbClr val="66727F"/>
+                </a:solidFill>
+                <a:latin typeface="Microsoft YaHei"/>
+                <a:ea typeface="Microsoft YaHei"/>
+                <a:cs typeface="Microsoft YaHei"/>
+              </a:rPr>
+              <a:t>　五组，全部为单卡 TP1 口径</a:t>
+            </a:r>
+          </a:p>
+        </p:txBody>
+      </p:sp>
+      <p:sp>
+        <p:nvSpPr>
+          <p:cNvPr id="20" name="TextBox 19"/>
+          <p:cNvSpPr txBox="1"/>
+          <p:nvPr/>
+        </p:nvSpPr>
+        <p:spPr>
+          <a:xfrm>
+            <a:off x="3675888" y="2340864"/>
+            <a:ext cx="2651760" cy="219456"/>
+          </a:xfrm>
+          <a:prstGeom prst="rect">
+            <a:avLst/>
+          </a:prstGeom>
+          <a:noFill/>
+        </p:spPr>
+        <p:txBody>
+          <a:bodyPr wrap="square" anchor="ctr" lIns="0" tIns="0" rIns="0" bIns="0">
+            <a:noAutofit/>
+          </a:bodyPr>
+          <a:lstStyle/>
+          <a:p>
+            <a:pPr algn="l" latinLnBrk="0">
+              <a:lnSpc>
+                <a:spcPct val="100000"/>
+              </a:lnSpc>
+              <a:spcBef>
+                <a:spcPts val="0"/>
+              </a:spcBef>
+              <a:spcAft>
+                <a:spcPts val="0"/>
+              </a:spcAft>
+            </a:pPr>
+            <a:r>
+              <a:rPr sz="900" b="0">
+                <a:solidFill>
+                  <a:srgbClr val="8C96A1"/>
+                </a:solidFill>
+                <a:latin typeface="Microsoft YaHei"/>
+                <a:ea typeface="Microsoft YaHei"/>
+                <a:cs typeface="Microsoft YaHei"/>
+              </a:rPr>
+              <a:t>改动</a:t>
+            </a:r>
+          </a:p>
+        </p:txBody>
+      </p:sp>
+      <p:sp>
+        <p:nvSpPr>
+          <p:cNvPr id="21" name="TextBox 20"/>
+          <p:cNvSpPr txBox="1"/>
+          <p:nvPr/>
+        </p:nvSpPr>
+        <p:spPr>
+          <a:xfrm>
+            <a:off x="6419088" y="2340864"/>
+            <a:ext cx="2002536" cy="219456"/>
+          </a:xfrm>
+          <a:prstGeom prst="rect">
+            <a:avLst/>
+          </a:prstGeom>
+          <a:noFill/>
+        </p:spPr>
+        <p:txBody>
+          <a:bodyPr wrap="square" anchor="ctr" lIns="0" tIns="0" rIns="0" bIns="0">
+            <a:noAutofit/>
+          </a:bodyPr>
+          <a:lstStyle/>
+          <a:p>
+            <a:pPr algn="l" latinLnBrk="0">
+              <a:lnSpc>
+                <a:spcPct val="100000"/>
+              </a:lnSpc>
+              <a:spcBef>
+                <a:spcPts val="0"/>
+              </a:spcBef>
+              <a:spcAft>
+                <a:spcPts val="0"/>
+              </a:spcAft>
+            </a:pPr>
+            <a:r>
+              <a:rPr sz="900" b="0">
+                <a:solidFill>
+                  <a:srgbClr val="8C96A1"/>
+                </a:solidFill>
+                <a:latin typeface="Microsoft YaHei"/>
+                <a:ea typeface="Microsoft YaHei"/>
+                <a:cs typeface="Microsoft YaHei"/>
+              </a:rPr>
+              <a:t>C 筛选</a:t>
+            </a:r>
+          </a:p>
+        </p:txBody>
+      </p:sp>
+      <p:sp>
+        <p:nvSpPr>
+          <p:cNvPr id="22" name="TextBox 21"/>
+          <p:cNvSpPr txBox="1"/>
+          <p:nvPr/>
+        </p:nvSpPr>
+        <p:spPr>
+          <a:xfrm>
+            <a:off x="8513064" y="2340864"/>
+            <a:ext cx="1280160" cy="219456"/>
+          </a:xfrm>
+          <a:prstGeom prst="rect">
+            <a:avLst/>
+          </a:prstGeom>
+          <a:noFill/>
+        </p:spPr>
+        <p:txBody>
+          <a:bodyPr wrap="square" anchor="ctr" lIns="0" tIns="0" rIns="0" bIns="0">
+            <a:noAutofit/>
+          </a:bodyPr>
+          <a:lstStyle/>
+          <a:p>
+            <a:pPr algn="l" latinLnBrk="0">
+              <a:lnSpc>
+                <a:spcPct val="100000"/>
+              </a:lnSpc>
+              <a:spcBef>
+                <a:spcPts val="0"/>
+              </a:spcBef>
+              <a:spcAft>
+                <a:spcPts val="0"/>
+              </a:spcAft>
+            </a:pPr>
+            <a:r>
+              <a:rPr sz="900" b="0">
+                <a:solidFill>
+                  <a:srgbClr val="8C96A1"/>
+                </a:solidFill>
+                <a:latin typeface="Microsoft YaHei"/>
+                <a:ea typeface="Microsoft YaHei"/>
+                <a:cs typeface="Microsoft YaHei"/>
+              </a:rPr>
+              <a:t>D 复验</a:t>
+            </a:r>
+          </a:p>
+        </p:txBody>
+      </p:sp>
+      <p:sp>
+        <p:nvSpPr>
+          <p:cNvPr id="23" name="TextBox 22"/>
+          <p:cNvSpPr txBox="1"/>
+          <p:nvPr/>
+        </p:nvSpPr>
+        <p:spPr>
+          <a:xfrm>
+            <a:off x="9884664" y="2340864"/>
+            <a:ext cx="1554480" cy="219456"/>
+          </a:xfrm>
+          <a:prstGeom prst="rect">
+            <a:avLst/>
+          </a:prstGeom>
+          <a:noFill/>
+        </p:spPr>
+        <p:txBody>
+          <a:bodyPr wrap="square" anchor="ctr" lIns="0" tIns="0" rIns="0" bIns="0">
+            <a:noAutofit/>
+          </a:bodyPr>
+          <a:lstStyle/>
+          <a:p>
+            <a:pPr algn="l" latinLnBrk="0">
+              <a:lnSpc>
+                <a:spcPct val="100000"/>
+              </a:lnSpc>
+              <a:spcBef>
+                <a:spcPts val="0"/>
+              </a:spcBef>
+              <a:spcAft>
+                <a:spcPts val="0"/>
+              </a:spcAft>
+            </a:pPr>
+            <a:r>
+              <a:rPr sz="900" b="0">
+                <a:solidFill>
+                  <a:srgbClr val="8C96A1"/>
+                </a:solidFill>
+                <a:latin typeface="Microsoft YaHei"/>
+                <a:ea typeface="Microsoft YaHei"/>
+                <a:cs typeface="Microsoft YaHei"/>
+              </a:rPr>
+              <a:t>结论</a:t>
             </a:r>
           </a:p>
         </p:txBody>
       </p:sp>
       <p:cxnSp>
         <p:nvCxnSpPr>
-          <p:cNvPr id="11" name="Connector 10"/>
+          <p:cNvPr id="24" name="Connector 23"/>
           <p:cNvCxnSpPr/>
           <p:nvPr/>
         </p:nvCxnSpPr>
         <p:spPr>
           <a:xfrm>
-            <a:off x="4937759" y="2148840"/>
-            <a:ext cx="237744" cy="0"/>
-          </a:xfrm>
-          <a:prstGeom prst="line">
-            <a:avLst/>
-          </a:prstGeom>
-          <a:ln w="15875">
-            <a:solidFill>
-              <a:srgbClr val="C0612C"/>
-            </a:solidFill>
-            <a:prstDash val="dash"/>
-          </a:ln>
-        </p:spPr>
-      </p:cxnSp>
-      <p:sp>
-        <p:nvSpPr>
-          <p:cNvPr id="12" name="TextBox 11"/>
-          <p:cNvSpPr txBox="1"/>
-          <p:nvPr/>
-        </p:nvSpPr>
-        <p:spPr>
-          <a:xfrm>
-            <a:off x="5230368" y="2011680"/>
-            <a:ext cx="1353312" cy="274320"/>
-          </a:xfrm>
-          <a:prstGeom prst="rect">
-            <a:avLst/>
-          </a:prstGeom>
-          <a:noFill/>
-        </p:spPr>
-        <p:txBody>
-          <a:bodyPr wrap="square" anchor="ctr" lIns="0" tIns="0" rIns="0" bIns="0">
-            <a:noAutofit/>
-          </a:bodyPr>
-          <a:lstStyle/>
-          <a:p>
-            <a:pPr algn="l" latinLnBrk="0">
-              <a:lnSpc>
-                <a:spcPct val="100000"/>
-              </a:lnSpc>
-              <a:spcBef>
-                <a:spcPts val="0"/>
-              </a:spcBef>
-              <a:spcAft>
-                <a:spcPts val="0"/>
-              </a:spcAft>
-            </a:pPr>
-            <a:r>
-              <a:rPr sz="900" b="0">
-                <a:solidFill>
-                  <a:srgbClr val="66727F"/>
-                </a:solidFill>
-                <a:latin typeface="Microsoft YaHei"/>
-                <a:ea typeface="Microsoft YaHei"/>
-                <a:cs typeface="Microsoft YaHei"/>
-              </a:rPr>
-              <a:t>噪声极差 __%</a:t>
-            </a:r>
-          </a:p>
-        </p:txBody>
-      </p:sp>
-      <p:cxnSp>
-        <p:nvCxnSpPr>
-          <p:cNvPr id="13" name="Connector 12"/>
-          <p:cNvCxnSpPr/>
-          <p:nvPr/>
-        </p:nvCxnSpPr>
-        <p:spPr>
-          <a:xfrm>
-            <a:off x="1188720" y="4197577"/>
-            <a:ext cx="5349240" cy="0"/>
+            <a:off x="3675888" y="2578608"/>
+            <a:ext cx="7765999" cy="0"/>
           </a:xfrm>
           <a:prstGeom prst="line">
             <a:avLst/>
@@ -3620,1185 +4085,14 @@
       </p:cxnSp>
       <p:sp>
         <p:nvSpPr>
-          <p:cNvPr id="14" name="TextBox 13"/>
-          <p:cNvSpPr txBox="1"/>
-          <p:nvPr/>
-        </p:nvSpPr>
-        <p:spPr>
-          <a:xfrm>
-            <a:off x="621792" y="4096993"/>
-            <a:ext cx="457200" cy="201168"/>
-          </a:xfrm>
-          <a:prstGeom prst="rect">
-            <a:avLst/>
-          </a:prstGeom>
-          <a:noFill/>
-        </p:spPr>
-        <p:txBody>
-          <a:bodyPr wrap="square" anchor="ctr" lIns="0" tIns="0" rIns="0" bIns="0">
-            <a:noAutofit/>
-          </a:bodyPr>
-          <a:lstStyle/>
-          <a:p>
-            <a:pPr algn="r" latinLnBrk="0">
-              <a:lnSpc>
-                <a:spcPct val="100000"/>
-              </a:lnSpc>
-              <a:spcBef>
-                <a:spcPts val="0"/>
-              </a:spcBef>
-              <a:spcAft>
-                <a:spcPts val="0"/>
-              </a:spcAft>
-            </a:pPr>
-            <a:r>
-              <a:rPr sz="900" b="0">
-                <a:solidFill>
-                  <a:srgbClr val="8C96A1"/>
-                </a:solidFill>
-                <a:latin typeface="Consolas"/>
-                <a:ea typeface="Microsoft YaHei"/>
-                <a:cs typeface="Microsoft YaHei"/>
-              </a:rPr>
-              <a:t>__</a:t>
-            </a:r>
-          </a:p>
-        </p:txBody>
-      </p:sp>
-      <p:cxnSp>
-        <p:nvCxnSpPr>
-          <p:cNvPr id="15" name="Connector 14"/>
-          <p:cNvCxnSpPr/>
-          <p:nvPr/>
-        </p:nvCxnSpPr>
-        <p:spPr>
-          <a:xfrm>
-            <a:off x="1188720" y="3797166"/>
-            <a:ext cx="5349240" cy="0"/>
-          </a:xfrm>
-          <a:prstGeom prst="line">
-            <a:avLst/>
-          </a:prstGeom>
-          <a:ln w="12700">
-            <a:solidFill>
-              <a:srgbClr val="8C96A1"/>
-            </a:solidFill>
-          </a:ln>
-        </p:spPr>
-      </p:cxnSp>
-      <p:sp>
-        <p:nvSpPr>
-          <p:cNvPr id="16" name="TextBox 15"/>
-          <p:cNvSpPr txBox="1"/>
-          <p:nvPr/>
-        </p:nvSpPr>
-        <p:spPr>
-          <a:xfrm>
-            <a:off x="621792" y="3696582"/>
-            <a:ext cx="457200" cy="201168"/>
-          </a:xfrm>
-          <a:prstGeom prst="rect">
-            <a:avLst/>
-          </a:prstGeom>
-          <a:noFill/>
-        </p:spPr>
-        <p:txBody>
-          <a:bodyPr wrap="square" anchor="ctr" lIns="0" tIns="0" rIns="0" bIns="0">
-            <a:noAutofit/>
-          </a:bodyPr>
-          <a:lstStyle/>
-          <a:p>
-            <a:pPr algn="r" latinLnBrk="0">
-              <a:lnSpc>
-                <a:spcPct val="100000"/>
-              </a:lnSpc>
-              <a:spcBef>
-                <a:spcPts val="0"/>
-              </a:spcBef>
-              <a:spcAft>
-                <a:spcPts val="0"/>
-              </a:spcAft>
-            </a:pPr>
-            <a:r>
-              <a:rPr sz="900" b="0">
-                <a:solidFill>
-                  <a:srgbClr val="66727F"/>
-                </a:solidFill>
-                <a:latin typeface="Microsoft YaHei"/>
-                <a:ea typeface="Microsoft YaHei"/>
-                <a:cs typeface="Microsoft YaHei"/>
-              </a:rPr>
-              <a:t>基线</a:t>
-            </a:r>
-          </a:p>
-        </p:txBody>
-      </p:sp>
-      <p:cxnSp>
-        <p:nvCxnSpPr>
-          <p:cNvPr id="17" name="Connector 16"/>
-          <p:cNvCxnSpPr/>
-          <p:nvPr/>
-        </p:nvCxnSpPr>
-        <p:spPr>
-          <a:xfrm>
-            <a:off x="1188720" y="3396755"/>
-            <a:ext cx="5349240" cy="0"/>
-          </a:xfrm>
-          <a:prstGeom prst="line">
-            <a:avLst/>
-          </a:prstGeom>
-          <a:ln w="9525">
-            <a:solidFill>
-              <a:srgbClr val="DDE2E7"/>
-            </a:solidFill>
-          </a:ln>
-        </p:spPr>
-      </p:cxnSp>
-      <p:sp>
-        <p:nvSpPr>
-          <p:cNvPr id="18" name="TextBox 17"/>
-          <p:cNvSpPr txBox="1"/>
-          <p:nvPr/>
-        </p:nvSpPr>
-        <p:spPr>
-          <a:xfrm>
-            <a:off x="621792" y="3296171"/>
-            <a:ext cx="457200" cy="201168"/>
-          </a:xfrm>
-          <a:prstGeom prst="rect">
-            <a:avLst/>
-          </a:prstGeom>
-          <a:noFill/>
-        </p:spPr>
-        <p:txBody>
-          <a:bodyPr wrap="square" anchor="ctr" lIns="0" tIns="0" rIns="0" bIns="0">
-            <a:noAutofit/>
-          </a:bodyPr>
-          <a:lstStyle/>
-          <a:p>
-            <a:pPr algn="r" latinLnBrk="0">
-              <a:lnSpc>
-                <a:spcPct val="100000"/>
-              </a:lnSpc>
-              <a:spcBef>
-                <a:spcPts val="0"/>
-              </a:spcBef>
-              <a:spcAft>
-                <a:spcPts val="0"/>
-              </a:spcAft>
-            </a:pPr>
-            <a:r>
-              <a:rPr sz="900" b="0">
-                <a:solidFill>
-                  <a:srgbClr val="8C96A1"/>
-                </a:solidFill>
-                <a:latin typeface="Consolas"/>
-                <a:ea typeface="Microsoft YaHei"/>
-                <a:cs typeface="Microsoft YaHei"/>
-              </a:rPr>
-              <a:t>__</a:t>
-            </a:r>
-          </a:p>
-        </p:txBody>
-      </p:sp>
-      <p:cxnSp>
-        <p:nvCxnSpPr>
-          <p:cNvPr id="19" name="Connector 18"/>
-          <p:cNvCxnSpPr/>
-          <p:nvPr/>
-        </p:nvCxnSpPr>
-        <p:spPr>
-          <a:xfrm>
-            <a:off x="1188720" y="2996344"/>
-            <a:ext cx="5349240" cy="0"/>
-          </a:xfrm>
-          <a:prstGeom prst="line">
-            <a:avLst/>
-          </a:prstGeom>
-          <a:ln w="9525">
-            <a:solidFill>
-              <a:srgbClr val="DDE2E7"/>
-            </a:solidFill>
-          </a:ln>
-        </p:spPr>
-      </p:cxnSp>
-      <p:sp>
-        <p:nvSpPr>
-          <p:cNvPr id="20" name="TextBox 19"/>
-          <p:cNvSpPr txBox="1"/>
-          <p:nvPr/>
-        </p:nvSpPr>
-        <p:spPr>
-          <a:xfrm>
-            <a:off x="621792" y="2895760"/>
-            <a:ext cx="457200" cy="201168"/>
-          </a:xfrm>
-          <a:prstGeom prst="rect">
-            <a:avLst/>
-          </a:prstGeom>
-          <a:noFill/>
-        </p:spPr>
-        <p:txBody>
-          <a:bodyPr wrap="square" anchor="ctr" lIns="0" tIns="0" rIns="0" bIns="0">
-            <a:noAutofit/>
-          </a:bodyPr>
-          <a:lstStyle/>
-          <a:p>
-            <a:pPr algn="r" latinLnBrk="0">
-              <a:lnSpc>
-                <a:spcPct val="100000"/>
-              </a:lnSpc>
-              <a:spcBef>
-                <a:spcPts val="0"/>
-              </a:spcBef>
-              <a:spcAft>
-                <a:spcPts val="0"/>
-              </a:spcAft>
-            </a:pPr>
-            <a:r>
-              <a:rPr sz="900" b="0">
-                <a:solidFill>
-                  <a:srgbClr val="8C96A1"/>
-                </a:solidFill>
-                <a:latin typeface="Consolas"/>
-                <a:ea typeface="Microsoft YaHei"/>
-                <a:cs typeface="Microsoft YaHei"/>
-              </a:rPr>
-              <a:t>__</a:t>
-            </a:r>
-          </a:p>
-        </p:txBody>
-      </p:sp>
-      <p:cxnSp>
-        <p:nvCxnSpPr>
-          <p:cNvPr id="21" name="Connector 20"/>
-          <p:cNvCxnSpPr/>
-          <p:nvPr/>
-        </p:nvCxnSpPr>
-        <p:spPr>
-          <a:xfrm>
-            <a:off x="1188720" y="2595933"/>
-            <a:ext cx="5349240" cy="0"/>
-          </a:xfrm>
-          <a:prstGeom prst="line">
-            <a:avLst/>
-          </a:prstGeom>
-          <a:ln w="9525">
-            <a:solidFill>
-              <a:srgbClr val="DDE2E7"/>
-            </a:solidFill>
-          </a:ln>
-        </p:spPr>
-      </p:cxnSp>
-      <p:sp>
-        <p:nvSpPr>
-          <p:cNvPr id="22" name="TextBox 21"/>
-          <p:cNvSpPr txBox="1"/>
-          <p:nvPr/>
-        </p:nvSpPr>
-        <p:spPr>
-          <a:xfrm>
-            <a:off x="621792" y="2495349"/>
-            <a:ext cx="457200" cy="201168"/>
-          </a:xfrm>
-          <a:prstGeom prst="rect">
-            <a:avLst/>
-          </a:prstGeom>
-          <a:noFill/>
-        </p:spPr>
-        <p:txBody>
-          <a:bodyPr wrap="square" anchor="ctr" lIns="0" tIns="0" rIns="0" bIns="0">
-            <a:noAutofit/>
-          </a:bodyPr>
-          <a:lstStyle/>
-          <a:p>
-            <a:pPr algn="r" latinLnBrk="0">
-              <a:lnSpc>
-                <a:spcPct val="100000"/>
-              </a:lnSpc>
-              <a:spcBef>
-                <a:spcPts val="0"/>
-              </a:spcBef>
-              <a:spcAft>
-                <a:spcPts val="0"/>
-              </a:spcAft>
-            </a:pPr>
-            <a:r>
-              <a:rPr sz="900" b="0">
-                <a:solidFill>
-                  <a:srgbClr val="8C96A1"/>
-                </a:solidFill>
-                <a:latin typeface="Consolas"/>
-                <a:ea typeface="Microsoft YaHei"/>
-                <a:cs typeface="Microsoft YaHei"/>
-              </a:rPr>
-              <a:t>__</a:t>
-            </a:r>
-          </a:p>
-        </p:txBody>
-      </p:sp>
-      <p:cxnSp>
-        <p:nvCxnSpPr>
-          <p:cNvPr id="23" name="Connector 22"/>
-          <p:cNvCxnSpPr/>
-          <p:nvPr/>
-        </p:nvCxnSpPr>
-        <p:spPr>
-          <a:xfrm>
-            <a:off x="1188720" y="3496858"/>
-            <a:ext cx="5349240" cy="0"/>
-          </a:xfrm>
-          <a:prstGeom prst="line">
-            <a:avLst/>
-          </a:prstGeom>
-          <a:ln w="12700">
-            <a:solidFill>
-              <a:srgbClr val="8C96A1"/>
-            </a:solidFill>
-            <a:prstDash val="dash"/>
-          </a:ln>
-        </p:spPr>
-      </p:cxnSp>
-      <p:cxnSp>
-        <p:nvCxnSpPr>
-          <p:cNvPr id="24" name="Connector 23"/>
-          <p:cNvCxnSpPr/>
-          <p:nvPr/>
-        </p:nvCxnSpPr>
-        <p:spPr>
-          <a:xfrm>
-            <a:off x="1188720" y="3616981"/>
-            <a:ext cx="5349240" cy="0"/>
-          </a:xfrm>
-          <a:prstGeom prst="line">
-            <a:avLst/>
-          </a:prstGeom>
-          <a:ln w="12700">
-            <a:solidFill>
-              <a:srgbClr val="C0612C"/>
-            </a:solidFill>
-            <a:prstDash val="dash"/>
-          </a:ln>
-        </p:spPr>
-      </p:cxnSp>
-      <p:cxnSp>
-        <p:nvCxnSpPr>
-          <p:cNvPr id="25" name="Connector 24"/>
-          <p:cNvCxnSpPr/>
-          <p:nvPr/>
-        </p:nvCxnSpPr>
-        <p:spPr>
-          <a:xfrm>
-            <a:off x="1188720" y="4297680"/>
-            <a:ext cx="5349240" cy="0"/>
-          </a:xfrm>
-          <a:prstGeom prst="line">
-            <a:avLst/>
-          </a:prstGeom>
-          <a:ln w="12700">
-            <a:solidFill>
-              <a:srgbClr val="C5CCD4"/>
-            </a:solidFill>
-          </a:ln>
-        </p:spPr>
-      </p:cxnSp>
-      <p:sp>
-        <p:nvSpPr>
-          <p:cNvPr id="26" name="TextBox 25"/>
-          <p:cNvSpPr txBox="1"/>
-          <p:nvPr/>
-        </p:nvSpPr>
-        <p:spPr>
-          <a:xfrm>
-            <a:off x="1389888" y="4334256"/>
-            <a:ext cx="603504" cy="201168"/>
-          </a:xfrm>
-          <a:prstGeom prst="rect">
-            <a:avLst/>
-          </a:prstGeom>
-          <a:noFill/>
-        </p:spPr>
-        <p:txBody>
-          <a:bodyPr wrap="square" anchor="ctr" lIns="0" tIns="0" rIns="0" bIns="0">
-            <a:noAutofit/>
-          </a:bodyPr>
-          <a:lstStyle/>
-          <a:p>
-            <a:pPr algn="ctr" latinLnBrk="0">
-              <a:lnSpc>
-                <a:spcPct val="100000"/>
-              </a:lnSpc>
-              <a:spcBef>
-                <a:spcPts val="0"/>
-              </a:spcBef>
-              <a:spcAft>
-                <a:spcPts val="0"/>
-              </a:spcAft>
-            </a:pPr>
-            <a:r>
-              <a:rPr sz="950" b="0">
-                <a:solidFill>
-                  <a:srgbClr val="66727F"/>
-                </a:solidFill>
-                <a:latin typeface="Consolas"/>
-                <a:ea typeface="Microsoft YaHei"/>
-                <a:cs typeface="Microsoft YaHei"/>
-              </a:rPr>
-              <a:t>C1</a:t>
-            </a:r>
-          </a:p>
-        </p:txBody>
-      </p:sp>
-      <p:sp>
-        <p:nvSpPr>
-          <p:cNvPr id="27" name="Oval 26"/>
+          <p:cNvPr id="25" name="Rectangle 24"/>
           <p:cNvSpPr/>
           <p:nvPr/>
         </p:nvSpPr>
         <p:spPr>
           <a:xfrm>
-            <a:off x="1627632" y="3653076"/>
-            <a:ext cx="128016" cy="128016"/>
-          </a:xfrm>
-          <a:prstGeom prst="ellipse">
-            <a:avLst/>
-          </a:prstGeom>
-          <a:solidFill>
-            <a:srgbClr val="C5CCD4"/>
-          </a:solidFill>
-          <a:ln w="15875">
-            <a:solidFill>
-              <a:srgbClr val="FFFFFF"/>
-            </a:solidFill>
-          </a:ln>
-        </p:spPr>
-        <p:txBody>
-          <a:bodyPr rtlCol="0" anchor="ctr"/>
-          <a:lstStyle/>
-          <a:p>
-            <a:pPr algn="ctr"/>
-          </a:p>
-        </p:txBody>
-      </p:sp>
-      <p:sp>
-        <p:nvSpPr>
-          <p:cNvPr id="28" name="TextBox 27"/>
-          <p:cNvSpPr txBox="1"/>
-          <p:nvPr/>
-        </p:nvSpPr>
-        <p:spPr>
-          <a:xfrm>
-            <a:off x="1801368" y="3616500"/>
-            <a:ext cx="457200" cy="201168"/>
-          </a:xfrm>
-          <a:prstGeom prst="rect">
-            <a:avLst/>
-          </a:prstGeom>
-          <a:noFill/>
-        </p:spPr>
-        <p:txBody>
-          <a:bodyPr wrap="square" anchor="ctr" lIns="0" tIns="0" rIns="0" bIns="0">
-            <a:noAutofit/>
-          </a:bodyPr>
-          <a:lstStyle/>
-          <a:p>
-            <a:pPr algn="l" latinLnBrk="0">
-              <a:lnSpc>
-                <a:spcPct val="100000"/>
-              </a:lnSpc>
-              <a:spcBef>
-                <a:spcPts val="0"/>
-              </a:spcBef>
-              <a:spcAft>
-                <a:spcPts val="0"/>
-              </a:spcAft>
-            </a:pPr>
-            <a:r>
-              <a:rPr sz="950" b="1">
-                <a:solidFill>
-                  <a:srgbClr val="8C96A1"/>
-                </a:solidFill>
-                <a:latin typeface="Consolas"/>
-                <a:ea typeface="Microsoft YaHei"/>
-                <a:cs typeface="Microsoft YaHei"/>
-              </a:rPr>
-              <a:t>__</a:t>
-            </a:r>
-          </a:p>
-        </p:txBody>
-      </p:sp>
-      <p:sp>
-        <p:nvSpPr>
-          <p:cNvPr id="29" name="TextBox 28"/>
-          <p:cNvSpPr txBox="1"/>
-          <p:nvPr/>
-        </p:nvSpPr>
-        <p:spPr>
-          <a:xfrm>
-            <a:off x="2510028" y="4334256"/>
-            <a:ext cx="603504" cy="201168"/>
-          </a:xfrm>
-          <a:prstGeom prst="rect">
-            <a:avLst/>
-          </a:prstGeom>
-          <a:noFill/>
-        </p:spPr>
-        <p:txBody>
-          <a:bodyPr wrap="square" anchor="ctr" lIns="0" tIns="0" rIns="0" bIns="0">
-            <a:noAutofit/>
-          </a:bodyPr>
-          <a:lstStyle/>
-          <a:p>
-            <a:pPr algn="ctr" latinLnBrk="0">
-              <a:lnSpc>
-                <a:spcPct val="100000"/>
-              </a:lnSpc>
-              <a:spcBef>
-                <a:spcPts val="0"/>
-              </a:spcBef>
-              <a:spcAft>
-                <a:spcPts val="0"/>
-              </a:spcAft>
-            </a:pPr>
-            <a:r>
-              <a:rPr sz="950" b="0">
-                <a:solidFill>
-                  <a:srgbClr val="66727F"/>
-                </a:solidFill>
-                <a:latin typeface="Consolas"/>
-                <a:ea typeface="Microsoft YaHei"/>
-                <a:cs typeface="Microsoft YaHei"/>
-              </a:rPr>
-              <a:t>C2</a:t>
-            </a:r>
-          </a:p>
-        </p:txBody>
-      </p:sp>
-      <p:cxnSp>
-        <p:nvCxnSpPr>
-          <p:cNvPr id="30" name="Connector 29"/>
-          <p:cNvCxnSpPr/>
-          <p:nvPr/>
-        </p:nvCxnSpPr>
-        <p:spPr>
-          <a:xfrm>
-            <a:off x="2702052" y="3146498"/>
-            <a:ext cx="219456" cy="150154"/>
-          </a:xfrm>
-          <a:prstGeom prst="line">
-            <a:avLst/>
-          </a:prstGeom>
-          <a:ln w="15875">
-            <a:solidFill>
-              <a:srgbClr val="C5CCD4"/>
-            </a:solidFill>
-          </a:ln>
-        </p:spPr>
-      </p:cxnSp>
-      <p:sp>
-        <p:nvSpPr>
-          <p:cNvPr id="31" name="Oval 30"/>
-          <p:cNvSpPr/>
-          <p:nvPr/>
-        </p:nvSpPr>
-        <p:spPr>
-          <a:xfrm>
-            <a:off x="2638044" y="3082490"/>
-            <a:ext cx="128016" cy="128016"/>
-          </a:xfrm>
-          <a:prstGeom prst="ellipse">
-            <a:avLst/>
-          </a:prstGeom>
-          <a:solidFill>
-            <a:srgbClr val="C5CCD4"/>
-          </a:solidFill>
-          <a:ln w="15875">
-            <a:solidFill>
-              <a:srgbClr val="FFFFFF"/>
-            </a:solidFill>
-          </a:ln>
-        </p:spPr>
-        <p:txBody>
-          <a:bodyPr rtlCol="0" anchor="ctr"/>
-          <a:lstStyle/>
-          <a:p>
-            <a:pPr algn="ctr"/>
-          </a:p>
-        </p:txBody>
-      </p:sp>
-      <p:sp>
-        <p:nvSpPr>
-          <p:cNvPr id="32" name="Oval 31"/>
-          <p:cNvSpPr/>
-          <p:nvPr/>
-        </p:nvSpPr>
-        <p:spPr>
-          <a:xfrm>
-            <a:off x="2848356" y="3223500"/>
-            <a:ext cx="146304" cy="146304"/>
-          </a:xfrm>
-          <a:prstGeom prst="ellipse">
-            <a:avLst/>
-          </a:prstGeom>
-          <a:solidFill>
-            <a:srgbClr val="FFFFFF"/>
-          </a:solidFill>
-          <a:ln w="22225">
-            <a:solidFill>
-              <a:srgbClr val="C5CCD4"/>
-            </a:solidFill>
-          </a:ln>
-        </p:spPr>
-        <p:txBody>
-          <a:bodyPr rtlCol="0" anchor="ctr"/>
-          <a:lstStyle/>
-          <a:p>
-            <a:pPr algn="ctr"/>
-          </a:p>
-        </p:txBody>
-      </p:sp>
-      <p:sp>
-        <p:nvSpPr>
-          <p:cNvPr id="33" name="TextBox 32"/>
-          <p:cNvSpPr txBox="1"/>
-          <p:nvPr/>
-        </p:nvSpPr>
-        <p:spPr>
-          <a:xfrm>
-            <a:off x="2308860" y="2844746"/>
-            <a:ext cx="1005840" cy="201168"/>
-          </a:xfrm>
-          <a:prstGeom prst="rect">
-            <a:avLst/>
-          </a:prstGeom>
-          <a:noFill/>
-        </p:spPr>
-        <p:txBody>
-          <a:bodyPr wrap="square" anchor="ctr" lIns="0" tIns="0" rIns="0" bIns="0">
-            <a:noAutofit/>
-          </a:bodyPr>
-          <a:lstStyle/>
-          <a:p>
-            <a:pPr algn="ctr" latinLnBrk="0">
-              <a:lnSpc>
-                <a:spcPct val="100000"/>
-              </a:lnSpc>
-              <a:spcBef>
-                <a:spcPts val="0"/>
-              </a:spcBef>
-              <a:spcAft>
-                <a:spcPts val="0"/>
-              </a:spcAft>
-            </a:pPr>
-            <a:r>
-              <a:rPr sz="950" b="1">
-                <a:solidFill>
-                  <a:srgbClr val="8C96A1"/>
-                </a:solidFill>
-                <a:latin typeface="Consolas"/>
-                <a:ea typeface="Microsoft YaHei"/>
-                <a:cs typeface="Microsoft YaHei"/>
-              </a:rPr>
-              <a:t>__ → __</a:t>
-            </a:r>
-          </a:p>
-        </p:txBody>
-      </p:sp>
-      <p:sp>
-        <p:nvSpPr>
-          <p:cNvPr id="34" name="TextBox 33"/>
-          <p:cNvSpPr txBox="1"/>
-          <p:nvPr/>
-        </p:nvSpPr>
-        <p:spPr>
-          <a:xfrm>
-            <a:off x="3630168" y="4334256"/>
-            <a:ext cx="603504" cy="201168"/>
-          </a:xfrm>
-          <a:prstGeom prst="rect">
-            <a:avLst/>
-          </a:prstGeom>
-          <a:noFill/>
-        </p:spPr>
-        <p:txBody>
-          <a:bodyPr wrap="square" anchor="ctr" lIns="0" tIns="0" rIns="0" bIns="0">
-            <a:noAutofit/>
-          </a:bodyPr>
-          <a:lstStyle/>
-          <a:p>
-            <a:pPr algn="ctr" latinLnBrk="0">
-              <a:lnSpc>
-                <a:spcPct val="100000"/>
-              </a:lnSpc>
-              <a:spcBef>
-                <a:spcPts val="0"/>
-              </a:spcBef>
-              <a:spcAft>
-                <a:spcPts val="0"/>
-              </a:spcAft>
-            </a:pPr>
-            <a:r>
-              <a:rPr sz="950" b="0">
-                <a:solidFill>
-                  <a:srgbClr val="66727F"/>
-                </a:solidFill>
-                <a:latin typeface="Consolas"/>
-                <a:ea typeface="Microsoft YaHei"/>
-                <a:cs typeface="Microsoft YaHei"/>
-              </a:rPr>
-              <a:t>C3</a:t>
-            </a:r>
-          </a:p>
-        </p:txBody>
-      </p:sp>
-      <p:cxnSp>
-        <p:nvCxnSpPr>
-          <p:cNvPr id="35" name="Connector 34"/>
-          <p:cNvCxnSpPr/>
-          <p:nvPr/>
-        </p:nvCxnSpPr>
-        <p:spPr>
-          <a:xfrm>
-            <a:off x="3877056" y="4242816"/>
-            <a:ext cx="109728" cy="109728"/>
-          </a:xfrm>
-          <a:prstGeom prst="line">
-            <a:avLst/>
-          </a:prstGeom>
-          <a:ln w="19050">
-            <a:solidFill>
-              <a:srgbClr val="8C96A1"/>
-            </a:solidFill>
-          </a:ln>
-        </p:spPr>
-      </p:cxnSp>
-      <p:cxnSp>
-        <p:nvCxnSpPr>
-          <p:cNvPr id="36" name="Connector 35"/>
-          <p:cNvCxnSpPr/>
-          <p:nvPr/>
-        </p:nvCxnSpPr>
-        <p:spPr>
-          <a:xfrm flipV="1">
-            <a:off x="3877056" y="4242816"/>
-            <a:ext cx="109728" cy="109728"/>
-          </a:xfrm>
-          <a:prstGeom prst="line">
-            <a:avLst/>
-          </a:prstGeom>
-          <a:ln w="19050">
-            <a:solidFill>
-              <a:srgbClr val="8C96A1"/>
-            </a:solidFill>
-          </a:ln>
-        </p:spPr>
-      </p:cxnSp>
-      <p:sp>
-        <p:nvSpPr>
-          <p:cNvPr id="37" name="TextBox 36"/>
-          <p:cNvSpPr txBox="1"/>
-          <p:nvPr/>
-        </p:nvSpPr>
-        <p:spPr>
-          <a:xfrm>
-            <a:off x="3520440" y="3986784"/>
-            <a:ext cx="822960" cy="201168"/>
-          </a:xfrm>
-          <a:prstGeom prst="rect">
-            <a:avLst/>
-          </a:prstGeom>
-          <a:noFill/>
-        </p:spPr>
-        <p:txBody>
-          <a:bodyPr wrap="square" anchor="ctr" lIns="0" tIns="0" rIns="0" bIns="0">
-            <a:noAutofit/>
-          </a:bodyPr>
-          <a:lstStyle/>
-          <a:p>
-            <a:pPr algn="ctr" latinLnBrk="0">
-              <a:lnSpc>
-                <a:spcPct val="100000"/>
-              </a:lnSpc>
-              <a:spcBef>
-                <a:spcPts val="0"/>
-              </a:spcBef>
-              <a:spcAft>
-                <a:spcPts val="0"/>
-              </a:spcAft>
-            </a:pPr>
-            <a:r>
-              <a:rPr sz="900" b="0">
-                <a:solidFill>
-                  <a:srgbClr val="8C96A1"/>
-                </a:solidFill>
-                <a:latin typeface="Microsoft YaHei"/>
-                <a:ea typeface="Microsoft YaHei"/>
-                <a:cs typeface="Microsoft YaHei"/>
-              </a:rPr>
-              <a:t>停在 __</a:t>
-            </a:r>
-          </a:p>
-        </p:txBody>
-      </p:sp>
-      <p:sp>
-        <p:nvSpPr>
-          <p:cNvPr id="38" name="TextBox 37"/>
-          <p:cNvSpPr txBox="1"/>
-          <p:nvPr/>
-        </p:nvSpPr>
-        <p:spPr>
-          <a:xfrm>
-            <a:off x="4750308" y="4334256"/>
-            <a:ext cx="603504" cy="201168"/>
-          </a:xfrm>
-          <a:prstGeom prst="rect">
-            <a:avLst/>
-          </a:prstGeom>
-          <a:noFill/>
-        </p:spPr>
-        <p:txBody>
-          <a:bodyPr wrap="square" anchor="ctr" lIns="0" tIns="0" rIns="0" bIns="0">
-            <a:noAutofit/>
-          </a:bodyPr>
-          <a:lstStyle/>
-          <a:p>
-            <a:pPr algn="ctr" latinLnBrk="0">
-              <a:lnSpc>
-                <a:spcPct val="100000"/>
-              </a:lnSpc>
-              <a:spcBef>
-                <a:spcPts val="0"/>
-              </a:spcBef>
-              <a:spcAft>
-                <a:spcPts val="0"/>
-              </a:spcAft>
-            </a:pPr>
-            <a:r>
-              <a:rPr sz="950" b="0">
-                <a:solidFill>
-                  <a:srgbClr val="66727F"/>
-                </a:solidFill>
-                <a:latin typeface="Consolas"/>
-                <a:ea typeface="Microsoft YaHei"/>
-                <a:cs typeface="Microsoft YaHei"/>
-              </a:rPr>
-              <a:t>C4</a:t>
-            </a:r>
-          </a:p>
-        </p:txBody>
-      </p:sp>
-      <p:cxnSp>
-        <p:nvCxnSpPr>
-          <p:cNvPr id="39" name="Connector 38"/>
-          <p:cNvCxnSpPr/>
-          <p:nvPr/>
-        </p:nvCxnSpPr>
-        <p:spPr>
-          <a:xfrm>
-            <a:off x="4942332" y="2746087"/>
-            <a:ext cx="219456" cy="190195"/>
-          </a:xfrm>
-          <a:prstGeom prst="line">
-            <a:avLst/>
-          </a:prstGeom>
-          <a:ln w="15875">
-            <a:solidFill>
-              <a:srgbClr val="C5CCD4"/>
-            </a:solidFill>
-          </a:ln>
-        </p:spPr>
-      </p:cxnSp>
-      <p:sp>
-        <p:nvSpPr>
-          <p:cNvPr id="40" name="Oval 39"/>
-          <p:cNvSpPr/>
-          <p:nvPr/>
-        </p:nvSpPr>
-        <p:spPr>
-          <a:xfrm>
-            <a:off x="4878324" y="2682079"/>
-            <a:ext cx="128016" cy="128016"/>
-          </a:xfrm>
-          <a:prstGeom prst="ellipse">
-            <a:avLst/>
-          </a:prstGeom>
-          <a:solidFill>
-            <a:srgbClr val="C5CCD4"/>
-          </a:solidFill>
-          <a:ln w="15875">
-            <a:solidFill>
-              <a:srgbClr val="FFFFFF"/>
-            </a:solidFill>
-          </a:ln>
-        </p:spPr>
-        <p:txBody>
-          <a:bodyPr rtlCol="0" anchor="ctr"/>
-          <a:lstStyle/>
-          <a:p>
-            <a:pPr algn="ctr"/>
-          </a:p>
-        </p:txBody>
-      </p:sp>
-      <p:sp>
-        <p:nvSpPr>
-          <p:cNvPr id="41" name="Oval 40"/>
-          <p:cNvSpPr/>
-          <p:nvPr/>
-        </p:nvSpPr>
-        <p:spPr>
-          <a:xfrm>
-            <a:off x="5070348" y="2844842"/>
-            <a:ext cx="182880" cy="182880"/>
-          </a:xfrm>
-          <a:prstGeom prst="ellipse">
-            <a:avLst/>
-          </a:prstGeom>
-          <a:solidFill>
-            <a:srgbClr val="FFFFFF"/>
-          </a:solidFill>
-          <a:ln w="22225">
-            <a:solidFill>
-              <a:srgbClr val="66727F"/>
-            </a:solidFill>
-          </a:ln>
-        </p:spPr>
-        <p:txBody>
-          <a:bodyPr rtlCol="0" anchor="ctr"/>
-          <a:lstStyle/>
-          <a:p>
-            <a:pPr algn="ctr"/>
-          </a:p>
-        </p:txBody>
-      </p:sp>
-      <p:sp>
-        <p:nvSpPr>
-          <p:cNvPr id="42" name="TextBox 41"/>
-          <p:cNvSpPr txBox="1"/>
-          <p:nvPr/>
-        </p:nvSpPr>
-        <p:spPr>
-          <a:xfrm>
-            <a:off x="4549140" y="2444335"/>
-            <a:ext cx="1005840" cy="201168"/>
-          </a:xfrm>
-          <a:prstGeom prst="rect">
-            <a:avLst/>
-          </a:prstGeom>
-          <a:noFill/>
-        </p:spPr>
-        <p:txBody>
-          <a:bodyPr wrap="square" anchor="ctr" lIns="0" tIns="0" rIns="0" bIns="0">
-            <a:noAutofit/>
-          </a:bodyPr>
-          <a:lstStyle/>
-          <a:p>
-            <a:pPr algn="ctr" latinLnBrk="0">
-              <a:lnSpc>
-                <a:spcPct val="100000"/>
-              </a:lnSpc>
-              <a:spcBef>
-                <a:spcPts val="0"/>
-              </a:spcBef>
-              <a:spcAft>
-                <a:spcPts val="0"/>
-              </a:spcAft>
-            </a:pPr>
-            <a:r>
-              <a:rPr sz="950" b="1">
-                <a:solidFill>
-                  <a:srgbClr val="8C96A1"/>
-                </a:solidFill>
-                <a:latin typeface="Consolas"/>
-                <a:ea typeface="Microsoft YaHei"/>
-                <a:cs typeface="Microsoft YaHei"/>
-              </a:rPr>
-              <a:t>__ → __</a:t>
-            </a:r>
-          </a:p>
-        </p:txBody>
-      </p:sp>
-      <p:sp>
-        <p:nvSpPr>
-          <p:cNvPr id="43" name="TextBox 42"/>
-          <p:cNvSpPr txBox="1"/>
-          <p:nvPr/>
-        </p:nvSpPr>
-        <p:spPr>
-          <a:xfrm>
-            <a:off x="4887468" y="3055154"/>
-            <a:ext cx="548640" cy="201168"/>
-          </a:xfrm>
-          <a:prstGeom prst="rect">
-            <a:avLst/>
-          </a:prstGeom>
-          <a:noFill/>
-        </p:spPr>
-        <p:txBody>
-          <a:bodyPr wrap="square" anchor="ctr" lIns="0" tIns="0" rIns="0" bIns="0">
-            <a:noAutofit/>
-          </a:bodyPr>
-          <a:lstStyle/>
-          <a:p>
-            <a:pPr algn="ctr" latinLnBrk="0">
-              <a:lnSpc>
-                <a:spcPct val="100000"/>
-              </a:lnSpc>
-              <a:spcBef>
-                <a:spcPts val="0"/>
-              </a:spcBef>
-              <a:spcAft>
-                <a:spcPts val="0"/>
-              </a:spcAft>
-            </a:pPr>
-            <a:r>
-              <a:rPr sz="950" b="1">
-                <a:solidFill>
-                  <a:srgbClr val="35424F"/>
-                </a:solidFill>
-                <a:latin typeface="Microsoft YaHei"/>
-                <a:ea typeface="Microsoft YaHei"/>
-                <a:cs typeface="Microsoft YaHei"/>
-              </a:rPr>
-              <a:t>交付</a:t>
-            </a:r>
-          </a:p>
-        </p:txBody>
-      </p:sp>
-      <p:sp>
-        <p:nvSpPr>
-          <p:cNvPr id="44" name="TextBox 43"/>
-          <p:cNvSpPr txBox="1"/>
-          <p:nvPr/>
-        </p:nvSpPr>
-        <p:spPr>
-          <a:xfrm>
-            <a:off x="5870448" y="4334256"/>
-            <a:ext cx="603504" cy="201168"/>
-          </a:xfrm>
-          <a:prstGeom prst="rect">
-            <a:avLst/>
-          </a:prstGeom>
-          <a:noFill/>
-        </p:spPr>
-        <p:txBody>
-          <a:bodyPr wrap="square" anchor="ctr" lIns="0" tIns="0" rIns="0" bIns="0">
-            <a:noAutofit/>
-          </a:bodyPr>
-          <a:lstStyle/>
-          <a:p>
-            <a:pPr algn="ctr" latinLnBrk="0">
-              <a:lnSpc>
-                <a:spcPct val="100000"/>
-              </a:lnSpc>
-              <a:spcBef>
-                <a:spcPts val="0"/>
-              </a:spcBef>
-              <a:spcAft>
-                <a:spcPts val="0"/>
-              </a:spcAft>
-            </a:pPr>
-            <a:r>
-              <a:rPr sz="950" b="0">
-                <a:solidFill>
-                  <a:srgbClr val="66727F"/>
-                </a:solidFill>
-                <a:latin typeface="Consolas"/>
-                <a:ea typeface="Microsoft YaHei"/>
-                <a:cs typeface="Microsoft YaHei"/>
-              </a:rPr>
-              <a:t>C5</a:t>
-            </a:r>
-          </a:p>
-        </p:txBody>
-      </p:sp>
-      <p:sp>
-        <p:nvSpPr>
-          <p:cNvPr id="45" name="Oval 44"/>
-          <p:cNvSpPr/>
-          <p:nvPr/>
-        </p:nvSpPr>
-        <p:spPr>
-          <a:xfrm>
-            <a:off x="6108192" y="3983415"/>
-            <a:ext cx="128016" cy="128016"/>
-          </a:xfrm>
-          <a:prstGeom prst="ellipse">
-            <a:avLst/>
-          </a:prstGeom>
-          <a:solidFill>
-            <a:srgbClr val="C5CCD4"/>
-          </a:solidFill>
-          <a:ln w="15875">
-            <a:solidFill>
-              <a:srgbClr val="FFFFFF"/>
-            </a:solidFill>
-          </a:ln>
-        </p:spPr>
-        <p:txBody>
-          <a:bodyPr rtlCol="0" anchor="ctr"/>
-          <a:lstStyle/>
-          <a:p>
-            <a:pPr algn="ctr"/>
-          </a:p>
-        </p:txBody>
-      </p:sp>
-      <p:sp>
-        <p:nvSpPr>
-          <p:cNvPr id="46" name="TextBox 45"/>
-          <p:cNvSpPr txBox="1"/>
-          <p:nvPr/>
-        </p:nvSpPr>
-        <p:spPr>
-          <a:xfrm>
-            <a:off x="6281928" y="3946839"/>
-            <a:ext cx="457200" cy="201168"/>
-          </a:xfrm>
-          <a:prstGeom prst="rect">
-            <a:avLst/>
-          </a:prstGeom>
-          <a:noFill/>
-        </p:spPr>
-        <p:txBody>
-          <a:bodyPr wrap="square" anchor="ctr" lIns="0" tIns="0" rIns="0" bIns="0">
-            <a:noAutofit/>
-          </a:bodyPr>
-          <a:lstStyle/>
-          <a:p>
-            <a:pPr algn="l" latinLnBrk="0">
-              <a:lnSpc>
-                <a:spcPct val="100000"/>
-              </a:lnSpc>
-              <a:spcBef>
-                <a:spcPts val="0"/>
-              </a:spcBef>
-              <a:spcAft>
-                <a:spcPts val="0"/>
-              </a:spcAft>
-            </a:pPr>
-            <a:r>
-              <a:rPr sz="950" b="1">
-                <a:solidFill>
-                  <a:srgbClr val="8C96A1"/>
-                </a:solidFill>
-                <a:latin typeface="Consolas"/>
-                <a:ea typeface="Microsoft YaHei"/>
-                <a:cs typeface="Microsoft YaHei"/>
-              </a:rPr>
-              <a:t>__</a:t>
-            </a:r>
-          </a:p>
-        </p:txBody>
-      </p:sp>
-      <p:sp>
-        <p:nvSpPr>
-          <p:cNvPr id="47" name="Rectangle 46"/>
-          <p:cNvSpPr/>
-          <p:nvPr/>
-        </p:nvSpPr>
-        <p:spPr>
-          <a:xfrm>
-            <a:off x="5806440" y="4681728"/>
-            <a:ext cx="1078992" cy="219456"/>
+            <a:off x="3602736" y="2633472"/>
+            <a:ext cx="7912303" cy="566928"/>
           </a:xfrm>
           <a:prstGeom prst="rect">
             <a:avLst/>
@@ -4820,72 +4114,49 @@
       </p:sp>
       <p:sp>
         <p:nvSpPr>
-          <p:cNvPr id="48" name="TextBox 47"/>
-          <p:cNvSpPr txBox="1"/>
-          <p:nvPr/>
-        </p:nvSpPr>
-        <p:spPr>
-          <a:xfrm>
-            <a:off x="5806440" y="4681728"/>
-            <a:ext cx="1078992" cy="219456"/>
-          </a:xfrm>
-          <a:prstGeom prst="rect">
-            <a:avLst/>
-          </a:prstGeom>
-          <a:noFill/>
-        </p:spPr>
-        <p:txBody>
-          <a:bodyPr wrap="square" anchor="ctr" lIns="0" tIns="0" rIns="0" bIns="0">
-            <a:noAutofit/>
-          </a:bodyPr>
-          <a:lstStyle/>
-          <a:p>
-            <a:pPr algn="ctr" latinLnBrk="0">
-              <a:lnSpc>
-                <a:spcPct val="100000"/>
-              </a:lnSpc>
-              <a:spcBef>
-                <a:spcPts val="0"/>
-              </a:spcBef>
-              <a:spcAft>
-                <a:spcPts val="0"/>
-              </a:spcAft>
-            </a:pPr>
-            <a:r>
-              <a:rPr sz="850" b="1">
-                <a:solidFill>
-                  <a:srgbClr val="C0612C"/>
+          <p:cNvPr id="26" name="TextBox 25"/>
+          <p:cNvSpPr txBox="1"/>
+          <p:nvPr/>
+        </p:nvSpPr>
+        <p:spPr>
+          <a:xfrm>
+            <a:off x="3675888" y="2633472"/>
+            <a:ext cx="2651760" cy="566928"/>
+          </a:xfrm>
+          <a:prstGeom prst="rect">
+            <a:avLst/>
+          </a:prstGeom>
+          <a:noFill/>
+        </p:spPr>
+        <p:txBody>
+          <a:bodyPr wrap="square" anchor="ctr" lIns="0" tIns="0" rIns="0" bIns="0">
+            <a:noAutofit/>
+          </a:bodyPr>
+          <a:lstStyle/>
+          <a:p>
+            <a:pPr algn="l" latinLnBrk="0">
+              <a:lnSpc>
+                <a:spcPct val="100000"/>
+              </a:lnSpc>
+              <a:spcBef>
+                <a:spcPts val="0"/>
+              </a:spcBef>
+              <a:spcAft>
+                <a:spcPts val="0"/>
+              </a:spcAft>
+            </a:pPr>
+            <a:r>
+              <a:rPr sz="950" b="0">
+                <a:solidFill>
+                  <a:srgbClr val="16202A"/>
                 </a:solidFill>
                 <a:latin typeface="Microsoft YaHei"/>
                 <a:ea typeface="Microsoft YaHei"/>
                 <a:cs typeface="Microsoft YaHei"/>
               </a:rPr>
-              <a:t>示意　非数据</a:t>
-            </a:r>
-          </a:p>
-        </p:txBody>
-      </p:sp>
-      <p:sp>
-        <p:nvSpPr>
-          <p:cNvPr id="49" name="TextBox 48"/>
-          <p:cNvSpPr txBox="1"/>
-          <p:nvPr/>
-        </p:nvSpPr>
-        <p:spPr>
-          <a:xfrm>
-            <a:off x="749808" y="4681728"/>
-            <a:ext cx="4983480" cy="219456"/>
-          </a:xfrm>
-          <a:prstGeom prst="rect">
-            <a:avLst/>
-          </a:prstGeom>
-          <a:noFill/>
-        </p:spPr>
-        <p:txBody>
-          <a:bodyPr wrap="square" anchor="ctr" lIns="0" tIns="0" rIns="0" bIns="0">
-            <a:noAutofit/>
-          </a:bodyPr>
-          <a:lstStyle/>
+              <a:t>融合 swiglu + 动态量化</a:t>
+            </a:r>
+          </a:p>
           <a:p>
             <a:pPr algn="l" latinLnBrk="0">
               <a:lnSpc>
@@ -4899,1349 +4170,218 @@
               </a:spcAft>
             </a:pPr>
             <a:r>
-              <a:rPr sz="900" b="0">
-                <a:solidFill>
-                  <a:srgbClr val="8C96A1"/>
+              <a:rPr sz="950" b="0">
+                <a:solidFill>
+                  <a:srgbClr val="16202A"/>
                 </a:solidFill>
                 <a:latin typeface="Microsoft YaHei"/>
                 <a:ea typeface="Microsoft YaHei"/>
                 <a:cs typeface="Microsoft YaHei"/>
               </a:rPr>
-              <a:t>●</a:t>
-            </a:r>
-            <a:r>
-              <a:rPr sz="900" b="0">
-                <a:solidFill>
-                  <a:srgbClr val="66727F"/>
+              <a:t>替掉散点 elementwise 3.08 ms</a:t>
+            </a:r>
+          </a:p>
+          <a:p>
+            <a:pPr algn="l" latinLnBrk="0">
+              <a:lnSpc>
+                <a:spcPct val="100000"/>
+              </a:lnSpc>
+              <a:spcBef>
+                <a:spcPts val="0"/>
+              </a:spcBef>
+              <a:spcAft>
+                <a:spcPts val="0"/>
+              </a:spcAft>
+            </a:pPr>
+            <a:r>
+              <a:rPr sz="950" b="0">
+                <a:solidFill>
+                  <a:srgbClr val="16202A"/>
                 </a:solidFill>
                 <a:latin typeface="Microsoft YaHei"/>
                 <a:ea typeface="Microsoft YaHei"/>
                 <a:cs typeface="Microsoft YaHei"/>
               </a:rPr>
-              <a:t> C 阶段筛选　</a:t>
-            </a:r>
-            <a:r>
-              <a:rPr sz="900" b="0">
-                <a:solidFill>
-                  <a:srgbClr val="8C96A1"/>
+              <a:t>+ per-token quant 0.43 ms</a:t>
+            </a:r>
+          </a:p>
+        </p:txBody>
+      </p:sp>
+      <p:sp>
+        <p:nvSpPr>
+          <p:cNvPr id="27" name="TextBox 26"/>
+          <p:cNvSpPr txBox="1"/>
+          <p:nvPr/>
+        </p:nvSpPr>
+        <p:spPr>
+          <a:xfrm>
+            <a:off x="6419088" y="2633472"/>
+            <a:ext cx="2002536" cy="566928"/>
+          </a:xfrm>
+          <a:prstGeom prst="rect">
+            <a:avLst/>
+          </a:prstGeom>
+          <a:noFill/>
+        </p:spPr>
+        <p:txBody>
+          <a:bodyPr wrap="square" anchor="ctr" lIns="0" tIns="0" rIns="0" bIns="0">
+            <a:noAutofit/>
+          </a:bodyPr>
+          <a:lstStyle/>
+          <a:p>
+            <a:pPr algn="l" latinLnBrk="0">
+              <a:lnSpc>
+                <a:spcPct val="100000"/>
+              </a:lnSpc>
+              <a:spcBef>
+                <a:spcPts val="0"/>
+              </a:spcBef>
+              <a:spcAft>
+                <a:spcPts val="0"/>
+              </a:spcAft>
+            </a:pPr>
+            <a:r>
+              <a:rPr sz="950" b="0">
+                <a:solidFill>
+                  <a:srgbClr val="35424F"/>
                 </a:solidFill>
                 <a:latin typeface="Microsoft YaHei"/>
                 <a:ea typeface="Microsoft YaHei"/>
                 <a:cs typeface="Microsoft YaHei"/>
               </a:rPr>
-              <a:t>○</a:t>
-            </a:r>
-            <a:r>
-              <a:rPr sz="900" b="0">
-                <a:solidFill>
-                  <a:srgbClr val="66727F"/>
+              <a:t>单核 1.75 ms/步</a:t>
+            </a:r>
+          </a:p>
+        </p:txBody>
+      </p:sp>
+      <p:sp>
+        <p:nvSpPr>
+          <p:cNvPr id="28" name="TextBox 27"/>
+          <p:cNvSpPr txBox="1"/>
+          <p:nvPr/>
+        </p:nvSpPr>
+        <p:spPr>
+          <a:xfrm>
+            <a:off x="8513064" y="2633472"/>
+            <a:ext cx="1280160" cy="566928"/>
+          </a:xfrm>
+          <a:prstGeom prst="rect">
+            <a:avLst/>
+          </a:prstGeom>
+          <a:noFill/>
+        </p:spPr>
+        <p:txBody>
+          <a:bodyPr wrap="square" anchor="ctr" lIns="0" tIns="0" rIns="0" bIns="0">
+            <a:noAutofit/>
+          </a:bodyPr>
+          <a:lstStyle/>
+          <a:p>
+            <a:pPr algn="l" latinLnBrk="0">
+              <a:lnSpc>
+                <a:spcPct val="100000"/>
+              </a:lnSpc>
+              <a:spcBef>
+                <a:spcPts val="0"/>
+              </a:spcBef>
+              <a:spcAft>
+                <a:spcPts val="0"/>
+              </a:spcAft>
+            </a:pPr>
+            <a:r>
+              <a:rPr sz="950" b="0">
+                <a:solidFill>
+                  <a:srgbClr val="35424F"/>
                 </a:solidFill>
                 <a:latin typeface="Microsoft YaHei"/>
                 <a:ea typeface="Microsoft YaHei"/>
                 <a:cs typeface="Microsoft YaHei"/>
               </a:rPr>
-              <a:t> D 阶段独立复验　</a:t>
-            </a:r>
-            <a:r>
-              <a:rPr sz="900" b="0">
-                <a:solidFill>
-                  <a:srgbClr val="8C96A1"/>
+              <a:t>device 单步时间</a:t>
+            </a:r>
+          </a:p>
+          <a:p>
+            <a:pPr algn="l" latinLnBrk="0">
+              <a:lnSpc>
+                <a:spcPct val="100000"/>
+              </a:lnSpc>
+              <a:spcBef>
+                <a:spcPts val="0"/>
+              </a:spcBef>
+              <a:spcAft>
+                <a:spcPts val="0"/>
+              </a:spcAft>
+            </a:pPr>
+            <a:r>
+              <a:rPr sz="950" b="0">
+                <a:solidFill>
+                  <a:srgbClr val="35424F"/>
                 </a:solidFill>
                 <a:latin typeface="Microsoft YaHei"/>
                 <a:ea typeface="Microsoft YaHei"/>
                 <a:cs typeface="Microsoft YaHei"/>
               </a:rPr>
-              <a:t>×</a:t>
-            </a:r>
-            <a:r>
-              <a:rPr sz="900" b="0">
-                <a:solidFill>
-                  <a:srgbClr val="66727F"/>
+              <a:t>24.7 → 22.2 ms</a:t>
+            </a:r>
+          </a:p>
+        </p:txBody>
+      </p:sp>
+      <p:sp>
+        <p:nvSpPr>
+          <p:cNvPr id="29" name="TextBox 28"/>
+          <p:cNvSpPr txBox="1"/>
+          <p:nvPr/>
+        </p:nvSpPr>
+        <p:spPr>
+          <a:xfrm>
+            <a:off x="9884664" y="2633472"/>
+            <a:ext cx="1554480" cy="566928"/>
+          </a:xfrm>
+          <a:prstGeom prst="rect">
+            <a:avLst/>
+          </a:prstGeom>
+          <a:noFill/>
+        </p:spPr>
+        <p:txBody>
+          <a:bodyPr wrap="square" anchor="ctr" lIns="0" tIns="0" rIns="0" bIns="0">
+            <a:noAutofit/>
+          </a:bodyPr>
+          <a:lstStyle/>
+          <a:p>
+            <a:pPr algn="l" latinLnBrk="0">
+              <a:lnSpc>
+                <a:spcPct val="100000"/>
+              </a:lnSpc>
+              <a:spcBef>
+                <a:spcPts val="0"/>
+              </a:spcBef>
+              <a:spcAft>
+                <a:spcPts val="0"/>
+              </a:spcAft>
+            </a:pPr>
+            <a:r>
+              <a:rPr sz="950" b="1">
+                <a:solidFill>
+                  <a:srgbClr val="3F63A8"/>
                 </a:solidFill>
                 <a:latin typeface="Microsoft YaHei"/>
                 <a:ea typeface="Microsoft YaHei"/>
                 <a:cs typeface="Microsoft YaHei"/>
               </a:rPr>
-              <a:t> 停在 ① 或 ②，未测性能</a:t>
-            </a:r>
-          </a:p>
-        </p:txBody>
-      </p:sp>
-      <p:sp>
-        <p:nvSpPr>
-          <p:cNvPr id="50" name="Rectangle 49"/>
+              <a:t>交付，全矩阵 +22~38%</a:t>
+            </a:r>
+          </a:p>
+        </p:txBody>
+      </p:sp>
+      <p:sp>
+        <p:nvSpPr>
+          <p:cNvPr id="30" name="Rectangle 29"/>
           <p:cNvSpPr/>
           <p:nvPr/>
         </p:nvSpPr>
         <p:spPr>
           <a:xfrm>
-            <a:off x="7269480" y="1975104"/>
-            <a:ext cx="4373575" cy="3017520"/>
-          </a:xfrm>
-          <a:prstGeom prst="rect">
-            <a:avLst/>
-          </a:prstGeom>
-          <a:solidFill>
-            <a:srgbClr val="F6F7F9"/>
-          </a:solidFill>
-          <a:ln>
-            <a:noFill/>
-          </a:ln>
-        </p:spPr>
-        <p:txBody>
-          <a:bodyPr rtlCol="0" anchor="ctr"/>
-          <a:lstStyle/>
-          <a:p>
-            <a:pPr algn="ctr"/>
-          </a:p>
-        </p:txBody>
-      </p:sp>
-      <p:sp>
-        <p:nvSpPr>
-          <p:cNvPr id="51" name="TextBox 50"/>
-          <p:cNvSpPr txBox="1"/>
-          <p:nvPr/>
-        </p:nvSpPr>
-        <p:spPr>
-          <a:xfrm>
-            <a:off x="7470648" y="2048256"/>
-            <a:ext cx="3971239" cy="256032"/>
-          </a:xfrm>
-          <a:prstGeom prst="rect">
-            <a:avLst/>
-          </a:prstGeom>
-          <a:noFill/>
-        </p:spPr>
-        <p:txBody>
-          <a:bodyPr wrap="square" anchor="ctr" lIns="0" tIns="0" rIns="0" bIns="0">
-            <a:noAutofit/>
-          </a:bodyPr>
-          <a:lstStyle/>
-          <a:p>
-            <a:pPr algn="l" latinLnBrk="0">
-              <a:lnSpc>
-                <a:spcPct val="100000"/>
-              </a:lnSpc>
-              <a:spcBef>
-                <a:spcPts val="0"/>
-              </a:spcBef>
-              <a:spcAft>
-                <a:spcPts val="0"/>
-              </a:spcAft>
-            </a:pPr>
-            <a:r>
-              <a:rPr sz="1250" b="1">
-                <a:solidFill>
-                  <a:srgbClr val="16202A"/>
-                </a:solidFill>
-                <a:latin typeface="Microsoft YaHei"/>
-                <a:ea typeface="Microsoft YaHei"/>
-                <a:cs typeface="Microsoft YaHei"/>
-              </a:rPr>
-              <a:t>__ 个候选</a:t>
-            </a:r>
-            <a:r>
-              <a:rPr sz="1000" b="0">
-                <a:solidFill>
-                  <a:srgbClr val="66727F"/>
-                </a:solidFill>
-                <a:latin typeface="Microsoft YaHei"/>
-                <a:ea typeface="Microsoft YaHei"/>
-                <a:cs typeface="Microsoft YaHei"/>
-              </a:rPr>
-              <a:t>　__ 个过三道门，复验后交付 1 个</a:t>
-            </a:r>
-          </a:p>
-        </p:txBody>
-      </p:sp>
-      <p:sp>
-        <p:nvSpPr>
-          <p:cNvPr id="52" name="TextBox 51"/>
-          <p:cNvSpPr txBox="1"/>
-          <p:nvPr/>
-        </p:nvSpPr>
-        <p:spPr>
-          <a:xfrm>
-            <a:off x="7872983" y="2377440"/>
-            <a:ext cx="1828800" cy="219456"/>
-          </a:xfrm>
-          <a:prstGeom prst="rect">
-            <a:avLst/>
-          </a:prstGeom>
-          <a:noFill/>
-        </p:spPr>
-        <p:txBody>
-          <a:bodyPr wrap="square" anchor="ctr" lIns="0" tIns="0" rIns="0" bIns="0">
-            <a:noAutofit/>
-          </a:bodyPr>
-          <a:lstStyle/>
-          <a:p>
-            <a:pPr algn="l" latinLnBrk="0">
-              <a:lnSpc>
-                <a:spcPct val="100000"/>
-              </a:lnSpc>
-              <a:spcBef>
-                <a:spcPts val="0"/>
-              </a:spcBef>
-              <a:spcAft>
-                <a:spcPts val="0"/>
-              </a:spcAft>
-            </a:pPr>
-            <a:r>
-              <a:rPr sz="900" b="0">
-                <a:solidFill>
-                  <a:srgbClr val="8C96A1"/>
-                </a:solidFill>
-                <a:latin typeface="Microsoft YaHei"/>
-                <a:ea typeface="Microsoft YaHei"/>
-                <a:cs typeface="Microsoft YaHei"/>
-              </a:rPr>
-              <a:t>改动</a:t>
-            </a:r>
-          </a:p>
-        </p:txBody>
-      </p:sp>
-      <p:sp>
-        <p:nvSpPr>
-          <p:cNvPr id="53" name="TextBox 52"/>
-          <p:cNvSpPr txBox="1"/>
-          <p:nvPr/>
-        </p:nvSpPr>
-        <p:spPr>
-          <a:xfrm>
-            <a:off x="9738360" y="2377440"/>
-            <a:ext cx="566928" cy="219456"/>
-          </a:xfrm>
-          <a:prstGeom prst="rect">
-            <a:avLst/>
-          </a:prstGeom>
-          <a:noFill/>
-        </p:spPr>
-        <p:txBody>
-          <a:bodyPr wrap="square" anchor="ctr" lIns="0" tIns="0" rIns="0" bIns="0">
-            <a:noAutofit/>
-          </a:bodyPr>
-          <a:lstStyle/>
-          <a:p>
-            <a:pPr algn="r" latinLnBrk="0">
-              <a:lnSpc>
-                <a:spcPct val="100000"/>
-              </a:lnSpc>
-              <a:spcBef>
-                <a:spcPts val="0"/>
-              </a:spcBef>
-              <a:spcAft>
-                <a:spcPts val="0"/>
-              </a:spcAft>
-            </a:pPr>
-            <a:r>
-              <a:rPr sz="900" b="0">
-                <a:solidFill>
-                  <a:srgbClr val="8C96A1"/>
-                </a:solidFill>
-                <a:latin typeface="Microsoft YaHei"/>
-                <a:ea typeface="Microsoft YaHei"/>
-                <a:cs typeface="Microsoft YaHei"/>
-              </a:rPr>
-              <a:t>C 筛选</a:t>
-            </a:r>
-          </a:p>
-        </p:txBody>
-      </p:sp>
-      <p:sp>
-        <p:nvSpPr>
-          <p:cNvPr id="54" name="TextBox 53"/>
-          <p:cNvSpPr txBox="1"/>
-          <p:nvPr/>
-        </p:nvSpPr>
-        <p:spPr>
-          <a:xfrm>
-            <a:off x="10360152" y="2377440"/>
-            <a:ext cx="566928" cy="219456"/>
-          </a:xfrm>
-          <a:prstGeom prst="rect">
-            <a:avLst/>
-          </a:prstGeom>
-          <a:noFill/>
-        </p:spPr>
-        <p:txBody>
-          <a:bodyPr wrap="square" anchor="ctr" lIns="0" tIns="0" rIns="0" bIns="0">
-            <a:noAutofit/>
-          </a:bodyPr>
-          <a:lstStyle/>
-          <a:p>
-            <a:pPr algn="r" latinLnBrk="0">
-              <a:lnSpc>
-                <a:spcPct val="100000"/>
-              </a:lnSpc>
-              <a:spcBef>
-                <a:spcPts val="0"/>
-              </a:spcBef>
-              <a:spcAft>
-                <a:spcPts val="0"/>
-              </a:spcAft>
-            </a:pPr>
-            <a:r>
-              <a:rPr sz="900" b="0">
-                <a:solidFill>
-                  <a:srgbClr val="8C96A1"/>
-                </a:solidFill>
-                <a:latin typeface="Microsoft YaHei"/>
-                <a:ea typeface="Microsoft YaHei"/>
-                <a:cs typeface="Microsoft YaHei"/>
-              </a:rPr>
-              <a:t>D 复验</a:t>
-            </a:r>
-          </a:p>
-        </p:txBody>
-      </p:sp>
-      <p:sp>
-        <p:nvSpPr>
-          <p:cNvPr id="55" name="TextBox 54"/>
-          <p:cNvSpPr txBox="1"/>
-          <p:nvPr/>
-        </p:nvSpPr>
-        <p:spPr>
-          <a:xfrm>
-            <a:off x="11018520" y="2377440"/>
-            <a:ext cx="512064" cy="219456"/>
-          </a:xfrm>
-          <a:prstGeom prst="rect">
-            <a:avLst/>
-          </a:prstGeom>
-          <a:noFill/>
-        </p:spPr>
-        <p:txBody>
-          <a:bodyPr wrap="square" anchor="ctr" lIns="0" tIns="0" rIns="0" bIns="0">
-            <a:noAutofit/>
-          </a:bodyPr>
-          <a:lstStyle/>
-          <a:p>
-            <a:pPr algn="l" latinLnBrk="0">
-              <a:lnSpc>
-                <a:spcPct val="100000"/>
-              </a:lnSpc>
-              <a:spcBef>
-                <a:spcPts val="0"/>
-              </a:spcBef>
-              <a:spcAft>
-                <a:spcPts val="0"/>
-              </a:spcAft>
-            </a:pPr>
-            <a:r>
-              <a:rPr sz="900" b="0">
-                <a:solidFill>
-                  <a:srgbClr val="8C96A1"/>
-                </a:solidFill>
-                <a:latin typeface="Microsoft YaHei"/>
-                <a:ea typeface="Microsoft YaHei"/>
-                <a:cs typeface="Microsoft YaHei"/>
-              </a:rPr>
-              <a:t>结论</a:t>
-            </a:r>
-          </a:p>
-        </p:txBody>
-      </p:sp>
-      <p:cxnSp>
-        <p:nvCxnSpPr>
-          <p:cNvPr id="56" name="Connector 55"/>
-          <p:cNvCxnSpPr/>
-          <p:nvPr/>
-        </p:nvCxnSpPr>
-        <p:spPr>
-          <a:xfrm>
-            <a:off x="7470648" y="2615184"/>
-            <a:ext cx="3971239" cy="0"/>
-          </a:xfrm>
-          <a:prstGeom prst="line">
-            <a:avLst/>
-          </a:prstGeom>
-          <a:ln w="9525">
-            <a:solidFill>
-              <a:srgbClr val="DDE2E7"/>
-            </a:solidFill>
-          </a:ln>
-        </p:spPr>
-      </p:cxnSp>
-      <p:sp>
-        <p:nvSpPr>
-          <p:cNvPr id="57" name="Rectangle 56"/>
-          <p:cNvSpPr/>
-          <p:nvPr/>
-        </p:nvSpPr>
-        <p:spPr>
-          <a:xfrm>
-            <a:off x="7397496" y="2670048"/>
-            <a:ext cx="4117543" cy="329184"/>
-          </a:xfrm>
-          <a:prstGeom prst="rect">
-            <a:avLst/>
-          </a:prstGeom>
-          <a:solidFill>
-            <a:srgbClr val="EEF1F4"/>
-          </a:solidFill>
-          <a:ln>
-            <a:noFill/>
-          </a:ln>
-        </p:spPr>
-        <p:txBody>
-          <a:bodyPr rtlCol="0" anchor="ctr"/>
-          <a:lstStyle/>
-          <a:p>
-            <a:pPr algn="ctr"/>
-          </a:p>
-        </p:txBody>
-      </p:sp>
-      <p:sp>
-        <p:nvSpPr>
-          <p:cNvPr id="58" name="TextBox 57"/>
-          <p:cNvSpPr txBox="1"/>
-          <p:nvPr/>
-        </p:nvSpPr>
-        <p:spPr>
-          <a:xfrm>
-            <a:off x="7470648" y="2670048"/>
-            <a:ext cx="402336" cy="329184"/>
-          </a:xfrm>
-          <a:prstGeom prst="rect">
-            <a:avLst/>
-          </a:prstGeom>
-          <a:noFill/>
-        </p:spPr>
-        <p:txBody>
-          <a:bodyPr wrap="square" anchor="ctr" lIns="0" tIns="0" rIns="0" bIns="0">
-            <a:noAutofit/>
-          </a:bodyPr>
-          <a:lstStyle/>
-          <a:p>
-            <a:pPr algn="l" latinLnBrk="0">
-              <a:lnSpc>
-                <a:spcPct val="100000"/>
-              </a:lnSpc>
-              <a:spcBef>
-                <a:spcPts val="0"/>
-              </a:spcBef>
-              <a:spcAft>
-                <a:spcPts val="0"/>
-              </a:spcAft>
-            </a:pPr>
-            <a:r>
-              <a:rPr sz="950" b="1">
-                <a:solidFill>
-                  <a:srgbClr val="66727F"/>
-                </a:solidFill>
-                <a:latin typeface="Consolas"/>
-                <a:ea typeface="Microsoft YaHei"/>
-                <a:cs typeface="Microsoft YaHei"/>
-              </a:rPr>
-              <a:t>基线</a:t>
-            </a:r>
-          </a:p>
-        </p:txBody>
-      </p:sp>
-      <p:sp>
-        <p:nvSpPr>
-          <p:cNvPr id="59" name="TextBox 58"/>
-          <p:cNvSpPr txBox="1"/>
-          <p:nvPr/>
-        </p:nvSpPr>
-        <p:spPr>
-          <a:xfrm>
-            <a:off x="7872983" y="2670048"/>
-            <a:ext cx="1828800" cy="329184"/>
-          </a:xfrm>
-          <a:prstGeom prst="rect">
-            <a:avLst/>
-          </a:prstGeom>
-          <a:noFill/>
-        </p:spPr>
-        <p:txBody>
-          <a:bodyPr wrap="square" anchor="ctr" lIns="0" tIns="0" rIns="0" bIns="0">
-            <a:noAutofit/>
-          </a:bodyPr>
-          <a:lstStyle/>
-          <a:p>
-            <a:pPr algn="l" latinLnBrk="0">
-              <a:lnSpc>
-                <a:spcPct val="100000"/>
-              </a:lnSpc>
-              <a:spcBef>
-                <a:spcPts val="0"/>
-              </a:spcBef>
-              <a:spcAft>
-                <a:spcPts val="0"/>
-              </a:spcAft>
-            </a:pPr>
-            <a:r>
-              <a:rPr sz="950" b="0">
-                <a:solidFill>
-                  <a:srgbClr val="35424F"/>
-                </a:solidFill>
-                <a:latin typeface="Microsoft YaHei"/>
-                <a:ea typeface="Microsoft YaHei"/>
-                <a:cs typeface="Microsoft YaHei"/>
-              </a:rPr>
-              <a:t>A 阶段建立，D 阶段重测</a:t>
-            </a:r>
-          </a:p>
-        </p:txBody>
-      </p:sp>
-      <p:sp>
-        <p:nvSpPr>
-          <p:cNvPr id="60" name="TextBox 59"/>
-          <p:cNvSpPr txBox="1"/>
-          <p:nvPr/>
-        </p:nvSpPr>
-        <p:spPr>
-          <a:xfrm>
-            <a:off x="9738360" y="2670048"/>
-            <a:ext cx="566928" cy="329184"/>
-          </a:xfrm>
-          <a:prstGeom prst="rect">
-            <a:avLst/>
-          </a:prstGeom>
-          <a:noFill/>
-        </p:spPr>
-        <p:txBody>
-          <a:bodyPr wrap="square" anchor="ctr" lIns="0" tIns="0" rIns="0" bIns="0">
-            <a:noAutofit/>
-          </a:bodyPr>
-          <a:lstStyle/>
-          <a:p>
-            <a:pPr algn="r" latinLnBrk="0">
-              <a:lnSpc>
-                <a:spcPct val="100000"/>
-              </a:lnSpc>
-              <a:spcBef>
-                <a:spcPts val="0"/>
-              </a:spcBef>
-              <a:spcAft>
-                <a:spcPts val="0"/>
-              </a:spcAft>
-            </a:pPr>
-            <a:r>
-              <a:rPr sz="950" b="0">
-                <a:solidFill>
-                  <a:srgbClr val="8C96A1"/>
-                </a:solidFill>
-                <a:latin typeface="Consolas"/>
-                <a:ea typeface="Microsoft YaHei"/>
-                <a:cs typeface="Microsoft YaHei"/>
-              </a:rPr>
-              <a:t>__</a:t>
-            </a:r>
-          </a:p>
-        </p:txBody>
-      </p:sp>
-      <p:sp>
-        <p:nvSpPr>
-          <p:cNvPr id="61" name="TextBox 60"/>
-          <p:cNvSpPr txBox="1"/>
-          <p:nvPr/>
-        </p:nvSpPr>
-        <p:spPr>
-          <a:xfrm>
-            <a:off x="10360152" y="2670048"/>
-            <a:ext cx="566928" cy="329184"/>
-          </a:xfrm>
-          <a:prstGeom prst="rect">
-            <a:avLst/>
-          </a:prstGeom>
-          <a:noFill/>
-        </p:spPr>
-        <p:txBody>
-          <a:bodyPr wrap="square" anchor="ctr" lIns="0" tIns="0" rIns="0" bIns="0">
-            <a:noAutofit/>
-          </a:bodyPr>
-          <a:lstStyle/>
-          <a:p>
-            <a:pPr algn="r" latinLnBrk="0">
-              <a:lnSpc>
-                <a:spcPct val="100000"/>
-              </a:lnSpc>
-              <a:spcBef>
-                <a:spcPts val="0"/>
-              </a:spcBef>
-              <a:spcAft>
-                <a:spcPts val="0"/>
-              </a:spcAft>
-            </a:pPr>
-            <a:r>
-              <a:rPr sz="950" b="0">
-                <a:solidFill>
-                  <a:srgbClr val="8C96A1"/>
-                </a:solidFill>
-                <a:latin typeface="Consolas"/>
-                <a:ea typeface="Microsoft YaHei"/>
-                <a:cs typeface="Microsoft YaHei"/>
-              </a:rPr>
-              <a:t>__</a:t>
-            </a:r>
-          </a:p>
-        </p:txBody>
-      </p:sp>
-      <p:sp>
-        <p:nvSpPr>
-          <p:cNvPr id="62" name="TextBox 61"/>
-          <p:cNvSpPr txBox="1"/>
-          <p:nvPr/>
-        </p:nvSpPr>
-        <p:spPr>
-          <a:xfrm>
-            <a:off x="11018520" y="2670048"/>
-            <a:ext cx="512064" cy="329184"/>
-          </a:xfrm>
-          <a:prstGeom prst="rect">
-            <a:avLst/>
-          </a:prstGeom>
-          <a:noFill/>
-        </p:spPr>
-        <p:txBody>
-          <a:bodyPr wrap="square" anchor="ctr" lIns="0" tIns="0" rIns="0" bIns="0">
-            <a:noAutofit/>
-          </a:bodyPr>
-          <a:lstStyle/>
-          <a:p>
-            <a:pPr algn="l" latinLnBrk="0">
-              <a:lnSpc>
-                <a:spcPct val="100000"/>
-              </a:lnSpc>
-              <a:spcBef>
-                <a:spcPts val="0"/>
-              </a:spcBef>
-              <a:spcAft>
-                <a:spcPts val="0"/>
-              </a:spcAft>
-            </a:pPr>
-            <a:r>
-              <a:rPr sz="950" b="0">
-                <a:solidFill>
-                  <a:srgbClr val="8C96A1"/>
-                </a:solidFill>
-                <a:latin typeface="Microsoft YaHei"/>
-                <a:ea typeface="Microsoft YaHei"/>
-                <a:cs typeface="Microsoft YaHei"/>
-              </a:rPr>
-              <a:t>—</a:t>
-            </a:r>
-          </a:p>
-        </p:txBody>
-      </p:sp>
-      <p:sp>
-        <p:nvSpPr>
-          <p:cNvPr id="63" name="TextBox 62"/>
-          <p:cNvSpPr txBox="1"/>
-          <p:nvPr/>
-        </p:nvSpPr>
-        <p:spPr>
-          <a:xfrm>
-            <a:off x="7470648" y="3035808"/>
-            <a:ext cx="402336" cy="329184"/>
-          </a:xfrm>
-          <a:prstGeom prst="rect">
-            <a:avLst/>
-          </a:prstGeom>
-          <a:noFill/>
-        </p:spPr>
-        <p:txBody>
-          <a:bodyPr wrap="square" anchor="ctr" lIns="0" tIns="0" rIns="0" bIns="0">
-            <a:noAutofit/>
-          </a:bodyPr>
-          <a:lstStyle/>
-          <a:p>
-            <a:pPr algn="l" latinLnBrk="0">
-              <a:lnSpc>
-                <a:spcPct val="100000"/>
-              </a:lnSpc>
-              <a:spcBef>
-                <a:spcPts val="0"/>
-              </a:spcBef>
-              <a:spcAft>
-                <a:spcPts val="0"/>
-              </a:spcAft>
-            </a:pPr>
-            <a:r>
-              <a:rPr sz="950" b="1">
-                <a:solidFill>
-                  <a:srgbClr val="66727F"/>
-                </a:solidFill>
-                <a:latin typeface="Consolas"/>
-                <a:ea typeface="Microsoft YaHei"/>
-                <a:cs typeface="Microsoft YaHei"/>
-              </a:rPr>
-              <a:t>C1</a:t>
-            </a:r>
-          </a:p>
-        </p:txBody>
-      </p:sp>
-      <p:sp>
-        <p:nvSpPr>
-          <p:cNvPr id="64" name="TextBox 63"/>
-          <p:cNvSpPr txBox="1"/>
-          <p:nvPr/>
-        </p:nvSpPr>
-        <p:spPr>
-          <a:xfrm>
-            <a:off x="7872983" y="3035808"/>
-            <a:ext cx="1828800" cy="329184"/>
-          </a:xfrm>
-          <a:prstGeom prst="rect">
-            <a:avLst/>
-          </a:prstGeom>
-          <a:noFill/>
-        </p:spPr>
-        <p:txBody>
-          <a:bodyPr wrap="square" anchor="ctr" lIns="0" tIns="0" rIns="0" bIns="0">
-            <a:noAutofit/>
-          </a:bodyPr>
-          <a:lstStyle/>
-          <a:p>
-            <a:pPr algn="l" latinLnBrk="0">
-              <a:lnSpc>
-                <a:spcPct val="100000"/>
-              </a:lnSpc>
-              <a:spcBef>
-                <a:spcPts val="0"/>
-              </a:spcBef>
-              <a:spcAft>
-                <a:spcPts val="0"/>
-              </a:spcAft>
-            </a:pPr>
-            <a:r>
-              <a:rPr sz="950" b="0">
-                <a:solidFill>
-                  <a:srgbClr val="35424F"/>
-                </a:solidFill>
-                <a:latin typeface="Microsoft YaHei"/>
-                <a:ea typeface="Microsoft YaHei"/>
-                <a:cs typeface="Microsoft YaHei"/>
-              </a:rPr>
-              <a:t>例：调大 batch 上限</a:t>
-            </a:r>
-          </a:p>
-        </p:txBody>
-      </p:sp>
-      <p:sp>
-        <p:nvSpPr>
-          <p:cNvPr id="65" name="TextBox 64"/>
-          <p:cNvSpPr txBox="1"/>
-          <p:nvPr/>
-        </p:nvSpPr>
-        <p:spPr>
-          <a:xfrm>
-            <a:off x="9738360" y="3035808"/>
-            <a:ext cx="566928" cy="329184"/>
-          </a:xfrm>
-          <a:prstGeom prst="rect">
-            <a:avLst/>
-          </a:prstGeom>
-          <a:noFill/>
-        </p:spPr>
-        <p:txBody>
-          <a:bodyPr wrap="square" anchor="ctr" lIns="0" tIns="0" rIns="0" bIns="0">
-            <a:noAutofit/>
-          </a:bodyPr>
-          <a:lstStyle/>
-          <a:p>
-            <a:pPr algn="r" latinLnBrk="0">
-              <a:lnSpc>
-                <a:spcPct val="100000"/>
-              </a:lnSpc>
-              <a:spcBef>
-                <a:spcPts val="0"/>
-              </a:spcBef>
-              <a:spcAft>
-                <a:spcPts val="0"/>
-              </a:spcAft>
-            </a:pPr>
-            <a:r>
-              <a:rPr sz="950" b="0">
-                <a:solidFill>
-                  <a:srgbClr val="8C96A1"/>
-                </a:solidFill>
-                <a:latin typeface="Consolas"/>
-                <a:ea typeface="Microsoft YaHei"/>
-                <a:cs typeface="Microsoft YaHei"/>
-              </a:rPr>
-              <a:t>__</a:t>
-            </a:r>
-          </a:p>
-        </p:txBody>
-      </p:sp>
-      <p:sp>
-        <p:nvSpPr>
-          <p:cNvPr id="66" name="TextBox 65"/>
-          <p:cNvSpPr txBox="1"/>
-          <p:nvPr/>
-        </p:nvSpPr>
-        <p:spPr>
-          <a:xfrm>
-            <a:off x="10360152" y="3035808"/>
-            <a:ext cx="566928" cy="329184"/>
-          </a:xfrm>
-          <a:prstGeom prst="rect">
-            <a:avLst/>
-          </a:prstGeom>
-          <a:noFill/>
-        </p:spPr>
-        <p:txBody>
-          <a:bodyPr wrap="square" anchor="ctr" lIns="0" tIns="0" rIns="0" bIns="0">
-            <a:noAutofit/>
-          </a:bodyPr>
-          <a:lstStyle/>
-          <a:p>
-            <a:pPr algn="r" latinLnBrk="0">
-              <a:lnSpc>
-                <a:spcPct val="100000"/>
-              </a:lnSpc>
-              <a:spcBef>
-                <a:spcPts val="0"/>
-              </a:spcBef>
-              <a:spcAft>
-                <a:spcPts val="0"/>
-              </a:spcAft>
-            </a:pPr>
-            <a:r>
-              <a:rPr sz="950" b="0">
-                <a:solidFill>
-                  <a:srgbClr val="8C96A1"/>
-                </a:solidFill>
-                <a:latin typeface="Consolas"/>
-                <a:ea typeface="Microsoft YaHei"/>
-                <a:cs typeface="Microsoft YaHei"/>
-              </a:rPr>
-              <a:t>—</a:t>
-            </a:r>
-          </a:p>
-        </p:txBody>
-      </p:sp>
-      <p:sp>
-        <p:nvSpPr>
-          <p:cNvPr id="67" name="TextBox 66"/>
-          <p:cNvSpPr txBox="1"/>
-          <p:nvPr/>
-        </p:nvSpPr>
-        <p:spPr>
-          <a:xfrm>
-            <a:off x="11018520" y="3035808"/>
-            <a:ext cx="512064" cy="329184"/>
-          </a:xfrm>
-          <a:prstGeom prst="rect">
-            <a:avLst/>
-          </a:prstGeom>
-          <a:noFill/>
-        </p:spPr>
-        <p:txBody>
-          <a:bodyPr wrap="square" anchor="ctr" lIns="0" tIns="0" rIns="0" bIns="0">
-            <a:noAutofit/>
-          </a:bodyPr>
-          <a:lstStyle/>
-          <a:p>
-            <a:pPr algn="l" latinLnBrk="0">
-              <a:lnSpc>
-                <a:spcPct val="100000"/>
-              </a:lnSpc>
-              <a:spcBef>
-                <a:spcPts val="0"/>
-              </a:spcBef>
-              <a:spcAft>
-                <a:spcPts val="0"/>
-              </a:spcAft>
-            </a:pPr>
-            <a:r>
-              <a:rPr sz="950" b="0">
-                <a:solidFill>
-                  <a:srgbClr val="8C96A1"/>
-                </a:solidFill>
-                <a:latin typeface="Microsoft YaHei"/>
-                <a:ea typeface="Microsoft YaHei"/>
-                <a:cs typeface="Microsoft YaHei"/>
-              </a:rPr>
-              <a:t>③ 未过</a:t>
-            </a:r>
-          </a:p>
-        </p:txBody>
-      </p:sp>
-      <p:sp>
-        <p:nvSpPr>
-          <p:cNvPr id="68" name="TextBox 67"/>
-          <p:cNvSpPr txBox="1"/>
-          <p:nvPr/>
-        </p:nvSpPr>
-        <p:spPr>
-          <a:xfrm>
-            <a:off x="7470648" y="3401568"/>
-            <a:ext cx="402336" cy="329184"/>
-          </a:xfrm>
-          <a:prstGeom prst="rect">
-            <a:avLst/>
-          </a:prstGeom>
-          <a:noFill/>
-        </p:spPr>
-        <p:txBody>
-          <a:bodyPr wrap="square" anchor="ctr" lIns="0" tIns="0" rIns="0" bIns="0">
-            <a:noAutofit/>
-          </a:bodyPr>
-          <a:lstStyle/>
-          <a:p>
-            <a:pPr algn="l" latinLnBrk="0">
-              <a:lnSpc>
-                <a:spcPct val="100000"/>
-              </a:lnSpc>
-              <a:spcBef>
-                <a:spcPts val="0"/>
-              </a:spcBef>
-              <a:spcAft>
-                <a:spcPts val="0"/>
-              </a:spcAft>
-            </a:pPr>
-            <a:r>
-              <a:rPr sz="950" b="1">
-                <a:solidFill>
-                  <a:srgbClr val="66727F"/>
-                </a:solidFill>
-                <a:latin typeface="Consolas"/>
-                <a:ea typeface="Microsoft YaHei"/>
-                <a:cs typeface="Microsoft YaHei"/>
-              </a:rPr>
-              <a:t>C2</a:t>
-            </a:r>
-          </a:p>
-        </p:txBody>
-      </p:sp>
-      <p:sp>
-        <p:nvSpPr>
-          <p:cNvPr id="69" name="TextBox 68"/>
-          <p:cNvSpPr txBox="1"/>
-          <p:nvPr/>
-        </p:nvSpPr>
-        <p:spPr>
-          <a:xfrm>
-            <a:off x="7872983" y="3401568"/>
-            <a:ext cx="1828800" cy="329184"/>
-          </a:xfrm>
-          <a:prstGeom prst="rect">
-            <a:avLst/>
-          </a:prstGeom>
-          <a:noFill/>
-        </p:spPr>
-        <p:txBody>
-          <a:bodyPr wrap="square" anchor="ctr" lIns="0" tIns="0" rIns="0" bIns="0">
-            <a:noAutofit/>
-          </a:bodyPr>
-          <a:lstStyle/>
-          <a:p>
-            <a:pPr algn="l" latinLnBrk="0">
-              <a:lnSpc>
-                <a:spcPct val="100000"/>
-              </a:lnSpc>
-              <a:spcBef>
-                <a:spcPts val="0"/>
-              </a:spcBef>
-              <a:spcAft>
-                <a:spcPts val="0"/>
-              </a:spcAft>
-            </a:pPr>
-            <a:r>
-              <a:rPr sz="950" b="0">
-                <a:solidFill>
-                  <a:srgbClr val="35424F"/>
-                </a:solidFill>
-                <a:latin typeface="Microsoft YaHei"/>
-                <a:ea typeface="Microsoft YaHei"/>
-                <a:cs typeface="Microsoft YaHei"/>
-              </a:rPr>
-              <a:t>例：换 attention 后端</a:t>
-            </a:r>
-          </a:p>
-        </p:txBody>
-      </p:sp>
-      <p:sp>
-        <p:nvSpPr>
-          <p:cNvPr id="70" name="TextBox 69"/>
-          <p:cNvSpPr txBox="1"/>
-          <p:nvPr/>
-        </p:nvSpPr>
-        <p:spPr>
-          <a:xfrm>
-            <a:off x="9738360" y="3401568"/>
-            <a:ext cx="566928" cy="329184"/>
-          </a:xfrm>
-          <a:prstGeom prst="rect">
-            <a:avLst/>
-          </a:prstGeom>
-          <a:noFill/>
-        </p:spPr>
-        <p:txBody>
-          <a:bodyPr wrap="square" anchor="ctr" lIns="0" tIns="0" rIns="0" bIns="0">
-            <a:noAutofit/>
-          </a:bodyPr>
-          <a:lstStyle/>
-          <a:p>
-            <a:pPr algn="r" latinLnBrk="0">
-              <a:lnSpc>
-                <a:spcPct val="100000"/>
-              </a:lnSpc>
-              <a:spcBef>
-                <a:spcPts val="0"/>
-              </a:spcBef>
-              <a:spcAft>
-                <a:spcPts val="0"/>
-              </a:spcAft>
-            </a:pPr>
-            <a:r>
-              <a:rPr sz="950" b="0">
-                <a:solidFill>
-                  <a:srgbClr val="8C96A1"/>
-                </a:solidFill>
-                <a:latin typeface="Consolas"/>
-                <a:ea typeface="Microsoft YaHei"/>
-                <a:cs typeface="Microsoft YaHei"/>
-              </a:rPr>
-              <a:t>__</a:t>
-            </a:r>
-          </a:p>
-        </p:txBody>
-      </p:sp>
-      <p:sp>
-        <p:nvSpPr>
-          <p:cNvPr id="71" name="TextBox 70"/>
-          <p:cNvSpPr txBox="1"/>
-          <p:nvPr/>
-        </p:nvSpPr>
-        <p:spPr>
-          <a:xfrm>
-            <a:off x="10360152" y="3401568"/>
-            <a:ext cx="566928" cy="329184"/>
-          </a:xfrm>
-          <a:prstGeom prst="rect">
-            <a:avLst/>
-          </a:prstGeom>
-          <a:noFill/>
-        </p:spPr>
-        <p:txBody>
-          <a:bodyPr wrap="square" anchor="ctr" lIns="0" tIns="0" rIns="0" bIns="0">
-            <a:noAutofit/>
-          </a:bodyPr>
-          <a:lstStyle/>
-          <a:p>
-            <a:pPr algn="r" latinLnBrk="0">
-              <a:lnSpc>
-                <a:spcPct val="100000"/>
-              </a:lnSpc>
-              <a:spcBef>
-                <a:spcPts val="0"/>
-              </a:spcBef>
-              <a:spcAft>
-                <a:spcPts val="0"/>
-              </a:spcAft>
-            </a:pPr>
-            <a:r>
-              <a:rPr sz="950" b="0">
-                <a:solidFill>
-                  <a:srgbClr val="8C96A1"/>
-                </a:solidFill>
-                <a:latin typeface="Consolas"/>
-                <a:ea typeface="Microsoft YaHei"/>
-                <a:cs typeface="Microsoft YaHei"/>
-              </a:rPr>
-              <a:t>__</a:t>
-            </a:r>
-          </a:p>
-        </p:txBody>
-      </p:sp>
-      <p:sp>
-        <p:nvSpPr>
-          <p:cNvPr id="72" name="TextBox 71"/>
-          <p:cNvSpPr txBox="1"/>
-          <p:nvPr/>
-        </p:nvSpPr>
-        <p:spPr>
-          <a:xfrm>
-            <a:off x="11018520" y="3401568"/>
-            <a:ext cx="512064" cy="329184"/>
-          </a:xfrm>
-          <a:prstGeom prst="rect">
-            <a:avLst/>
-          </a:prstGeom>
-          <a:noFill/>
-        </p:spPr>
-        <p:txBody>
-          <a:bodyPr wrap="square" anchor="ctr" lIns="0" tIns="0" rIns="0" bIns="0">
-            <a:noAutofit/>
-          </a:bodyPr>
-          <a:lstStyle/>
-          <a:p>
-            <a:pPr algn="l" latinLnBrk="0">
-              <a:lnSpc>
-                <a:spcPct val="100000"/>
-              </a:lnSpc>
-              <a:spcBef>
-                <a:spcPts val="0"/>
-              </a:spcBef>
-              <a:spcAft>
-                <a:spcPts val="0"/>
-              </a:spcAft>
-            </a:pPr>
-            <a:r>
-              <a:rPr sz="950" b="0">
-                <a:solidFill>
-                  <a:srgbClr val="8C96A1"/>
-                </a:solidFill>
-                <a:latin typeface="Microsoft YaHei"/>
-                <a:ea typeface="Microsoft YaHei"/>
-                <a:cs typeface="Microsoft YaHei"/>
-              </a:rPr>
-              <a:t>通过</a:t>
-            </a:r>
-          </a:p>
-        </p:txBody>
-      </p:sp>
-      <p:sp>
-        <p:nvSpPr>
-          <p:cNvPr id="73" name="TextBox 72"/>
-          <p:cNvSpPr txBox="1"/>
-          <p:nvPr/>
-        </p:nvSpPr>
-        <p:spPr>
-          <a:xfrm>
-            <a:off x="7470648" y="3767328"/>
-            <a:ext cx="402336" cy="329184"/>
-          </a:xfrm>
-          <a:prstGeom prst="rect">
-            <a:avLst/>
-          </a:prstGeom>
-          <a:noFill/>
-        </p:spPr>
-        <p:txBody>
-          <a:bodyPr wrap="square" anchor="ctr" lIns="0" tIns="0" rIns="0" bIns="0">
-            <a:noAutofit/>
-          </a:bodyPr>
-          <a:lstStyle/>
-          <a:p>
-            <a:pPr algn="l" latinLnBrk="0">
-              <a:lnSpc>
-                <a:spcPct val="100000"/>
-              </a:lnSpc>
-              <a:spcBef>
-                <a:spcPts val="0"/>
-              </a:spcBef>
-              <a:spcAft>
-                <a:spcPts val="0"/>
-              </a:spcAft>
-            </a:pPr>
-            <a:r>
-              <a:rPr sz="950" b="1">
-                <a:solidFill>
-                  <a:srgbClr val="66727F"/>
-                </a:solidFill>
-                <a:latin typeface="Consolas"/>
-                <a:ea typeface="Microsoft YaHei"/>
-                <a:cs typeface="Microsoft YaHei"/>
-              </a:rPr>
-              <a:t>C3</a:t>
-            </a:r>
-          </a:p>
-        </p:txBody>
-      </p:sp>
-      <p:sp>
-        <p:nvSpPr>
-          <p:cNvPr id="74" name="TextBox 73"/>
-          <p:cNvSpPr txBox="1"/>
-          <p:nvPr/>
-        </p:nvSpPr>
-        <p:spPr>
-          <a:xfrm>
-            <a:off x="7872983" y="3767328"/>
-            <a:ext cx="1828800" cy="329184"/>
-          </a:xfrm>
-          <a:prstGeom prst="rect">
-            <a:avLst/>
-          </a:prstGeom>
-          <a:noFill/>
-        </p:spPr>
-        <p:txBody>
-          <a:bodyPr wrap="square" anchor="ctr" lIns="0" tIns="0" rIns="0" bIns="0">
-            <a:noAutofit/>
-          </a:bodyPr>
-          <a:lstStyle/>
-          <a:p>
-            <a:pPr algn="l" latinLnBrk="0">
-              <a:lnSpc>
-                <a:spcPct val="100000"/>
-              </a:lnSpc>
-              <a:spcBef>
-                <a:spcPts val="0"/>
-              </a:spcBef>
-              <a:spcAft>
-                <a:spcPts val="0"/>
-              </a:spcAft>
-            </a:pPr>
-            <a:r>
-              <a:rPr sz="950" b="0">
-                <a:solidFill>
-                  <a:srgbClr val="35424F"/>
-                </a:solidFill>
-                <a:latin typeface="Microsoft YaHei"/>
-                <a:ea typeface="Microsoft YaHei"/>
-                <a:cs typeface="Microsoft YaHei"/>
-              </a:rPr>
-              <a:t>例：接入算子层新内核</a:t>
-            </a:r>
-          </a:p>
-        </p:txBody>
-      </p:sp>
-      <p:sp>
-        <p:nvSpPr>
-          <p:cNvPr id="75" name="TextBox 74"/>
-          <p:cNvSpPr txBox="1"/>
-          <p:nvPr/>
-        </p:nvSpPr>
-        <p:spPr>
-          <a:xfrm>
-            <a:off x="9738360" y="3767328"/>
-            <a:ext cx="566928" cy="329184"/>
-          </a:xfrm>
-          <a:prstGeom prst="rect">
-            <a:avLst/>
-          </a:prstGeom>
-          <a:noFill/>
-        </p:spPr>
-        <p:txBody>
-          <a:bodyPr wrap="square" anchor="ctr" lIns="0" tIns="0" rIns="0" bIns="0">
-            <a:noAutofit/>
-          </a:bodyPr>
-          <a:lstStyle/>
-          <a:p>
-            <a:pPr algn="r" latinLnBrk="0">
-              <a:lnSpc>
-                <a:spcPct val="100000"/>
-              </a:lnSpc>
-              <a:spcBef>
-                <a:spcPts val="0"/>
-              </a:spcBef>
-              <a:spcAft>
-                <a:spcPts val="0"/>
-              </a:spcAft>
-            </a:pPr>
-            <a:r>
-              <a:rPr sz="950" b="0">
-                <a:solidFill>
-                  <a:srgbClr val="8C96A1"/>
-                </a:solidFill>
-                <a:latin typeface="Consolas"/>
-                <a:ea typeface="Microsoft YaHei"/>
-                <a:cs typeface="Microsoft YaHei"/>
-              </a:rPr>
-              <a:t>—</a:t>
-            </a:r>
-          </a:p>
-        </p:txBody>
-      </p:sp>
-      <p:sp>
-        <p:nvSpPr>
-          <p:cNvPr id="76" name="TextBox 75"/>
-          <p:cNvSpPr txBox="1"/>
-          <p:nvPr/>
-        </p:nvSpPr>
-        <p:spPr>
-          <a:xfrm>
-            <a:off x="10360152" y="3767328"/>
-            <a:ext cx="566928" cy="329184"/>
-          </a:xfrm>
-          <a:prstGeom prst="rect">
-            <a:avLst/>
-          </a:prstGeom>
-          <a:noFill/>
-        </p:spPr>
-        <p:txBody>
-          <a:bodyPr wrap="square" anchor="ctr" lIns="0" tIns="0" rIns="0" bIns="0">
-            <a:noAutofit/>
-          </a:bodyPr>
-          <a:lstStyle/>
-          <a:p>
-            <a:pPr algn="r" latinLnBrk="0">
-              <a:lnSpc>
-                <a:spcPct val="100000"/>
-              </a:lnSpc>
-              <a:spcBef>
-                <a:spcPts val="0"/>
-              </a:spcBef>
-              <a:spcAft>
-                <a:spcPts val="0"/>
-              </a:spcAft>
-            </a:pPr>
-            <a:r>
-              <a:rPr sz="950" b="0">
-                <a:solidFill>
-                  <a:srgbClr val="8C96A1"/>
-                </a:solidFill>
-                <a:latin typeface="Consolas"/>
-                <a:ea typeface="Microsoft YaHei"/>
-                <a:cs typeface="Microsoft YaHei"/>
-              </a:rPr>
-              <a:t>—</a:t>
-            </a:r>
-          </a:p>
-        </p:txBody>
-      </p:sp>
-      <p:sp>
-        <p:nvSpPr>
-          <p:cNvPr id="77" name="TextBox 76"/>
-          <p:cNvSpPr txBox="1"/>
-          <p:nvPr/>
-        </p:nvSpPr>
-        <p:spPr>
-          <a:xfrm>
-            <a:off x="11018520" y="3767328"/>
-            <a:ext cx="512064" cy="329184"/>
-          </a:xfrm>
-          <a:prstGeom prst="rect">
-            <a:avLst/>
-          </a:prstGeom>
-          <a:noFill/>
-        </p:spPr>
-        <p:txBody>
-          <a:bodyPr wrap="square" anchor="ctr" lIns="0" tIns="0" rIns="0" bIns="0">
-            <a:noAutofit/>
-          </a:bodyPr>
-          <a:lstStyle/>
-          <a:p>
-            <a:pPr algn="l" latinLnBrk="0">
-              <a:lnSpc>
-                <a:spcPct val="100000"/>
-              </a:lnSpc>
-              <a:spcBef>
-                <a:spcPts val="0"/>
-              </a:spcBef>
-              <a:spcAft>
-                <a:spcPts val="0"/>
-              </a:spcAft>
-            </a:pPr>
-            <a:r>
-              <a:rPr sz="950" b="0">
-                <a:solidFill>
-                  <a:srgbClr val="8C96A1"/>
-                </a:solidFill>
-                <a:latin typeface="Microsoft YaHei"/>
-                <a:ea typeface="Microsoft YaHei"/>
-                <a:cs typeface="Microsoft YaHei"/>
-              </a:rPr>
-              <a:t>① 未过</a:t>
-            </a:r>
-          </a:p>
-        </p:txBody>
-      </p:sp>
-      <p:sp>
-        <p:nvSpPr>
-          <p:cNvPr id="78" name="Rectangle 77"/>
-          <p:cNvSpPr/>
-          <p:nvPr/>
-        </p:nvSpPr>
-        <p:spPr>
-          <a:xfrm>
-            <a:off x="7397496" y="4133087"/>
-            <a:ext cx="4117543" cy="329184"/>
+            <a:off x="3602736" y="3236976"/>
+            <a:ext cx="7912303" cy="420624"/>
           </a:xfrm>
           <a:prstGeom prst="rect">
             <a:avLst/>
@@ -6263,14 +4403,14 @@
       </p:sp>
       <p:sp>
         <p:nvSpPr>
-          <p:cNvPr id="79" name="TextBox 78"/>
-          <p:cNvSpPr txBox="1"/>
-          <p:nvPr/>
-        </p:nvSpPr>
-        <p:spPr>
-          <a:xfrm>
-            <a:off x="7470648" y="4133087"/>
-            <a:ext cx="402336" cy="329184"/>
+          <p:cNvPr id="31" name="TextBox 30"/>
+          <p:cNvSpPr txBox="1"/>
+          <p:nvPr/>
+        </p:nvSpPr>
+        <p:spPr>
+          <a:xfrm>
+            <a:off x="3675888" y="3236976"/>
+            <a:ext cx="2651760" cy="420624"/>
           </a:xfrm>
           <a:prstGeom prst="rect">
             <a:avLst/>
@@ -6295,445 +4435,847 @@
               </a:spcAft>
             </a:pPr>
             <a:r>
+              <a:rPr sz="950" b="0">
+                <a:solidFill>
+                  <a:srgbClr val="16202A"/>
+                </a:solidFill>
+                <a:latin typeface="Microsoft YaHei"/>
+                <a:ea typeface="Microsoft YaHei"/>
+                <a:cs typeface="Microsoft YaHei"/>
+              </a:rPr>
+              <a:t>量化 + shuffle 换 SDNN 恒定核</a:t>
+            </a:r>
+          </a:p>
+          <a:p>
+            <a:pPr algn="l" latinLnBrk="0">
+              <a:lnSpc>
+                <a:spcPct val="100000"/>
+              </a:lnSpc>
+              <a:spcBef>
+                <a:spcPts val="0"/>
+              </a:spcBef>
+              <a:spcAft>
+                <a:spcPts val="0"/>
+              </a:spcAft>
+            </a:pPr>
+            <a:r>
+              <a:rPr sz="950" b="0">
+                <a:solidFill>
+                  <a:srgbClr val="16202A"/>
+                </a:solidFill>
+                <a:latin typeface="Microsoft YaHei"/>
+                <a:ea typeface="Microsoft YaHei"/>
+                <a:cs typeface="Microsoft YaHei"/>
+              </a:rPr>
+              <a:t>现用核随 rows×hidden 从 20 涨到 141 µs</a:t>
+            </a:r>
+          </a:p>
+        </p:txBody>
+      </p:sp>
+      <p:sp>
+        <p:nvSpPr>
+          <p:cNvPr id="32" name="TextBox 31"/>
+          <p:cNvSpPr txBox="1"/>
+          <p:nvPr/>
+        </p:nvSpPr>
+        <p:spPr>
+          <a:xfrm>
+            <a:off x="6419088" y="3236976"/>
+            <a:ext cx="2002536" cy="420624"/>
+          </a:xfrm>
+          <a:prstGeom prst="rect">
+            <a:avLst/>
+          </a:prstGeom>
+          <a:noFill/>
+        </p:spPr>
+        <p:txBody>
+          <a:bodyPr wrap="square" anchor="ctr" lIns="0" tIns="0" rIns="0" bIns="0">
+            <a:noAutofit/>
+          </a:bodyPr>
+          <a:lstStyle/>
+          <a:p>
+            <a:pPr algn="l" latinLnBrk="0">
+              <a:lnSpc>
+                <a:spcPct val="100000"/>
+              </a:lnSpc>
+              <a:spcBef>
+                <a:spcPts val="0"/>
+              </a:spcBef>
+              <a:spcAft>
+                <a:spcPts val="0"/>
+              </a:spcAft>
+            </a:pPr>
+            <a:r>
+              <a:rPr sz="950" b="0">
+                <a:solidFill>
+                  <a:srgbClr val="35424F"/>
+                </a:solidFill>
+                <a:latin typeface="Microsoft YaHei"/>
+                <a:ea typeface="Microsoft YaHei"/>
+                <a:cs typeface="Microsoft YaHei"/>
+              </a:rPr>
+              <a:t>微基准 c128 5.43×，cos = 1.0</a:t>
+            </a:r>
+          </a:p>
+        </p:txBody>
+      </p:sp>
+      <p:sp>
+        <p:nvSpPr>
+          <p:cNvPr id="33" name="TextBox 32"/>
+          <p:cNvSpPr txBox="1"/>
+          <p:nvPr/>
+        </p:nvSpPr>
+        <p:spPr>
+          <a:xfrm>
+            <a:off x="8513064" y="3236976"/>
+            <a:ext cx="1280160" cy="420624"/>
+          </a:xfrm>
+          <a:prstGeom prst="rect">
+            <a:avLst/>
+          </a:prstGeom>
+          <a:noFill/>
+        </p:spPr>
+        <p:txBody>
+          <a:bodyPr wrap="square" anchor="ctr" lIns="0" tIns="0" rIns="0" bIns="0">
+            <a:noAutofit/>
+          </a:bodyPr>
+          <a:lstStyle/>
+          <a:p>
+            <a:pPr algn="l" latinLnBrk="0">
+              <a:lnSpc>
+                <a:spcPct val="100000"/>
+              </a:lnSpc>
+              <a:spcBef>
+                <a:spcPts val="0"/>
+              </a:spcBef>
+              <a:spcAft>
+                <a:spcPts val="0"/>
+              </a:spcAft>
+            </a:pPr>
+            <a:r>
+              <a:rPr sz="950" b="0">
+                <a:solidFill>
+                  <a:srgbClr val="35424F"/>
+                </a:solidFill>
+                <a:latin typeface="Microsoft YaHei"/>
+                <a:ea typeface="Microsoft YaHei"/>
+                <a:cs typeface="Microsoft YaHei"/>
+              </a:rPr>
+              <a:t>E2E 吞吐 +3%</a:t>
+            </a:r>
+          </a:p>
+          <a:p>
+            <a:pPr algn="l" latinLnBrk="0">
+              <a:lnSpc>
+                <a:spcPct val="100000"/>
+              </a:lnSpc>
+              <a:spcBef>
+                <a:spcPts val="0"/>
+              </a:spcBef>
+              <a:spcAft>
+                <a:spcPts val="0"/>
+              </a:spcAft>
+            </a:pPr>
+            <a:r>
+              <a:rPr sz="950" b="0">
+                <a:solidFill>
+                  <a:srgbClr val="35424F"/>
+                </a:solidFill>
+                <a:latin typeface="Microsoft YaHei"/>
+                <a:ea typeface="Microsoft YaHei"/>
+                <a:cs typeface="Microsoft YaHei"/>
+              </a:rPr>
+              <a:t>TPOT −3.4%</a:t>
+            </a:r>
+          </a:p>
+        </p:txBody>
+      </p:sp>
+      <p:sp>
+        <p:nvSpPr>
+          <p:cNvPr id="34" name="TextBox 33"/>
+          <p:cNvSpPr txBox="1"/>
+          <p:nvPr/>
+        </p:nvSpPr>
+        <p:spPr>
+          <a:xfrm>
+            <a:off x="9884664" y="3236976"/>
+            <a:ext cx="1554480" cy="420624"/>
+          </a:xfrm>
+          <a:prstGeom prst="rect">
+            <a:avLst/>
+          </a:prstGeom>
+          <a:noFill/>
+        </p:spPr>
+        <p:txBody>
+          <a:bodyPr wrap="square" anchor="ctr" lIns="0" tIns="0" rIns="0" bIns="0">
+            <a:noAutofit/>
+          </a:bodyPr>
+          <a:lstStyle/>
+          <a:p>
+            <a:pPr algn="l" latinLnBrk="0">
+              <a:lnSpc>
+                <a:spcPct val="100000"/>
+              </a:lnSpc>
+              <a:spcBef>
+                <a:spcPts val="0"/>
+              </a:spcBef>
+              <a:spcAft>
+                <a:spcPts val="0"/>
+              </a:spcAft>
+            </a:pPr>
+            <a:r>
               <a:rPr sz="950" b="1">
                 <a:solidFill>
+                  <a:srgbClr val="3F63A8"/>
+                </a:solidFill>
+                <a:latin typeface="Microsoft YaHei"/>
+                <a:ea typeface="Microsoft YaHei"/>
+                <a:cs typeface="Microsoft YaHei"/>
+              </a:rPr>
+              <a:t>交付</a:t>
+            </a:r>
+          </a:p>
+        </p:txBody>
+      </p:sp>
+      <p:sp>
+        <p:nvSpPr>
+          <p:cNvPr id="35" name="TextBox 34"/>
+          <p:cNvSpPr txBox="1"/>
+          <p:nvPr/>
+        </p:nvSpPr>
+        <p:spPr>
+          <a:xfrm>
+            <a:off x="3675888" y="3694176"/>
+            <a:ext cx="2651760" cy="566928"/>
+          </a:xfrm>
+          <a:prstGeom prst="rect">
+            <a:avLst/>
+          </a:prstGeom>
+          <a:noFill/>
+        </p:spPr>
+        <p:txBody>
+          <a:bodyPr wrap="square" anchor="ctr" lIns="0" tIns="0" rIns="0" bIns="0">
+            <a:noAutofit/>
+          </a:bodyPr>
+          <a:lstStyle/>
+          <a:p>
+            <a:pPr algn="l" latinLnBrk="0">
+              <a:lnSpc>
+                <a:spcPct val="100000"/>
+              </a:lnSpc>
+              <a:spcBef>
+                <a:spcPts val="0"/>
+              </a:spcBef>
+              <a:spcAft>
+                <a:spcPts val="0"/>
+              </a:spcAft>
+            </a:pPr>
+            <a:r>
+              <a:rPr sz="950" b="0">
+                <a:solidFill>
+                  <a:srgbClr val="35424F"/>
+                </a:solidFill>
+                <a:latin typeface="Microsoft YaHei"/>
+                <a:ea typeface="Microsoft YaHei"/>
+                <a:cs typeface="Microsoft YaHei"/>
+              </a:rPr>
+              <a:t>grouped-GEMM group-mode 四个旋钮</a:t>
+            </a:r>
+          </a:p>
+        </p:txBody>
+      </p:sp>
+      <p:sp>
+        <p:nvSpPr>
+          <p:cNvPr id="36" name="TextBox 35"/>
+          <p:cNvSpPr txBox="1"/>
+          <p:nvPr/>
+        </p:nvSpPr>
+        <p:spPr>
+          <a:xfrm>
+            <a:off x="6419088" y="3694176"/>
+            <a:ext cx="2002536" cy="566928"/>
+          </a:xfrm>
+          <a:prstGeom prst="rect">
+            <a:avLst/>
+          </a:prstGeom>
+          <a:noFill/>
+        </p:spPr>
+        <p:txBody>
+          <a:bodyPr wrap="square" anchor="ctr" lIns="0" tIns="0" rIns="0" bIns="0">
+            <a:noAutofit/>
+          </a:bodyPr>
+          <a:lstStyle/>
+          <a:p>
+            <a:pPr algn="l" latinLnBrk="0">
+              <a:lnSpc>
+                <a:spcPct val="100000"/>
+              </a:lnSpc>
+              <a:spcBef>
+                <a:spcPts val="0"/>
+              </a:spcBef>
+              <a:spcAft>
+                <a:spcPts val="0"/>
+              </a:spcAft>
+            </a:pPr>
+            <a:r>
+              <a:rPr sz="950" b="0">
+                <a:solidFill>
+                  <a:srgbClr val="35424F"/>
+                </a:solidFill>
+                <a:latin typeface="Microsoft YaHei"/>
+                <a:ea typeface="Microsoft YaHei"/>
+                <a:cs typeface="Microsoft YaHei"/>
+              </a:rPr>
+              <a:t>四模式完全同速</a:t>
+            </a:r>
+          </a:p>
+          <a:p>
+            <a:pPr algn="l" latinLnBrk="0">
+              <a:lnSpc>
+                <a:spcPct val="100000"/>
+              </a:lnSpc>
+              <a:spcBef>
+                <a:spcPts val="0"/>
+              </a:spcBef>
+              <a:spcAft>
+                <a:spcPts val="0"/>
+              </a:spcAft>
+            </a:pPr>
+            <a:r>
+              <a:rPr sz="950" b="0">
+                <a:solidFill>
+                  <a:srgbClr val="35424F"/>
+                </a:solidFill>
+                <a:latin typeface="Microsoft YaHei"/>
+                <a:ea typeface="Microsoft YaHei"/>
+                <a:cs typeface="Microsoft YaHei"/>
+              </a:rPr>
+              <a:t>force_nogroup −20%</a:t>
+            </a:r>
+          </a:p>
+          <a:p>
+            <a:pPr algn="l" latinLnBrk="0">
+              <a:lnSpc>
+                <a:spcPct val="100000"/>
+              </a:lnSpc>
+              <a:spcBef>
+                <a:spcPts val="0"/>
+              </a:spcBef>
+              <a:spcAft>
+                <a:spcPts val="0"/>
+              </a:spcAft>
+            </a:pPr>
+            <a:r>
+              <a:rPr sz="950" b="0">
+                <a:solidFill>
+                  <a:srgbClr val="35424F"/>
+                </a:solidFill>
+                <a:latin typeface="Microsoft YaHei"/>
+                <a:ea typeface="Microsoft YaHei"/>
+                <a:cs typeface="Microsoft YaHei"/>
+              </a:rPr>
+              <a:t>no_group cos 0.000</a:t>
+            </a:r>
+          </a:p>
+        </p:txBody>
+      </p:sp>
+      <p:sp>
+        <p:nvSpPr>
+          <p:cNvPr id="37" name="TextBox 36"/>
+          <p:cNvSpPr txBox="1"/>
+          <p:nvPr/>
+        </p:nvSpPr>
+        <p:spPr>
+          <a:xfrm>
+            <a:off x="8513064" y="3694176"/>
+            <a:ext cx="1280160" cy="566928"/>
+          </a:xfrm>
+          <a:prstGeom prst="rect">
+            <a:avLst/>
+          </a:prstGeom>
+          <a:noFill/>
+        </p:spPr>
+        <p:txBody>
+          <a:bodyPr wrap="square" anchor="ctr" lIns="0" tIns="0" rIns="0" bIns="0">
+            <a:noAutofit/>
+          </a:bodyPr>
+          <a:lstStyle/>
+          <a:p>
+            <a:pPr algn="l" latinLnBrk="0">
+              <a:lnSpc>
+                <a:spcPct val="100000"/>
+              </a:lnSpc>
+              <a:spcBef>
+                <a:spcPts val="0"/>
+              </a:spcBef>
+              <a:spcAft>
+                <a:spcPts val="0"/>
+              </a:spcAft>
+            </a:pPr>
+            <a:r>
+              <a:rPr sz="950" b="0">
+                <a:solidFill>
+                  <a:srgbClr val="8C96A1"/>
+                </a:solidFill>
+                <a:latin typeface="Microsoft YaHei"/>
+                <a:ea typeface="Microsoft YaHei"/>
+                <a:cs typeface="Microsoft YaHei"/>
+              </a:rPr>
+              <a:t>—</a:t>
+            </a:r>
+          </a:p>
+        </p:txBody>
+      </p:sp>
+      <p:sp>
+        <p:nvSpPr>
+          <p:cNvPr id="38" name="TextBox 37"/>
+          <p:cNvSpPr txBox="1"/>
+          <p:nvPr/>
+        </p:nvSpPr>
+        <p:spPr>
+          <a:xfrm>
+            <a:off x="9884664" y="3694176"/>
+            <a:ext cx="1554480" cy="566928"/>
+          </a:xfrm>
+          <a:prstGeom prst="rect">
+            <a:avLst/>
+          </a:prstGeom>
+          <a:noFill/>
+        </p:spPr>
+        <p:txBody>
+          <a:bodyPr wrap="square" anchor="ctr" lIns="0" tIns="0" rIns="0" bIns="0">
+            <a:noAutofit/>
+          </a:bodyPr>
+          <a:lstStyle/>
+          <a:p>
+            <a:pPr algn="l" latinLnBrk="0">
+              <a:lnSpc>
+                <a:spcPct val="100000"/>
+              </a:lnSpc>
+              <a:spcBef>
+                <a:spcPts val="0"/>
+              </a:spcBef>
+              <a:spcAft>
+                <a:spcPts val="0"/>
+              </a:spcAft>
+            </a:pPr>
+            <a:r>
+              <a:rPr sz="950" b="0">
+                <a:solidFill>
+                  <a:srgbClr val="B4382F"/>
+                </a:solidFill>
+                <a:latin typeface="Microsoft YaHei"/>
+                <a:ea typeface="Microsoft YaHei"/>
+                <a:cs typeface="Microsoft YaHei"/>
+              </a:rPr>
+              <a:t>① 挡掉一个，③ 挡掉其余</a:t>
+            </a:r>
+          </a:p>
+          <a:p>
+            <a:pPr algn="l" latinLnBrk="0">
+              <a:lnSpc>
+                <a:spcPct val="100000"/>
+              </a:lnSpc>
+              <a:spcBef>
+                <a:spcPts val="0"/>
+              </a:spcBef>
+              <a:spcAft>
+                <a:spcPts val="0"/>
+              </a:spcAft>
+            </a:pPr>
+            <a:r>
+              <a:rPr sz="950" b="0">
+                <a:solidFill>
+                  <a:srgbClr val="B4382F"/>
+                </a:solidFill>
+                <a:latin typeface="Microsoft YaHei"/>
+                <a:ea typeface="Microsoft YaHei"/>
+                <a:cs typeface="Microsoft YaHei"/>
+              </a:rPr>
+              <a:t>判定为闭源核内在开销</a:t>
+            </a:r>
+          </a:p>
+        </p:txBody>
+      </p:sp>
+      <p:sp>
+        <p:nvSpPr>
+          <p:cNvPr id="39" name="TextBox 38"/>
+          <p:cNvSpPr txBox="1"/>
+          <p:nvPr/>
+        </p:nvSpPr>
+        <p:spPr>
+          <a:xfrm>
+            <a:off x="3675888" y="4297680"/>
+            <a:ext cx="2651760" cy="274320"/>
+          </a:xfrm>
+          <a:prstGeom prst="rect">
+            <a:avLst/>
+          </a:prstGeom>
+          <a:noFill/>
+        </p:spPr>
+        <p:txBody>
+          <a:bodyPr wrap="square" anchor="ctr" lIns="0" tIns="0" rIns="0" bIns="0">
+            <a:noAutofit/>
+          </a:bodyPr>
+          <a:lstStyle/>
+          <a:p>
+            <a:pPr algn="l" latinLnBrk="0">
+              <a:lnSpc>
+                <a:spcPct val="100000"/>
+              </a:lnSpc>
+              <a:spcBef>
+                <a:spcPts val="0"/>
+              </a:spcBef>
+              <a:spcAft>
+                <a:spcPts val="0"/>
+              </a:spcAft>
+            </a:pPr>
+            <a:r>
+              <a:rPr sz="950" b="0">
+                <a:solidFill>
+                  <a:srgbClr val="35424F"/>
+                </a:solidFill>
+                <a:latin typeface="Microsoft YaHei"/>
+                <a:ea typeface="Microsoft YaHei"/>
+                <a:cs typeface="Microsoft YaHei"/>
+              </a:rPr>
+              <a:t>FFN 输出合并换 shuffle_mul_sum_sdnn</a:t>
+            </a:r>
+          </a:p>
+        </p:txBody>
+      </p:sp>
+      <p:sp>
+        <p:nvSpPr>
+          <p:cNvPr id="40" name="TextBox 39"/>
+          <p:cNvSpPr txBox="1"/>
+          <p:nvPr/>
+        </p:nvSpPr>
+        <p:spPr>
+          <a:xfrm>
+            <a:off x="6419088" y="4297680"/>
+            <a:ext cx="2002536" cy="274320"/>
+          </a:xfrm>
+          <a:prstGeom prst="rect">
+            <a:avLst/>
+          </a:prstGeom>
+          <a:noFill/>
+        </p:spPr>
+        <p:txBody>
+          <a:bodyPr wrap="square" anchor="ctr" lIns="0" tIns="0" rIns="0" bIns="0">
+            <a:noAutofit/>
+          </a:bodyPr>
+          <a:lstStyle/>
+          <a:p>
+            <a:pPr algn="l" latinLnBrk="0">
+              <a:lnSpc>
+                <a:spcPct val="100000"/>
+              </a:lnSpc>
+              <a:spcBef>
+                <a:spcPts val="0"/>
+              </a:spcBef>
+              <a:spcAft>
+                <a:spcPts val="0"/>
+              </a:spcAft>
+            </a:pPr>
+            <a:r>
+              <a:rPr sz="950" b="0">
+                <a:solidFill>
+                  <a:srgbClr val="35424F"/>
+                </a:solidFill>
+                <a:latin typeface="Microsoft YaHei"/>
+                <a:ea typeface="Microsoft YaHei"/>
+                <a:cs typeface="Microsoft YaHei"/>
+              </a:rPr>
+              <a:t>0.61×，更慢</a:t>
+            </a:r>
+          </a:p>
+        </p:txBody>
+      </p:sp>
+      <p:sp>
+        <p:nvSpPr>
+          <p:cNvPr id="41" name="TextBox 40"/>
+          <p:cNvSpPr txBox="1"/>
+          <p:nvPr/>
+        </p:nvSpPr>
+        <p:spPr>
+          <a:xfrm>
+            <a:off x="8513064" y="4297680"/>
+            <a:ext cx="1280160" cy="274320"/>
+          </a:xfrm>
+          <a:prstGeom prst="rect">
+            <a:avLst/>
+          </a:prstGeom>
+          <a:noFill/>
+        </p:spPr>
+        <p:txBody>
+          <a:bodyPr wrap="square" anchor="ctr" lIns="0" tIns="0" rIns="0" bIns="0">
+            <a:noAutofit/>
+          </a:bodyPr>
+          <a:lstStyle/>
+          <a:p>
+            <a:pPr algn="l" latinLnBrk="0">
+              <a:lnSpc>
+                <a:spcPct val="100000"/>
+              </a:lnSpc>
+              <a:spcBef>
+                <a:spcPts val="0"/>
+              </a:spcBef>
+              <a:spcAft>
+                <a:spcPts val="0"/>
+              </a:spcAft>
+            </a:pPr>
+            <a:r>
+              <a:rPr sz="950" b="0">
+                <a:solidFill>
+                  <a:srgbClr val="8C96A1"/>
+                </a:solidFill>
+                <a:latin typeface="Microsoft YaHei"/>
+                <a:ea typeface="Microsoft YaHei"/>
+                <a:cs typeface="Microsoft YaHei"/>
+              </a:rPr>
+              <a:t>—</a:t>
+            </a:r>
+          </a:p>
+        </p:txBody>
+      </p:sp>
+      <p:sp>
+        <p:nvSpPr>
+          <p:cNvPr id="42" name="TextBox 41"/>
+          <p:cNvSpPr txBox="1"/>
+          <p:nvPr/>
+        </p:nvSpPr>
+        <p:spPr>
+          <a:xfrm>
+            <a:off x="9884664" y="4297680"/>
+            <a:ext cx="1554480" cy="274320"/>
+          </a:xfrm>
+          <a:prstGeom prst="rect">
+            <a:avLst/>
+          </a:prstGeom>
+          <a:noFill/>
+        </p:spPr>
+        <p:txBody>
+          <a:bodyPr wrap="square" anchor="ctr" lIns="0" tIns="0" rIns="0" bIns="0">
+            <a:noAutofit/>
+          </a:bodyPr>
+          <a:lstStyle/>
+          <a:p>
+            <a:pPr algn="l" latinLnBrk="0">
+              <a:lnSpc>
+                <a:spcPct val="100000"/>
+              </a:lnSpc>
+              <a:spcBef>
+                <a:spcPts val="0"/>
+              </a:spcBef>
+              <a:spcAft>
+                <a:spcPts val="0"/>
+              </a:spcAft>
+            </a:pPr>
+            <a:r>
+              <a:rPr sz="950" b="0">
+                <a:solidFill>
+                  <a:srgbClr val="B4382F"/>
+                </a:solidFill>
+                <a:latin typeface="Microsoft YaHei"/>
+                <a:ea typeface="Microsoft YaHei"/>
+                <a:cs typeface="Microsoft YaHei"/>
+              </a:rPr>
+              <a:t>③ 未过</a:t>
+            </a:r>
+          </a:p>
+        </p:txBody>
+      </p:sp>
+      <p:sp>
+        <p:nvSpPr>
+          <p:cNvPr id="43" name="TextBox 42"/>
+          <p:cNvSpPr txBox="1"/>
+          <p:nvPr/>
+        </p:nvSpPr>
+        <p:spPr>
+          <a:xfrm>
+            <a:off x="3675888" y="4608576"/>
+            <a:ext cx="2651760" cy="274320"/>
+          </a:xfrm>
+          <a:prstGeom prst="rect">
+            <a:avLst/>
+          </a:prstGeom>
+          <a:noFill/>
+        </p:spPr>
+        <p:txBody>
+          <a:bodyPr wrap="square" anchor="ctr" lIns="0" tIns="0" rIns="0" bIns="0">
+            <a:noAutofit/>
+          </a:bodyPr>
+          <a:lstStyle/>
+          <a:p>
+            <a:pPr algn="l" latinLnBrk="0">
+              <a:lnSpc>
+                <a:spcPct val="100000"/>
+              </a:lnSpc>
+              <a:spcBef>
+                <a:spcPts val="0"/>
+              </a:spcBef>
+              <a:spcAft>
+                <a:spcPts val="0"/>
+              </a:spcAft>
+            </a:pPr>
+            <a:r>
+              <a:rPr sz="950" b="0">
+                <a:solidFill>
+                  <a:srgbClr val="35424F"/>
+                </a:solidFill>
+                <a:latin typeface="Microsoft YaHei"/>
+                <a:ea typeface="Microsoft YaHei"/>
+                <a:cs typeface="Microsoft YaHei"/>
+              </a:rPr>
+              <a:t>路由 softmax + topk + renorm 融合</a:t>
+            </a:r>
+          </a:p>
+        </p:txBody>
+      </p:sp>
+      <p:sp>
+        <p:nvSpPr>
+          <p:cNvPr id="44" name="TextBox 43"/>
+          <p:cNvSpPr txBox="1"/>
+          <p:nvPr/>
+        </p:nvSpPr>
+        <p:spPr>
+          <a:xfrm>
+            <a:off x="6419088" y="4608576"/>
+            <a:ext cx="2002536" cy="274320"/>
+          </a:xfrm>
+          <a:prstGeom prst="rect">
+            <a:avLst/>
+          </a:prstGeom>
+          <a:noFill/>
+        </p:spPr>
+        <p:txBody>
+          <a:bodyPr wrap="square" anchor="ctr" lIns="0" tIns="0" rIns="0" bIns="0">
+            <a:noAutofit/>
+          </a:bodyPr>
+          <a:lstStyle/>
+          <a:p>
+            <a:pPr algn="l" latinLnBrk="0">
+              <a:lnSpc>
+                <a:spcPct val="100000"/>
+              </a:lnSpc>
+              <a:spcBef>
+                <a:spcPts val="0"/>
+              </a:spcBef>
+              <a:spcAft>
+                <a:spcPts val="0"/>
+              </a:spcAft>
+            </a:pPr>
+            <a:r>
+              <a:rPr sz="950" b="0">
+                <a:solidFill>
+                  <a:srgbClr val="35424F"/>
+                </a:solidFill>
+                <a:latin typeface="Microsoft YaHei"/>
+                <a:ea typeface="Microsoft YaHei"/>
+                <a:cs typeface="Microsoft YaHei"/>
+              </a:rPr>
+              <a:t>内核 2×，数值对（Δ 3e-8）</a:t>
+            </a:r>
+          </a:p>
+        </p:txBody>
+      </p:sp>
+      <p:sp>
+        <p:nvSpPr>
+          <p:cNvPr id="45" name="TextBox 44"/>
+          <p:cNvSpPr txBox="1"/>
+          <p:nvPr/>
+        </p:nvSpPr>
+        <p:spPr>
+          <a:xfrm>
+            <a:off x="8513064" y="4608576"/>
+            <a:ext cx="1280160" cy="274320"/>
+          </a:xfrm>
+          <a:prstGeom prst="rect">
+            <a:avLst/>
+          </a:prstGeom>
+          <a:noFill/>
+        </p:spPr>
+        <p:txBody>
+          <a:bodyPr wrap="square" anchor="ctr" lIns="0" tIns="0" rIns="0" bIns="0">
+            <a:noAutofit/>
+          </a:bodyPr>
+          <a:lstStyle/>
+          <a:p>
+            <a:pPr algn="l" latinLnBrk="0">
+              <a:lnSpc>
+                <a:spcPct val="100000"/>
+              </a:lnSpc>
+              <a:spcBef>
+                <a:spcPts val="0"/>
+              </a:spcBef>
+              <a:spcAft>
+                <a:spcPts val="0"/>
+              </a:spcAft>
+            </a:pPr>
+            <a:r>
+              <a:rPr sz="950" b="0">
+                <a:solidFill>
+                  <a:srgbClr val="35424F"/>
+                </a:solidFill>
+                <a:latin typeface="Microsoft YaHei"/>
+                <a:ea typeface="Microsoft YaHei"/>
+                <a:cs typeface="Microsoft YaHei"/>
+              </a:rPr>
+              <a:t>只占 ~0.9% TPOT</a:t>
+            </a:r>
+          </a:p>
+        </p:txBody>
+      </p:sp>
+      <p:sp>
+        <p:nvSpPr>
+          <p:cNvPr id="46" name="TextBox 45"/>
+          <p:cNvSpPr txBox="1"/>
+          <p:nvPr/>
+        </p:nvSpPr>
+        <p:spPr>
+          <a:xfrm>
+            <a:off x="9884664" y="4608576"/>
+            <a:ext cx="1554480" cy="274320"/>
+          </a:xfrm>
+          <a:prstGeom prst="rect">
+            <a:avLst/>
+          </a:prstGeom>
+          <a:noFill/>
+        </p:spPr>
+        <p:txBody>
+          <a:bodyPr wrap="square" anchor="ctr" lIns="0" tIns="0" rIns="0" bIns="0">
+            <a:noAutofit/>
+          </a:bodyPr>
+          <a:lstStyle/>
+          <a:p>
+            <a:pPr algn="l" latinLnBrk="0">
+              <a:lnSpc>
+                <a:spcPct val="100000"/>
+              </a:lnSpc>
+              <a:spcBef>
+                <a:spcPts val="0"/>
+              </a:spcBef>
+              <a:spcAft>
+                <a:spcPts val="0"/>
+              </a:spcAft>
+            </a:pPr>
+            <a:r>
+              <a:rPr sz="950" b="0">
+                <a:solidFill>
                   <a:srgbClr val="66727F"/>
                 </a:solidFill>
-                <a:latin typeface="Consolas"/>
-                <a:ea typeface="Microsoft YaHei"/>
-                <a:cs typeface="Microsoft YaHei"/>
-              </a:rPr>
-              <a:t>C4</a:t>
-            </a:r>
-          </a:p>
-        </p:txBody>
-      </p:sp>
-      <p:sp>
-        <p:nvSpPr>
-          <p:cNvPr id="80" name="TextBox 79"/>
-          <p:cNvSpPr txBox="1"/>
-          <p:nvPr/>
-        </p:nvSpPr>
-        <p:spPr>
-          <a:xfrm>
-            <a:off x="7872983" y="4133087"/>
-            <a:ext cx="1828800" cy="329184"/>
-          </a:xfrm>
-          <a:prstGeom prst="rect">
-            <a:avLst/>
-          </a:prstGeom>
-          <a:noFill/>
-        </p:spPr>
-        <p:txBody>
-          <a:bodyPr wrap="square" anchor="ctr" lIns="0" tIns="0" rIns="0" bIns="0">
-            <a:noAutofit/>
-          </a:bodyPr>
-          <a:lstStyle/>
-          <a:p>
-            <a:pPr algn="l" latinLnBrk="0">
-              <a:lnSpc>
-                <a:spcPct val="100000"/>
-              </a:lnSpc>
-              <a:spcBef>
-                <a:spcPts val="0"/>
-              </a:spcBef>
-              <a:spcAft>
-                <a:spcPts val="0"/>
-              </a:spcAft>
-            </a:pPr>
-            <a:r>
-              <a:rPr sz="950" b="0">
-                <a:solidFill>
-                  <a:srgbClr val="16202A"/>
-                </a:solidFill>
                 <a:latin typeface="Microsoft YaHei"/>
                 <a:ea typeface="Microsoft YaHei"/>
                 <a:cs typeface="Microsoft YaHei"/>
               </a:rPr>
-              <a:t>例：KV 缓存与复用策略</a:t>
-            </a:r>
-          </a:p>
-        </p:txBody>
-      </p:sp>
-      <p:sp>
-        <p:nvSpPr>
-          <p:cNvPr id="81" name="TextBox 80"/>
-          <p:cNvSpPr txBox="1"/>
-          <p:nvPr/>
-        </p:nvSpPr>
-        <p:spPr>
-          <a:xfrm>
-            <a:off x="9738360" y="4133087"/>
-            <a:ext cx="566928" cy="329184"/>
-          </a:xfrm>
-          <a:prstGeom prst="rect">
-            <a:avLst/>
-          </a:prstGeom>
-          <a:noFill/>
-        </p:spPr>
-        <p:txBody>
-          <a:bodyPr wrap="square" anchor="ctr" lIns="0" tIns="0" rIns="0" bIns="0">
-            <a:noAutofit/>
-          </a:bodyPr>
-          <a:lstStyle/>
-          <a:p>
-            <a:pPr algn="r" latinLnBrk="0">
-              <a:lnSpc>
-                <a:spcPct val="100000"/>
-              </a:lnSpc>
-              <a:spcBef>
-                <a:spcPts val="0"/>
-              </a:spcBef>
-              <a:spcAft>
-                <a:spcPts val="0"/>
-              </a:spcAft>
-            </a:pPr>
-            <a:r>
-              <a:rPr sz="950" b="0">
-                <a:solidFill>
-                  <a:srgbClr val="8C96A1"/>
-                </a:solidFill>
-                <a:latin typeface="Consolas"/>
-                <a:ea typeface="Microsoft YaHei"/>
-                <a:cs typeface="Microsoft YaHei"/>
-              </a:rPr>
-              <a:t>__</a:t>
-            </a:r>
-          </a:p>
-        </p:txBody>
-      </p:sp>
-      <p:sp>
-        <p:nvSpPr>
-          <p:cNvPr id="82" name="TextBox 81"/>
-          <p:cNvSpPr txBox="1"/>
-          <p:nvPr/>
-        </p:nvSpPr>
-        <p:spPr>
-          <a:xfrm>
-            <a:off x="10360152" y="4133087"/>
-            <a:ext cx="566928" cy="329184"/>
-          </a:xfrm>
-          <a:prstGeom prst="rect">
-            <a:avLst/>
-          </a:prstGeom>
-          <a:noFill/>
-        </p:spPr>
-        <p:txBody>
-          <a:bodyPr wrap="square" anchor="ctr" lIns="0" tIns="0" rIns="0" bIns="0">
-            <a:noAutofit/>
-          </a:bodyPr>
-          <a:lstStyle/>
-          <a:p>
-            <a:pPr algn="r" latinLnBrk="0">
-              <a:lnSpc>
-                <a:spcPct val="100000"/>
-              </a:lnSpc>
-              <a:spcBef>
-                <a:spcPts val="0"/>
-              </a:spcBef>
-              <a:spcAft>
-                <a:spcPts val="0"/>
-              </a:spcAft>
-            </a:pPr>
-            <a:r>
-              <a:rPr sz="950" b="0">
-                <a:solidFill>
-                  <a:srgbClr val="8C96A1"/>
-                </a:solidFill>
-                <a:latin typeface="Consolas"/>
-                <a:ea typeface="Microsoft YaHei"/>
-                <a:cs typeface="Microsoft YaHei"/>
-              </a:rPr>
-              <a:t>__</a:t>
-            </a:r>
-          </a:p>
-        </p:txBody>
-      </p:sp>
-      <p:sp>
-        <p:nvSpPr>
-          <p:cNvPr id="83" name="TextBox 82"/>
-          <p:cNvSpPr txBox="1"/>
-          <p:nvPr/>
-        </p:nvSpPr>
-        <p:spPr>
-          <a:xfrm>
-            <a:off x="11018520" y="4133087"/>
-            <a:ext cx="512064" cy="329184"/>
-          </a:xfrm>
-          <a:prstGeom prst="rect">
-            <a:avLst/>
-          </a:prstGeom>
-          <a:noFill/>
-        </p:spPr>
-        <p:txBody>
-          <a:bodyPr wrap="square" anchor="ctr" lIns="0" tIns="0" rIns="0" bIns="0">
-            <a:noAutofit/>
-          </a:bodyPr>
-          <a:lstStyle/>
-          <a:p>
-            <a:pPr algn="l" latinLnBrk="0">
-              <a:lnSpc>
-                <a:spcPct val="100000"/>
-              </a:lnSpc>
-              <a:spcBef>
-                <a:spcPts val="0"/>
-              </a:spcBef>
-              <a:spcAft>
-                <a:spcPts val="0"/>
-              </a:spcAft>
-            </a:pPr>
-            <a:r>
-              <a:rPr sz="950" b="1">
-                <a:solidFill>
-                  <a:srgbClr val="35424F"/>
-                </a:solidFill>
-                <a:latin typeface="Microsoft YaHei"/>
-                <a:ea typeface="Microsoft YaHei"/>
-                <a:cs typeface="Microsoft YaHei"/>
-              </a:rPr>
-              <a:t>交付</a:t>
-            </a:r>
-          </a:p>
-        </p:txBody>
-      </p:sp>
-      <p:sp>
-        <p:nvSpPr>
-          <p:cNvPr id="84" name="TextBox 83"/>
-          <p:cNvSpPr txBox="1"/>
-          <p:nvPr/>
-        </p:nvSpPr>
-        <p:spPr>
-          <a:xfrm>
-            <a:off x="7470648" y="4498848"/>
-            <a:ext cx="402336" cy="329184"/>
-          </a:xfrm>
-          <a:prstGeom prst="rect">
-            <a:avLst/>
-          </a:prstGeom>
-          <a:noFill/>
-        </p:spPr>
-        <p:txBody>
-          <a:bodyPr wrap="square" anchor="ctr" lIns="0" tIns="0" rIns="0" bIns="0">
-            <a:noAutofit/>
-          </a:bodyPr>
-          <a:lstStyle/>
-          <a:p>
-            <a:pPr algn="l" latinLnBrk="0">
-              <a:lnSpc>
-                <a:spcPct val="100000"/>
-              </a:lnSpc>
-              <a:spcBef>
-                <a:spcPts val="0"/>
-              </a:spcBef>
-              <a:spcAft>
-                <a:spcPts val="0"/>
-              </a:spcAft>
-            </a:pPr>
-            <a:r>
-              <a:rPr sz="950" b="1">
-                <a:solidFill>
-                  <a:srgbClr val="66727F"/>
-                </a:solidFill>
-                <a:latin typeface="Consolas"/>
-                <a:ea typeface="Microsoft YaHei"/>
-                <a:cs typeface="Microsoft YaHei"/>
-              </a:rPr>
-              <a:t>C5</a:t>
-            </a:r>
-          </a:p>
-        </p:txBody>
-      </p:sp>
-      <p:sp>
-        <p:nvSpPr>
-          <p:cNvPr id="85" name="TextBox 84"/>
-          <p:cNvSpPr txBox="1"/>
-          <p:nvPr/>
-        </p:nvSpPr>
-        <p:spPr>
-          <a:xfrm>
-            <a:off x="7872983" y="4498848"/>
-            <a:ext cx="1828800" cy="329184"/>
-          </a:xfrm>
-          <a:prstGeom prst="rect">
-            <a:avLst/>
-          </a:prstGeom>
-          <a:noFill/>
-        </p:spPr>
-        <p:txBody>
-          <a:bodyPr wrap="square" anchor="ctr" lIns="0" tIns="0" rIns="0" bIns="0">
-            <a:noAutofit/>
-          </a:bodyPr>
-          <a:lstStyle/>
-          <a:p>
-            <a:pPr algn="l" latinLnBrk="0">
-              <a:lnSpc>
-                <a:spcPct val="100000"/>
-              </a:lnSpc>
-              <a:spcBef>
-                <a:spcPts val="0"/>
-              </a:spcBef>
-              <a:spcAft>
-                <a:spcPts val="0"/>
-              </a:spcAft>
-            </a:pPr>
-            <a:r>
-              <a:rPr sz="950" b="0">
-                <a:solidFill>
-                  <a:srgbClr val="35424F"/>
-                </a:solidFill>
-                <a:latin typeface="Microsoft YaHei"/>
-                <a:ea typeface="Microsoft YaHei"/>
-                <a:cs typeface="Microsoft YaHei"/>
-              </a:rPr>
-              <a:t>例：通信与计算重叠</a:t>
-            </a:r>
-          </a:p>
-        </p:txBody>
-      </p:sp>
-      <p:sp>
-        <p:nvSpPr>
-          <p:cNvPr id="86" name="TextBox 85"/>
-          <p:cNvSpPr txBox="1"/>
-          <p:nvPr/>
-        </p:nvSpPr>
-        <p:spPr>
-          <a:xfrm>
-            <a:off x="9738360" y="4498848"/>
-            <a:ext cx="566928" cy="329184"/>
-          </a:xfrm>
-          <a:prstGeom prst="rect">
-            <a:avLst/>
-          </a:prstGeom>
-          <a:noFill/>
-        </p:spPr>
-        <p:txBody>
-          <a:bodyPr wrap="square" anchor="ctr" lIns="0" tIns="0" rIns="0" bIns="0">
-            <a:noAutofit/>
-          </a:bodyPr>
-          <a:lstStyle/>
-          <a:p>
-            <a:pPr algn="r" latinLnBrk="0">
-              <a:lnSpc>
-                <a:spcPct val="100000"/>
-              </a:lnSpc>
-              <a:spcBef>
-                <a:spcPts val="0"/>
-              </a:spcBef>
-              <a:spcAft>
-                <a:spcPts val="0"/>
-              </a:spcAft>
-            </a:pPr>
-            <a:r>
-              <a:rPr sz="950" b="0">
-                <a:solidFill>
-                  <a:srgbClr val="8C96A1"/>
-                </a:solidFill>
-                <a:latin typeface="Consolas"/>
-                <a:ea typeface="Microsoft YaHei"/>
-                <a:cs typeface="Microsoft YaHei"/>
-              </a:rPr>
-              <a:t>__</a:t>
-            </a:r>
-          </a:p>
-        </p:txBody>
-      </p:sp>
-      <p:sp>
-        <p:nvSpPr>
-          <p:cNvPr id="87" name="TextBox 86"/>
-          <p:cNvSpPr txBox="1"/>
-          <p:nvPr/>
-        </p:nvSpPr>
-        <p:spPr>
-          <a:xfrm>
-            <a:off x="10360152" y="4498848"/>
-            <a:ext cx="566928" cy="329184"/>
-          </a:xfrm>
-          <a:prstGeom prst="rect">
-            <a:avLst/>
-          </a:prstGeom>
-          <a:noFill/>
-        </p:spPr>
-        <p:txBody>
-          <a:bodyPr wrap="square" anchor="ctr" lIns="0" tIns="0" rIns="0" bIns="0">
-            <a:noAutofit/>
-          </a:bodyPr>
-          <a:lstStyle/>
-          <a:p>
-            <a:pPr algn="r" latinLnBrk="0">
-              <a:lnSpc>
-                <a:spcPct val="100000"/>
-              </a:lnSpc>
-              <a:spcBef>
-                <a:spcPts val="0"/>
-              </a:spcBef>
-              <a:spcAft>
-                <a:spcPts val="0"/>
-              </a:spcAft>
-            </a:pPr>
-            <a:r>
-              <a:rPr sz="950" b="0">
-                <a:solidFill>
-                  <a:srgbClr val="8C96A1"/>
-                </a:solidFill>
-                <a:latin typeface="Consolas"/>
-                <a:ea typeface="Microsoft YaHei"/>
-                <a:cs typeface="Microsoft YaHei"/>
-              </a:rPr>
-              <a:t>—</a:t>
-            </a:r>
-          </a:p>
-        </p:txBody>
-      </p:sp>
-      <p:sp>
-        <p:nvSpPr>
-          <p:cNvPr id="88" name="TextBox 87"/>
-          <p:cNvSpPr txBox="1"/>
-          <p:nvPr/>
-        </p:nvSpPr>
-        <p:spPr>
-          <a:xfrm>
-            <a:off x="11018520" y="4498848"/>
-            <a:ext cx="512064" cy="329184"/>
-          </a:xfrm>
-          <a:prstGeom prst="rect">
-            <a:avLst/>
-          </a:prstGeom>
-          <a:noFill/>
-        </p:spPr>
-        <p:txBody>
-          <a:bodyPr wrap="square" anchor="ctr" lIns="0" tIns="0" rIns="0" bIns="0">
-            <a:noAutofit/>
-          </a:bodyPr>
-          <a:lstStyle/>
-          <a:p>
-            <a:pPr algn="l" latinLnBrk="0">
-              <a:lnSpc>
-                <a:spcPct val="100000"/>
-              </a:lnSpc>
-              <a:spcBef>
-                <a:spcPts val="0"/>
-              </a:spcBef>
-              <a:spcAft>
-                <a:spcPts val="0"/>
-              </a:spcAft>
-            </a:pPr>
-            <a:r>
-              <a:rPr sz="950" b="0">
-                <a:solidFill>
-                  <a:srgbClr val="8C96A1"/>
-                </a:solidFill>
-                <a:latin typeface="Microsoft YaHei"/>
-                <a:ea typeface="Microsoft YaHei"/>
-                <a:cs typeface="Microsoft YaHei"/>
-              </a:rPr>
-              <a:t>③ 未过</a:t>
-            </a:r>
-          </a:p>
-        </p:txBody>
-      </p:sp>
-      <p:sp>
-        <p:nvSpPr>
-          <p:cNvPr id="89" name="TextBox 88"/>
+              <a:t>③ 过但不值当，未接线</a:t>
+            </a:r>
+          </a:p>
+        </p:txBody>
+      </p:sp>
+      <p:sp>
+        <p:nvSpPr>
+          <p:cNvPr id="47" name="TextBox 46"/>
           <p:cNvSpPr txBox="1"/>
           <p:nvPr/>
         </p:nvSpPr>
@@ -6821,21 +5363,21 @@
                 <a:ea typeface="Microsoft YaHei"/>
                 <a:cs typeface="Microsoft YaHei"/>
               </a:rPr>
-              <a:t>越靠前的门越省设备时间</a:t>
-            </a:r>
-          </a:p>
-        </p:txBody>
-      </p:sp>
-      <p:sp>
-        <p:nvSpPr>
-          <p:cNvPr id="90" name="Rectangle 89"/>
+              <a:t>数值不对、更慢的当场挡掉</a:t>
+            </a:r>
+          </a:p>
+        </p:txBody>
+      </p:sp>
+      <p:sp>
+        <p:nvSpPr>
+          <p:cNvPr id="48" name="Rectangle 47"/>
           <p:cNvSpPr/>
           <p:nvPr/>
         </p:nvSpPr>
         <p:spPr>
           <a:xfrm>
             <a:off x="3291840" y="5084064"/>
-            <a:ext cx="1553199" cy="621792"/>
+            <a:ext cx="2503322" cy="621792"/>
           </a:xfrm>
           <a:prstGeom prst="rect">
             <a:avLst/>
@@ -6859,14 +5401,14 @@
       </p:sp>
       <p:sp>
         <p:nvSpPr>
-          <p:cNvPr id="91" name="TextBox 90"/>
-          <p:cNvSpPr txBox="1"/>
-          <p:nvPr/>
-        </p:nvSpPr>
-        <p:spPr>
-          <a:xfrm>
-            <a:off x="3438144" y="5120640"/>
-            <a:ext cx="1260591" cy="182880"/>
+          <p:cNvPr id="49" name="TextBox 48"/>
+          <p:cNvSpPr txBox="1"/>
+          <p:nvPr/>
+        </p:nvSpPr>
+        <p:spPr>
+          <a:xfrm>
+            <a:off x="3474720" y="5157216"/>
+            <a:ext cx="2137562" cy="201168"/>
           </a:xfrm>
           <a:prstGeom prst="rect">
             <a:avLst/>
@@ -6906,14 +5448,14 @@
       </p:sp>
       <p:sp>
         <p:nvSpPr>
-          <p:cNvPr id="92" name="TextBox 91"/>
-          <p:cNvSpPr txBox="1"/>
-          <p:nvPr/>
-        </p:nvSpPr>
-        <p:spPr>
-          <a:xfrm>
-            <a:off x="3438144" y="5321807"/>
-            <a:ext cx="1260591" cy="201168"/>
+          <p:cNvPr id="50" name="TextBox 49"/>
+          <p:cNvSpPr txBox="1"/>
+          <p:nvPr/>
+        </p:nvSpPr>
+        <p:spPr>
+          <a:xfrm>
+            <a:off x="3474720" y="5376672"/>
+            <a:ext cx="2137562" cy="274320"/>
           </a:xfrm>
           <a:prstGeom prst="rect">
             <a:avLst/>
@@ -6938,76 +5480,29 @@
               </a:spcAft>
             </a:pPr>
             <a:r>
-              <a:rPr sz="1500" b="1">
-                <a:solidFill>
-                  <a:srgbClr val="8C96A1"/>
-                </a:solidFill>
-                <a:latin typeface="Consolas"/>
-                <a:ea typeface="Microsoft YaHei"/>
-                <a:cs typeface="Microsoft YaHei"/>
-              </a:rPr>
-              <a:t>__</a:t>
-            </a:r>
-          </a:p>
-        </p:txBody>
-      </p:sp>
-      <p:sp>
-        <p:nvSpPr>
-          <p:cNvPr id="93" name="TextBox 92"/>
-          <p:cNvSpPr txBox="1"/>
-          <p:nvPr/>
-        </p:nvSpPr>
-        <p:spPr>
-          <a:xfrm>
-            <a:off x="3438144" y="5541264"/>
-            <a:ext cx="1260591" cy="164592"/>
-          </a:xfrm>
-          <a:prstGeom prst="rect">
-            <a:avLst/>
-          </a:prstGeom>
-          <a:noFill/>
-        </p:spPr>
-        <p:txBody>
-          <a:bodyPr wrap="square" anchor="ctr" lIns="0" tIns="0" rIns="0" bIns="0">
-            <a:noAutofit/>
-          </a:bodyPr>
-          <a:lstStyle/>
-          <a:p>
-            <a:pPr algn="l" latinLnBrk="0">
-              <a:lnSpc>
-                <a:spcPct val="100000"/>
-              </a:lnSpc>
-              <a:spcBef>
-                <a:spcPts val="0"/>
-              </a:spcBef>
-              <a:spcAft>
-                <a:spcPts val="0"/>
-              </a:spcAft>
-            </a:pPr>
-            <a:r>
-              <a:rPr sz="850" b="0">
-                <a:solidFill>
-                  <a:srgbClr val="8C96A1"/>
-                </a:solidFill>
-                <a:latin typeface="Microsoft YaHei"/>
-                <a:ea typeface="Microsoft YaHei"/>
-                <a:cs typeface="Microsoft YaHei"/>
-              </a:rPr>
-              <a:t>设备时间 __</a:t>
-            </a:r>
-          </a:p>
-        </p:txBody>
-      </p:sp>
-      <p:sp>
-        <p:nvSpPr>
-          <p:cNvPr id="94" name="Rectangle 93"/>
+              <a:rPr sz="1600" b="1">
+                <a:solidFill>
+                  <a:srgbClr val="16202A"/>
+                </a:solidFill>
+                <a:latin typeface="Arial"/>
+                <a:ea typeface="Microsoft YaHei"/>
+                <a:cs typeface="Microsoft YaHei"/>
+              </a:rPr>
+              <a:t>10</a:t>
+            </a:r>
+          </a:p>
+        </p:txBody>
+      </p:sp>
+      <p:sp>
+        <p:nvSpPr>
+          <p:cNvPr id="51" name="Rectangle 50"/>
           <p:cNvSpPr/>
           <p:nvPr/>
         </p:nvSpPr>
         <p:spPr>
           <a:xfrm>
-            <a:off x="4991343" y="5084064"/>
-            <a:ext cx="1553199" cy="621792"/>
+            <a:off x="6215786" y="5084064"/>
+            <a:ext cx="2503322" cy="621792"/>
           </a:xfrm>
           <a:prstGeom prst="rect">
             <a:avLst/>
@@ -7031,14 +5526,14 @@
       </p:sp>
       <p:sp>
         <p:nvSpPr>
-          <p:cNvPr id="95" name="TextBox 94"/>
-          <p:cNvSpPr txBox="1"/>
-          <p:nvPr/>
-        </p:nvSpPr>
-        <p:spPr>
-          <a:xfrm>
-            <a:off x="5137647" y="5120640"/>
-            <a:ext cx="1260591" cy="182880"/>
+          <p:cNvPr id="52" name="TextBox 51"/>
+          <p:cNvSpPr txBox="1"/>
+          <p:nvPr/>
+        </p:nvSpPr>
+        <p:spPr>
+          <a:xfrm>
+            <a:off x="6398666" y="5157216"/>
+            <a:ext cx="2137562" cy="201168"/>
           </a:xfrm>
           <a:prstGeom prst="rect">
             <a:avLst/>
@@ -7071,21 +5566,21 @@
                 <a:ea typeface="Microsoft YaHei"/>
                 <a:cs typeface="Microsoft YaHei"/>
               </a:rPr>
-              <a:t>过 ① 输出未变</a:t>
-            </a:r>
-          </a:p>
-        </p:txBody>
-      </p:sp>
-      <p:sp>
-        <p:nvSpPr>
-          <p:cNvPr id="96" name="TextBox 95"/>
-          <p:cNvSpPr txBox="1"/>
-          <p:nvPr/>
-        </p:nvSpPr>
-        <p:spPr>
-          <a:xfrm>
-            <a:off x="5137647" y="5321807"/>
-            <a:ext cx="1260591" cy="201168"/>
+              <a:t>过三道门</a:t>
+            </a:r>
+          </a:p>
+        </p:txBody>
+      </p:sp>
+      <p:sp>
+        <p:nvSpPr>
+          <p:cNvPr id="53" name="TextBox 52"/>
+          <p:cNvSpPr txBox="1"/>
+          <p:nvPr/>
+        </p:nvSpPr>
+        <p:spPr>
+          <a:xfrm>
+            <a:off x="6398666" y="5376672"/>
+            <a:ext cx="2137562" cy="274320"/>
           </a:xfrm>
           <a:prstGeom prst="rect">
             <a:avLst/>
@@ -7110,592 +5605,51 @@
               </a:spcAft>
             </a:pPr>
             <a:r>
-              <a:rPr sz="1500" b="1">
-                <a:solidFill>
-                  <a:srgbClr val="8C96A1"/>
-                </a:solidFill>
-                <a:latin typeface="Consolas"/>
-                <a:ea typeface="Microsoft YaHei"/>
-                <a:cs typeface="Microsoft YaHei"/>
-              </a:rPr>
-              <a:t>__</a:t>
-            </a:r>
-          </a:p>
-        </p:txBody>
-      </p:sp>
-      <p:sp>
-        <p:nvSpPr>
-          <p:cNvPr id="97" name="TextBox 96"/>
-          <p:cNvSpPr txBox="1"/>
-          <p:nvPr/>
-        </p:nvSpPr>
-        <p:spPr>
-          <a:xfrm>
-            <a:off x="5137647" y="5541264"/>
-            <a:ext cx="1260591" cy="164592"/>
-          </a:xfrm>
-          <a:prstGeom prst="rect">
-            <a:avLst/>
-          </a:prstGeom>
-          <a:noFill/>
-        </p:spPr>
-        <p:txBody>
-          <a:bodyPr wrap="square" anchor="ctr" lIns="0" tIns="0" rIns="0" bIns="0">
-            <a:noAutofit/>
-          </a:bodyPr>
-          <a:lstStyle/>
-          <a:p>
-            <a:pPr algn="l" latinLnBrk="0">
-              <a:lnSpc>
-                <a:spcPct val="100000"/>
-              </a:lnSpc>
-              <a:spcBef>
-                <a:spcPts val="0"/>
-              </a:spcBef>
-              <a:spcAft>
-                <a:spcPts val="0"/>
-              </a:spcAft>
-            </a:pPr>
-            <a:r>
-              <a:rPr sz="850" b="0">
-                <a:solidFill>
-                  <a:srgbClr val="8C96A1"/>
-                </a:solidFill>
-                <a:latin typeface="Microsoft YaHei"/>
-                <a:ea typeface="Microsoft YaHei"/>
-                <a:cs typeface="Microsoft YaHei"/>
-              </a:rPr>
-              <a:t>设备时间 __</a:t>
-            </a:r>
-          </a:p>
-        </p:txBody>
-      </p:sp>
-      <p:sp>
-        <p:nvSpPr>
-          <p:cNvPr id="98" name="Rectangle 97"/>
+              <a:rPr sz="1600" b="1">
+                <a:solidFill>
+                  <a:srgbClr val="16202A"/>
+                </a:solidFill>
+                <a:latin typeface="Arial"/>
+                <a:ea typeface="Microsoft YaHei"/>
+                <a:cs typeface="Microsoft YaHei"/>
+              </a:rPr>
+              <a:t>5</a:t>
+            </a:r>
+          </a:p>
+        </p:txBody>
+      </p:sp>
+      <p:cxnSp>
+        <p:nvCxnSpPr>
+          <p:cNvPr id="54" name="Connector 53"/>
+          <p:cNvCxnSpPr/>
+          <p:nvPr/>
+        </p:nvCxnSpPr>
+        <p:spPr>
+          <a:xfrm>
+            <a:off x="5886602" y="5394959"/>
+            <a:ext cx="237744" cy="0"/>
+          </a:xfrm>
+          <a:prstGeom prst="line">
+            <a:avLst/>
+          </a:prstGeom>
+          <a:ln w="15875">
+            <a:solidFill>
+              <a:srgbClr val="8C96A1"/>
+            </a:solidFill>
+            <a:tailEnd type="triangle" w="med" len="med"/>
+          </a:ln>
+        </p:spPr>
+      </p:cxnSp>
+      <p:sp>
+        <p:nvSpPr>
+          <p:cNvPr id="55" name="Rectangle 54"/>
           <p:cNvSpPr/>
           <p:nvPr/>
         </p:nvSpPr>
         <p:spPr>
           <a:xfrm>
-            <a:off x="6690847" y="5084064"/>
-            <a:ext cx="1553199" cy="621792"/>
-          </a:xfrm>
-          <a:prstGeom prst="rect">
-            <a:avLst/>
-          </a:prstGeom>
-          <a:solidFill>
-            <a:srgbClr val="FFFFFF"/>
-          </a:solidFill>
-          <a:ln w="9525">
-            <a:solidFill>
-              <a:srgbClr val="DDE2E7"/>
-            </a:solidFill>
-          </a:ln>
-        </p:spPr>
-        <p:txBody>
-          <a:bodyPr rtlCol="0" anchor="ctr"/>
-          <a:lstStyle/>
-          <a:p>
-            <a:pPr algn="ctr"/>
-          </a:p>
-        </p:txBody>
-      </p:sp>
-      <p:sp>
-        <p:nvSpPr>
-          <p:cNvPr id="99" name="TextBox 98"/>
-          <p:cNvSpPr txBox="1"/>
-          <p:nvPr/>
-        </p:nvSpPr>
-        <p:spPr>
-          <a:xfrm>
-            <a:off x="6837151" y="5120640"/>
-            <a:ext cx="1260591" cy="182880"/>
-          </a:xfrm>
-          <a:prstGeom prst="rect">
-            <a:avLst/>
-          </a:prstGeom>
-          <a:noFill/>
-        </p:spPr>
-        <p:txBody>
-          <a:bodyPr wrap="square" anchor="ctr" lIns="0" tIns="0" rIns="0" bIns="0">
-            <a:noAutofit/>
-          </a:bodyPr>
-          <a:lstStyle/>
-          <a:p>
-            <a:pPr algn="l" latinLnBrk="0">
-              <a:lnSpc>
-                <a:spcPct val="100000"/>
-              </a:lnSpc>
-              <a:spcBef>
-                <a:spcPts val="0"/>
-              </a:spcBef>
-              <a:spcAft>
-                <a:spcPts val="0"/>
-              </a:spcAft>
-            </a:pPr>
-            <a:r>
-              <a:rPr sz="950" b="0">
-                <a:solidFill>
-                  <a:srgbClr val="66727F"/>
-                </a:solidFill>
-                <a:latin typeface="Microsoft YaHei"/>
-                <a:ea typeface="Microsoft YaHei"/>
-                <a:cs typeface="Microsoft YaHei"/>
-              </a:rPr>
-              <a:t>过 ② 质量达标</a:t>
-            </a:r>
-          </a:p>
-        </p:txBody>
-      </p:sp>
-      <p:sp>
-        <p:nvSpPr>
-          <p:cNvPr id="100" name="TextBox 99"/>
-          <p:cNvSpPr txBox="1"/>
-          <p:nvPr/>
-        </p:nvSpPr>
-        <p:spPr>
-          <a:xfrm>
-            <a:off x="6837151" y="5321807"/>
-            <a:ext cx="1260591" cy="201168"/>
-          </a:xfrm>
-          <a:prstGeom prst="rect">
-            <a:avLst/>
-          </a:prstGeom>
-          <a:noFill/>
-        </p:spPr>
-        <p:txBody>
-          <a:bodyPr wrap="square" anchor="ctr" lIns="0" tIns="0" rIns="0" bIns="0">
-            <a:noAutofit/>
-          </a:bodyPr>
-          <a:lstStyle/>
-          <a:p>
-            <a:pPr algn="l" latinLnBrk="0">
-              <a:lnSpc>
-                <a:spcPct val="100000"/>
-              </a:lnSpc>
-              <a:spcBef>
-                <a:spcPts val="0"/>
-              </a:spcBef>
-              <a:spcAft>
-                <a:spcPts val="0"/>
-              </a:spcAft>
-            </a:pPr>
-            <a:r>
-              <a:rPr sz="1500" b="1">
-                <a:solidFill>
-                  <a:srgbClr val="8C96A1"/>
-                </a:solidFill>
-                <a:latin typeface="Consolas"/>
-                <a:ea typeface="Microsoft YaHei"/>
-                <a:cs typeface="Microsoft YaHei"/>
-              </a:rPr>
-              <a:t>__</a:t>
-            </a:r>
-          </a:p>
-        </p:txBody>
-      </p:sp>
-      <p:sp>
-        <p:nvSpPr>
-          <p:cNvPr id="101" name="TextBox 100"/>
-          <p:cNvSpPr txBox="1"/>
-          <p:nvPr/>
-        </p:nvSpPr>
-        <p:spPr>
-          <a:xfrm>
-            <a:off x="6837151" y="5541264"/>
-            <a:ext cx="1260591" cy="164592"/>
-          </a:xfrm>
-          <a:prstGeom prst="rect">
-            <a:avLst/>
-          </a:prstGeom>
-          <a:noFill/>
-        </p:spPr>
-        <p:txBody>
-          <a:bodyPr wrap="square" anchor="ctr" lIns="0" tIns="0" rIns="0" bIns="0">
-            <a:noAutofit/>
-          </a:bodyPr>
-          <a:lstStyle/>
-          <a:p>
-            <a:pPr algn="l" latinLnBrk="0">
-              <a:lnSpc>
-                <a:spcPct val="100000"/>
-              </a:lnSpc>
-              <a:spcBef>
-                <a:spcPts val="0"/>
-              </a:spcBef>
-              <a:spcAft>
-                <a:spcPts val="0"/>
-              </a:spcAft>
-            </a:pPr>
-            <a:r>
-              <a:rPr sz="850" b="0">
-                <a:solidFill>
-                  <a:srgbClr val="8C96A1"/>
-                </a:solidFill>
-                <a:latin typeface="Microsoft YaHei"/>
-                <a:ea typeface="Microsoft YaHei"/>
-                <a:cs typeface="Microsoft YaHei"/>
-              </a:rPr>
-              <a:t>设备时间 __</a:t>
-            </a:r>
-          </a:p>
-        </p:txBody>
-      </p:sp>
-      <p:sp>
-        <p:nvSpPr>
-          <p:cNvPr id="102" name="Rectangle 101"/>
-          <p:cNvSpPr/>
-          <p:nvPr/>
-        </p:nvSpPr>
-        <p:spPr>
-          <a:xfrm>
-            <a:off x="8390351" y="5084064"/>
-            <a:ext cx="1553199" cy="621792"/>
-          </a:xfrm>
-          <a:prstGeom prst="rect">
-            <a:avLst/>
-          </a:prstGeom>
-          <a:solidFill>
-            <a:srgbClr val="FFFFFF"/>
-          </a:solidFill>
-          <a:ln w="9525">
-            <a:solidFill>
-              <a:srgbClr val="DDE2E7"/>
-            </a:solidFill>
-          </a:ln>
-        </p:spPr>
-        <p:txBody>
-          <a:bodyPr rtlCol="0" anchor="ctr"/>
-          <a:lstStyle/>
-          <a:p>
-            <a:pPr algn="ctr"/>
-          </a:p>
-        </p:txBody>
-      </p:sp>
-      <p:sp>
-        <p:nvSpPr>
-          <p:cNvPr id="103" name="TextBox 102"/>
-          <p:cNvSpPr txBox="1"/>
-          <p:nvPr/>
-        </p:nvSpPr>
-        <p:spPr>
-          <a:xfrm>
-            <a:off x="8536655" y="5120640"/>
-            <a:ext cx="1260591" cy="182880"/>
-          </a:xfrm>
-          <a:prstGeom prst="rect">
-            <a:avLst/>
-          </a:prstGeom>
-          <a:noFill/>
-        </p:spPr>
-        <p:txBody>
-          <a:bodyPr wrap="square" anchor="ctr" lIns="0" tIns="0" rIns="0" bIns="0">
-            <a:noAutofit/>
-          </a:bodyPr>
-          <a:lstStyle/>
-          <a:p>
-            <a:pPr algn="l" latinLnBrk="0">
-              <a:lnSpc>
-                <a:spcPct val="100000"/>
-              </a:lnSpc>
-              <a:spcBef>
-                <a:spcPts val="0"/>
-              </a:spcBef>
-              <a:spcAft>
-                <a:spcPts val="0"/>
-              </a:spcAft>
-            </a:pPr>
-            <a:r>
-              <a:rPr sz="950" b="0">
-                <a:solidFill>
-                  <a:srgbClr val="66727F"/>
-                </a:solidFill>
-                <a:latin typeface="Microsoft YaHei"/>
-                <a:ea typeface="Microsoft YaHei"/>
-                <a:cs typeface="Microsoft YaHei"/>
-              </a:rPr>
-              <a:t>过 ③ 确实更快</a:t>
-            </a:r>
-          </a:p>
-        </p:txBody>
-      </p:sp>
-      <p:sp>
-        <p:nvSpPr>
-          <p:cNvPr id="104" name="TextBox 103"/>
-          <p:cNvSpPr txBox="1"/>
-          <p:nvPr/>
-        </p:nvSpPr>
-        <p:spPr>
-          <a:xfrm>
-            <a:off x="8536655" y="5321807"/>
-            <a:ext cx="1260591" cy="201168"/>
-          </a:xfrm>
-          <a:prstGeom prst="rect">
-            <a:avLst/>
-          </a:prstGeom>
-          <a:noFill/>
-        </p:spPr>
-        <p:txBody>
-          <a:bodyPr wrap="square" anchor="ctr" lIns="0" tIns="0" rIns="0" bIns="0">
-            <a:noAutofit/>
-          </a:bodyPr>
-          <a:lstStyle/>
-          <a:p>
-            <a:pPr algn="l" latinLnBrk="0">
-              <a:lnSpc>
-                <a:spcPct val="100000"/>
-              </a:lnSpc>
-              <a:spcBef>
-                <a:spcPts val="0"/>
-              </a:spcBef>
-              <a:spcAft>
-                <a:spcPts val="0"/>
-              </a:spcAft>
-            </a:pPr>
-            <a:r>
-              <a:rPr sz="1500" b="1">
-                <a:solidFill>
-                  <a:srgbClr val="8C96A1"/>
-                </a:solidFill>
-                <a:latin typeface="Consolas"/>
-                <a:ea typeface="Microsoft YaHei"/>
-                <a:cs typeface="Microsoft YaHei"/>
-              </a:rPr>
-              <a:t>__</a:t>
-            </a:r>
-          </a:p>
-        </p:txBody>
-      </p:sp>
-      <p:sp>
-        <p:nvSpPr>
-          <p:cNvPr id="105" name="TextBox 104"/>
-          <p:cNvSpPr txBox="1"/>
-          <p:nvPr/>
-        </p:nvSpPr>
-        <p:spPr>
-          <a:xfrm>
-            <a:off x="8536655" y="5541264"/>
-            <a:ext cx="1260591" cy="164592"/>
-          </a:xfrm>
-          <a:prstGeom prst="rect">
-            <a:avLst/>
-          </a:prstGeom>
-          <a:noFill/>
-        </p:spPr>
-        <p:txBody>
-          <a:bodyPr wrap="square" anchor="ctr" lIns="0" tIns="0" rIns="0" bIns="0">
-            <a:noAutofit/>
-          </a:bodyPr>
-          <a:lstStyle/>
-          <a:p>
-            <a:pPr algn="l" latinLnBrk="0">
-              <a:lnSpc>
-                <a:spcPct val="100000"/>
-              </a:lnSpc>
-              <a:spcBef>
-                <a:spcPts val="0"/>
-              </a:spcBef>
-              <a:spcAft>
-                <a:spcPts val="0"/>
-              </a:spcAft>
-            </a:pPr>
-            <a:r>
-              <a:rPr sz="850" b="0">
-                <a:solidFill>
-                  <a:srgbClr val="8C96A1"/>
-                </a:solidFill>
-                <a:latin typeface="Microsoft YaHei"/>
-                <a:ea typeface="Microsoft YaHei"/>
-                <a:cs typeface="Microsoft YaHei"/>
-              </a:rPr>
-              <a:t>设备时间 __</a:t>
-            </a:r>
-          </a:p>
-        </p:txBody>
-      </p:sp>
-      <p:sp>
-        <p:nvSpPr>
-          <p:cNvPr id="106" name="Rectangle 105"/>
-          <p:cNvSpPr/>
-          <p:nvPr/>
-        </p:nvSpPr>
-        <p:spPr>
-          <a:xfrm>
-            <a:off x="10089855" y="5084064"/>
-            <a:ext cx="1553199" cy="621792"/>
-          </a:xfrm>
-          <a:prstGeom prst="rect">
-            <a:avLst/>
-          </a:prstGeom>
-          <a:solidFill>
-            <a:srgbClr val="FFFFFF"/>
-          </a:solidFill>
-          <a:ln w="9525">
-            <a:solidFill>
-              <a:srgbClr val="DDE2E7"/>
-            </a:solidFill>
-          </a:ln>
-        </p:spPr>
-        <p:txBody>
-          <a:bodyPr rtlCol="0" anchor="ctr"/>
-          <a:lstStyle/>
-          <a:p>
-            <a:pPr algn="ctr"/>
-          </a:p>
-        </p:txBody>
-      </p:sp>
-      <p:sp>
-        <p:nvSpPr>
-          <p:cNvPr id="107" name="TextBox 106"/>
-          <p:cNvSpPr txBox="1"/>
-          <p:nvPr/>
-        </p:nvSpPr>
-        <p:spPr>
-          <a:xfrm>
-            <a:off x="10236159" y="5120640"/>
-            <a:ext cx="1260591" cy="182880"/>
-          </a:xfrm>
-          <a:prstGeom prst="rect">
-            <a:avLst/>
-          </a:prstGeom>
-          <a:noFill/>
-        </p:spPr>
-        <p:txBody>
-          <a:bodyPr wrap="square" anchor="ctr" lIns="0" tIns="0" rIns="0" bIns="0">
-            <a:noAutofit/>
-          </a:bodyPr>
-          <a:lstStyle/>
-          <a:p>
-            <a:pPr algn="l" latinLnBrk="0">
-              <a:lnSpc>
-                <a:spcPct val="100000"/>
-              </a:lnSpc>
-              <a:spcBef>
-                <a:spcPts val="0"/>
-              </a:spcBef>
-              <a:spcAft>
-                <a:spcPts val="0"/>
-              </a:spcAft>
-            </a:pPr>
-            <a:r>
-              <a:rPr sz="950" b="0">
-                <a:solidFill>
-                  <a:srgbClr val="66727F"/>
-                </a:solidFill>
-                <a:latin typeface="Microsoft YaHei"/>
-                <a:ea typeface="Microsoft YaHei"/>
-                <a:cs typeface="Microsoft YaHei"/>
-              </a:rPr>
-              <a:t>过 D 独立复验</a:t>
-            </a:r>
-          </a:p>
-        </p:txBody>
-      </p:sp>
-      <p:sp>
-        <p:nvSpPr>
-          <p:cNvPr id="108" name="TextBox 107"/>
-          <p:cNvSpPr txBox="1"/>
-          <p:nvPr/>
-        </p:nvSpPr>
-        <p:spPr>
-          <a:xfrm>
-            <a:off x="10236159" y="5321807"/>
-            <a:ext cx="1260591" cy="201168"/>
-          </a:xfrm>
-          <a:prstGeom prst="rect">
-            <a:avLst/>
-          </a:prstGeom>
-          <a:noFill/>
-        </p:spPr>
-        <p:txBody>
-          <a:bodyPr wrap="square" anchor="ctr" lIns="0" tIns="0" rIns="0" bIns="0">
-            <a:noAutofit/>
-          </a:bodyPr>
-          <a:lstStyle/>
-          <a:p>
-            <a:pPr algn="l" latinLnBrk="0">
-              <a:lnSpc>
-                <a:spcPct val="100000"/>
-              </a:lnSpc>
-              <a:spcBef>
-                <a:spcPts val="0"/>
-              </a:spcBef>
-              <a:spcAft>
-                <a:spcPts val="0"/>
-              </a:spcAft>
-            </a:pPr>
-            <a:r>
-              <a:rPr sz="1500" b="1">
-                <a:solidFill>
-                  <a:srgbClr val="8C96A1"/>
-                </a:solidFill>
-                <a:latin typeface="Consolas"/>
-                <a:ea typeface="Microsoft YaHei"/>
-                <a:cs typeface="Microsoft YaHei"/>
-              </a:rPr>
-              <a:t>__</a:t>
-            </a:r>
-          </a:p>
-        </p:txBody>
-      </p:sp>
-      <p:sp>
-        <p:nvSpPr>
-          <p:cNvPr id="109" name="TextBox 108"/>
-          <p:cNvSpPr txBox="1"/>
-          <p:nvPr/>
-        </p:nvSpPr>
-        <p:spPr>
-          <a:xfrm>
-            <a:off x="10236159" y="5541264"/>
-            <a:ext cx="1260591" cy="164592"/>
-          </a:xfrm>
-          <a:prstGeom prst="rect">
-            <a:avLst/>
-          </a:prstGeom>
-          <a:noFill/>
-        </p:spPr>
-        <p:txBody>
-          <a:bodyPr wrap="square" anchor="ctr" lIns="0" tIns="0" rIns="0" bIns="0">
-            <a:noAutofit/>
-          </a:bodyPr>
-          <a:lstStyle/>
-          <a:p>
-            <a:pPr algn="l" latinLnBrk="0">
-              <a:lnSpc>
-                <a:spcPct val="100000"/>
-              </a:lnSpc>
-              <a:spcBef>
-                <a:spcPts val="0"/>
-              </a:spcBef>
-              <a:spcAft>
-                <a:spcPts val="0"/>
-              </a:spcAft>
-            </a:pPr>
-            <a:r>
-              <a:rPr sz="850" b="0">
-                <a:solidFill>
-                  <a:srgbClr val="8C96A1"/>
-                </a:solidFill>
-                <a:latin typeface="Microsoft YaHei"/>
-                <a:ea typeface="Microsoft YaHei"/>
-                <a:cs typeface="Microsoft YaHei"/>
-              </a:rPr>
-              <a:t>设备时间 __</a:t>
-            </a:r>
-          </a:p>
-        </p:txBody>
-      </p:sp>
-      <p:sp>
-        <p:nvSpPr>
-          <p:cNvPr id="110" name="Rectangle 109"/>
-          <p:cNvSpPr/>
-          <p:nvPr/>
-        </p:nvSpPr>
-        <p:spPr>
-          <a:xfrm>
-            <a:off x="548640" y="5797296"/>
-            <a:ext cx="11094415" cy="475488"/>
+            <a:off x="9139732" y="5084064"/>
+            <a:ext cx="2503322" cy="621792"/>
           </a:xfrm>
           <a:prstGeom prst="rect">
             <a:avLst/>
@@ -7717,7 +5671,152 @@
       </p:sp>
       <p:sp>
         <p:nvSpPr>
-          <p:cNvPr id="111" name="Rectangle 110"/>
+          <p:cNvPr id="56" name="TextBox 55"/>
+          <p:cNvSpPr txBox="1"/>
+          <p:nvPr/>
+        </p:nvSpPr>
+        <p:spPr>
+          <a:xfrm>
+            <a:off x="9322612" y="5157216"/>
+            <a:ext cx="2137562" cy="201168"/>
+          </a:xfrm>
+          <a:prstGeom prst="rect">
+            <a:avLst/>
+          </a:prstGeom>
+          <a:noFill/>
+        </p:spPr>
+        <p:txBody>
+          <a:bodyPr wrap="square" anchor="ctr" lIns="0" tIns="0" rIns="0" bIns="0">
+            <a:noAutofit/>
+          </a:bodyPr>
+          <a:lstStyle/>
+          <a:p>
+            <a:pPr algn="l" latinLnBrk="0">
+              <a:lnSpc>
+                <a:spcPct val="100000"/>
+              </a:lnSpc>
+              <a:spcBef>
+                <a:spcPts val="0"/>
+              </a:spcBef>
+              <a:spcAft>
+                <a:spcPts val="0"/>
+              </a:spcAft>
+            </a:pPr>
+            <a:r>
+              <a:rPr sz="950" b="1">
+                <a:solidFill>
+                  <a:srgbClr val="C0612C"/>
+                </a:solidFill>
+                <a:latin typeface="Microsoft YaHei"/>
+                <a:ea typeface="Microsoft YaHei"/>
+                <a:cs typeface="Microsoft YaHei"/>
+              </a:rPr>
+              <a:t>交付</a:t>
+            </a:r>
+          </a:p>
+        </p:txBody>
+      </p:sp>
+      <p:sp>
+        <p:nvSpPr>
+          <p:cNvPr id="57" name="TextBox 56"/>
+          <p:cNvSpPr txBox="1"/>
+          <p:nvPr/>
+        </p:nvSpPr>
+        <p:spPr>
+          <a:xfrm>
+            <a:off x="9322612" y="5376672"/>
+            <a:ext cx="2137562" cy="274320"/>
+          </a:xfrm>
+          <a:prstGeom prst="rect">
+            <a:avLst/>
+          </a:prstGeom>
+          <a:noFill/>
+        </p:spPr>
+        <p:txBody>
+          <a:bodyPr wrap="square" anchor="ctr" lIns="0" tIns="0" rIns="0" bIns="0">
+            <a:noAutofit/>
+          </a:bodyPr>
+          <a:lstStyle/>
+          <a:p>
+            <a:pPr algn="l" latinLnBrk="0">
+              <a:lnSpc>
+                <a:spcPct val="100000"/>
+              </a:lnSpc>
+              <a:spcBef>
+                <a:spcPts val="0"/>
+              </a:spcBef>
+              <a:spcAft>
+                <a:spcPts val="0"/>
+              </a:spcAft>
+            </a:pPr>
+            <a:r>
+              <a:rPr sz="1600" b="1">
+                <a:solidFill>
+                  <a:srgbClr val="16202A"/>
+                </a:solidFill>
+                <a:latin typeface="Arial"/>
+                <a:ea typeface="Microsoft YaHei"/>
+                <a:cs typeface="Microsoft YaHei"/>
+              </a:rPr>
+              <a:t>2</a:t>
+            </a:r>
+          </a:p>
+        </p:txBody>
+      </p:sp>
+      <p:cxnSp>
+        <p:nvCxnSpPr>
+          <p:cNvPr id="58" name="Connector 57"/>
+          <p:cNvCxnSpPr/>
+          <p:nvPr/>
+        </p:nvCxnSpPr>
+        <p:spPr>
+          <a:xfrm>
+            <a:off x="8810548" y="5394959"/>
+            <a:ext cx="237744" cy="0"/>
+          </a:xfrm>
+          <a:prstGeom prst="line">
+            <a:avLst/>
+          </a:prstGeom>
+          <a:ln w="15875">
+            <a:solidFill>
+              <a:srgbClr val="8C96A1"/>
+            </a:solidFill>
+            <a:tailEnd type="triangle" w="med" len="med"/>
+          </a:ln>
+        </p:spPr>
+      </p:cxnSp>
+      <p:sp>
+        <p:nvSpPr>
+          <p:cNvPr id="59" name="Rectangle 58"/>
+          <p:cNvSpPr/>
+          <p:nvPr/>
+        </p:nvSpPr>
+        <p:spPr>
+          <a:xfrm>
+            <a:off x="548640" y="5797296"/>
+            <a:ext cx="11094415" cy="475488"/>
+          </a:xfrm>
+          <a:prstGeom prst="rect">
+            <a:avLst/>
+          </a:prstGeom>
+          <a:solidFill>
+            <a:srgbClr val="F8EADF"/>
+          </a:solidFill>
+          <a:ln>
+            <a:noFill/>
+          </a:ln>
+        </p:spPr>
+        <p:txBody>
+          <a:bodyPr rtlCol="0" anchor="ctr"/>
+          <a:lstStyle/>
+          <a:p>
+            <a:pPr algn="ctr"/>
+          </a:p>
+        </p:txBody>
+      </p:sp>
+      <p:sp>
+        <p:nvSpPr>
+          <p:cNvPr id="60" name="Rectangle 59"/>
           <p:cNvSpPr/>
           <p:nvPr/>
         </p:nvSpPr>
@@ -7746,7 +5845,7 @@
       </p:sp>
       <p:sp>
         <p:nvSpPr>
-          <p:cNvPr id="112" name="TextBox 111"/>
+          <p:cNvPr id="61" name="TextBox 60"/>
           <p:cNvSpPr txBox="1"/>
           <p:nvPr/>
         </p:nvSpPr>
@@ -7797,14 +5896,14 @@
                 <a:ea typeface="Microsoft YaHei"/>
                 <a:cs typeface="Microsoft YaHei"/>
               </a:rPr>
-              <a:t>待填：交付了哪个候选、复验收益多少、哪道门挡掉的最多</a:t>
-            </a:r>
-          </a:p>
-        </p:txBody>
-      </p:sp>
-      <p:sp>
-        <p:nvSpPr>
-          <p:cNvPr id="113" name="TextBox 112"/>
+              <a:t>两个交付都在替换小核；闭源 grouped-GEMM 的旋钮调不动，占比不到 1% 的核再快也不接线</a:t>
+            </a:r>
+          </a:p>
+        </p:txBody>
+      </p:sp>
+      <p:sp>
+        <p:nvSpPr>
+          <p:cNvPr id="62" name="TextBox 61"/>
           <p:cNvSpPr txBox="1"/>
           <p:nvPr/>
         </p:nvSpPr>
@@ -7836,26 +5935,15 @@
               </a:spcAft>
             </a:pPr>
             <a:r>
-              <a:rPr sz="1000" b="1">
-                <a:solidFill>
-                  <a:srgbClr val="C0612C"/>
+              <a:rPr sz="1000" b="0">
+                <a:solidFill>
+                  <a:srgbClr val="66727F"/>
                 </a:solidFill>
                 <a:latin typeface="Microsoft YaHei"/>
                 <a:ea typeface="Microsoft YaHei"/>
                 <a:cs typeface="Microsoft YaHei"/>
               </a:rPr>
-              <a:t>方案 A　</a:t>
-            </a:r>
-            <a:r>
-              <a:rPr sz="1000" b="0">
-                <a:solidFill>
-                  <a:srgbClr val="66727F"/>
-                </a:solidFill>
-                <a:latin typeface="Microsoft YaHei"/>
-                <a:ea typeface="Microsoft YaHei"/>
-                <a:cs typeface="Microsoft YaHei"/>
-              </a:rPr>
-              <a:t>与第 7 页同骨架，但候选都从基线分叉、收益不叠加，所以画逐个候选而不画爬升曲线；要一次跑完 A–D 的任务才能填满</a:t>
+              <a:t>C 列是内核或微基准读数，D 列是整步或端到端读数，两列口径不同、不能互相换算；表中全部为 M100 单卡 TP1</a:t>
             </a:r>
           </a:p>
         </p:txBody>

--- a/slides/model_layer_mock.pptx
+++ b/slides/model_layer_mock.pptx
@@ -7,6 +7,7 @@
   <p:sldIdLst>
     <p:sldId id="256" r:id="rId7"/>
     <p:sldId id="257" r:id="rId8"/>
+    <p:sldId id="258" r:id="rId9"/>
   </p:sldIdLst>
   <p:sldSz cx="12191695" cy="6858000" type="screen4x3"/>
   <p:notesSz cx="6858000" cy="9144000"/>
@@ -3225,7 +3226,7 @@
                 <a:ea typeface="Microsoft YaHei"/>
                 <a:cs typeface="Microsoft YaHei"/>
               </a:rPr>
-              <a:t>判定全部来自 M100 真机——数值不对、更慢的当场挡掉，占比太小的不接线</a:t>
+              <a:t>先用 Trace 量出每类算子离上界多远、占多少，再决定对谁下手——判定全部来自 M100 真机</a:t>
             </a:r>
           </a:p>
         </p:txBody>
@@ -3348,7 +3349,7 @@
         <p:spPr>
           <a:xfrm>
             <a:off x="548640" y="1975104"/>
-            <a:ext cx="2743200" cy="3017520"/>
+            <a:ext cx="5669280" cy="3017520"/>
           </a:xfrm>
           <a:prstGeom prst="rect">
             <a:avLst/>
@@ -3376,8 +3377,8 @@
         </p:nvSpPr>
         <p:spPr>
           <a:xfrm>
-            <a:off x="749808" y="2048256"/>
-            <a:ext cx="2340864" cy="256032"/>
+            <a:off x="749808" y="2029968"/>
+            <a:ext cx="5266944" cy="237744"/>
           </a:xfrm>
           <a:prstGeom prst="rect">
             <a:avLst/>
@@ -3402,26 +3403,37 @@
               </a:spcAft>
             </a:pPr>
             <a:r>
-              <a:rPr sz="1250" b="1">
+              <a:rPr sz="1000" b="1">
                 <a:solidFill>
                   <a:srgbClr val="16202A"/>
                 </a:solidFill>
-                <a:latin typeface="Microsoft YaHei"/>
-                <a:ea typeface="Microsoft YaHei"/>
-                <a:cs typeface="Microsoft YaHei"/>
-              </a:rPr>
-              <a:t>峰值吞吐</a:t>
+                <a:latin typeface="Consolas"/>
+                <a:ea typeface="Microsoft YaHei"/>
+                <a:cs typeface="Microsoft YaHei"/>
+              </a:rPr>
+              <a:t>achieved</a:t>
             </a:r>
             <a:r>
               <a:rPr sz="1000" b="0">
                 <a:solidFill>
+                  <a:srgbClr val="35424F"/>
+                </a:solidFill>
+                <a:latin typeface="Microsoft YaHei"/>
+                <a:ea typeface="Microsoft YaHei"/>
+                <a:cs typeface="Microsoft YaHei"/>
+              </a:rPr>
+              <a:t> = 上界耗时 ÷ 实测耗时</a:t>
+            </a:r>
+            <a:r>
+              <a:rPr sz="950" b="0">
+                <a:solidFill>
                   <a:srgbClr val="66727F"/>
                 </a:solidFill>
                 <a:latin typeface="Microsoft YaHei"/>
                 <a:ea typeface="Microsoft YaHei"/>
                 <a:cs typeface="Microsoft YaHei"/>
               </a:rPr>
-              <a:t>　持续输出 tok/s</a:t>
+              <a:t>　上界按峰值 __ TFLOPS、带宽 __ GB/s 逐类计算</a:t>
             </a:r>
           </a:p>
         </p:txBody>
@@ -3434,8 +3446,8 @@
         </p:nvSpPr>
         <p:spPr>
           <a:xfrm>
-            <a:off x="749808" y="2340864"/>
-            <a:ext cx="2340864" cy="475488"/>
+            <a:off x="749808" y="2322576"/>
+            <a:ext cx="1783080" cy="219456"/>
           </a:xfrm>
           <a:prstGeom prst="rect">
             <a:avLst/>
@@ -3460,35 +3472,335 @@
               </a:spcAft>
             </a:pPr>
             <a:r>
-              <a:rPr sz="2800" b="1">
-                <a:solidFill>
-                  <a:srgbClr val="3F63A8"/>
-                </a:solidFill>
-                <a:latin typeface="Arial"/>
-                <a:ea typeface="Microsoft YaHei"/>
-                <a:cs typeface="Microsoft YaHei"/>
-              </a:rPr>
-              <a:t>+37%</a:t>
-            </a:r>
-          </a:p>
-        </p:txBody>
-      </p:sp>
-      <p:sp>
-        <p:nvSpPr>
-          <p:cNvPr id="10" name="Rectangle 9"/>
+              <a:rPr sz="900" b="0">
+                <a:solidFill>
+                  <a:srgbClr val="8C96A1"/>
+                </a:solidFill>
+                <a:latin typeface="Microsoft YaHei"/>
+                <a:ea typeface="Microsoft YaHei"/>
+                <a:cs typeface="Microsoft YaHei"/>
+              </a:rPr>
+              <a:t>类别</a:t>
+            </a:r>
+          </a:p>
+        </p:txBody>
+      </p:sp>
+      <p:sp>
+        <p:nvSpPr>
+          <p:cNvPr id="10" name="TextBox 9"/>
+          <p:cNvSpPr txBox="1"/>
+          <p:nvPr/>
+        </p:nvSpPr>
+        <p:spPr>
+          <a:xfrm>
+            <a:off x="2606040" y="2322576"/>
+            <a:ext cx="1920240" cy="219456"/>
+          </a:xfrm>
+          <a:prstGeom prst="rect">
+            <a:avLst/>
+          </a:prstGeom>
+          <a:noFill/>
+        </p:spPr>
+        <p:txBody>
+          <a:bodyPr wrap="square" anchor="ctr" lIns="0" tIns="0" rIns="0" bIns="0">
+            <a:noAutofit/>
+          </a:bodyPr>
+          <a:lstStyle/>
+          <a:p>
+            <a:pPr algn="l" latinLnBrk="0">
+              <a:lnSpc>
+                <a:spcPct val="100000"/>
+              </a:lnSpc>
+              <a:spcBef>
+                <a:spcPts val="0"/>
+              </a:spcBef>
+              <a:spcAft>
+                <a:spcPts val="0"/>
+              </a:spcAft>
+            </a:pPr>
+            <a:r>
+              <a:rPr sz="900" b="0">
+                <a:solidFill>
+                  <a:srgbClr val="8C96A1"/>
+                </a:solidFill>
+                <a:latin typeface="Microsoft YaHei"/>
+                <a:ea typeface="Microsoft YaHei"/>
+                <a:cs typeface="Microsoft YaHei"/>
+              </a:rPr>
+              <a:t>每步耗时　</a:t>
+            </a:r>
+            <a:r>
+              <a:rPr sz="900" b="0">
+                <a:solidFill>
+                  <a:srgbClr val="8C96A1"/>
+                </a:solidFill>
+                <a:latin typeface="Microsoft YaHei"/>
+                <a:ea typeface="Microsoft YaHei"/>
+                <a:cs typeface="Microsoft YaHei"/>
+              </a:rPr>
+              <a:t>■</a:t>
+            </a:r>
+            <a:r>
+              <a:rPr sz="900" b="0">
+                <a:solidFill>
+                  <a:srgbClr val="8C96A1"/>
+                </a:solidFill>
+                <a:latin typeface="Microsoft YaHei"/>
+                <a:ea typeface="Microsoft YaHei"/>
+                <a:cs typeface="Microsoft YaHei"/>
+              </a:rPr>
+              <a:t> 上界内　</a:t>
+            </a:r>
+            <a:r>
+              <a:rPr sz="900" b="0">
+                <a:solidFill>
+                  <a:srgbClr val="DDE2E7"/>
+                </a:solidFill>
+                <a:latin typeface="Microsoft YaHei"/>
+                <a:ea typeface="Microsoft YaHei"/>
+                <a:cs typeface="Microsoft YaHei"/>
+              </a:rPr>
+              <a:t>■</a:t>
+            </a:r>
+            <a:r>
+              <a:rPr sz="900" b="0">
+                <a:solidFill>
+                  <a:srgbClr val="8C96A1"/>
+                </a:solidFill>
+                <a:latin typeface="Microsoft YaHei"/>
+                <a:ea typeface="Microsoft YaHei"/>
+                <a:cs typeface="Microsoft YaHei"/>
+              </a:rPr>
+              <a:t> 超出上界</a:t>
+            </a:r>
+          </a:p>
+        </p:txBody>
+      </p:sp>
+      <p:sp>
+        <p:nvSpPr>
+          <p:cNvPr id="11" name="TextBox 10"/>
+          <p:cNvSpPr txBox="1"/>
+          <p:nvPr/>
+        </p:nvSpPr>
+        <p:spPr>
+          <a:xfrm>
+            <a:off x="4572000" y="2322576"/>
+            <a:ext cx="438912" cy="219456"/>
+          </a:xfrm>
+          <a:prstGeom prst="rect">
+            <a:avLst/>
+          </a:prstGeom>
+          <a:noFill/>
+        </p:spPr>
+        <p:txBody>
+          <a:bodyPr wrap="square" anchor="ctr" lIns="0" tIns="0" rIns="0" bIns="0">
+            <a:noAutofit/>
+          </a:bodyPr>
+          <a:lstStyle/>
+          <a:p>
+            <a:pPr algn="r" latinLnBrk="0">
+              <a:lnSpc>
+                <a:spcPct val="100000"/>
+              </a:lnSpc>
+              <a:spcBef>
+                <a:spcPts val="0"/>
+              </a:spcBef>
+              <a:spcAft>
+                <a:spcPts val="0"/>
+              </a:spcAft>
+            </a:pPr>
+            <a:r>
+              <a:rPr sz="900" b="0">
+                <a:solidFill>
+                  <a:srgbClr val="8C96A1"/>
+                </a:solidFill>
+                <a:latin typeface="Microsoft YaHei"/>
+                <a:ea typeface="Microsoft YaHei"/>
+                <a:cs typeface="Microsoft YaHei"/>
+              </a:rPr>
+              <a:t>占比</a:t>
+            </a:r>
+          </a:p>
+        </p:txBody>
+      </p:sp>
+      <p:sp>
+        <p:nvSpPr>
+          <p:cNvPr id="12" name="TextBox 11"/>
+          <p:cNvSpPr txBox="1"/>
+          <p:nvPr/>
+        </p:nvSpPr>
+        <p:spPr>
+          <a:xfrm>
+            <a:off x="5065776" y="2322576"/>
+            <a:ext cx="585216" cy="219456"/>
+          </a:xfrm>
+          <a:prstGeom prst="rect">
+            <a:avLst/>
+          </a:prstGeom>
+          <a:noFill/>
+        </p:spPr>
+        <p:txBody>
+          <a:bodyPr wrap="square" anchor="ctr" lIns="0" tIns="0" rIns="0" bIns="0">
+            <a:noAutofit/>
+          </a:bodyPr>
+          <a:lstStyle/>
+          <a:p>
+            <a:pPr algn="r" latinLnBrk="0">
+              <a:lnSpc>
+                <a:spcPct val="100000"/>
+              </a:lnSpc>
+              <a:spcBef>
+                <a:spcPts val="0"/>
+              </a:spcBef>
+              <a:spcAft>
+                <a:spcPts val="0"/>
+              </a:spcAft>
+            </a:pPr>
+            <a:r>
+              <a:rPr sz="900" b="0">
+                <a:solidFill>
+                  <a:srgbClr val="8C96A1"/>
+                </a:solidFill>
+                <a:latin typeface="Microsoft YaHei"/>
+                <a:ea typeface="Microsoft YaHei"/>
+                <a:cs typeface="Microsoft YaHei"/>
+              </a:rPr>
+              <a:t>achieved</a:t>
+            </a:r>
+          </a:p>
+        </p:txBody>
+      </p:sp>
+      <p:sp>
+        <p:nvSpPr>
+          <p:cNvPr id="13" name="TextBox 12"/>
+          <p:cNvSpPr txBox="1"/>
+          <p:nvPr/>
+        </p:nvSpPr>
+        <p:spPr>
+          <a:xfrm>
+            <a:off x="5687568" y="2322576"/>
+            <a:ext cx="329184" cy="219456"/>
+          </a:xfrm>
+          <a:prstGeom prst="rect">
+            <a:avLst/>
+          </a:prstGeom>
+          <a:noFill/>
+        </p:spPr>
+        <p:txBody>
+          <a:bodyPr wrap="square" anchor="ctr" lIns="0" tIns="0" rIns="0" bIns="0">
+            <a:noAutofit/>
+          </a:bodyPr>
+          <a:lstStyle/>
+          <a:p>
+            <a:pPr algn="ctr" latinLnBrk="0">
+              <a:lnSpc>
+                <a:spcPct val="100000"/>
+              </a:lnSpc>
+              <a:spcBef>
+                <a:spcPts val="0"/>
+              </a:spcBef>
+              <a:spcAft>
+                <a:spcPts val="0"/>
+              </a:spcAft>
+            </a:pPr>
+            <a:r>
+              <a:rPr sz="900" b="0">
+                <a:solidFill>
+                  <a:srgbClr val="8C96A1"/>
+                </a:solidFill>
+                <a:latin typeface="Microsoft YaHei"/>
+                <a:ea typeface="Microsoft YaHei"/>
+                <a:cs typeface="Microsoft YaHei"/>
+              </a:rPr>
+              <a:t>候选</a:t>
+            </a:r>
+          </a:p>
+        </p:txBody>
+      </p:sp>
+      <p:cxnSp>
+        <p:nvCxnSpPr>
+          <p:cNvPr id="14" name="Connector 13"/>
+          <p:cNvCxnSpPr/>
+          <p:nvPr/>
+        </p:nvCxnSpPr>
+        <p:spPr>
+          <a:xfrm>
+            <a:off x="749808" y="2560320"/>
+            <a:ext cx="5266944" cy="0"/>
+          </a:xfrm>
+          <a:prstGeom prst="line">
+            <a:avLst/>
+          </a:prstGeom>
+          <a:ln w="9525">
+            <a:solidFill>
+              <a:srgbClr val="DDE2E7"/>
+            </a:solidFill>
+          </a:ln>
+        </p:spPr>
+      </p:cxnSp>
+      <p:sp>
+        <p:nvSpPr>
+          <p:cNvPr id="15" name="TextBox 14"/>
+          <p:cNvSpPr txBox="1"/>
+          <p:nvPr/>
+        </p:nvSpPr>
+        <p:spPr>
+          <a:xfrm>
+            <a:off x="749808" y="2615184"/>
+            <a:ext cx="1783080" cy="228600"/>
+          </a:xfrm>
+          <a:prstGeom prst="rect">
+            <a:avLst/>
+          </a:prstGeom>
+          <a:noFill/>
+        </p:spPr>
+        <p:txBody>
+          <a:bodyPr wrap="square" anchor="ctr" lIns="0" tIns="0" rIns="0" bIns="0">
+            <a:noAutofit/>
+          </a:bodyPr>
+          <a:lstStyle/>
+          <a:p>
+            <a:pPr algn="l" latinLnBrk="0">
+              <a:lnSpc>
+                <a:spcPct val="100000"/>
+              </a:lnSpc>
+              <a:spcBef>
+                <a:spcPts val="0"/>
+              </a:spcBef>
+              <a:spcAft>
+                <a:spcPts val="0"/>
+              </a:spcAft>
+            </a:pPr>
+            <a:r>
+              <a:rPr sz="950" b="0">
+                <a:solidFill>
+                  <a:srgbClr val="35424F"/>
+                </a:solidFill>
+                <a:latin typeface="Microsoft YaHei"/>
+                <a:ea typeface="Microsoft YaHei"/>
+                <a:cs typeface="Microsoft YaHei"/>
+              </a:rPr>
+              <a:t>专家 GEMM（闭源核）</a:t>
+            </a:r>
+          </a:p>
+        </p:txBody>
+      </p:sp>
+      <p:sp>
+        <p:nvSpPr>
+          <p:cNvPr id="16" name="Rectangle 15"/>
           <p:cNvSpPr/>
           <p:nvPr/>
         </p:nvSpPr>
         <p:spPr>
           <a:xfrm>
-            <a:off x="1005840" y="3416165"/>
-            <a:ext cx="640080" cy="918090"/>
+            <a:off x="2606040" y="2660904"/>
+            <a:ext cx="1766620" cy="137160"/>
           </a:xfrm>
           <a:prstGeom prst="rect">
             <a:avLst/>
           </a:prstGeom>
           <a:solidFill>
-            <a:srgbClr val="C5CCD4"/>
+            <a:srgbClr val="DDE2E7"/>
           </a:solidFill>
           <a:ln>
             <a:noFill/>
@@ -3504,114 +3816,20 @@
       </p:sp>
       <p:sp>
         <p:nvSpPr>
-          <p:cNvPr id="11" name="TextBox 10"/>
-          <p:cNvSpPr txBox="1"/>
-          <p:nvPr/>
-        </p:nvSpPr>
-        <p:spPr>
-          <a:xfrm>
-            <a:off x="777240" y="3160133"/>
-            <a:ext cx="1097280" cy="219456"/>
-          </a:xfrm>
-          <a:prstGeom prst="rect">
-            <a:avLst/>
-          </a:prstGeom>
-          <a:noFill/>
-        </p:spPr>
-        <p:txBody>
-          <a:bodyPr wrap="square" anchor="ctr" lIns="0" tIns="0" rIns="0" bIns="0">
-            <a:noAutofit/>
-          </a:bodyPr>
-          <a:lstStyle/>
-          <a:p>
-            <a:pPr algn="ctr" latinLnBrk="0">
-              <a:lnSpc>
-                <a:spcPct val="100000"/>
-              </a:lnSpc>
-              <a:spcBef>
-                <a:spcPts val="0"/>
-              </a:spcBef>
-              <a:spcAft>
-                <a:spcPts val="0"/>
-              </a:spcAft>
-            </a:pPr>
-            <a:r>
-              <a:rPr sz="1150" b="1">
-                <a:solidFill>
-                  <a:srgbClr val="16202A"/>
-                </a:solidFill>
-                <a:latin typeface="Arial"/>
-                <a:ea typeface="Microsoft YaHei"/>
-                <a:cs typeface="Microsoft YaHei"/>
-              </a:rPr>
-              <a:t>1370</a:t>
-            </a:r>
-          </a:p>
-        </p:txBody>
-      </p:sp>
-      <p:sp>
-        <p:nvSpPr>
-          <p:cNvPr id="12" name="TextBox 11"/>
-          <p:cNvSpPr txBox="1"/>
-          <p:nvPr/>
-        </p:nvSpPr>
-        <p:spPr>
-          <a:xfrm>
-            <a:off x="777240" y="4398264"/>
-            <a:ext cx="1097280" cy="201168"/>
-          </a:xfrm>
-          <a:prstGeom prst="rect">
-            <a:avLst/>
-          </a:prstGeom>
-          <a:noFill/>
-        </p:spPr>
-        <p:txBody>
-          <a:bodyPr wrap="square" anchor="ctr" lIns="0" tIns="0" rIns="0" bIns="0">
-            <a:noAutofit/>
-          </a:bodyPr>
-          <a:lstStyle/>
-          <a:p>
-            <a:pPr algn="ctr" latinLnBrk="0">
-              <a:lnSpc>
-                <a:spcPct val="100000"/>
-              </a:lnSpc>
-              <a:spcBef>
-                <a:spcPts val="0"/>
-              </a:spcBef>
-              <a:spcAft>
-                <a:spcPts val="0"/>
-              </a:spcAft>
-            </a:pPr>
-            <a:r>
-              <a:rPr sz="950" b="0">
-                <a:solidFill>
-                  <a:srgbClr val="35424F"/>
-                </a:solidFill>
-                <a:latin typeface="Microsoft YaHei"/>
-                <a:ea typeface="Microsoft YaHei"/>
-                <a:cs typeface="Microsoft YaHei"/>
-              </a:rPr>
-              <a:t>基线</a:t>
-            </a:r>
-          </a:p>
-        </p:txBody>
-      </p:sp>
-      <p:sp>
-        <p:nvSpPr>
-          <p:cNvPr id="13" name="Rectangle 12"/>
+          <p:cNvPr id="17" name="Rectangle 16"/>
           <p:cNvSpPr/>
           <p:nvPr/>
         </p:nvSpPr>
         <p:spPr>
           <a:xfrm>
-            <a:off x="2194560" y="3072384"/>
-            <a:ext cx="640080" cy="1261872"/>
+            <a:off x="2606040" y="2660904"/>
+            <a:ext cx="1075334" cy="137160"/>
           </a:xfrm>
           <a:prstGeom prst="rect">
             <a:avLst/>
           </a:prstGeom>
           <a:solidFill>
-            <a:srgbClr val="3F63A8"/>
+            <a:srgbClr val="8C96A1"/>
           </a:solidFill>
           <a:ln>
             <a:noFill/>
@@ -3627,14 +3845,108 @@
       </p:sp>
       <p:sp>
         <p:nvSpPr>
-          <p:cNvPr id="14" name="TextBox 13"/>
-          <p:cNvSpPr txBox="1"/>
-          <p:nvPr/>
-        </p:nvSpPr>
-        <p:spPr>
-          <a:xfrm>
-            <a:off x="1965960" y="2816352"/>
-            <a:ext cx="1097280" cy="219456"/>
+          <p:cNvPr id="18" name="TextBox 17"/>
+          <p:cNvSpPr txBox="1"/>
+          <p:nvPr/>
+        </p:nvSpPr>
+        <p:spPr>
+          <a:xfrm>
+            <a:off x="4572000" y="2615184"/>
+            <a:ext cx="438912" cy="228600"/>
+          </a:xfrm>
+          <a:prstGeom prst="rect">
+            <a:avLst/>
+          </a:prstGeom>
+          <a:noFill/>
+        </p:spPr>
+        <p:txBody>
+          <a:bodyPr wrap="square" anchor="ctr" lIns="0" tIns="0" rIns="0" bIns="0">
+            <a:noAutofit/>
+          </a:bodyPr>
+          <a:lstStyle/>
+          <a:p>
+            <a:pPr algn="r" latinLnBrk="0">
+              <a:lnSpc>
+                <a:spcPct val="100000"/>
+              </a:lnSpc>
+              <a:spcBef>
+                <a:spcPts val="0"/>
+              </a:spcBef>
+              <a:spcAft>
+                <a:spcPts val="0"/>
+              </a:spcAft>
+            </a:pPr>
+            <a:r>
+              <a:rPr sz="950" b="0">
+                <a:solidFill>
+                  <a:srgbClr val="8C96A1"/>
+                </a:solidFill>
+                <a:latin typeface="Consolas"/>
+                <a:ea typeface="Microsoft YaHei"/>
+                <a:cs typeface="Microsoft YaHei"/>
+              </a:rPr>
+              <a:t>__%</a:t>
+            </a:r>
+          </a:p>
+        </p:txBody>
+      </p:sp>
+      <p:sp>
+        <p:nvSpPr>
+          <p:cNvPr id="19" name="TextBox 18"/>
+          <p:cNvSpPr txBox="1"/>
+          <p:nvPr/>
+        </p:nvSpPr>
+        <p:spPr>
+          <a:xfrm>
+            <a:off x="5065776" y="2615184"/>
+            <a:ext cx="585216" cy="228600"/>
+          </a:xfrm>
+          <a:prstGeom prst="rect">
+            <a:avLst/>
+          </a:prstGeom>
+          <a:noFill/>
+        </p:spPr>
+        <p:txBody>
+          <a:bodyPr wrap="square" anchor="ctr" lIns="0" tIns="0" rIns="0" bIns="0">
+            <a:noAutofit/>
+          </a:bodyPr>
+          <a:lstStyle/>
+          <a:p>
+            <a:pPr algn="r" latinLnBrk="0">
+              <a:lnSpc>
+                <a:spcPct val="100000"/>
+              </a:lnSpc>
+              <a:spcBef>
+                <a:spcPts val="0"/>
+              </a:spcBef>
+              <a:spcAft>
+                <a:spcPts val="0"/>
+              </a:spcAft>
+            </a:pPr>
+            <a:r>
+              <a:rPr sz="950" b="0">
+                <a:solidFill>
+                  <a:srgbClr val="8C96A1"/>
+                </a:solidFill>
+                <a:latin typeface="Consolas"/>
+                <a:ea typeface="Microsoft YaHei"/>
+                <a:cs typeface="Microsoft YaHei"/>
+              </a:rPr>
+              <a:t>__</a:t>
+            </a:r>
+          </a:p>
+        </p:txBody>
+      </p:sp>
+      <p:sp>
+        <p:nvSpPr>
+          <p:cNvPr id="20" name="TextBox 19"/>
+          <p:cNvSpPr txBox="1"/>
+          <p:nvPr/>
+        </p:nvSpPr>
+        <p:spPr>
+          <a:xfrm>
+            <a:off x="5687568" y="2615184"/>
+            <a:ext cx="329184" cy="228600"/>
           </a:xfrm>
           <a:prstGeom prst="rect">
             <a:avLst/>
@@ -3659,29 +3971,228 @@
               </a:spcAft>
             </a:pPr>
             <a:r>
-              <a:rPr sz="1150" b="1">
-                <a:solidFill>
-                  <a:srgbClr val="16202A"/>
-                </a:solidFill>
-                <a:latin typeface="Arial"/>
-                <a:ea typeface="Microsoft YaHei"/>
-                <a:cs typeface="Microsoft YaHei"/>
-              </a:rPr>
-              <a:t>1883</a:t>
-            </a:r>
-          </a:p>
-        </p:txBody>
-      </p:sp>
-      <p:sp>
-        <p:nvSpPr>
-          <p:cNvPr id="15" name="TextBox 14"/>
-          <p:cNvSpPr txBox="1"/>
-          <p:nvPr/>
-        </p:nvSpPr>
-        <p:spPr>
-          <a:xfrm>
-            <a:off x="1965960" y="4398264"/>
-            <a:ext cx="1097280" cy="201168"/>
+              <a:rPr sz="950" b="1">
+                <a:solidFill>
+                  <a:srgbClr val="35424F"/>
+                </a:solidFill>
+                <a:latin typeface="Microsoft YaHei"/>
+                <a:ea typeface="Microsoft YaHei"/>
+                <a:cs typeface="Microsoft YaHei"/>
+              </a:rPr>
+              <a:t>3</a:t>
+            </a:r>
+          </a:p>
+        </p:txBody>
+      </p:sp>
+      <p:sp>
+        <p:nvSpPr>
+          <p:cNvPr id="21" name="TextBox 20"/>
+          <p:cNvSpPr txBox="1"/>
+          <p:nvPr/>
+        </p:nvSpPr>
+        <p:spPr>
+          <a:xfrm>
+            <a:off x="749808" y="2875788"/>
+            <a:ext cx="1783080" cy="228600"/>
+          </a:xfrm>
+          <a:prstGeom prst="rect">
+            <a:avLst/>
+          </a:prstGeom>
+          <a:noFill/>
+        </p:spPr>
+        <p:txBody>
+          <a:bodyPr wrap="square" anchor="ctr" lIns="0" tIns="0" rIns="0" bIns="0">
+            <a:noAutofit/>
+          </a:bodyPr>
+          <a:lstStyle/>
+          <a:p>
+            <a:pPr algn="l" latinLnBrk="0">
+              <a:lnSpc>
+                <a:spcPct val="100000"/>
+              </a:lnSpc>
+              <a:spcBef>
+                <a:spcPts val="0"/>
+              </a:spcBef>
+              <a:spcAft>
+                <a:spcPts val="0"/>
+              </a:spcAft>
+            </a:pPr>
+            <a:r>
+              <a:rPr sz="950" b="0">
+                <a:solidFill>
+                  <a:srgbClr val="35424F"/>
+                </a:solidFill>
+                <a:latin typeface="Microsoft YaHei"/>
+                <a:ea typeface="Microsoft YaHei"/>
+                <a:cs typeface="Microsoft YaHei"/>
+              </a:rPr>
+              <a:t>专家重排与合并</a:t>
+            </a:r>
+          </a:p>
+        </p:txBody>
+      </p:sp>
+      <p:sp>
+        <p:nvSpPr>
+          <p:cNvPr id="22" name="Rectangle 21"/>
+          <p:cNvSpPr/>
+          <p:nvPr/>
+        </p:nvSpPr>
+        <p:spPr>
+          <a:xfrm>
+            <a:off x="2606040" y="2921508"/>
+            <a:ext cx="883310" cy="137160"/>
+          </a:xfrm>
+          <a:prstGeom prst="rect">
+            <a:avLst/>
+          </a:prstGeom>
+          <a:solidFill>
+            <a:srgbClr val="DDE2E7"/>
+          </a:solidFill>
+          <a:ln>
+            <a:noFill/>
+          </a:ln>
+        </p:spPr>
+        <p:txBody>
+          <a:bodyPr rtlCol="0" anchor="ctr"/>
+          <a:lstStyle/>
+          <a:p>
+            <a:pPr algn="ctr"/>
+          </a:p>
+        </p:txBody>
+      </p:sp>
+      <p:sp>
+        <p:nvSpPr>
+          <p:cNvPr id="23" name="Rectangle 22"/>
+          <p:cNvSpPr/>
+          <p:nvPr/>
+        </p:nvSpPr>
+        <p:spPr>
+          <a:xfrm>
+            <a:off x="2606040" y="2921508"/>
+            <a:ext cx="288036" cy="137160"/>
+          </a:xfrm>
+          <a:prstGeom prst="rect">
+            <a:avLst/>
+          </a:prstGeom>
+          <a:solidFill>
+            <a:srgbClr val="8C96A1"/>
+          </a:solidFill>
+          <a:ln>
+            <a:noFill/>
+          </a:ln>
+        </p:spPr>
+        <p:txBody>
+          <a:bodyPr rtlCol="0" anchor="ctr"/>
+          <a:lstStyle/>
+          <a:p>
+            <a:pPr algn="ctr"/>
+          </a:p>
+        </p:txBody>
+      </p:sp>
+      <p:sp>
+        <p:nvSpPr>
+          <p:cNvPr id="24" name="TextBox 23"/>
+          <p:cNvSpPr txBox="1"/>
+          <p:nvPr/>
+        </p:nvSpPr>
+        <p:spPr>
+          <a:xfrm>
+            <a:off x="4572000" y="2875788"/>
+            <a:ext cx="438912" cy="228600"/>
+          </a:xfrm>
+          <a:prstGeom prst="rect">
+            <a:avLst/>
+          </a:prstGeom>
+          <a:noFill/>
+        </p:spPr>
+        <p:txBody>
+          <a:bodyPr wrap="square" anchor="ctr" lIns="0" tIns="0" rIns="0" bIns="0">
+            <a:noAutofit/>
+          </a:bodyPr>
+          <a:lstStyle/>
+          <a:p>
+            <a:pPr algn="r" latinLnBrk="0">
+              <a:lnSpc>
+                <a:spcPct val="100000"/>
+              </a:lnSpc>
+              <a:spcBef>
+                <a:spcPts val="0"/>
+              </a:spcBef>
+              <a:spcAft>
+                <a:spcPts val="0"/>
+              </a:spcAft>
+            </a:pPr>
+            <a:r>
+              <a:rPr sz="950" b="0">
+                <a:solidFill>
+                  <a:srgbClr val="8C96A1"/>
+                </a:solidFill>
+                <a:latin typeface="Consolas"/>
+                <a:ea typeface="Microsoft YaHei"/>
+                <a:cs typeface="Microsoft YaHei"/>
+              </a:rPr>
+              <a:t>__%</a:t>
+            </a:r>
+          </a:p>
+        </p:txBody>
+      </p:sp>
+      <p:sp>
+        <p:nvSpPr>
+          <p:cNvPr id="25" name="TextBox 24"/>
+          <p:cNvSpPr txBox="1"/>
+          <p:nvPr/>
+        </p:nvSpPr>
+        <p:spPr>
+          <a:xfrm>
+            <a:off x="5065776" y="2875788"/>
+            <a:ext cx="585216" cy="228600"/>
+          </a:xfrm>
+          <a:prstGeom prst="rect">
+            <a:avLst/>
+          </a:prstGeom>
+          <a:noFill/>
+        </p:spPr>
+        <p:txBody>
+          <a:bodyPr wrap="square" anchor="ctr" lIns="0" tIns="0" rIns="0" bIns="0">
+            <a:noAutofit/>
+          </a:bodyPr>
+          <a:lstStyle/>
+          <a:p>
+            <a:pPr algn="r" latinLnBrk="0">
+              <a:lnSpc>
+                <a:spcPct val="100000"/>
+              </a:lnSpc>
+              <a:spcBef>
+                <a:spcPts val="0"/>
+              </a:spcBef>
+              <a:spcAft>
+                <a:spcPts val="0"/>
+              </a:spcAft>
+            </a:pPr>
+            <a:r>
+              <a:rPr sz="950" b="0">
+                <a:solidFill>
+                  <a:srgbClr val="8C96A1"/>
+                </a:solidFill>
+                <a:latin typeface="Consolas"/>
+                <a:ea typeface="Microsoft YaHei"/>
+                <a:cs typeface="Microsoft YaHei"/>
+              </a:rPr>
+              <a:t>__</a:t>
+            </a:r>
+          </a:p>
+        </p:txBody>
+      </p:sp>
+      <p:sp>
+        <p:nvSpPr>
+          <p:cNvPr id="26" name="TextBox 25"/>
+          <p:cNvSpPr txBox="1"/>
+          <p:nvPr/>
+        </p:nvSpPr>
+        <p:spPr>
+          <a:xfrm>
+            <a:off x="5687568" y="2875788"/>
+            <a:ext cx="329184" cy="228600"/>
           </a:xfrm>
           <a:prstGeom prst="rect">
             <a:avLst/>
@@ -3706,6 +4217,53 @@
               </a:spcAft>
             </a:pPr>
             <a:r>
+              <a:rPr sz="950" b="1">
+                <a:solidFill>
+                  <a:srgbClr val="35424F"/>
+                </a:solidFill>
+                <a:latin typeface="Microsoft YaHei"/>
+                <a:ea typeface="Microsoft YaHei"/>
+                <a:cs typeface="Microsoft YaHei"/>
+              </a:rPr>
+              <a:t>2 · 4</a:t>
+            </a:r>
+          </a:p>
+        </p:txBody>
+      </p:sp>
+      <p:sp>
+        <p:nvSpPr>
+          <p:cNvPr id="27" name="TextBox 26"/>
+          <p:cNvSpPr txBox="1"/>
+          <p:nvPr/>
+        </p:nvSpPr>
+        <p:spPr>
+          <a:xfrm>
+            <a:off x="749808" y="3136392"/>
+            <a:ext cx="1783080" cy="228600"/>
+          </a:xfrm>
+          <a:prstGeom prst="rect">
+            <a:avLst/>
+          </a:prstGeom>
+          <a:noFill/>
+        </p:spPr>
+        <p:txBody>
+          <a:bodyPr wrap="square" anchor="ctr" lIns="0" tIns="0" rIns="0" bIns="0">
+            <a:noAutofit/>
+          </a:bodyPr>
+          <a:lstStyle/>
+          <a:p>
+            <a:pPr algn="l" latinLnBrk="0">
+              <a:lnSpc>
+                <a:spcPct val="100000"/>
+              </a:lnSpc>
+              <a:spcBef>
+                <a:spcPts val="0"/>
+              </a:spcBef>
+              <a:spcAft>
+                <a:spcPts val="0"/>
+              </a:spcAft>
+            </a:pPr>
+            <a:r>
               <a:rPr sz="950" b="0">
                 <a:solidFill>
                   <a:srgbClr val="35424F"/>
@@ -3714,42 +4272,220 @@
                 <a:ea typeface="Microsoft YaHei"/>
                 <a:cs typeface="Microsoft YaHei"/>
               </a:rPr>
-              <a:t>交付</a:t>
-            </a:r>
-          </a:p>
-        </p:txBody>
-      </p:sp>
-      <p:cxnSp>
-        <p:nvCxnSpPr>
-          <p:cNvPr id="16" name="Connector 15"/>
-          <p:cNvCxnSpPr/>
-          <p:nvPr/>
-        </p:nvCxnSpPr>
-        <p:spPr>
-          <a:xfrm>
-            <a:off x="822959" y="4334256"/>
-            <a:ext cx="2194561" cy="0"/>
-          </a:xfrm>
-          <a:prstGeom prst="line">
-            <a:avLst/>
-          </a:prstGeom>
-          <a:ln w="12700">
-            <a:solidFill>
-              <a:srgbClr val="C5CCD4"/>
-            </a:solidFill>
+              <a:t>逐元素 + 量化</a:t>
+            </a:r>
+          </a:p>
+        </p:txBody>
+      </p:sp>
+      <p:sp>
+        <p:nvSpPr>
+          <p:cNvPr id="28" name="Rectangle 27"/>
+          <p:cNvSpPr/>
+          <p:nvPr/>
+        </p:nvSpPr>
+        <p:spPr>
+          <a:xfrm>
+            <a:off x="2606040" y="3182112"/>
+            <a:ext cx="1056132" cy="137160"/>
+          </a:xfrm>
+          <a:prstGeom prst="rect">
+            <a:avLst/>
+          </a:prstGeom>
+          <a:solidFill>
+            <a:srgbClr val="DDE2E7"/>
+          </a:solidFill>
+          <a:ln>
+            <a:noFill/>
           </a:ln>
         </p:spPr>
-      </p:cxnSp>
-      <p:sp>
-        <p:nvSpPr>
-          <p:cNvPr id="17" name="TextBox 16"/>
-          <p:cNvSpPr txBox="1"/>
-          <p:nvPr/>
-        </p:nvSpPr>
-        <p:spPr>
-          <a:xfrm>
-            <a:off x="749808" y="4681728"/>
-            <a:ext cx="2340864" cy="219456"/>
+        <p:txBody>
+          <a:bodyPr rtlCol="0" anchor="ctr"/>
+          <a:lstStyle/>
+          <a:p>
+            <a:pPr algn="ctr"/>
+          </a:p>
+        </p:txBody>
+      </p:sp>
+      <p:sp>
+        <p:nvSpPr>
+          <p:cNvPr id="29" name="Rectangle 28"/>
+          <p:cNvSpPr/>
+          <p:nvPr/>
+        </p:nvSpPr>
+        <p:spPr>
+          <a:xfrm>
+            <a:off x="2606040" y="3182112"/>
+            <a:ext cx="211226" cy="137160"/>
+          </a:xfrm>
+          <a:prstGeom prst="rect">
+            <a:avLst/>
+          </a:prstGeom>
+          <a:solidFill>
+            <a:srgbClr val="8C96A1"/>
+          </a:solidFill>
+          <a:ln>
+            <a:noFill/>
+          </a:ln>
+        </p:spPr>
+        <p:txBody>
+          <a:bodyPr rtlCol="0" anchor="ctr"/>
+          <a:lstStyle/>
+          <a:p>
+            <a:pPr algn="ctr"/>
+          </a:p>
+        </p:txBody>
+      </p:sp>
+      <p:sp>
+        <p:nvSpPr>
+          <p:cNvPr id="30" name="TextBox 29"/>
+          <p:cNvSpPr txBox="1"/>
+          <p:nvPr/>
+        </p:nvSpPr>
+        <p:spPr>
+          <a:xfrm>
+            <a:off x="4572000" y="3136392"/>
+            <a:ext cx="438912" cy="228600"/>
+          </a:xfrm>
+          <a:prstGeom prst="rect">
+            <a:avLst/>
+          </a:prstGeom>
+          <a:noFill/>
+        </p:spPr>
+        <p:txBody>
+          <a:bodyPr wrap="square" anchor="ctr" lIns="0" tIns="0" rIns="0" bIns="0">
+            <a:noAutofit/>
+          </a:bodyPr>
+          <a:lstStyle/>
+          <a:p>
+            <a:pPr algn="r" latinLnBrk="0">
+              <a:lnSpc>
+                <a:spcPct val="100000"/>
+              </a:lnSpc>
+              <a:spcBef>
+                <a:spcPts val="0"/>
+              </a:spcBef>
+              <a:spcAft>
+                <a:spcPts val="0"/>
+              </a:spcAft>
+            </a:pPr>
+            <a:r>
+              <a:rPr sz="950" b="0">
+                <a:solidFill>
+                  <a:srgbClr val="8C96A1"/>
+                </a:solidFill>
+                <a:latin typeface="Consolas"/>
+                <a:ea typeface="Microsoft YaHei"/>
+                <a:cs typeface="Microsoft YaHei"/>
+              </a:rPr>
+              <a:t>__%</a:t>
+            </a:r>
+          </a:p>
+        </p:txBody>
+      </p:sp>
+      <p:sp>
+        <p:nvSpPr>
+          <p:cNvPr id="31" name="TextBox 30"/>
+          <p:cNvSpPr txBox="1"/>
+          <p:nvPr/>
+        </p:nvSpPr>
+        <p:spPr>
+          <a:xfrm>
+            <a:off x="5065776" y="3136392"/>
+            <a:ext cx="585216" cy="228600"/>
+          </a:xfrm>
+          <a:prstGeom prst="rect">
+            <a:avLst/>
+          </a:prstGeom>
+          <a:noFill/>
+        </p:spPr>
+        <p:txBody>
+          <a:bodyPr wrap="square" anchor="ctr" lIns="0" tIns="0" rIns="0" bIns="0">
+            <a:noAutofit/>
+          </a:bodyPr>
+          <a:lstStyle/>
+          <a:p>
+            <a:pPr algn="r" latinLnBrk="0">
+              <a:lnSpc>
+                <a:spcPct val="100000"/>
+              </a:lnSpc>
+              <a:spcBef>
+                <a:spcPts val="0"/>
+              </a:spcBef>
+              <a:spcAft>
+                <a:spcPts val="0"/>
+              </a:spcAft>
+            </a:pPr>
+            <a:r>
+              <a:rPr sz="950" b="0">
+                <a:solidFill>
+                  <a:srgbClr val="8C96A1"/>
+                </a:solidFill>
+                <a:latin typeface="Consolas"/>
+                <a:ea typeface="Microsoft YaHei"/>
+                <a:cs typeface="Microsoft YaHei"/>
+              </a:rPr>
+              <a:t>__</a:t>
+            </a:r>
+          </a:p>
+        </p:txBody>
+      </p:sp>
+      <p:sp>
+        <p:nvSpPr>
+          <p:cNvPr id="32" name="TextBox 31"/>
+          <p:cNvSpPr txBox="1"/>
+          <p:nvPr/>
+        </p:nvSpPr>
+        <p:spPr>
+          <a:xfrm>
+            <a:off x="5687568" y="3136392"/>
+            <a:ext cx="329184" cy="228600"/>
+          </a:xfrm>
+          <a:prstGeom prst="rect">
+            <a:avLst/>
+          </a:prstGeom>
+          <a:noFill/>
+        </p:spPr>
+        <p:txBody>
+          <a:bodyPr wrap="square" anchor="ctr" lIns="0" tIns="0" rIns="0" bIns="0">
+            <a:noAutofit/>
+          </a:bodyPr>
+          <a:lstStyle/>
+          <a:p>
+            <a:pPr algn="ctr" latinLnBrk="0">
+              <a:lnSpc>
+                <a:spcPct val="100000"/>
+              </a:lnSpc>
+              <a:spcBef>
+                <a:spcPts val="0"/>
+              </a:spcBef>
+              <a:spcAft>
+                <a:spcPts val="0"/>
+              </a:spcAft>
+            </a:pPr>
+            <a:r>
+              <a:rPr sz="950" b="1">
+                <a:solidFill>
+                  <a:srgbClr val="35424F"/>
+                </a:solidFill>
+                <a:latin typeface="Microsoft YaHei"/>
+                <a:ea typeface="Microsoft YaHei"/>
+                <a:cs typeface="Microsoft YaHei"/>
+              </a:rPr>
+              <a:t>1</a:t>
+            </a:r>
+          </a:p>
+        </p:txBody>
+      </p:sp>
+      <p:sp>
+        <p:nvSpPr>
+          <p:cNvPr id="33" name="TextBox 32"/>
+          <p:cNvSpPr txBox="1"/>
+          <p:nvPr/>
+        </p:nvSpPr>
+        <p:spPr>
+          <a:xfrm>
+            <a:off x="749808" y="3396996"/>
+            <a:ext cx="1783080" cy="228600"/>
           </a:xfrm>
           <a:prstGeom prst="rect">
             <a:avLst/>
@@ -3774,6 +4510,1218 @@
               </a:spcAft>
             </a:pPr>
             <a:r>
+              <a:rPr sz="950" b="0">
+                <a:solidFill>
+                  <a:srgbClr val="35424F"/>
+                </a:solidFill>
+                <a:latin typeface="Microsoft YaHei"/>
+                <a:ea typeface="Microsoft YaHei"/>
+                <a:cs typeface="Microsoft YaHei"/>
+              </a:rPr>
+              <a:t>Attention</a:t>
+            </a:r>
+          </a:p>
+        </p:txBody>
+      </p:sp>
+      <p:sp>
+        <p:nvSpPr>
+          <p:cNvPr id="34" name="Rectangle 33"/>
+          <p:cNvSpPr/>
+          <p:nvPr/>
+        </p:nvSpPr>
+        <p:spPr>
+          <a:xfrm>
+            <a:off x="2606040" y="3442716"/>
+            <a:ext cx="844905" cy="137160"/>
+          </a:xfrm>
+          <a:prstGeom prst="rect">
+            <a:avLst/>
+          </a:prstGeom>
+          <a:solidFill>
+            <a:srgbClr val="DDE2E7"/>
+          </a:solidFill>
+          <a:ln>
+            <a:noFill/>
+          </a:ln>
+        </p:spPr>
+        <p:txBody>
+          <a:bodyPr rtlCol="0" anchor="ctr"/>
+          <a:lstStyle/>
+          <a:p>
+            <a:pPr algn="ctr"/>
+          </a:p>
+        </p:txBody>
+      </p:sp>
+      <p:sp>
+        <p:nvSpPr>
+          <p:cNvPr id="35" name="Rectangle 34"/>
+          <p:cNvSpPr/>
+          <p:nvPr/>
+        </p:nvSpPr>
+        <p:spPr>
+          <a:xfrm>
+            <a:off x="2606040" y="3442716"/>
+            <a:ext cx="556869" cy="137160"/>
+          </a:xfrm>
+          <a:prstGeom prst="rect">
+            <a:avLst/>
+          </a:prstGeom>
+          <a:solidFill>
+            <a:srgbClr val="8C96A1"/>
+          </a:solidFill>
+          <a:ln>
+            <a:noFill/>
+          </a:ln>
+        </p:spPr>
+        <p:txBody>
+          <a:bodyPr rtlCol="0" anchor="ctr"/>
+          <a:lstStyle/>
+          <a:p>
+            <a:pPr algn="ctr"/>
+          </a:p>
+        </p:txBody>
+      </p:sp>
+      <p:sp>
+        <p:nvSpPr>
+          <p:cNvPr id="36" name="TextBox 35"/>
+          <p:cNvSpPr txBox="1"/>
+          <p:nvPr/>
+        </p:nvSpPr>
+        <p:spPr>
+          <a:xfrm>
+            <a:off x="4572000" y="3396996"/>
+            <a:ext cx="438912" cy="228600"/>
+          </a:xfrm>
+          <a:prstGeom prst="rect">
+            <a:avLst/>
+          </a:prstGeom>
+          <a:noFill/>
+        </p:spPr>
+        <p:txBody>
+          <a:bodyPr wrap="square" anchor="ctr" lIns="0" tIns="0" rIns="0" bIns="0">
+            <a:noAutofit/>
+          </a:bodyPr>
+          <a:lstStyle/>
+          <a:p>
+            <a:pPr algn="r" latinLnBrk="0">
+              <a:lnSpc>
+                <a:spcPct val="100000"/>
+              </a:lnSpc>
+              <a:spcBef>
+                <a:spcPts val="0"/>
+              </a:spcBef>
+              <a:spcAft>
+                <a:spcPts val="0"/>
+              </a:spcAft>
+            </a:pPr>
+            <a:r>
+              <a:rPr sz="950" b="0">
+                <a:solidFill>
+                  <a:srgbClr val="8C96A1"/>
+                </a:solidFill>
+                <a:latin typeface="Consolas"/>
+                <a:ea typeface="Microsoft YaHei"/>
+                <a:cs typeface="Microsoft YaHei"/>
+              </a:rPr>
+              <a:t>__%</a:t>
+            </a:r>
+          </a:p>
+        </p:txBody>
+      </p:sp>
+      <p:sp>
+        <p:nvSpPr>
+          <p:cNvPr id="37" name="TextBox 36"/>
+          <p:cNvSpPr txBox="1"/>
+          <p:nvPr/>
+        </p:nvSpPr>
+        <p:spPr>
+          <a:xfrm>
+            <a:off x="5065776" y="3396996"/>
+            <a:ext cx="585216" cy="228600"/>
+          </a:xfrm>
+          <a:prstGeom prst="rect">
+            <a:avLst/>
+          </a:prstGeom>
+          <a:noFill/>
+        </p:spPr>
+        <p:txBody>
+          <a:bodyPr wrap="square" anchor="ctr" lIns="0" tIns="0" rIns="0" bIns="0">
+            <a:noAutofit/>
+          </a:bodyPr>
+          <a:lstStyle/>
+          <a:p>
+            <a:pPr algn="r" latinLnBrk="0">
+              <a:lnSpc>
+                <a:spcPct val="100000"/>
+              </a:lnSpc>
+              <a:spcBef>
+                <a:spcPts val="0"/>
+              </a:spcBef>
+              <a:spcAft>
+                <a:spcPts val="0"/>
+              </a:spcAft>
+            </a:pPr>
+            <a:r>
+              <a:rPr sz="950" b="0">
+                <a:solidFill>
+                  <a:srgbClr val="8C96A1"/>
+                </a:solidFill>
+                <a:latin typeface="Consolas"/>
+                <a:ea typeface="Microsoft YaHei"/>
+                <a:cs typeface="Microsoft YaHei"/>
+              </a:rPr>
+              <a:t>__</a:t>
+            </a:r>
+          </a:p>
+        </p:txBody>
+      </p:sp>
+      <p:sp>
+        <p:nvSpPr>
+          <p:cNvPr id="38" name="TextBox 37"/>
+          <p:cNvSpPr txBox="1"/>
+          <p:nvPr/>
+        </p:nvSpPr>
+        <p:spPr>
+          <a:xfrm>
+            <a:off x="5687568" y="3396996"/>
+            <a:ext cx="329184" cy="228600"/>
+          </a:xfrm>
+          <a:prstGeom prst="rect">
+            <a:avLst/>
+          </a:prstGeom>
+          <a:noFill/>
+        </p:spPr>
+        <p:txBody>
+          <a:bodyPr wrap="square" anchor="ctr" lIns="0" tIns="0" rIns="0" bIns="0">
+            <a:noAutofit/>
+          </a:bodyPr>
+          <a:lstStyle/>
+          <a:p>
+            <a:pPr algn="ctr" latinLnBrk="0">
+              <a:lnSpc>
+                <a:spcPct val="100000"/>
+              </a:lnSpc>
+              <a:spcBef>
+                <a:spcPts val="0"/>
+              </a:spcBef>
+              <a:spcAft>
+                <a:spcPts val="0"/>
+              </a:spcAft>
+            </a:pPr>
+            <a:r>
+              <a:rPr sz="950" b="0">
+                <a:solidFill>
+                  <a:srgbClr val="8C96A1"/>
+                </a:solidFill>
+                <a:latin typeface="Microsoft YaHei"/>
+                <a:ea typeface="Microsoft YaHei"/>
+                <a:cs typeface="Microsoft YaHei"/>
+              </a:rPr>
+              <a:t>—</a:t>
+            </a:r>
+          </a:p>
+        </p:txBody>
+      </p:sp>
+      <p:sp>
+        <p:nvSpPr>
+          <p:cNvPr id="39" name="TextBox 38"/>
+          <p:cNvSpPr txBox="1"/>
+          <p:nvPr/>
+        </p:nvSpPr>
+        <p:spPr>
+          <a:xfrm>
+            <a:off x="749808" y="3657600"/>
+            <a:ext cx="1783080" cy="228600"/>
+          </a:xfrm>
+          <a:prstGeom prst="rect">
+            <a:avLst/>
+          </a:prstGeom>
+          <a:noFill/>
+        </p:spPr>
+        <p:txBody>
+          <a:bodyPr wrap="square" anchor="ctr" lIns="0" tIns="0" rIns="0" bIns="0">
+            <a:noAutofit/>
+          </a:bodyPr>
+          <a:lstStyle/>
+          <a:p>
+            <a:pPr algn="l" latinLnBrk="0">
+              <a:lnSpc>
+                <a:spcPct val="100000"/>
+              </a:lnSpc>
+              <a:spcBef>
+                <a:spcPts val="0"/>
+              </a:spcBef>
+              <a:spcAft>
+                <a:spcPts val="0"/>
+              </a:spcAft>
+            </a:pPr>
+            <a:r>
+              <a:rPr sz="950" b="0">
+                <a:solidFill>
+                  <a:srgbClr val="35424F"/>
+                </a:solidFill>
+                <a:latin typeface="Microsoft YaHei"/>
+                <a:ea typeface="Microsoft YaHei"/>
+                <a:cs typeface="Microsoft YaHei"/>
+              </a:rPr>
+              <a:t>稠密 GEMM（QKV / O 等）</a:t>
+            </a:r>
+          </a:p>
+        </p:txBody>
+      </p:sp>
+      <p:sp>
+        <p:nvSpPr>
+          <p:cNvPr id="40" name="Rectangle 39"/>
+          <p:cNvSpPr/>
+          <p:nvPr/>
+        </p:nvSpPr>
+        <p:spPr>
+          <a:xfrm>
+            <a:off x="2606040" y="3703320"/>
+            <a:ext cx="691286" cy="137160"/>
+          </a:xfrm>
+          <a:prstGeom prst="rect">
+            <a:avLst/>
+          </a:prstGeom>
+          <a:solidFill>
+            <a:srgbClr val="DDE2E7"/>
+          </a:solidFill>
+          <a:ln>
+            <a:noFill/>
+          </a:ln>
+        </p:spPr>
+        <p:txBody>
+          <a:bodyPr rtlCol="0" anchor="ctr"/>
+          <a:lstStyle/>
+          <a:p>
+            <a:pPr algn="ctr"/>
+          </a:p>
+        </p:txBody>
+      </p:sp>
+      <p:sp>
+        <p:nvSpPr>
+          <p:cNvPr id="41" name="Rectangle 40"/>
+          <p:cNvSpPr/>
+          <p:nvPr/>
+        </p:nvSpPr>
+        <p:spPr>
+          <a:xfrm>
+            <a:off x="2606040" y="3703320"/>
+            <a:ext cx="499262" cy="137160"/>
+          </a:xfrm>
+          <a:prstGeom prst="rect">
+            <a:avLst/>
+          </a:prstGeom>
+          <a:solidFill>
+            <a:srgbClr val="8C96A1"/>
+          </a:solidFill>
+          <a:ln>
+            <a:noFill/>
+          </a:ln>
+        </p:spPr>
+        <p:txBody>
+          <a:bodyPr rtlCol="0" anchor="ctr"/>
+          <a:lstStyle/>
+          <a:p>
+            <a:pPr algn="ctr"/>
+          </a:p>
+        </p:txBody>
+      </p:sp>
+      <p:sp>
+        <p:nvSpPr>
+          <p:cNvPr id="42" name="TextBox 41"/>
+          <p:cNvSpPr txBox="1"/>
+          <p:nvPr/>
+        </p:nvSpPr>
+        <p:spPr>
+          <a:xfrm>
+            <a:off x="4572000" y="3657600"/>
+            <a:ext cx="438912" cy="228600"/>
+          </a:xfrm>
+          <a:prstGeom prst="rect">
+            <a:avLst/>
+          </a:prstGeom>
+          <a:noFill/>
+        </p:spPr>
+        <p:txBody>
+          <a:bodyPr wrap="square" anchor="ctr" lIns="0" tIns="0" rIns="0" bIns="0">
+            <a:noAutofit/>
+          </a:bodyPr>
+          <a:lstStyle/>
+          <a:p>
+            <a:pPr algn="r" latinLnBrk="0">
+              <a:lnSpc>
+                <a:spcPct val="100000"/>
+              </a:lnSpc>
+              <a:spcBef>
+                <a:spcPts val="0"/>
+              </a:spcBef>
+              <a:spcAft>
+                <a:spcPts val="0"/>
+              </a:spcAft>
+            </a:pPr>
+            <a:r>
+              <a:rPr sz="950" b="0">
+                <a:solidFill>
+                  <a:srgbClr val="8C96A1"/>
+                </a:solidFill>
+                <a:latin typeface="Consolas"/>
+                <a:ea typeface="Microsoft YaHei"/>
+                <a:cs typeface="Microsoft YaHei"/>
+              </a:rPr>
+              <a:t>__%</a:t>
+            </a:r>
+          </a:p>
+        </p:txBody>
+      </p:sp>
+      <p:sp>
+        <p:nvSpPr>
+          <p:cNvPr id="43" name="TextBox 42"/>
+          <p:cNvSpPr txBox="1"/>
+          <p:nvPr/>
+        </p:nvSpPr>
+        <p:spPr>
+          <a:xfrm>
+            <a:off x="5065776" y="3657600"/>
+            <a:ext cx="585216" cy="228600"/>
+          </a:xfrm>
+          <a:prstGeom prst="rect">
+            <a:avLst/>
+          </a:prstGeom>
+          <a:noFill/>
+        </p:spPr>
+        <p:txBody>
+          <a:bodyPr wrap="square" anchor="ctr" lIns="0" tIns="0" rIns="0" bIns="0">
+            <a:noAutofit/>
+          </a:bodyPr>
+          <a:lstStyle/>
+          <a:p>
+            <a:pPr algn="r" latinLnBrk="0">
+              <a:lnSpc>
+                <a:spcPct val="100000"/>
+              </a:lnSpc>
+              <a:spcBef>
+                <a:spcPts val="0"/>
+              </a:spcBef>
+              <a:spcAft>
+                <a:spcPts val="0"/>
+              </a:spcAft>
+            </a:pPr>
+            <a:r>
+              <a:rPr sz="950" b="0">
+                <a:solidFill>
+                  <a:srgbClr val="8C96A1"/>
+                </a:solidFill>
+                <a:latin typeface="Consolas"/>
+                <a:ea typeface="Microsoft YaHei"/>
+                <a:cs typeface="Microsoft YaHei"/>
+              </a:rPr>
+              <a:t>__</a:t>
+            </a:r>
+          </a:p>
+        </p:txBody>
+      </p:sp>
+      <p:sp>
+        <p:nvSpPr>
+          <p:cNvPr id="44" name="TextBox 43"/>
+          <p:cNvSpPr txBox="1"/>
+          <p:nvPr/>
+        </p:nvSpPr>
+        <p:spPr>
+          <a:xfrm>
+            <a:off x="5687568" y="3657600"/>
+            <a:ext cx="329184" cy="228600"/>
+          </a:xfrm>
+          <a:prstGeom prst="rect">
+            <a:avLst/>
+          </a:prstGeom>
+          <a:noFill/>
+        </p:spPr>
+        <p:txBody>
+          <a:bodyPr wrap="square" anchor="ctr" lIns="0" tIns="0" rIns="0" bIns="0">
+            <a:noAutofit/>
+          </a:bodyPr>
+          <a:lstStyle/>
+          <a:p>
+            <a:pPr algn="ctr" latinLnBrk="0">
+              <a:lnSpc>
+                <a:spcPct val="100000"/>
+              </a:lnSpc>
+              <a:spcBef>
+                <a:spcPts val="0"/>
+              </a:spcBef>
+              <a:spcAft>
+                <a:spcPts val="0"/>
+              </a:spcAft>
+            </a:pPr>
+            <a:r>
+              <a:rPr sz="950" b="0">
+                <a:solidFill>
+                  <a:srgbClr val="8C96A1"/>
+                </a:solidFill>
+                <a:latin typeface="Microsoft YaHei"/>
+                <a:ea typeface="Microsoft YaHei"/>
+                <a:cs typeface="Microsoft YaHei"/>
+              </a:rPr>
+              <a:t>—</a:t>
+            </a:r>
+          </a:p>
+        </p:txBody>
+      </p:sp>
+      <p:sp>
+        <p:nvSpPr>
+          <p:cNvPr id="45" name="TextBox 44"/>
+          <p:cNvSpPr txBox="1"/>
+          <p:nvPr/>
+        </p:nvSpPr>
+        <p:spPr>
+          <a:xfrm>
+            <a:off x="749808" y="3918204"/>
+            <a:ext cx="1783080" cy="228600"/>
+          </a:xfrm>
+          <a:prstGeom prst="rect">
+            <a:avLst/>
+          </a:prstGeom>
+          <a:noFill/>
+        </p:spPr>
+        <p:txBody>
+          <a:bodyPr wrap="square" anchor="ctr" lIns="0" tIns="0" rIns="0" bIns="0">
+            <a:noAutofit/>
+          </a:bodyPr>
+          <a:lstStyle/>
+          <a:p>
+            <a:pPr algn="l" latinLnBrk="0">
+              <a:lnSpc>
+                <a:spcPct val="100000"/>
+              </a:lnSpc>
+              <a:spcBef>
+                <a:spcPts val="0"/>
+              </a:spcBef>
+              <a:spcAft>
+                <a:spcPts val="0"/>
+              </a:spcAft>
+            </a:pPr>
+            <a:r>
+              <a:rPr sz="950" b="0">
+                <a:solidFill>
+                  <a:srgbClr val="35424F"/>
+                </a:solidFill>
+                <a:latin typeface="Microsoft YaHei"/>
+                <a:ea typeface="Microsoft YaHei"/>
+                <a:cs typeface="Microsoft YaHei"/>
+              </a:rPr>
+              <a:t>路由 softmax / topk</a:t>
+            </a:r>
+          </a:p>
+        </p:txBody>
+      </p:sp>
+      <p:sp>
+        <p:nvSpPr>
+          <p:cNvPr id="46" name="Rectangle 45"/>
+          <p:cNvSpPr/>
+          <p:nvPr/>
+        </p:nvSpPr>
+        <p:spPr>
+          <a:xfrm>
+            <a:off x="2606040" y="3963924"/>
+            <a:ext cx="172821" cy="137160"/>
+          </a:xfrm>
+          <a:prstGeom prst="rect">
+            <a:avLst/>
+          </a:prstGeom>
+          <a:solidFill>
+            <a:srgbClr val="DDE2E7"/>
+          </a:solidFill>
+          <a:ln>
+            <a:noFill/>
+          </a:ln>
+        </p:spPr>
+        <p:txBody>
+          <a:bodyPr rtlCol="0" anchor="ctr"/>
+          <a:lstStyle/>
+          <a:p>
+            <a:pPr algn="ctr"/>
+          </a:p>
+        </p:txBody>
+      </p:sp>
+      <p:sp>
+        <p:nvSpPr>
+          <p:cNvPr id="47" name="Rectangle 46"/>
+          <p:cNvSpPr/>
+          <p:nvPr/>
+        </p:nvSpPr>
+        <p:spPr>
+          <a:xfrm>
+            <a:off x="2606040" y="3963924"/>
+            <a:ext cx="57607" cy="137160"/>
+          </a:xfrm>
+          <a:prstGeom prst="rect">
+            <a:avLst/>
+          </a:prstGeom>
+          <a:solidFill>
+            <a:srgbClr val="8C96A1"/>
+          </a:solidFill>
+          <a:ln>
+            <a:noFill/>
+          </a:ln>
+        </p:spPr>
+        <p:txBody>
+          <a:bodyPr rtlCol="0" anchor="ctr"/>
+          <a:lstStyle/>
+          <a:p>
+            <a:pPr algn="ctr"/>
+          </a:p>
+        </p:txBody>
+      </p:sp>
+      <p:sp>
+        <p:nvSpPr>
+          <p:cNvPr id="48" name="TextBox 47"/>
+          <p:cNvSpPr txBox="1"/>
+          <p:nvPr/>
+        </p:nvSpPr>
+        <p:spPr>
+          <a:xfrm>
+            <a:off x="4572000" y="3918204"/>
+            <a:ext cx="438912" cy="228600"/>
+          </a:xfrm>
+          <a:prstGeom prst="rect">
+            <a:avLst/>
+          </a:prstGeom>
+          <a:noFill/>
+        </p:spPr>
+        <p:txBody>
+          <a:bodyPr wrap="square" anchor="ctr" lIns="0" tIns="0" rIns="0" bIns="0">
+            <a:noAutofit/>
+          </a:bodyPr>
+          <a:lstStyle/>
+          <a:p>
+            <a:pPr algn="r" latinLnBrk="0">
+              <a:lnSpc>
+                <a:spcPct val="100000"/>
+              </a:lnSpc>
+              <a:spcBef>
+                <a:spcPts val="0"/>
+              </a:spcBef>
+              <a:spcAft>
+                <a:spcPts val="0"/>
+              </a:spcAft>
+            </a:pPr>
+            <a:r>
+              <a:rPr sz="950" b="0">
+                <a:solidFill>
+                  <a:srgbClr val="8C96A1"/>
+                </a:solidFill>
+                <a:latin typeface="Consolas"/>
+                <a:ea typeface="Microsoft YaHei"/>
+                <a:cs typeface="Microsoft YaHei"/>
+              </a:rPr>
+              <a:t>__%</a:t>
+            </a:r>
+          </a:p>
+        </p:txBody>
+      </p:sp>
+      <p:sp>
+        <p:nvSpPr>
+          <p:cNvPr id="49" name="TextBox 48"/>
+          <p:cNvSpPr txBox="1"/>
+          <p:nvPr/>
+        </p:nvSpPr>
+        <p:spPr>
+          <a:xfrm>
+            <a:off x="5065776" y="3918204"/>
+            <a:ext cx="585216" cy="228600"/>
+          </a:xfrm>
+          <a:prstGeom prst="rect">
+            <a:avLst/>
+          </a:prstGeom>
+          <a:noFill/>
+        </p:spPr>
+        <p:txBody>
+          <a:bodyPr wrap="square" anchor="ctr" lIns="0" tIns="0" rIns="0" bIns="0">
+            <a:noAutofit/>
+          </a:bodyPr>
+          <a:lstStyle/>
+          <a:p>
+            <a:pPr algn="r" latinLnBrk="0">
+              <a:lnSpc>
+                <a:spcPct val="100000"/>
+              </a:lnSpc>
+              <a:spcBef>
+                <a:spcPts val="0"/>
+              </a:spcBef>
+              <a:spcAft>
+                <a:spcPts val="0"/>
+              </a:spcAft>
+            </a:pPr>
+            <a:r>
+              <a:rPr sz="950" b="0">
+                <a:solidFill>
+                  <a:srgbClr val="8C96A1"/>
+                </a:solidFill>
+                <a:latin typeface="Consolas"/>
+                <a:ea typeface="Microsoft YaHei"/>
+                <a:cs typeface="Microsoft YaHei"/>
+              </a:rPr>
+              <a:t>__</a:t>
+            </a:r>
+          </a:p>
+        </p:txBody>
+      </p:sp>
+      <p:sp>
+        <p:nvSpPr>
+          <p:cNvPr id="50" name="TextBox 49"/>
+          <p:cNvSpPr txBox="1"/>
+          <p:nvPr/>
+        </p:nvSpPr>
+        <p:spPr>
+          <a:xfrm>
+            <a:off x="5687568" y="3918204"/>
+            <a:ext cx="329184" cy="228600"/>
+          </a:xfrm>
+          <a:prstGeom prst="rect">
+            <a:avLst/>
+          </a:prstGeom>
+          <a:noFill/>
+        </p:spPr>
+        <p:txBody>
+          <a:bodyPr wrap="square" anchor="ctr" lIns="0" tIns="0" rIns="0" bIns="0">
+            <a:noAutofit/>
+          </a:bodyPr>
+          <a:lstStyle/>
+          <a:p>
+            <a:pPr algn="ctr" latinLnBrk="0">
+              <a:lnSpc>
+                <a:spcPct val="100000"/>
+              </a:lnSpc>
+              <a:spcBef>
+                <a:spcPts val="0"/>
+              </a:spcBef>
+              <a:spcAft>
+                <a:spcPts val="0"/>
+              </a:spcAft>
+            </a:pPr>
+            <a:r>
+              <a:rPr sz="950" b="1">
+                <a:solidFill>
+                  <a:srgbClr val="35424F"/>
+                </a:solidFill>
+                <a:latin typeface="Microsoft YaHei"/>
+                <a:ea typeface="Microsoft YaHei"/>
+                <a:cs typeface="Microsoft YaHei"/>
+              </a:rPr>
+              <a:t>5</a:t>
+            </a:r>
+          </a:p>
+        </p:txBody>
+      </p:sp>
+      <p:sp>
+        <p:nvSpPr>
+          <p:cNvPr id="51" name="TextBox 50"/>
+          <p:cNvSpPr txBox="1"/>
+          <p:nvPr/>
+        </p:nvSpPr>
+        <p:spPr>
+          <a:xfrm>
+            <a:off x="749808" y="4178808"/>
+            <a:ext cx="1783080" cy="228600"/>
+          </a:xfrm>
+          <a:prstGeom prst="rect">
+            <a:avLst/>
+          </a:prstGeom>
+          <a:noFill/>
+        </p:spPr>
+        <p:txBody>
+          <a:bodyPr wrap="square" anchor="ctr" lIns="0" tIns="0" rIns="0" bIns="0">
+            <a:noAutofit/>
+          </a:bodyPr>
+          <a:lstStyle/>
+          <a:p>
+            <a:pPr algn="l" latinLnBrk="0">
+              <a:lnSpc>
+                <a:spcPct val="100000"/>
+              </a:lnSpc>
+              <a:spcBef>
+                <a:spcPts val="0"/>
+              </a:spcBef>
+              <a:spcAft>
+                <a:spcPts val="0"/>
+              </a:spcAft>
+            </a:pPr>
+            <a:r>
+              <a:rPr sz="950" b="0">
+                <a:solidFill>
+                  <a:srgbClr val="35424F"/>
+                </a:solidFill>
+                <a:latin typeface="Microsoft YaHei"/>
+                <a:ea typeface="Microsoft YaHei"/>
+                <a:cs typeface="Microsoft YaHei"/>
+              </a:rPr>
+              <a:t>Norm 与其他小核</a:t>
+            </a:r>
+          </a:p>
+        </p:txBody>
+      </p:sp>
+      <p:sp>
+        <p:nvSpPr>
+          <p:cNvPr id="52" name="Rectangle 51"/>
+          <p:cNvSpPr/>
+          <p:nvPr/>
+        </p:nvSpPr>
+        <p:spPr>
+          <a:xfrm>
+            <a:off x="2606040" y="4224528"/>
+            <a:ext cx="422452" cy="137160"/>
+          </a:xfrm>
+          <a:prstGeom prst="rect">
+            <a:avLst/>
+          </a:prstGeom>
+          <a:solidFill>
+            <a:srgbClr val="DDE2E7"/>
+          </a:solidFill>
+          <a:ln>
+            <a:noFill/>
+          </a:ln>
+        </p:spPr>
+        <p:txBody>
+          <a:bodyPr rtlCol="0" anchor="ctr"/>
+          <a:lstStyle/>
+          <a:p>
+            <a:pPr algn="ctr"/>
+          </a:p>
+        </p:txBody>
+      </p:sp>
+      <p:sp>
+        <p:nvSpPr>
+          <p:cNvPr id="53" name="Rectangle 52"/>
+          <p:cNvSpPr/>
+          <p:nvPr/>
+        </p:nvSpPr>
+        <p:spPr>
+          <a:xfrm>
+            <a:off x="2606040" y="4224528"/>
+            <a:ext cx="134416" cy="137160"/>
+          </a:xfrm>
+          <a:prstGeom prst="rect">
+            <a:avLst/>
+          </a:prstGeom>
+          <a:solidFill>
+            <a:srgbClr val="8C96A1"/>
+          </a:solidFill>
+          <a:ln>
+            <a:noFill/>
+          </a:ln>
+        </p:spPr>
+        <p:txBody>
+          <a:bodyPr rtlCol="0" anchor="ctr"/>
+          <a:lstStyle/>
+          <a:p>
+            <a:pPr algn="ctr"/>
+          </a:p>
+        </p:txBody>
+      </p:sp>
+      <p:sp>
+        <p:nvSpPr>
+          <p:cNvPr id="54" name="TextBox 53"/>
+          <p:cNvSpPr txBox="1"/>
+          <p:nvPr/>
+        </p:nvSpPr>
+        <p:spPr>
+          <a:xfrm>
+            <a:off x="4572000" y="4178808"/>
+            <a:ext cx="438912" cy="228600"/>
+          </a:xfrm>
+          <a:prstGeom prst="rect">
+            <a:avLst/>
+          </a:prstGeom>
+          <a:noFill/>
+        </p:spPr>
+        <p:txBody>
+          <a:bodyPr wrap="square" anchor="ctr" lIns="0" tIns="0" rIns="0" bIns="0">
+            <a:noAutofit/>
+          </a:bodyPr>
+          <a:lstStyle/>
+          <a:p>
+            <a:pPr algn="r" latinLnBrk="0">
+              <a:lnSpc>
+                <a:spcPct val="100000"/>
+              </a:lnSpc>
+              <a:spcBef>
+                <a:spcPts val="0"/>
+              </a:spcBef>
+              <a:spcAft>
+                <a:spcPts val="0"/>
+              </a:spcAft>
+            </a:pPr>
+            <a:r>
+              <a:rPr sz="950" b="0">
+                <a:solidFill>
+                  <a:srgbClr val="8C96A1"/>
+                </a:solidFill>
+                <a:latin typeface="Consolas"/>
+                <a:ea typeface="Microsoft YaHei"/>
+                <a:cs typeface="Microsoft YaHei"/>
+              </a:rPr>
+              <a:t>__%</a:t>
+            </a:r>
+          </a:p>
+        </p:txBody>
+      </p:sp>
+      <p:sp>
+        <p:nvSpPr>
+          <p:cNvPr id="55" name="TextBox 54"/>
+          <p:cNvSpPr txBox="1"/>
+          <p:nvPr/>
+        </p:nvSpPr>
+        <p:spPr>
+          <a:xfrm>
+            <a:off x="5065776" y="4178808"/>
+            <a:ext cx="585216" cy="228600"/>
+          </a:xfrm>
+          <a:prstGeom prst="rect">
+            <a:avLst/>
+          </a:prstGeom>
+          <a:noFill/>
+        </p:spPr>
+        <p:txBody>
+          <a:bodyPr wrap="square" anchor="ctr" lIns="0" tIns="0" rIns="0" bIns="0">
+            <a:noAutofit/>
+          </a:bodyPr>
+          <a:lstStyle/>
+          <a:p>
+            <a:pPr algn="r" latinLnBrk="0">
+              <a:lnSpc>
+                <a:spcPct val="100000"/>
+              </a:lnSpc>
+              <a:spcBef>
+                <a:spcPts val="0"/>
+              </a:spcBef>
+              <a:spcAft>
+                <a:spcPts val="0"/>
+              </a:spcAft>
+            </a:pPr>
+            <a:r>
+              <a:rPr sz="950" b="0">
+                <a:solidFill>
+                  <a:srgbClr val="8C96A1"/>
+                </a:solidFill>
+                <a:latin typeface="Consolas"/>
+                <a:ea typeface="Microsoft YaHei"/>
+                <a:cs typeface="Microsoft YaHei"/>
+              </a:rPr>
+              <a:t>__</a:t>
+            </a:r>
+          </a:p>
+        </p:txBody>
+      </p:sp>
+      <p:sp>
+        <p:nvSpPr>
+          <p:cNvPr id="56" name="TextBox 55"/>
+          <p:cNvSpPr txBox="1"/>
+          <p:nvPr/>
+        </p:nvSpPr>
+        <p:spPr>
+          <a:xfrm>
+            <a:off x="5687568" y="4178808"/>
+            <a:ext cx="329184" cy="228600"/>
+          </a:xfrm>
+          <a:prstGeom prst="rect">
+            <a:avLst/>
+          </a:prstGeom>
+          <a:noFill/>
+        </p:spPr>
+        <p:txBody>
+          <a:bodyPr wrap="square" anchor="ctr" lIns="0" tIns="0" rIns="0" bIns="0">
+            <a:noAutofit/>
+          </a:bodyPr>
+          <a:lstStyle/>
+          <a:p>
+            <a:pPr algn="ctr" latinLnBrk="0">
+              <a:lnSpc>
+                <a:spcPct val="100000"/>
+              </a:lnSpc>
+              <a:spcBef>
+                <a:spcPts val="0"/>
+              </a:spcBef>
+              <a:spcAft>
+                <a:spcPts val="0"/>
+              </a:spcAft>
+            </a:pPr>
+            <a:r>
+              <a:rPr sz="950" b="0">
+                <a:solidFill>
+                  <a:srgbClr val="8C96A1"/>
+                </a:solidFill>
+                <a:latin typeface="Microsoft YaHei"/>
+                <a:ea typeface="Microsoft YaHei"/>
+                <a:cs typeface="Microsoft YaHei"/>
+              </a:rPr>
+              <a:t>—</a:t>
+            </a:r>
+          </a:p>
+        </p:txBody>
+      </p:sp>
+      <p:sp>
+        <p:nvSpPr>
+          <p:cNvPr id="57" name="TextBox 56"/>
+          <p:cNvSpPr txBox="1"/>
+          <p:nvPr/>
+        </p:nvSpPr>
+        <p:spPr>
+          <a:xfrm>
+            <a:off x="749808" y="4439412"/>
+            <a:ext cx="1783080" cy="228600"/>
+          </a:xfrm>
+          <a:prstGeom prst="rect">
+            <a:avLst/>
+          </a:prstGeom>
+          <a:noFill/>
+        </p:spPr>
+        <p:txBody>
+          <a:bodyPr wrap="square" anchor="ctr" lIns="0" tIns="0" rIns="0" bIns="0">
+            <a:noAutofit/>
+          </a:bodyPr>
+          <a:lstStyle/>
+          <a:p>
+            <a:pPr algn="l" latinLnBrk="0">
+              <a:lnSpc>
+                <a:spcPct val="100000"/>
+              </a:lnSpc>
+              <a:spcBef>
+                <a:spcPts val="0"/>
+              </a:spcBef>
+              <a:spcAft>
+                <a:spcPts val="0"/>
+              </a:spcAft>
+            </a:pPr>
+            <a:r>
+              <a:rPr sz="950" b="0">
+                <a:solidFill>
+                  <a:srgbClr val="35424F"/>
+                </a:solidFill>
+                <a:latin typeface="Microsoft YaHei"/>
+                <a:ea typeface="Microsoft YaHei"/>
+                <a:cs typeface="Microsoft YaHei"/>
+              </a:rPr>
+              <a:t>device 空闲（host / 调度）</a:t>
+            </a:r>
+          </a:p>
+        </p:txBody>
+      </p:sp>
+      <p:sp>
+        <p:nvSpPr>
+          <p:cNvPr id="58" name="Rectangle 57"/>
+          <p:cNvSpPr/>
+          <p:nvPr/>
+        </p:nvSpPr>
+        <p:spPr>
+          <a:xfrm>
+            <a:off x="2606040" y="4485132"/>
+            <a:ext cx="1190548" cy="137160"/>
+          </a:xfrm>
+          <a:prstGeom prst="rect">
+            <a:avLst/>
+          </a:prstGeom>
+          <a:solidFill>
+            <a:srgbClr val="DDE2E7"/>
+          </a:solidFill>
+          <a:ln>
+            <a:noFill/>
+          </a:ln>
+        </p:spPr>
+        <p:txBody>
+          <a:bodyPr rtlCol="0" anchor="ctr"/>
+          <a:lstStyle/>
+          <a:p>
+            <a:pPr algn="ctr"/>
+          </a:p>
+        </p:txBody>
+      </p:sp>
+      <p:sp>
+        <p:nvSpPr>
+          <p:cNvPr id="59" name="TextBox 58"/>
+          <p:cNvSpPr txBox="1"/>
+          <p:nvPr/>
+        </p:nvSpPr>
+        <p:spPr>
+          <a:xfrm>
+            <a:off x="4572000" y="4439412"/>
+            <a:ext cx="438912" cy="228600"/>
+          </a:xfrm>
+          <a:prstGeom prst="rect">
+            <a:avLst/>
+          </a:prstGeom>
+          <a:noFill/>
+        </p:spPr>
+        <p:txBody>
+          <a:bodyPr wrap="square" anchor="ctr" lIns="0" tIns="0" rIns="0" bIns="0">
+            <a:noAutofit/>
+          </a:bodyPr>
+          <a:lstStyle/>
+          <a:p>
+            <a:pPr algn="r" latinLnBrk="0">
+              <a:lnSpc>
+                <a:spcPct val="100000"/>
+              </a:lnSpc>
+              <a:spcBef>
+                <a:spcPts val="0"/>
+              </a:spcBef>
+              <a:spcAft>
+                <a:spcPts val="0"/>
+              </a:spcAft>
+            </a:pPr>
+            <a:r>
+              <a:rPr sz="950" b="0">
+                <a:solidFill>
+                  <a:srgbClr val="8C96A1"/>
+                </a:solidFill>
+                <a:latin typeface="Consolas"/>
+                <a:ea typeface="Microsoft YaHei"/>
+                <a:cs typeface="Microsoft YaHei"/>
+              </a:rPr>
+              <a:t>__%</a:t>
+            </a:r>
+          </a:p>
+        </p:txBody>
+      </p:sp>
+      <p:sp>
+        <p:nvSpPr>
+          <p:cNvPr id="60" name="TextBox 59"/>
+          <p:cNvSpPr txBox="1"/>
+          <p:nvPr/>
+        </p:nvSpPr>
+        <p:spPr>
+          <a:xfrm>
+            <a:off x="5065776" y="4439412"/>
+            <a:ext cx="585216" cy="228600"/>
+          </a:xfrm>
+          <a:prstGeom prst="rect">
+            <a:avLst/>
+          </a:prstGeom>
+          <a:noFill/>
+        </p:spPr>
+        <p:txBody>
+          <a:bodyPr wrap="square" anchor="ctr" lIns="0" tIns="0" rIns="0" bIns="0">
+            <a:noAutofit/>
+          </a:bodyPr>
+          <a:lstStyle/>
+          <a:p>
+            <a:pPr algn="r" latinLnBrk="0">
+              <a:lnSpc>
+                <a:spcPct val="100000"/>
+              </a:lnSpc>
+              <a:spcBef>
+                <a:spcPts val="0"/>
+              </a:spcBef>
+              <a:spcAft>
+                <a:spcPts val="0"/>
+              </a:spcAft>
+            </a:pPr>
+            <a:r>
+              <a:rPr sz="950" b="0">
+                <a:solidFill>
+                  <a:srgbClr val="8C96A1"/>
+                </a:solidFill>
+                <a:latin typeface="Consolas"/>
+                <a:ea typeface="Microsoft YaHei"/>
+                <a:cs typeface="Microsoft YaHei"/>
+              </a:rPr>
+              <a:t>—</a:t>
+            </a:r>
+          </a:p>
+        </p:txBody>
+      </p:sp>
+      <p:sp>
+        <p:nvSpPr>
+          <p:cNvPr id="61" name="TextBox 60"/>
+          <p:cNvSpPr txBox="1"/>
+          <p:nvPr/>
+        </p:nvSpPr>
+        <p:spPr>
+          <a:xfrm>
+            <a:off x="5687568" y="4439412"/>
+            <a:ext cx="329184" cy="228600"/>
+          </a:xfrm>
+          <a:prstGeom prst="rect">
+            <a:avLst/>
+          </a:prstGeom>
+          <a:noFill/>
+        </p:spPr>
+        <p:txBody>
+          <a:bodyPr wrap="square" anchor="ctr" lIns="0" tIns="0" rIns="0" bIns="0">
+            <a:noAutofit/>
+          </a:bodyPr>
+          <a:lstStyle/>
+          <a:p>
+            <a:pPr algn="ctr" latinLnBrk="0">
+              <a:lnSpc>
+                <a:spcPct val="100000"/>
+              </a:lnSpc>
+              <a:spcBef>
+                <a:spcPts val="0"/>
+              </a:spcBef>
+              <a:spcAft>
+                <a:spcPts val="0"/>
+              </a:spcAft>
+            </a:pPr>
+            <a:r>
+              <a:rPr sz="950" b="0">
+                <a:solidFill>
+                  <a:srgbClr val="8C96A1"/>
+                </a:solidFill>
+                <a:latin typeface="Microsoft YaHei"/>
+                <a:ea typeface="Microsoft YaHei"/>
+                <a:cs typeface="Microsoft YaHei"/>
+              </a:rPr>
+              <a:t>—</a:t>
+            </a:r>
+          </a:p>
+        </p:txBody>
+      </p:sp>
+      <p:sp>
+        <p:nvSpPr>
+          <p:cNvPr id="62" name="TextBox 61"/>
+          <p:cNvSpPr txBox="1"/>
+          <p:nvPr/>
+        </p:nvSpPr>
+        <p:spPr>
+          <a:xfrm>
+            <a:off x="749808" y="4700016"/>
+            <a:ext cx="4114800" cy="219456"/>
+          </a:xfrm>
+          <a:prstGeom prst="rect">
+            <a:avLst/>
+          </a:prstGeom>
+          <a:noFill/>
+        </p:spPr>
+        <p:txBody>
+          <a:bodyPr wrap="square" anchor="ctr" lIns="0" tIns="0" rIns="0" bIns="0">
+            <a:noAutofit/>
+          </a:bodyPr>
+          <a:lstStyle/>
+          <a:p>
+            <a:pPr algn="l" latinLnBrk="0">
+              <a:lnSpc>
+                <a:spcPct val="100000"/>
+              </a:lnSpc>
+              <a:spcBef>
+                <a:spcPts val="0"/>
+              </a:spcBef>
+              <a:spcAft>
+                <a:spcPts val="0"/>
+              </a:spcAft>
+            </a:pPr>
+            <a:r>
+              <a:rPr sz="900" b="1">
+                <a:solidFill>
+                  <a:srgbClr val="35424F"/>
+                </a:solidFill>
+                <a:latin typeface="Microsoft YaHei"/>
+                <a:ea typeface="Microsoft YaHei"/>
+                <a:cs typeface="Microsoft YaHei"/>
+              </a:rPr>
+              <a:t>整步　</a:t>
+            </a:r>
+            <a:r>
               <a:rPr sz="900" b="0">
                 <a:solidFill>
                   <a:srgbClr val="66727F"/>
@@ -3782,21 +5730,97 @@
                 <a:ea typeface="Microsoft YaHei"/>
                 <a:cs typeface="Microsoft YaHei"/>
               </a:rPr>
-              <a:t>基线峰值在 c128，1K/1K</a:t>
-            </a:r>
-          </a:p>
-        </p:txBody>
-      </p:sp>
-      <p:sp>
-        <p:nvSpPr>
-          <p:cNvPr id="18" name="Rectangle 17"/>
+              <a:t>Σ 上界 __ ms ÷ 实测 __ ms = achieved __</a:t>
+            </a:r>
+          </a:p>
+        </p:txBody>
+      </p:sp>
+      <p:sp>
+        <p:nvSpPr>
+          <p:cNvPr id="63" name="Rectangle 62"/>
           <p:cNvSpPr/>
           <p:nvPr/>
         </p:nvSpPr>
         <p:spPr>
           <a:xfrm>
-            <a:off x="3474720" y="1975104"/>
-            <a:ext cx="8168335" cy="3017520"/>
+            <a:off x="4937760" y="4681728"/>
+            <a:ext cx="1078992" cy="219456"/>
+          </a:xfrm>
+          <a:prstGeom prst="rect">
+            <a:avLst/>
+          </a:prstGeom>
+          <a:solidFill>
+            <a:srgbClr val="F8EADF"/>
+          </a:solidFill>
+          <a:ln>
+            <a:noFill/>
+          </a:ln>
+        </p:spPr>
+        <p:txBody>
+          <a:bodyPr rtlCol="0" anchor="ctr"/>
+          <a:lstStyle/>
+          <a:p>
+            <a:pPr algn="ctr"/>
+          </a:p>
+        </p:txBody>
+      </p:sp>
+      <p:sp>
+        <p:nvSpPr>
+          <p:cNvPr id="64" name="TextBox 63"/>
+          <p:cNvSpPr txBox="1"/>
+          <p:nvPr/>
+        </p:nvSpPr>
+        <p:spPr>
+          <a:xfrm>
+            <a:off x="4937760" y="4681728"/>
+            <a:ext cx="1078992" cy="219456"/>
+          </a:xfrm>
+          <a:prstGeom prst="rect">
+            <a:avLst/>
+          </a:prstGeom>
+          <a:noFill/>
+        </p:spPr>
+        <p:txBody>
+          <a:bodyPr wrap="square" anchor="ctr" lIns="0" tIns="0" rIns="0" bIns="0">
+            <a:noAutofit/>
+          </a:bodyPr>
+          <a:lstStyle/>
+          <a:p>
+            <a:pPr algn="ctr" latinLnBrk="0">
+              <a:lnSpc>
+                <a:spcPct val="100000"/>
+              </a:lnSpc>
+              <a:spcBef>
+                <a:spcPts val="0"/>
+              </a:spcBef>
+              <a:spcAft>
+                <a:spcPts val="0"/>
+              </a:spcAft>
+            </a:pPr>
+            <a:r>
+              <a:rPr sz="850" b="1">
+                <a:solidFill>
+                  <a:srgbClr val="C0612C"/>
+                </a:solidFill>
+                <a:latin typeface="Microsoft YaHei"/>
+                <a:ea typeface="Microsoft YaHei"/>
+                <a:cs typeface="Microsoft YaHei"/>
+              </a:rPr>
+              <a:t>示意　非数据</a:t>
+            </a:r>
+          </a:p>
+        </p:txBody>
+      </p:sp>
+      <p:sp>
+        <p:nvSpPr>
+          <p:cNvPr id="65" name="Rectangle 64"/>
+          <p:cNvSpPr/>
+          <p:nvPr/>
+        </p:nvSpPr>
+        <p:spPr>
+          <a:xfrm>
+            <a:off x="6400800" y="1975104"/>
+            <a:ext cx="5242255" cy="3017520"/>
           </a:xfrm>
           <a:prstGeom prst="rect">
             <a:avLst/>
@@ -3818,14 +5842,14 @@
       </p:sp>
       <p:sp>
         <p:nvSpPr>
-          <p:cNvPr id="19" name="TextBox 18"/>
-          <p:cNvSpPr txBox="1"/>
-          <p:nvPr/>
-        </p:nvSpPr>
-        <p:spPr>
-          <a:xfrm>
-            <a:off x="3675888" y="2048256"/>
-            <a:ext cx="7765999" cy="256032"/>
+          <p:cNvPr id="66" name="TextBox 65"/>
+          <p:cNvSpPr txBox="1"/>
+          <p:nvPr/>
+        </p:nvSpPr>
+        <p:spPr>
+          <a:xfrm>
+            <a:off x="6601968" y="2048256"/>
+            <a:ext cx="4839919" cy="256032"/>
           </a:xfrm>
           <a:prstGeom prst="rect">
             <a:avLst/>
@@ -3876,223 +5900,14 @@
       </p:sp>
       <p:sp>
         <p:nvSpPr>
-          <p:cNvPr id="20" name="TextBox 19"/>
-          <p:cNvSpPr txBox="1"/>
-          <p:nvPr/>
-        </p:nvSpPr>
-        <p:spPr>
-          <a:xfrm>
-            <a:off x="3675888" y="2340864"/>
-            <a:ext cx="2651760" cy="219456"/>
-          </a:xfrm>
-          <a:prstGeom prst="rect">
-            <a:avLst/>
-          </a:prstGeom>
-          <a:noFill/>
-        </p:spPr>
-        <p:txBody>
-          <a:bodyPr wrap="square" anchor="ctr" lIns="0" tIns="0" rIns="0" bIns="0">
-            <a:noAutofit/>
-          </a:bodyPr>
-          <a:lstStyle/>
-          <a:p>
-            <a:pPr algn="l" latinLnBrk="0">
-              <a:lnSpc>
-                <a:spcPct val="100000"/>
-              </a:lnSpc>
-              <a:spcBef>
-                <a:spcPts val="0"/>
-              </a:spcBef>
-              <a:spcAft>
-                <a:spcPts val="0"/>
-              </a:spcAft>
-            </a:pPr>
-            <a:r>
-              <a:rPr sz="900" b="0">
-                <a:solidFill>
-                  <a:srgbClr val="8C96A1"/>
-                </a:solidFill>
-                <a:latin typeface="Microsoft YaHei"/>
-                <a:ea typeface="Microsoft YaHei"/>
-                <a:cs typeface="Microsoft YaHei"/>
-              </a:rPr>
-              <a:t>改动</a:t>
-            </a:r>
-          </a:p>
-        </p:txBody>
-      </p:sp>
-      <p:sp>
-        <p:nvSpPr>
-          <p:cNvPr id="21" name="TextBox 20"/>
-          <p:cNvSpPr txBox="1"/>
-          <p:nvPr/>
-        </p:nvSpPr>
-        <p:spPr>
-          <a:xfrm>
-            <a:off x="6419088" y="2340864"/>
-            <a:ext cx="2002536" cy="219456"/>
-          </a:xfrm>
-          <a:prstGeom prst="rect">
-            <a:avLst/>
-          </a:prstGeom>
-          <a:noFill/>
-        </p:spPr>
-        <p:txBody>
-          <a:bodyPr wrap="square" anchor="ctr" lIns="0" tIns="0" rIns="0" bIns="0">
-            <a:noAutofit/>
-          </a:bodyPr>
-          <a:lstStyle/>
-          <a:p>
-            <a:pPr algn="l" latinLnBrk="0">
-              <a:lnSpc>
-                <a:spcPct val="100000"/>
-              </a:lnSpc>
-              <a:spcBef>
-                <a:spcPts val="0"/>
-              </a:spcBef>
-              <a:spcAft>
-                <a:spcPts val="0"/>
-              </a:spcAft>
-            </a:pPr>
-            <a:r>
-              <a:rPr sz="900" b="0">
-                <a:solidFill>
-                  <a:srgbClr val="8C96A1"/>
-                </a:solidFill>
-                <a:latin typeface="Microsoft YaHei"/>
-                <a:ea typeface="Microsoft YaHei"/>
-                <a:cs typeface="Microsoft YaHei"/>
-              </a:rPr>
-              <a:t>C 筛选</a:t>
-            </a:r>
-          </a:p>
-        </p:txBody>
-      </p:sp>
-      <p:sp>
-        <p:nvSpPr>
-          <p:cNvPr id="22" name="TextBox 21"/>
-          <p:cNvSpPr txBox="1"/>
-          <p:nvPr/>
-        </p:nvSpPr>
-        <p:spPr>
-          <a:xfrm>
-            <a:off x="8513064" y="2340864"/>
-            <a:ext cx="1280160" cy="219456"/>
-          </a:xfrm>
-          <a:prstGeom prst="rect">
-            <a:avLst/>
-          </a:prstGeom>
-          <a:noFill/>
-        </p:spPr>
-        <p:txBody>
-          <a:bodyPr wrap="square" anchor="ctr" lIns="0" tIns="0" rIns="0" bIns="0">
-            <a:noAutofit/>
-          </a:bodyPr>
-          <a:lstStyle/>
-          <a:p>
-            <a:pPr algn="l" latinLnBrk="0">
-              <a:lnSpc>
-                <a:spcPct val="100000"/>
-              </a:lnSpc>
-              <a:spcBef>
-                <a:spcPts val="0"/>
-              </a:spcBef>
-              <a:spcAft>
-                <a:spcPts val="0"/>
-              </a:spcAft>
-            </a:pPr>
-            <a:r>
-              <a:rPr sz="900" b="0">
-                <a:solidFill>
-                  <a:srgbClr val="8C96A1"/>
-                </a:solidFill>
-                <a:latin typeface="Microsoft YaHei"/>
-                <a:ea typeface="Microsoft YaHei"/>
-                <a:cs typeface="Microsoft YaHei"/>
-              </a:rPr>
-              <a:t>D 复验</a:t>
-            </a:r>
-          </a:p>
-        </p:txBody>
-      </p:sp>
-      <p:sp>
-        <p:nvSpPr>
-          <p:cNvPr id="23" name="TextBox 22"/>
-          <p:cNvSpPr txBox="1"/>
-          <p:nvPr/>
-        </p:nvSpPr>
-        <p:spPr>
-          <a:xfrm>
-            <a:off x="9884664" y="2340864"/>
-            <a:ext cx="1554480" cy="219456"/>
-          </a:xfrm>
-          <a:prstGeom prst="rect">
-            <a:avLst/>
-          </a:prstGeom>
-          <a:noFill/>
-        </p:spPr>
-        <p:txBody>
-          <a:bodyPr wrap="square" anchor="ctr" lIns="0" tIns="0" rIns="0" bIns="0">
-            <a:noAutofit/>
-          </a:bodyPr>
-          <a:lstStyle/>
-          <a:p>
-            <a:pPr algn="l" latinLnBrk="0">
-              <a:lnSpc>
-                <a:spcPct val="100000"/>
-              </a:lnSpc>
-              <a:spcBef>
-                <a:spcPts val="0"/>
-              </a:spcBef>
-              <a:spcAft>
-                <a:spcPts val="0"/>
-              </a:spcAft>
-            </a:pPr>
-            <a:r>
-              <a:rPr sz="900" b="0">
-                <a:solidFill>
-                  <a:srgbClr val="8C96A1"/>
-                </a:solidFill>
-                <a:latin typeface="Microsoft YaHei"/>
-                <a:ea typeface="Microsoft YaHei"/>
-                <a:cs typeface="Microsoft YaHei"/>
-              </a:rPr>
-              <a:t>结论</a:t>
-            </a:r>
-          </a:p>
-        </p:txBody>
-      </p:sp>
-      <p:cxnSp>
-        <p:nvCxnSpPr>
-          <p:cNvPr id="24" name="Connector 23"/>
-          <p:cNvCxnSpPr/>
-          <p:nvPr/>
-        </p:nvCxnSpPr>
-        <p:spPr>
-          <a:xfrm>
-            <a:off x="3675888" y="2578608"/>
-            <a:ext cx="7765999" cy="0"/>
-          </a:xfrm>
-          <a:prstGeom prst="line">
-            <a:avLst/>
-          </a:prstGeom>
-          <a:ln w="9525">
-            <a:solidFill>
-              <a:srgbClr val="DDE2E7"/>
-            </a:solidFill>
-          </a:ln>
-        </p:spPr>
-      </p:cxnSp>
-      <p:sp>
-        <p:nvSpPr>
-          <p:cNvPr id="25" name="Rectangle 24"/>
+          <p:cNvPr id="67" name="Rectangle 66"/>
           <p:cNvSpPr/>
           <p:nvPr/>
         </p:nvSpPr>
         <p:spPr>
           <a:xfrm>
-            <a:off x="3602736" y="2633472"/>
-            <a:ext cx="7912303" cy="566928"/>
+            <a:off x="6528816" y="2395728"/>
+            <a:ext cx="4986223" cy="475488"/>
           </a:xfrm>
           <a:prstGeom prst="rect">
             <a:avLst/>
@@ -4114,14 +5929,14 @@
       </p:sp>
       <p:sp>
         <p:nvSpPr>
-          <p:cNvPr id="26" name="TextBox 25"/>
-          <p:cNvSpPr txBox="1"/>
-          <p:nvPr/>
-        </p:nvSpPr>
-        <p:spPr>
-          <a:xfrm>
-            <a:off x="3675888" y="2633472"/>
-            <a:ext cx="2651760" cy="566928"/>
+          <p:cNvPr id="68" name="TextBox 67"/>
+          <p:cNvSpPr txBox="1"/>
+          <p:nvPr/>
+        </p:nvSpPr>
+        <p:spPr>
+          <a:xfrm>
+            <a:off x="6601968" y="2423160"/>
+            <a:ext cx="274320" cy="219456"/>
           </a:xfrm>
           <a:prstGeom prst="rect">
             <a:avLst/>
@@ -4146,7 +5961,54 @@
               </a:spcAft>
             </a:pPr>
             <a:r>
-              <a:rPr sz="950" b="0">
+              <a:rPr sz="1000" b="1">
+                <a:solidFill>
+                  <a:srgbClr val="3F63A8"/>
+                </a:solidFill>
+                <a:latin typeface="Arial"/>
+                <a:ea typeface="Microsoft YaHei"/>
+                <a:cs typeface="Microsoft YaHei"/>
+              </a:rPr>
+              <a:t>1</a:t>
+            </a:r>
+          </a:p>
+        </p:txBody>
+      </p:sp>
+      <p:sp>
+        <p:nvSpPr>
+          <p:cNvPr id="69" name="TextBox 68"/>
+          <p:cNvSpPr txBox="1"/>
+          <p:nvPr/>
+        </p:nvSpPr>
+        <p:spPr>
+          <a:xfrm>
+            <a:off x="6912864" y="2423160"/>
+            <a:ext cx="3047695" cy="219456"/>
+          </a:xfrm>
+          <a:prstGeom prst="rect">
+            <a:avLst/>
+          </a:prstGeom>
+          <a:noFill/>
+        </p:spPr>
+        <p:txBody>
+          <a:bodyPr wrap="square" anchor="ctr" lIns="0" tIns="0" rIns="0" bIns="0">
+            <a:noAutofit/>
+          </a:bodyPr>
+          <a:lstStyle/>
+          <a:p>
+            <a:pPr algn="l" latinLnBrk="0">
+              <a:lnSpc>
+                <a:spcPct val="100000"/>
+              </a:lnSpc>
+              <a:spcBef>
+                <a:spcPts val="0"/>
+              </a:spcBef>
+              <a:spcAft>
+                <a:spcPts val="0"/>
+              </a:spcAft>
+            </a:pPr>
+            <a:r>
+              <a:rPr sz="950" b="1">
                 <a:solidFill>
                   <a:srgbClr val="16202A"/>
                 </a:solidFill>
@@ -4157,6 +6019,76 @@
               <a:t>融合 swiglu + 动态量化</a:t>
             </a:r>
           </a:p>
+        </p:txBody>
+      </p:sp>
+      <p:sp>
+        <p:nvSpPr>
+          <p:cNvPr id="70" name="TextBox 69"/>
+          <p:cNvSpPr txBox="1"/>
+          <p:nvPr/>
+        </p:nvSpPr>
+        <p:spPr>
+          <a:xfrm>
+            <a:off x="9960559" y="2423160"/>
+            <a:ext cx="1481328" cy="219456"/>
+          </a:xfrm>
+          <a:prstGeom prst="rect">
+            <a:avLst/>
+          </a:prstGeom>
+          <a:noFill/>
+        </p:spPr>
+        <p:txBody>
+          <a:bodyPr wrap="square" anchor="ctr" lIns="0" tIns="0" rIns="0" bIns="0">
+            <a:noAutofit/>
+          </a:bodyPr>
+          <a:lstStyle/>
+          <a:p>
+            <a:pPr algn="r" latinLnBrk="0">
+              <a:lnSpc>
+                <a:spcPct val="100000"/>
+              </a:lnSpc>
+              <a:spcBef>
+                <a:spcPts val="0"/>
+              </a:spcBef>
+              <a:spcAft>
+                <a:spcPts val="0"/>
+              </a:spcAft>
+            </a:pPr>
+            <a:r>
+              <a:rPr sz="950" b="1">
+                <a:solidFill>
+                  <a:srgbClr val="3F63A8"/>
+                </a:solidFill>
+                <a:latin typeface="Microsoft YaHei"/>
+                <a:ea typeface="Microsoft YaHei"/>
+                <a:cs typeface="Microsoft YaHei"/>
+              </a:rPr>
+              <a:t>交付，全矩阵 +22~38%</a:t>
+            </a:r>
+          </a:p>
+        </p:txBody>
+      </p:sp>
+      <p:sp>
+        <p:nvSpPr>
+          <p:cNvPr id="71" name="TextBox 70"/>
+          <p:cNvSpPr txBox="1"/>
+          <p:nvPr/>
+        </p:nvSpPr>
+        <p:spPr>
+          <a:xfrm>
+            <a:off x="6912864" y="2642616"/>
+            <a:ext cx="4529023" cy="201168"/>
+          </a:xfrm>
+          <a:prstGeom prst="rect">
+            <a:avLst/>
+          </a:prstGeom>
+          <a:noFill/>
+        </p:spPr>
+        <p:txBody>
+          <a:bodyPr wrap="square" anchor="ctr" lIns="0" tIns="0" rIns="0" bIns="0">
+            <a:noAutofit/>
+          </a:bodyPr>
+          <a:lstStyle/>
           <a:p>
             <a:pPr algn="l" latinLnBrk="0">
               <a:lnSpc>
@@ -4170,218 +6102,29 @@
               </a:spcAft>
             </a:pPr>
             <a:r>
-              <a:rPr sz="950" b="0">
-                <a:solidFill>
-                  <a:srgbClr val="16202A"/>
-                </a:solidFill>
-                <a:latin typeface="Microsoft YaHei"/>
-                <a:ea typeface="Microsoft YaHei"/>
-                <a:cs typeface="Microsoft YaHei"/>
-              </a:rPr>
-              <a:t>替掉散点 elementwise 3.08 ms</a:t>
-            </a:r>
-          </a:p>
-          <a:p>
-            <a:pPr algn="l" latinLnBrk="0">
-              <a:lnSpc>
-                <a:spcPct val="100000"/>
-              </a:lnSpc>
-              <a:spcBef>
-                <a:spcPts val="0"/>
-              </a:spcBef>
-              <a:spcAft>
-                <a:spcPts val="0"/>
-              </a:spcAft>
-            </a:pPr>
-            <a:r>
-              <a:rPr sz="950" b="0">
-                <a:solidFill>
-                  <a:srgbClr val="16202A"/>
-                </a:solidFill>
-                <a:latin typeface="Microsoft YaHei"/>
-                <a:ea typeface="Microsoft YaHei"/>
-                <a:cs typeface="Microsoft YaHei"/>
-              </a:rPr>
-              <a:t>+ per-token quant 0.43 ms</a:t>
-            </a:r>
-          </a:p>
-        </p:txBody>
-      </p:sp>
-      <p:sp>
-        <p:nvSpPr>
-          <p:cNvPr id="27" name="TextBox 26"/>
-          <p:cNvSpPr txBox="1"/>
-          <p:nvPr/>
-        </p:nvSpPr>
-        <p:spPr>
-          <a:xfrm>
-            <a:off x="6419088" y="2633472"/>
-            <a:ext cx="2002536" cy="566928"/>
-          </a:xfrm>
-          <a:prstGeom prst="rect">
-            <a:avLst/>
-          </a:prstGeom>
-          <a:noFill/>
-        </p:spPr>
-        <p:txBody>
-          <a:bodyPr wrap="square" anchor="ctr" lIns="0" tIns="0" rIns="0" bIns="0">
-            <a:noAutofit/>
-          </a:bodyPr>
-          <a:lstStyle/>
-          <a:p>
-            <a:pPr algn="l" latinLnBrk="0">
-              <a:lnSpc>
-                <a:spcPct val="100000"/>
-              </a:lnSpc>
-              <a:spcBef>
-                <a:spcPts val="0"/>
-              </a:spcBef>
-              <a:spcAft>
-                <a:spcPts val="0"/>
-              </a:spcAft>
-            </a:pPr>
-            <a:r>
-              <a:rPr sz="950" b="0">
-                <a:solidFill>
-                  <a:srgbClr val="35424F"/>
-                </a:solidFill>
-                <a:latin typeface="Microsoft YaHei"/>
-                <a:ea typeface="Microsoft YaHei"/>
-                <a:cs typeface="Microsoft YaHei"/>
-              </a:rPr>
-              <a:t>单核 1.75 ms/步</a:t>
-            </a:r>
-          </a:p>
-        </p:txBody>
-      </p:sp>
-      <p:sp>
-        <p:nvSpPr>
-          <p:cNvPr id="28" name="TextBox 27"/>
-          <p:cNvSpPr txBox="1"/>
-          <p:nvPr/>
-        </p:nvSpPr>
-        <p:spPr>
-          <a:xfrm>
-            <a:off x="8513064" y="2633472"/>
-            <a:ext cx="1280160" cy="566928"/>
-          </a:xfrm>
-          <a:prstGeom prst="rect">
-            <a:avLst/>
-          </a:prstGeom>
-          <a:noFill/>
-        </p:spPr>
-        <p:txBody>
-          <a:bodyPr wrap="square" anchor="ctr" lIns="0" tIns="0" rIns="0" bIns="0">
-            <a:noAutofit/>
-          </a:bodyPr>
-          <a:lstStyle/>
-          <a:p>
-            <a:pPr algn="l" latinLnBrk="0">
-              <a:lnSpc>
-                <a:spcPct val="100000"/>
-              </a:lnSpc>
-              <a:spcBef>
-                <a:spcPts val="0"/>
-              </a:spcBef>
-              <a:spcAft>
-                <a:spcPts val="0"/>
-              </a:spcAft>
-            </a:pPr>
-            <a:r>
-              <a:rPr sz="950" b="0">
-                <a:solidFill>
-                  <a:srgbClr val="35424F"/>
-                </a:solidFill>
-                <a:latin typeface="Microsoft YaHei"/>
-                <a:ea typeface="Microsoft YaHei"/>
-                <a:cs typeface="Microsoft YaHei"/>
-              </a:rPr>
-              <a:t>device 单步时间</a:t>
-            </a:r>
-          </a:p>
-          <a:p>
-            <a:pPr algn="l" latinLnBrk="0">
-              <a:lnSpc>
-                <a:spcPct val="100000"/>
-              </a:lnSpc>
-              <a:spcBef>
-                <a:spcPts val="0"/>
-              </a:spcBef>
-              <a:spcAft>
-                <a:spcPts val="0"/>
-              </a:spcAft>
-            </a:pPr>
-            <a:r>
-              <a:rPr sz="950" b="0">
-                <a:solidFill>
-                  <a:srgbClr val="35424F"/>
-                </a:solidFill>
-                <a:latin typeface="Microsoft YaHei"/>
-                <a:ea typeface="Microsoft YaHei"/>
-                <a:cs typeface="Microsoft YaHei"/>
-              </a:rPr>
-              <a:t>24.7 → 22.2 ms</a:t>
-            </a:r>
-          </a:p>
-        </p:txBody>
-      </p:sp>
-      <p:sp>
-        <p:nvSpPr>
-          <p:cNvPr id="29" name="TextBox 28"/>
-          <p:cNvSpPr txBox="1"/>
-          <p:nvPr/>
-        </p:nvSpPr>
-        <p:spPr>
-          <a:xfrm>
-            <a:off x="9884664" y="2633472"/>
-            <a:ext cx="1554480" cy="566928"/>
-          </a:xfrm>
-          <a:prstGeom prst="rect">
-            <a:avLst/>
-          </a:prstGeom>
-          <a:noFill/>
-        </p:spPr>
-        <p:txBody>
-          <a:bodyPr wrap="square" anchor="ctr" lIns="0" tIns="0" rIns="0" bIns="0">
-            <a:noAutofit/>
-          </a:bodyPr>
-          <a:lstStyle/>
-          <a:p>
-            <a:pPr algn="l" latinLnBrk="0">
-              <a:lnSpc>
-                <a:spcPct val="100000"/>
-              </a:lnSpc>
-              <a:spcBef>
-                <a:spcPts val="0"/>
-              </a:spcBef>
-              <a:spcAft>
-                <a:spcPts val="0"/>
-              </a:spcAft>
-            </a:pPr>
-            <a:r>
-              <a:rPr sz="950" b="1">
-                <a:solidFill>
-                  <a:srgbClr val="3F63A8"/>
-                </a:solidFill>
-                <a:latin typeface="Microsoft YaHei"/>
-                <a:ea typeface="Microsoft YaHei"/>
-                <a:cs typeface="Microsoft YaHei"/>
-              </a:rPr>
-              <a:t>交付，全矩阵 +22~38%</a:t>
-            </a:r>
-          </a:p>
-        </p:txBody>
-      </p:sp>
-      <p:sp>
-        <p:nvSpPr>
-          <p:cNvPr id="30" name="Rectangle 29"/>
+              <a:rPr sz="900" b="0">
+                <a:solidFill>
+                  <a:srgbClr val="66727F"/>
+                </a:solidFill>
+                <a:latin typeface="Microsoft YaHei"/>
+                <a:ea typeface="Microsoft YaHei"/>
+                <a:cs typeface="Microsoft YaHei"/>
+              </a:rPr>
+              <a:t>C 单核 1.75 ms/步（原 3.08 + 0.43 ms）· D device 24.7 → 22.2 ms</a:t>
+            </a:r>
+          </a:p>
+        </p:txBody>
+      </p:sp>
+      <p:sp>
+        <p:nvSpPr>
+          <p:cNvPr id="72" name="Rectangle 71"/>
           <p:cNvSpPr/>
           <p:nvPr/>
         </p:nvSpPr>
         <p:spPr>
           <a:xfrm>
-            <a:off x="3602736" y="3236976"/>
-            <a:ext cx="7912303" cy="420624"/>
+            <a:off x="6528816" y="2907792"/>
+            <a:ext cx="4986223" cy="475488"/>
           </a:xfrm>
           <a:prstGeom prst="rect">
             <a:avLst/>
@@ -4403,14 +6146,14 @@
       </p:sp>
       <p:sp>
         <p:nvSpPr>
-          <p:cNvPr id="31" name="TextBox 30"/>
-          <p:cNvSpPr txBox="1"/>
-          <p:nvPr/>
-        </p:nvSpPr>
-        <p:spPr>
-          <a:xfrm>
-            <a:off x="3675888" y="3236976"/>
-            <a:ext cx="2651760" cy="420624"/>
+          <p:cNvPr id="73" name="TextBox 72"/>
+          <p:cNvSpPr txBox="1"/>
+          <p:nvPr/>
+        </p:nvSpPr>
+        <p:spPr>
+          <a:xfrm>
+            <a:off x="6601968" y="2935224"/>
+            <a:ext cx="274320" cy="219456"/>
           </a:xfrm>
           <a:prstGeom prst="rect">
             <a:avLst/>
@@ -4435,17 +6178,322 @@
               </a:spcAft>
             </a:pPr>
             <a:r>
+              <a:rPr sz="1000" b="1">
+                <a:solidFill>
+                  <a:srgbClr val="3F63A8"/>
+                </a:solidFill>
+                <a:latin typeface="Arial"/>
+                <a:ea typeface="Microsoft YaHei"/>
+                <a:cs typeface="Microsoft YaHei"/>
+              </a:rPr>
+              <a:t>2</a:t>
+            </a:r>
+          </a:p>
+        </p:txBody>
+      </p:sp>
+      <p:sp>
+        <p:nvSpPr>
+          <p:cNvPr id="74" name="TextBox 73"/>
+          <p:cNvSpPr txBox="1"/>
+          <p:nvPr/>
+        </p:nvSpPr>
+        <p:spPr>
+          <a:xfrm>
+            <a:off x="6912864" y="2935224"/>
+            <a:ext cx="3047695" cy="219456"/>
+          </a:xfrm>
+          <a:prstGeom prst="rect">
+            <a:avLst/>
+          </a:prstGeom>
+          <a:noFill/>
+        </p:spPr>
+        <p:txBody>
+          <a:bodyPr wrap="square" anchor="ctr" lIns="0" tIns="0" rIns="0" bIns="0">
+            <a:noAutofit/>
+          </a:bodyPr>
+          <a:lstStyle/>
+          <a:p>
+            <a:pPr algn="l" latinLnBrk="0">
+              <a:lnSpc>
+                <a:spcPct val="100000"/>
+              </a:lnSpc>
+              <a:spcBef>
+                <a:spcPts val="0"/>
+              </a:spcBef>
+              <a:spcAft>
+                <a:spcPts val="0"/>
+              </a:spcAft>
+            </a:pPr>
+            <a:r>
+              <a:rPr sz="950" b="1">
+                <a:solidFill>
+                  <a:srgbClr val="16202A"/>
+                </a:solidFill>
+                <a:latin typeface="Microsoft YaHei"/>
+                <a:ea typeface="Microsoft YaHei"/>
+                <a:cs typeface="Microsoft YaHei"/>
+              </a:rPr>
+              <a:t>量化 + shuffle 换 SDNN 恒定核</a:t>
+            </a:r>
+          </a:p>
+        </p:txBody>
+      </p:sp>
+      <p:sp>
+        <p:nvSpPr>
+          <p:cNvPr id="75" name="TextBox 74"/>
+          <p:cNvSpPr txBox="1"/>
+          <p:nvPr/>
+        </p:nvSpPr>
+        <p:spPr>
+          <a:xfrm>
+            <a:off x="9960559" y="2935224"/>
+            <a:ext cx="1481328" cy="219456"/>
+          </a:xfrm>
+          <a:prstGeom prst="rect">
+            <a:avLst/>
+          </a:prstGeom>
+          <a:noFill/>
+        </p:spPr>
+        <p:txBody>
+          <a:bodyPr wrap="square" anchor="ctr" lIns="0" tIns="0" rIns="0" bIns="0">
+            <a:noAutofit/>
+          </a:bodyPr>
+          <a:lstStyle/>
+          <a:p>
+            <a:pPr algn="r" latinLnBrk="0">
+              <a:lnSpc>
+                <a:spcPct val="100000"/>
+              </a:lnSpc>
+              <a:spcBef>
+                <a:spcPts val="0"/>
+              </a:spcBef>
+              <a:spcAft>
+                <a:spcPts val="0"/>
+              </a:spcAft>
+            </a:pPr>
+            <a:r>
+              <a:rPr sz="950" b="1">
+                <a:solidFill>
+                  <a:srgbClr val="3F63A8"/>
+                </a:solidFill>
+                <a:latin typeface="Microsoft YaHei"/>
+                <a:ea typeface="Microsoft YaHei"/>
+                <a:cs typeface="Microsoft YaHei"/>
+              </a:rPr>
+              <a:t>交付</a:t>
+            </a:r>
+          </a:p>
+        </p:txBody>
+      </p:sp>
+      <p:sp>
+        <p:nvSpPr>
+          <p:cNvPr id="76" name="TextBox 75"/>
+          <p:cNvSpPr txBox="1"/>
+          <p:nvPr/>
+        </p:nvSpPr>
+        <p:spPr>
+          <a:xfrm>
+            <a:off x="6912864" y="3154680"/>
+            <a:ext cx="4529023" cy="201168"/>
+          </a:xfrm>
+          <a:prstGeom prst="rect">
+            <a:avLst/>
+          </a:prstGeom>
+          <a:noFill/>
+        </p:spPr>
+        <p:txBody>
+          <a:bodyPr wrap="square" anchor="ctr" lIns="0" tIns="0" rIns="0" bIns="0">
+            <a:noAutofit/>
+          </a:bodyPr>
+          <a:lstStyle/>
+          <a:p>
+            <a:pPr algn="l" latinLnBrk="0">
+              <a:lnSpc>
+                <a:spcPct val="100000"/>
+              </a:lnSpc>
+              <a:spcBef>
+                <a:spcPts val="0"/>
+              </a:spcBef>
+              <a:spcAft>
+                <a:spcPts val="0"/>
+              </a:spcAft>
+            </a:pPr>
+            <a:r>
+              <a:rPr sz="900" b="0">
+                <a:solidFill>
+                  <a:srgbClr val="66727F"/>
+                </a:solidFill>
+                <a:latin typeface="Microsoft YaHei"/>
+                <a:ea typeface="Microsoft YaHei"/>
+                <a:cs typeface="Microsoft YaHei"/>
+              </a:rPr>
+              <a:t>C 微基准 c128 5.43×，cos = 1.0 · D E2E 吞吐 +3%，TPOT −3.4%</a:t>
+            </a:r>
+          </a:p>
+        </p:txBody>
+      </p:sp>
+      <p:sp>
+        <p:nvSpPr>
+          <p:cNvPr id="77" name="TextBox 76"/>
+          <p:cNvSpPr txBox="1"/>
+          <p:nvPr/>
+        </p:nvSpPr>
+        <p:spPr>
+          <a:xfrm>
+            <a:off x="6601968" y="3447288"/>
+            <a:ext cx="274320" cy="219456"/>
+          </a:xfrm>
+          <a:prstGeom prst="rect">
+            <a:avLst/>
+          </a:prstGeom>
+          <a:noFill/>
+        </p:spPr>
+        <p:txBody>
+          <a:bodyPr wrap="square" anchor="ctr" lIns="0" tIns="0" rIns="0" bIns="0">
+            <a:noAutofit/>
+          </a:bodyPr>
+          <a:lstStyle/>
+          <a:p>
+            <a:pPr algn="l" latinLnBrk="0">
+              <a:lnSpc>
+                <a:spcPct val="100000"/>
+              </a:lnSpc>
+              <a:spcBef>
+                <a:spcPts val="0"/>
+              </a:spcBef>
+              <a:spcAft>
+                <a:spcPts val="0"/>
+              </a:spcAft>
+            </a:pPr>
+            <a:r>
+              <a:rPr sz="1000" b="1">
+                <a:solidFill>
+                  <a:srgbClr val="B4382F"/>
+                </a:solidFill>
+                <a:latin typeface="Arial"/>
+                <a:ea typeface="Microsoft YaHei"/>
+                <a:cs typeface="Microsoft YaHei"/>
+              </a:rPr>
+              <a:t>3</a:t>
+            </a:r>
+          </a:p>
+        </p:txBody>
+      </p:sp>
+      <p:sp>
+        <p:nvSpPr>
+          <p:cNvPr id="78" name="TextBox 77"/>
+          <p:cNvSpPr txBox="1"/>
+          <p:nvPr/>
+        </p:nvSpPr>
+        <p:spPr>
+          <a:xfrm>
+            <a:off x="6912864" y="3447288"/>
+            <a:ext cx="3047695" cy="219456"/>
+          </a:xfrm>
+          <a:prstGeom prst="rect">
+            <a:avLst/>
+          </a:prstGeom>
+          <a:noFill/>
+        </p:spPr>
+        <p:txBody>
+          <a:bodyPr wrap="square" anchor="ctr" lIns="0" tIns="0" rIns="0" bIns="0">
+            <a:noAutofit/>
+          </a:bodyPr>
+          <a:lstStyle/>
+          <a:p>
+            <a:pPr algn="l" latinLnBrk="0">
+              <a:lnSpc>
+                <a:spcPct val="100000"/>
+              </a:lnSpc>
+              <a:spcBef>
+                <a:spcPts val="0"/>
+              </a:spcBef>
+              <a:spcAft>
+                <a:spcPts val="0"/>
+              </a:spcAft>
+            </a:pPr>
+            <a:r>
               <a:rPr sz="950" b="0">
                 <a:solidFill>
-                  <a:srgbClr val="16202A"/>
-                </a:solidFill>
-                <a:latin typeface="Microsoft YaHei"/>
-                <a:ea typeface="Microsoft YaHei"/>
-                <a:cs typeface="Microsoft YaHei"/>
-              </a:rPr>
-              <a:t>量化 + shuffle 换 SDNN 恒定核</a:t>
-            </a:r>
-          </a:p>
+                  <a:srgbClr val="35424F"/>
+                </a:solidFill>
+                <a:latin typeface="Microsoft YaHei"/>
+                <a:ea typeface="Microsoft YaHei"/>
+                <a:cs typeface="Microsoft YaHei"/>
+              </a:rPr>
+              <a:t>grouped-GEMM group-mode 四个旋钮</a:t>
+            </a:r>
+          </a:p>
+        </p:txBody>
+      </p:sp>
+      <p:sp>
+        <p:nvSpPr>
+          <p:cNvPr id="79" name="TextBox 78"/>
+          <p:cNvSpPr txBox="1"/>
+          <p:nvPr/>
+        </p:nvSpPr>
+        <p:spPr>
+          <a:xfrm>
+            <a:off x="9960559" y="3447288"/>
+            <a:ext cx="1481328" cy="219456"/>
+          </a:xfrm>
+          <a:prstGeom prst="rect">
+            <a:avLst/>
+          </a:prstGeom>
+          <a:noFill/>
+        </p:spPr>
+        <p:txBody>
+          <a:bodyPr wrap="square" anchor="ctr" lIns="0" tIns="0" rIns="0" bIns="0">
+            <a:noAutofit/>
+          </a:bodyPr>
+          <a:lstStyle/>
+          <a:p>
+            <a:pPr algn="r" latinLnBrk="0">
+              <a:lnSpc>
+                <a:spcPct val="100000"/>
+              </a:lnSpc>
+              <a:spcBef>
+                <a:spcPts val="0"/>
+              </a:spcBef>
+              <a:spcAft>
+                <a:spcPts val="0"/>
+              </a:spcAft>
+            </a:pPr>
+            <a:r>
+              <a:rPr sz="950" b="0">
+                <a:solidFill>
+                  <a:srgbClr val="B4382F"/>
+                </a:solidFill>
+                <a:latin typeface="Microsoft YaHei"/>
+                <a:ea typeface="Microsoft YaHei"/>
+                <a:cs typeface="Microsoft YaHei"/>
+              </a:rPr>
+              <a:t>① 挡 1，③ 挡其余</a:t>
+            </a:r>
+          </a:p>
+        </p:txBody>
+      </p:sp>
+      <p:sp>
+        <p:nvSpPr>
+          <p:cNvPr id="80" name="TextBox 79"/>
+          <p:cNvSpPr txBox="1"/>
+          <p:nvPr/>
+        </p:nvSpPr>
+        <p:spPr>
+          <a:xfrm>
+            <a:off x="6912864" y="3666744"/>
+            <a:ext cx="4529023" cy="201168"/>
+          </a:xfrm>
+          <a:prstGeom prst="rect">
+            <a:avLst/>
+          </a:prstGeom>
+          <a:noFill/>
+        </p:spPr>
+        <p:txBody>
+          <a:bodyPr wrap="square" anchor="ctr" lIns="0" tIns="0" rIns="0" bIns="0">
+            <a:noAutofit/>
+          </a:bodyPr>
+          <a:lstStyle/>
           <a:p>
             <a:pPr algn="l" latinLnBrk="0">
               <a:lnSpc>
@@ -4459,29 +6507,170 @@
               </a:spcAft>
             </a:pPr>
             <a:r>
+              <a:rPr sz="900" b="0">
+                <a:solidFill>
+                  <a:srgbClr val="66727F"/>
+                </a:solidFill>
+                <a:latin typeface="Microsoft YaHei"/>
+                <a:ea typeface="Microsoft YaHei"/>
+                <a:cs typeface="Microsoft YaHei"/>
+              </a:rPr>
+              <a:t>C 四模式同速；force_nogroup −20%；no_group cos 0.000</a:t>
+            </a:r>
+          </a:p>
+        </p:txBody>
+      </p:sp>
+      <p:sp>
+        <p:nvSpPr>
+          <p:cNvPr id="81" name="TextBox 80"/>
+          <p:cNvSpPr txBox="1"/>
+          <p:nvPr/>
+        </p:nvSpPr>
+        <p:spPr>
+          <a:xfrm>
+            <a:off x="6601968" y="3959352"/>
+            <a:ext cx="274320" cy="219456"/>
+          </a:xfrm>
+          <a:prstGeom prst="rect">
+            <a:avLst/>
+          </a:prstGeom>
+          <a:noFill/>
+        </p:spPr>
+        <p:txBody>
+          <a:bodyPr wrap="square" anchor="ctr" lIns="0" tIns="0" rIns="0" bIns="0">
+            <a:noAutofit/>
+          </a:bodyPr>
+          <a:lstStyle/>
+          <a:p>
+            <a:pPr algn="l" latinLnBrk="0">
+              <a:lnSpc>
+                <a:spcPct val="100000"/>
+              </a:lnSpc>
+              <a:spcBef>
+                <a:spcPts val="0"/>
+              </a:spcBef>
+              <a:spcAft>
+                <a:spcPts val="0"/>
+              </a:spcAft>
+            </a:pPr>
+            <a:r>
+              <a:rPr sz="1000" b="1">
+                <a:solidFill>
+                  <a:srgbClr val="B4382F"/>
+                </a:solidFill>
+                <a:latin typeface="Arial"/>
+                <a:ea typeface="Microsoft YaHei"/>
+                <a:cs typeface="Microsoft YaHei"/>
+              </a:rPr>
+              <a:t>4</a:t>
+            </a:r>
+          </a:p>
+        </p:txBody>
+      </p:sp>
+      <p:sp>
+        <p:nvSpPr>
+          <p:cNvPr id="82" name="TextBox 81"/>
+          <p:cNvSpPr txBox="1"/>
+          <p:nvPr/>
+        </p:nvSpPr>
+        <p:spPr>
+          <a:xfrm>
+            <a:off x="6912864" y="3959352"/>
+            <a:ext cx="3047695" cy="219456"/>
+          </a:xfrm>
+          <a:prstGeom prst="rect">
+            <a:avLst/>
+          </a:prstGeom>
+          <a:noFill/>
+        </p:spPr>
+        <p:txBody>
+          <a:bodyPr wrap="square" anchor="ctr" lIns="0" tIns="0" rIns="0" bIns="0">
+            <a:noAutofit/>
+          </a:bodyPr>
+          <a:lstStyle/>
+          <a:p>
+            <a:pPr algn="l" latinLnBrk="0">
+              <a:lnSpc>
+                <a:spcPct val="100000"/>
+              </a:lnSpc>
+              <a:spcBef>
+                <a:spcPts val="0"/>
+              </a:spcBef>
+              <a:spcAft>
+                <a:spcPts val="0"/>
+              </a:spcAft>
+            </a:pPr>
+            <a:r>
               <a:rPr sz="950" b="0">
                 <a:solidFill>
-                  <a:srgbClr val="16202A"/>
-                </a:solidFill>
-                <a:latin typeface="Microsoft YaHei"/>
-                <a:ea typeface="Microsoft YaHei"/>
-                <a:cs typeface="Microsoft YaHei"/>
-              </a:rPr>
-              <a:t>现用核随 rows×hidden 从 20 涨到 141 µs</a:t>
-            </a:r>
-          </a:p>
-        </p:txBody>
-      </p:sp>
-      <p:sp>
-        <p:nvSpPr>
-          <p:cNvPr id="32" name="TextBox 31"/>
-          <p:cNvSpPr txBox="1"/>
-          <p:nvPr/>
-        </p:nvSpPr>
-        <p:spPr>
-          <a:xfrm>
-            <a:off x="6419088" y="3236976"/>
-            <a:ext cx="2002536" cy="420624"/>
+                  <a:srgbClr val="35424F"/>
+                </a:solidFill>
+                <a:latin typeface="Microsoft YaHei"/>
+                <a:ea typeface="Microsoft YaHei"/>
+                <a:cs typeface="Microsoft YaHei"/>
+              </a:rPr>
+              <a:t>FFN 输出合并换 shuffle_mul_sum_sdnn</a:t>
+            </a:r>
+          </a:p>
+        </p:txBody>
+      </p:sp>
+      <p:sp>
+        <p:nvSpPr>
+          <p:cNvPr id="83" name="TextBox 82"/>
+          <p:cNvSpPr txBox="1"/>
+          <p:nvPr/>
+        </p:nvSpPr>
+        <p:spPr>
+          <a:xfrm>
+            <a:off x="9960559" y="3959352"/>
+            <a:ext cx="1481328" cy="219456"/>
+          </a:xfrm>
+          <a:prstGeom prst="rect">
+            <a:avLst/>
+          </a:prstGeom>
+          <a:noFill/>
+        </p:spPr>
+        <p:txBody>
+          <a:bodyPr wrap="square" anchor="ctr" lIns="0" tIns="0" rIns="0" bIns="0">
+            <a:noAutofit/>
+          </a:bodyPr>
+          <a:lstStyle/>
+          <a:p>
+            <a:pPr algn="r" latinLnBrk="0">
+              <a:lnSpc>
+                <a:spcPct val="100000"/>
+              </a:lnSpc>
+              <a:spcBef>
+                <a:spcPts val="0"/>
+              </a:spcBef>
+              <a:spcAft>
+                <a:spcPts val="0"/>
+              </a:spcAft>
+            </a:pPr>
+            <a:r>
+              <a:rPr sz="950" b="0">
+                <a:solidFill>
+                  <a:srgbClr val="B4382F"/>
+                </a:solidFill>
+                <a:latin typeface="Microsoft YaHei"/>
+                <a:ea typeface="Microsoft YaHei"/>
+                <a:cs typeface="Microsoft YaHei"/>
+              </a:rPr>
+              <a:t>③ 未过</a:t>
+            </a:r>
+          </a:p>
+        </p:txBody>
+      </p:sp>
+      <p:sp>
+        <p:nvSpPr>
+          <p:cNvPr id="84" name="TextBox 83"/>
+          <p:cNvSpPr txBox="1"/>
+          <p:nvPr/>
+        </p:nvSpPr>
+        <p:spPr>
+          <a:xfrm>
+            <a:off x="6912864" y="4178808"/>
+            <a:ext cx="4529023" cy="201168"/>
           </a:xfrm>
           <a:prstGeom prst="rect">
             <a:avLst/>
@@ -4506,6 +6695,100 @@
               </a:spcAft>
             </a:pPr>
             <a:r>
+              <a:rPr sz="900" b="0">
+                <a:solidFill>
+                  <a:srgbClr val="66727F"/>
+                </a:solidFill>
+                <a:latin typeface="Microsoft YaHei"/>
+                <a:ea typeface="Microsoft YaHei"/>
+                <a:cs typeface="Microsoft YaHei"/>
+              </a:rPr>
+              <a:t>C 0.61×，更慢</a:t>
+            </a:r>
+          </a:p>
+        </p:txBody>
+      </p:sp>
+      <p:sp>
+        <p:nvSpPr>
+          <p:cNvPr id="85" name="TextBox 84"/>
+          <p:cNvSpPr txBox="1"/>
+          <p:nvPr/>
+        </p:nvSpPr>
+        <p:spPr>
+          <a:xfrm>
+            <a:off x="6601968" y="4471416"/>
+            <a:ext cx="274320" cy="219456"/>
+          </a:xfrm>
+          <a:prstGeom prst="rect">
+            <a:avLst/>
+          </a:prstGeom>
+          <a:noFill/>
+        </p:spPr>
+        <p:txBody>
+          <a:bodyPr wrap="square" anchor="ctr" lIns="0" tIns="0" rIns="0" bIns="0">
+            <a:noAutofit/>
+          </a:bodyPr>
+          <a:lstStyle/>
+          <a:p>
+            <a:pPr algn="l" latinLnBrk="0">
+              <a:lnSpc>
+                <a:spcPct val="100000"/>
+              </a:lnSpc>
+              <a:spcBef>
+                <a:spcPts val="0"/>
+              </a:spcBef>
+              <a:spcAft>
+                <a:spcPts val="0"/>
+              </a:spcAft>
+            </a:pPr>
+            <a:r>
+              <a:rPr sz="1000" b="1">
+                <a:solidFill>
+                  <a:srgbClr val="66727F"/>
+                </a:solidFill>
+                <a:latin typeface="Arial"/>
+                <a:ea typeface="Microsoft YaHei"/>
+                <a:cs typeface="Microsoft YaHei"/>
+              </a:rPr>
+              <a:t>5</a:t>
+            </a:r>
+          </a:p>
+        </p:txBody>
+      </p:sp>
+      <p:sp>
+        <p:nvSpPr>
+          <p:cNvPr id="86" name="TextBox 85"/>
+          <p:cNvSpPr txBox="1"/>
+          <p:nvPr/>
+        </p:nvSpPr>
+        <p:spPr>
+          <a:xfrm>
+            <a:off x="6912864" y="4471416"/>
+            <a:ext cx="3047695" cy="219456"/>
+          </a:xfrm>
+          <a:prstGeom prst="rect">
+            <a:avLst/>
+          </a:prstGeom>
+          <a:noFill/>
+        </p:spPr>
+        <p:txBody>
+          <a:bodyPr wrap="square" anchor="ctr" lIns="0" tIns="0" rIns="0" bIns="0">
+            <a:noAutofit/>
+          </a:bodyPr>
+          <a:lstStyle/>
+          <a:p>
+            <a:pPr algn="l" latinLnBrk="0">
+              <a:lnSpc>
+                <a:spcPct val="100000"/>
+              </a:lnSpc>
+              <a:spcBef>
+                <a:spcPts val="0"/>
+              </a:spcBef>
+              <a:spcAft>
+                <a:spcPts val="0"/>
+              </a:spcAft>
+            </a:pPr>
+            <a:r>
               <a:rPr sz="950" b="0">
                 <a:solidFill>
                   <a:srgbClr val="35424F"/>
@@ -4514,21 +6797,68 @@
                 <a:ea typeface="Microsoft YaHei"/>
                 <a:cs typeface="Microsoft YaHei"/>
               </a:rPr>
-              <a:t>微基准 c128 5.43×，cos = 1.0</a:t>
-            </a:r>
-          </a:p>
-        </p:txBody>
-      </p:sp>
-      <p:sp>
-        <p:nvSpPr>
-          <p:cNvPr id="33" name="TextBox 32"/>
-          <p:cNvSpPr txBox="1"/>
-          <p:nvPr/>
-        </p:nvSpPr>
-        <p:spPr>
-          <a:xfrm>
-            <a:off x="8513064" y="3236976"/>
-            <a:ext cx="1280160" cy="420624"/>
+              <a:t>路由 softmax + topk + renorm 融合</a:t>
+            </a:r>
+          </a:p>
+        </p:txBody>
+      </p:sp>
+      <p:sp>
+        <p:nvSpPr>
+          <p:cNvPr id="87" name="TextBox 86"/>
+          <p:cNvSpPr txBox="1"/>
+          <p:nvPr/>
+        </p:nvSpPr>
+        <p:spPr>
+          <a:xfrm>
+            <a:off x="9960559" y="4471416"/>
+            <a:ext cx="1481328" cy="219456"/>
+          </a:xfrm>
+          <a:prstGeom prst="rect">
+            <a:avLst/>
+          </a:prstGeom>
+          <a:noFill/>
+        </p:spPr>
+        <p:txBody>
+          <a:bodyPr wrap="square" anchor="ctr" lIns="0" tIns="0" rIns="0" bIns="0">
+            <a:noAutofit/>
+          </a:bodyPr>
+          <a:lstStyle/>
+          <a:p>
+            <a:pPr algn="r" latinLnBrk="0">
+              <a:lnSpc>
+                <a:spcPct val="100000"/>
+              </a:lnSpc>
+              <a:spcBef>
+                <a:spcPts val="0"/>
+              </a:spcBef>
+              <a:spcAft>
+                <a:spcPts val="0"/>
+              </a:spcAft>
+            </a:pPr>
+            <a:r>
+              <a:rPr sz="950" b="0">
+                <a:solidFill>
+                  <a:srgbClr val="66727F"/>
+                </a:solidFill>
+                <a:latin typeface="Microsoft YaHei"/>
+                <a:ea typeface="Microsoft YaHei"/>
+                <a:cs typeface="Microsoft YaHei"/>
+              </a:rPr>
+              <a:t>③ 过但不值当，未接线</a:t>
+            </a:r>
+          </a:p>
+        </p:txBody>
+      </p:sp>
+      <p:sp>
+        <p:nvSpPr>
+          <p:cNvPr id="88" name="TextBox 87"/>
+          <p:cNvSpPr txBox="1"/>
+          <p:nvPr/>
+        </p:nvSpPr>
+        <p:spPr>
+          <a:xfrm>
+            <a:off x="6912864" y="4690872"/>
+            <a:ext cx="4529023" cy="201168"/>
           </a:xfrm>
           <a:prstGeom prst="rect">
             <a:avLst/>
@@ -4553,714 +6883,7 @@
               </a:spcAft>
             </a:pPr>
             <a:r>
-              <a:rPr sz="950" b="0">
-                <a:solidFill>
-                  <a:srgbClr val="35424F"/>
-                </a:solidFill>
-                <a:latin typeface="Microsoft YaHei"/>
-                <a:ea typeface="Microsoft YaHei"/>
-                <a:cs typeface="Microsoft YaHei"/>
-              </a:rPr>
-              <a:t>E2E 吞吐 +3%</a:t>
-            </a:r>
-          </a:p>
-          <a:p>
-            <a:pPr algn="l" latinLnBrk="0">
-              <a:lnSpc>
-                <a:spcPct val="100000"/>
-              </a:lnSpc>
-              <a:spcBef>
-                <a:spcPts val="0"/>
-              </a:spcBef>
-              <a:spcAft>
-                <a:spcPts val="0"/>
-              </a:spcAft>
-            </a:pPr>
-            <a:r>
-              <a:rPr sz="950" b="0">
-                <a:solidFill>
-                  <a:srgbClr val="35424F"/>
-                </a:solidFill>
-                <a:latin typeface="Microsoft YaHei"/>
-                <a:ea typeface="Microsoft YaHei"/>
-                <a:cs typeface="Microsoft YaHei"/>
-              </a:rPr>
-              <a:t>TPOT −3.4%</a:t>
-            </a:r>
-          </a:p>
-        </p:txBody>
-      </p:sp>
-      <p:sp>
-        <p:nvSpPr>
-          <p:cNvPr id="34" name="TextBox 33"/>
-          <p:cNvSpPr txBox="1"/>
-          <p:nvPr/>
-        </p:nvSpPr>
-        <p:spPr>
-          <a:xfrm>
-            <a:off x="9884664" y="3236976"/>
-            <a:ext cx="1554480" cy="420624"/>
-          </a:xfrm>
-          <a:prstGeom prst="rect">
-            <a:avLst/>
-          </a:prstGeom>
-          <a:noFill/>
-        </p:spPr>
-        <p:txBody>
-          <a:bodyPr wrap="square" anchor="ctr" lIns="0" tIns="0" rIns="0" bIns="0">
-            <a:noAutofit/>
-          </a:bodyPr>
-          <a:lstStyle/>
-          <a:p>
-            <a:pPr algn="l" latinLnBrk="0">
-              <a:lnSpc>
-                <a:spcPct val="100000"/>
-              </a:lnSpc>
-              <a:spcBef>
-                <a:spcPts val="0"/>
-              </a:spcBef>
-              <a:spcAft>
-                <a:spcPts val="0"/>
-              </a:spcAft>
-            </a:pPr>
-            <a:r>
-              <a:rPr sz="950" b="1">
-                <a:solidFill>
-                  <a:srgbClr val="3F63A8"/>
-                </a:solidFill>
-                <a:latin typeface="Microsoft YaHei"/>
-                <a:ea typeface="Microsoft YaHei"/>
-                <a:cs typeface="Microsoft YaHei"/>
-              </a:rPr>
-              <a:t>交付</a:t>
-            </a:r>
-          </a:p>
-        </p:txBody>
-      </p:sp>
-      <p:sp>
-        <p:nvSpPr>
-          <p:cNvPr id="35" name="TextBox 34"/>
-          <p:cNvSpPr txBox="1"/>
-          <p:nvPr/>
-        </p:nvSpPr>
-        <p:spPr>
-          <a:xfrm>
-            <a:off x="3675888" y="3694176"/>
-            <a:ext cx="2651760" cy="566928"/>
-          </a:xfrm>
-          <a:prstGeom prst="rect">
-            <a:avLst/>
-          </a:prstGeom>
-          <a:noFill/>
-        </p:spPr>
-        <p:txBody>
-          <a:bodyPr wrap="square" anchor="ctr" lIns="0" tIns="0" rIns="0" bIns="0">
-            <a:noAutofit/>
-          </a:bodyPr>
-          <a:lstStyle/>
-          <a:p>
-            <a:pPr algn="l" latinLnBrk="0">
-              <a:lnSpc>
-                <a:spcPct val="100000"/>
-              </a:lnSpc>
-              <a:spcBef>
-                <a:spcPts val="0"/>
-              </a:spcBef>
-              <a:spcAft>
-                <a:spcPts val="0"/>
-              </a:spcAft>
-            </a:pPr>
-            <a:r>
-              <a:rPr sz="950" b="0">
-                <a:solidFill>
-                  <a:srgbClr val="35424F"/>
-                </a:solidFill>
-                <a:latin typeface="Microsoft YaHei"/>
-                <a:ea typeface="Microsoft YaHei"/>
-                <a:cs typeface="Microsoft YaHei"/>
-              </a:rPr>
-              <a:t>grouped-GEMM group-mode 四个旋钮</a:t>
-            </a:r>
-          </a:p>
-        </p:txBody>
-      </p:sp>
-      <p:sp>
-        <p:nvSpPr>
-          <p:cNvPr id="36" name="TextBox 35"/>
-          <p:cNvSpPr txBox="1"/>
-          <p:nvPr/>
-        </p:nvSpPr>
-        <p:spPr>
-          <a:xfrm>
-            <a:off x="6419088" y="3694176"/>
-            <a:ext cx="2002536" cy="566928"/>
-          </a:xfrm>
-          <a:prstGeom prst="rect">
-            <a:avLst/>
-          </a:prstGeom>
-          <a:noFill/>
-        </p:spPr>
-        <p:txBody>
-          <a:bodyPr wrap="square" anchor="ctr" lIns="0" tIns="0" rIns="0" bIns="0">
-            <a:noAutofit/>
-          </a:bodyPr>
-          <a:lstStyle/>
-          <a:p>
-            <a:pPr algn="l" latinLnBrk="0">
-              <a:lnSpc>
-                <a:spcPct val="100000"/>
-              </a:lnSpc>
-              <a:spcBef>
-                <a:spcPts val="0"/>
-              </a:spcBef>
-              <a:spcAft>
-                <a:spcPts val="0"/>
-              </a:spcAft>
-            </a:pPr>
-            <a:r>
-              <a:rPr sz="950" b="0">
-                <a:solidFill>
-                  <a:srgbClr val="35424F"/>
-                </a:solidFill>
-                <a:latin typeface="Microsoft YaHei"/>
-                <a:ea typeface="Microsoft YaHei"/>
-                <a:cs typeface="Microsoft YaHei"/>
-              </a:rPr>
-              <a:t>四模式完全同速</a:t>
-            </a:r>
-          </a:p>
-          <a:p>
-            <a:pPr algn="l" latinLnBrk="0">
-              <a:lnSpc>
-                <a:spcPct val="100000"/>
-              </a:lnSpc>
-              <a:spcBef>
-                <a:spcPts val="0"/>
-              </a:spcBef>
-              <a:spcAft>
-                <a:spcPts val="0"/>
-              </a:spcAft>
-            </a:pPr>
-            <a:r>
-              <a:rPr sz="950" b="0">
-                <a:solidFill>
-                  <a:srgbClr val="35424F"/>
-                </a:solidFill>
-                <a:latin typeface="Microsoft YaHei"/>
-                <a:ea typeface="Microsoft YaHei"/>
-                <a:cs typeface="Microsoft YaHei"/>
-              </a:rPr>
-              <a:t>force_nogroup −20%</a:t>
-            </a:r>
-          </a:p>
-          <a:p>
-            <a:pPr algn="l" latinLnBrk="0">
-              <a:lnSpc>
-                <a:spcPct val="100000"/>
-              </a:lnSpc>
-              <a:spcBef>
-                <a:spcPts val="0"/>
-              </a:spcBef>
-              <a:spcAft>
-                <a:spcPts val="0"/>
-              </a:spcAft>
-            </a:pPr>
-            <a:r>
-              <a:rPr sz="950" b="0">
-                <a:solidFill>
-                  <a:srgbClr val="35424F"/>
-                </a:solidFill>
-                <a:latin typeface="Microsoft YaHei"/>
-                <a:ea typeface="Microsoft YaHei"/>
-                <a:cs typeface="Microsoft YaHei"/>
-              </a:rPr>
-              <a:t>no_group cos 0.000</a:t>
-            </a:r>
-          </a:p>
-        </p:txBody>
-      </p:sp>
-      <p:sp>
-        <p:nvSpPr>
-          <p:cNvPr id="37" name="TextBox 36"/>
-          <p:cNvSpPr txBox="1"/>
-          <p:nvPr/>
-        </p:nvSpPr>
-        <p:spPr>
-          <a:xfrm>
-            <a:off x="8513064" y="3694176"/>
-            <a:ext cx="1280160" cy="566928"/>
-          </a:xfrm>
-          <a:prstGeom prst="rect">
-            <a:avLst/>
-          </a:prstGeom>
-          <a:noFill/>
-        </p:spPr>
-        <p:txBody>
-          <a:bodyPr wrap="square" anchor="ctr" lIns="0" tIns="0" rIns="0" bIns="0">
-            <a:noAutofit/>
-          </a:bodyPr>
-          <a:lstStyle/>
-          <a:p>
-            <a:pPr algn="l" latinLnBrk="0">
-              <a:lnSpc>
-                <a:spcPct val="100000"/>
-              </a:lnSpc>
-              <a:spcBef>
-                <a:spcPts val="0"/>
-              </a:spcBef>
-              <a:spcAft>
-                <a:spcPts val="0"/>
-              </a:spcAft>
-            </a:pPr>
-            <a:r>
-              <a:rPr sz="950" b="0">
-                <a:solidFill>
-                  <a:srgbClr val="8C96A1"/>
-                </a:solidFill>
-                <a:latin typeface="Microsoft YaHei"/>
-                <a:ea typeface="Microsoft YaHei"/>
-                <a:cs typeface="Microsoft YaHei"/>
-              </a:rPr>
-              <a:t>—</a:t>
-            </a:r>
-          </a:p>
-        </p:txBody>
-      </p:sp>
-      <p:sp>
-        <p:nvSpPr>
-          <p:cNvPr id="38" name="TextBox 37"/>
-          <p:cNvSpPr txBox="1"/>
-          <p:nvPr/>
-        </p:nvSpPr>
-        <p:spPr>
-          <a:xfrm>
-            <a:off x="9884664" y="3694176"/>
-            <a:ext cx="1554480" cy="566928"/>
-          </a:xfrm>
-          <a:prstGeom prst="rect">
-            <a:avLst/>
-          </a:prstGeom>
-          <a:noFill/>
-        </p:spPr>
-        <p:txBody>
-          <a:bodyPr wrap="square" anchor="ctr" lIns="0" tIns="0" rIns="0" bIns="0">
-            <a:noAutofit/>
-          </a:bodyPr>
-          <a:lstStyle/>
-          <a:p>
-            <a:pPr algn="l" latinLnBrk="0">
-              <a:lnSpc>
-                <a:spcPct val="100000"/>
-              </a:lnSpc>
-              <a:spcBef>
-                <a:spcPts val="0"/>
-              </a:spcBef>
-              <a:spcAft>
-                <a:spcPts val="0"/>
-              </a:spcAft>
-            </a:pPr>
-            <a:r>
-              <a:rPr sz="950" b="0">
-                <a:solidFill>
-                  <a:srgbClr val="B4382F"/>
-                </a:solidFill>
-                <a:latin typeface="Microsoft YaHei"/>
-                <a:ea typeface="Microsoft YaHei"/>
-                <a:cs typeface="Microsoft YaHei"/>
-              </a:rPr>
-              <a:t>① 挡掉一个，③ 挡掉其余</a:t>
-            </a:r>
-          </a:p>
-          <a:p>
-            <a:pPr algn="l" latinLnBrk="0">
-              <a:lnSpc>
-                <a:spcPct val="100000"/>
-              </a:lnSpc>
-              <a:spcBef>
-                <a:spcPts val="0"/>
-              </a:spcBef>
-              <a:spcAft>
-                <a:spcPts val="0"/>
-              </a:spcAft>
-            </a:pPr>
-            <a:r>
-              <a:rPr sz="950" b="0">
-                <a:solidFill>
-                  <a:srgbClr val="B4382F"/>
-                </a:solidFill>
-                <a:latin typeface="Microsoft YaHei"/>
-                <a:ea typeface="Microsoft YaHei"/>
-                <a:cs typeface="Microsoft YaHei"/>
-              </a:rPr>
-              <a:t>判定为闭源核内在开销</a:t>
-            </a:r>
-          </a:p>
-        </p:txBody>
-      </p:sp>
-      <p:sp>
-        <p:nvSpPr>
-          <p:cNvPr id="39" name="TextBox 38"/>
-          <p:cNvSpPr txBox="1"/>
-          <p:nvPr/>
-        </p:nvSpPr>
-        <p:spPr>
-          <a:xfrm>
-            <a:off x="3675888" y="4297680"/>
-            <a:ext cx="2651760" cy="274320"/>
-          </a:xfrm>
-          <a:prstGeom prst="rect">
-            <a:avLst/>
-          </a:prstGeom>
-          <a:noFill/>
-        </p:spPr>
-        <p:txBody>
-          <a:bodyPr wrap="square" anchor="ctr" lIns="0" tIns="0" rIns="0" bIns="0">
-            <a:noAutofit/>
-          </a:bodyPr>
-          <a:lstStyle/>
-          <a:p>
-            <a:pPr algn="l" latinLnBrk="0">
-              <a:lnSpc>
-                <a:spcPct val="100000"/>
-              </a:lnSpc>
-              <a:spcBef>
-                <a:spcPts val="0"/>
-              </a:spcBef>
-              <a:spcAft>
-                <a:spcPts val="0"/>
-              </a:spcAft>
-            </a:pPr>
-            <a:r>
-              <a:rPr sz="950" b="0">
-                <a:solidFill>
-                  <a:srgbClr val="35424F"/>
-                </a:solidFill>
-                <a:latin typeface="Microsoft YaHei"/>
-                <a:ea typeface="Microsoft YaHei"/>
-                <a:cs typeface="Microsoft YaHei"/>
-              </a:rPr>
-              <a:t>FFN 输出合并换 shuffle_mul_sum_sdnn</a:t>
-            </a:r>
-          </a:p>
-        </p:txBody>
-      </p:sp>
-      <p:sp>
-        <p:nvSpPr>
-          <p:cNvPr id="40" name="TextBox 39"/>
-          <p:cNvSpPr txBox="1"/>
-          <p:nvPr/>
-        </p:nvSpPr>
-        <p:spPr>
-          <a:xfrm>
-            <a:off x="6419088" y="4297680"/>
-            <a:ext cx="2002536" cy="274320"/>
-          </a:xfrm>
-          <a:prstGeom prst="rect">
-            <a:avLst/>
-          </a:prstGeom>
-          <a:noFill/>
-        </p:spPr>
-        <p:txBody>
-          <a:bodyPr wrap="square" anchor="ctr" lIns="0" tIns="0" rIns="0" bIns="0">
-            <a:noAutofit/>
-          </a:bodyPr>
-          <a:lstStyle/>
-          <a:p>
-            <a:pPr algn="l" latinLnBrk="0">
-              <a:lnSpc>
-                <a:spcPct val="100000"/>
-              </a:lnSpc>
-              <a:spcBef>
-                <a:spcPts val="0"/>
-              </a:spcBef>
-              <a:spcAft>
-                <a:spcPts val="0"/>
-              </a:spcAft>
-            </a:pPr>
-            <a:r>
-              <a:rPr sz="950" b="0">
-                <a:solidFill>
-                  <a:srgbClr val="35424F"/>
-                </a:solidFill>
-                <a:latin typeface="Microsoft YaHei"/>
-                <a:ea typeface="Microsoft YaHei"/>
-                <a:cs typeface="Microsoft YaHei"/>
-              </a:rPr>
-              <a:t>0.61×，更慢</a:t>
-            </a:r>
-          </a:p>
-        </p:txBody>
-      </p:sp>
-      <p:sp>
-        <p:nvSpPr>
-          <p:cNvPr id="41" name="TextBox 40"/>
-          <p:cNvSpPr txBox="1"/>
-          <p:nvPr/>
-        </p:nvSpPr>
-        <p:spPr>
-          <a:xfrm>
-            <a:off x="8513064" y="4297680"/>
-            <a:ext cx="1280160" cy="274320"/>
-          </a:xfrm>
-          <a:prstGeom prst="rect">
-            <a:avLst/>
-          </a:prstGeom>
-          <a:noFill/>
-        </p:spPr>
-        <p:txBody>
-          <a:bodyPr wrap="square" anchor="ctr" lIns="0" tIns="0" rIns="0" bIns="0">
-            <a:noAutofit/>
-          </a:bodyPr>
-          <a:lstStyle/>
-          <a:p>
-            <a:pPr algn="l" latinLnBrk="0">
-              <a:lnSpc>
-                <a:spcPct val="100000"/>
-              </a:lnSpc>
-              <a:spcBef>
-                <a:spcPts val="0"/>
-              </a:spcBef>
-              <a:spcAft>
-                <a:spcPts val="0"/>
-              </a:spcAft>
-            </a:pPr>
-            <a:r>
-              <a:rPr sz="950" b="0">
-                <a:solidFill>
-                  <a:srgbClr val="8C96A1"/>
-                </a:solidFill>
-                <a:latin typeface="Microsoft YaHei"/>
-                <a:ea typeface="Microsoft YaHei"/>
-                <a:cs typeface="Microsoft YaHei"/>
-              </a:rPr>
-              <a:t>—</a:t>
-            </a:r>
-          </a:p>
-        </p:txBody>
-      </p:sp>
-      <p:sp>
-        <p:nvSpPr>
-          <p:cNvPr id="42" name="TextBox 41"/>
-          <p:cNvSpPr txBox="1"/>
-          <p:nvPr/>
-        </p:nvSpPr>
-        <p:spPr>
-          <a:xfrm>
-            <a:off x="9884664" y="4297680"/>
-            <a:ext cx="1554480" cy="274320"/>
-          </a:xfrm>
-          <a:prstGeom prst="rect">
-            <a:avLst/>
-          </a:prstGeom>
-          <a:noFill/>
-        </p:spPr>
-        <p:txBody>
-          <a:bodyPr wrap="square" anchor="ctr" lIns="0" tIns="0" rIns="0" bIns="0">
-            <a:noAutofit/>
-          </a:bodyPr>
-          <a:lstStyle/>
-          <a:p>
-            <a:pPr algn="l" latinLnBrk="0">
-              <a:lnSpc>
-                <a:spcPct val="100000"/>
-              </a:lnSpc>
-              <a:spcBef>
-                <a:spcPts val="0"/>
-              </a:spcBef>
-              <a:spcAft>
-                <a:spcPts val="0"/>
-              </a:spcAft>
-            </a:pPr>
-            <a:r>
-              <a:rPr sz="950" b="0">
-                <a:solidFill>
-                  <a:srgbClr val="B4382F"/>
-                </a:solidFill>
-                <a:latin typeface="Microsoft YaHei"/>
-                <a:ea typeface="Microsoft YaHei"/>
-                <a:cs typeface="Microsoft YaHei"/>
-              </a:rPr>
-              <a:t>③ 未过</a:t>
-            </a:r>
-          </a:p>
-        </p:txBody>
-      </p:sp>
-      <p:sp>
-        <p:nvSpPr>
-          <p:cNvPr id="43" name="TextBox 42"/>
-          <p:cNvSpPr txBox="1"/>
-          <p:nvPr/>
-        </p:nvSpPr>
-        <p:spPr>
-          <a:xfrm>
-            <a:off x="3675888" y="4608576"/>
-            <a:ext cx="2651760" cy="274320"/>
-          </a:xfrm>
-          <a:prstGeom prst="rect">
-            <a:avLst/>
-          </a:prstGeom>
-          <a:noFill/>
-        </p:spPr>
-        <p:txBody>
-          <a:bodyPr wrap="square" anchor="ctr" lIns="0" tIns="0" rIns="0" bIns="0">
-            <a:noAutofit/>
-          </a:bodyPr>
-          <a:lstStyle/>
-          <a:p>
-            <a:pPr algn="l" latinLnBrk="0">
-              <a:lnSpc>
-                <a:spcPct val="100000"/>
-              </a:lnSpc>
-              <a:spcBef>
-                <a:spcPts val="0"/>
-              </a:spcBef>
-              <a:spcAft>
-                <a:spcPts val="0"/>
-              </a:spcAft>
-            </a:pPr>
-            <a:r>
-              <a:rPr sz="950" b="0">
-                <a:solidFill>
-                  <a:srgbClr val="35424F"/>
-                </a:solidFill>
-                <a:latin typeface="Microsoft YaHei"/>
-                <a:ea typeface="Microsoft YaHei"/>
-                <a:cs typeface="Microsoft YaHei"/>
-              </a:rPr>
-              <a:t>路由 softmax + topk + renorm 融合</a:t>
-            </a:r>
-          </a:p>
-        </p:txBody>
-      </p:sp>
-      <p:sp>
-        <p:nvSpPr>
-          <p:cNvPr id="44" name="TextBox 43"/>
-          <p:cNvSpPr txBox="1"/>
-          <p:nvPr/>
-        </p:nvSpPr>
-        <p:spPr>
-          <a:xfrm>
-            <a:off x="6419088" y="4608576"/>
-            <a:ext cx="2002536" cy="274320"/>
-          </a:xfrm>
-          <a:prstGeom prst="rect">
-            <a:avLst/>
-          </a:prstGeom>
-          <a:noFill/>
-        </p:spPr>
-        <p:txBody>
-          <a:bodyPr wrap="square" anchor="ctr" lIns="0" tIns="0" rIns="0" bIns="0">
-            <a:noAutofit/>
-          </a:bodyPr>
-          <a:lstStyle/>
-          <a:p>
-            <a:pPr algn="l" latinLnBrk="0">
-              <a:lnSpc>
-                <a:spcPct val="100000"/>
-              </a:lnSpc>
-              <a:spcBef>
-                <a:spcPts val="0"/>
-              </a:spcBef>
-              <a:spcAft>
-                <a:spcPts val="0"/>
-              </a:spcAft>
-            </a:pPr>
-            <a:r>
-              <a:rPr sz="950" b="0">
-                <a:solidFill>
-                  <a:srgbClr val="35424F"/>
-                </a:solidFill>
-                <a:latin typeface="Microsoft YaHei"/>
-                <a:ea typeface="Microsoft YaHei"/>
-                <a:cs typeface="Microsoft YaHei"/>
-              </a:rPr>
-              <a:t>内核 2×，数值对（Δ 3e-8）</a:t>
-            </a:r>
-          </a:p>
-        </p:txBody>
-      </p:sp>
-      <p:sp>
-        <p:nvSpPr>
-          <p:cNvPr id="45" name="TextBox 44"/>
-          <p:cNvSpPr txBox="1"/>
-          <p:nvPr/>
-        </p:nvSpPr>
-        <p:spPr>
-          <a:xfrm>
-            <a:off x="8513064" y="4608576"/>
-            <a:ext cx="1280160" cy="274320"/>
-          </a:xfrm>
-          <a:prstGeom prst="rect">
-            <a:avLst/>
-          </a:prstGeom>
-          <a:noFill/>
-        </p:spPr>
-        <p:txBody>
-          <a:bodyPr wrap="square" anchor="ctr" lIns="0" tIns="0" rIns="0" bIns="0">
-            <a:noAutofit/>
-          </a:bodyPr>
-          <a:lstStyle/>
-          <a:p>
-            <a:pPr algn="l" latinLnBrk="0">
-              <a:lnSpc>
-                <a:spcPct val="100000"/>
-              </a:lnSpc>
-              <a:spcBef>
-                <a:spcPts val="0"/>
-              </a:spcBef>
-              <a:spcAft>
-                <a:spcPts val="0"/>
-              </a:spcAft>
-            </a:pPr>
-            <a:r>
-              <a:rPr sz="950" b="0">
-                <a:solidFill>
-                  <a:srgbClr val="35424F"/>
-                </a:solidFill>
-                <a:latin typeface="Microsoft YaHei"/>
-                <a:ea typeface="Microsoft YaHei"/>
-                <a:cs typeface="Microsoft YaHei"/>
-              </a:rPr>
-              <a:t>只占 ~0.9% TPOT</a:t>
-            </a:r>
-          </a:p>
-        </p:txBody>
-      </p:sp>
-      <p:sp>
-        <p:nvSpPr>
-          <p:cNvPr id="46" name="TextBox 45"/>
-          <p:cNvSpPr txBox="1"/>
-          <p:nvPr/>
-        </p:nvSpPr>
-        <p:spPr>
-          <a:xfrm>
-            <a:off x="9884664" y="4608576"/>
-            <a:ext cx="1554480" cy="274320"/>
-          </a:xfrm>
-          <a:prstGeom prst="rect">
-            <a:avLst/>
-          </a:prstGeom>
-          <a:noFill/>
-        </p:spPr>
-        <p:txBody>
-          <a:bodyPr wrap="square" anchor="ctr" lIns="0" tIns="0" rIns="0" bIns="0">
-            <a:noAutofit/>
-          </a:bodyPr>
-          <a:lstStyle/>
-          <a:p>
-            <a:pPr algn="l" latinLnBrk="0">
-              <a:lnSpc>
-                <a:spcPct val="100000"/>
-              </a:lnSpc>
-              <a:spcBef>
-                <a:spcPts val="0"/>
-              </a:spcBef>
-              <a:spcAft>
-                <a:spcPts val="0"/>
-              </a:spcAft>
-            </a:pPr>
-            <a:r>
-              <a:rPr sz="950" b="0">
+              <a:rPr sz="900" b="0">
                 <a:solidFill>
                   <a:srgbClr val="66727F"/>
                 </a:solidFill>
@@ -5268,14 +6891,14 @@
                 <a:ea typeface="Microsoft YaHei"/>
                 <a:cs typeface="Microsoft YaHei"/>
               </a:rPr>
-              <a:t>③ 过但不值当，未接线</a:t>
-            </a:r>
-          </a:p>
-        </p:txBody>
-      </p:sp>
-      <p:sp>
-        <p:nvSpPr>
-          <p:cNvPr id="47" name="TextBox 46"/>
+              <a:t>C 内核 2×，Δ 3e-8 · D 只占 ~0.9% TPOT</a:t>
+            </a:r>
+          </a:p>
+        </p:txBody>
+      </p:sp>
+      <p:sp>
+        <p:nvSpPr>
+          <p:cNvPr id="89" name="TextBox 88"/>
           <p:cNvSpPr txBox="1"/>
           <p:nvPr/>
         </p:nvSpPr>
@@ -5315,7 +6938,7 @@
                 <a:ea typeface="Microsoft YaHei"/>
                 <a:cs typeface="Microsoft YaHei"/>
               </a:rPr>
-              <a:t>三道门的漏斗</a:t>
+              <a:t>同一交付，换个并发</a:t>
             </a:r>
           </a:p>
           <a:p>
@@ -5339,7 +6962,7 @@
                 <a:ea typeface="Microsoft YaHei"/>
                 <a:cs typeface="Microsoft YaHei"/>
               </a:rPr>
-              <a:t>由便宜到贵，任一道不过即停，</a:t>
+              <a:t>每格是基线 → 交付的持续输出，</a:t>
             </a:r>
           </a:p>
           <a:p>
@@ -5363,21 +6986,21 @@
                 <a:ea typeface="Microsoft YaHei"/>
                 <a:cs typeface="Microsoft YaHei"/>
               </a:rPr>
-              <a:t>数值不对、更慢的当场挡掉</a:t>
-            </a:r>
-          </a:p>
-        </p:txBody>
-      </p:sp>
-      <p:sp>
-        <p:nvSpPr>
-          <p:cNvPr id="48" name="Rectangle 47"/>
+              <a:t>峰值点在 c128</a:t>
+            </a:r>
+          </a:p>
+        </p:txBody>
+      </p:sp>
+      <p:sp>
+        <p:nvSpPr>
+          <p:cNvPr id="90" name="Rectangle 89"/>
           <p:cNvSpPr/>
           <p:nvPr/>
         </p:nvSpPr>
         <p:spPr>
           <a:xfrm>
             <a:off x="3291840" y="5084064"/>
-            <a:ext cx="2503322" cy="621792"/>
+            <a:ext cx="1978075" cy="621792"/>
           </a:xfrm>
           <a:prstGeom prst="rect">
             <a:avLst/>
@@ -5401,14 +7024,14 @@
       </p:sp>
       <p:sp>
         <p:nvSpPr>
-          <p:cNvPr id="49" name="TextBox 48"/>
-          <p:cNvSpPr txBox="1"/>
-          <p:nvPr/>
-        </p:nvSpPr>
-        <p:spPr>
-          <a:xfrm>
-            <a:off x="3474720" y="5157216"/>
-            <a:ext cx="2137562" cy="201168"/>
+          <p:cNvPr id="91" name="TextBox 90"/>
+          <p:cNvSpPr txBox="1"/>
+          <p:nvPr/>
+        </p:nvSpPr>
+        <p:spPr>
+          <a:xfrm>
+            <a:off x="3438144" y="5120640"/>
+            <a:ext cx="1685467" cy="182880"/>
           </a:xfrm>
           <a:prstGeom prst="rect">
             <a:avLst/>
@@ -5437,25 +7060,25 @@
                 <a:solidFill>
                   <a:srgbClr val="66727F"/>
                 </a:solidFill>
-                <a:latin typeface="Microsoft YaHei"/>
-                <a:ea typeface="Microsoft YaHei"/>
-                <a:cs typeface="Microsoft YaHei"/>
-              </a:rPr>
-              <a:t>候选</a:t>
-            </a:r>
-          </a:p>
-        </p:txBody>
-      </p:sp>
-      <p:sp>
-        <p:nvSpPr>
-          <p:cNvPr id="50" name="TextBox 49"/>
-          <p:cNvSpPr txBox="1"/>
-          <p:nvPr/>
-        </p:nvSpPr>
-        <p:spPr>
-          <a:xfrm>
-            <a:off x="3474720" y="5376672"/>
-            <a:ext cx="2137562" cy="274320"/>
+                <a:latin typeface="Consolas"/>
+                <a:ea typeface="Microsoft YaHei"/>
+                <a:cs typeface="Microsoft YaHei"/>
+              </a:rPr>
+              <a:t>c__</a:t>
+            </a:r>
+          </a:p>
+        </p:txBody>
+      </p:sp>
+      <p:sp>
+        <p:nvSpPr>
+          <p:cNvPr id="92" name="TextBox 91"/>
+          <p:cNvSpPr txBox="1"/>
+          <p:nvPr/>
+        </p:nvSpPr>
+        <p:spPr>
+          <a:xfrm>
+            <a:off x="3438144" y="5312664"/>
+            <a:ext cx="1685467" cy="219456"/>
           </a:xfrm>
           <a:prstGeom prst="rect">
             <a:avLst/>
@@ -5480,29 +7103,76 @@
               </a:spcAft>
             </a:pPr>
             <a:r>
-              <a:rPr sz="1600" b="1">
-                <a:solidFill>
-                  <a:srgbClr val="16202A"/>
+              <a:rPr sz="1500" b="1">
+                <a:solidFill>
+                  <a:srgbClr val="8C96A1"/>
                 </a:solidFill>
                 <a:latin typeface="Arial"/>
                 <a:ea typeface="Microsoft YaHei"/>
                 <a:cs typeface="Microsoft YaHei"/>
               </a:rPr>
-              <a:t>10</a:t>
-            </a:r>
-          </a:p>
-        </p:txBody>
-      </p:sp>
-      <p:sp>
-        <p:nvSpPr>
-          <p:cNvPr id="51" name="Rectangle 50"/>
+              <a:t>+__%</a:t>
+            </a:r>
+          </a:p>
+        </p:txBody>
+      </p:sp>
+      <p:sp>
+        <p:nvSpPr>
+          <p:cNvPr id="93" name="TextBox 92"/>
+          <p:cNvSpPr txBox="1"/>
+          <p:nvPr/>
+        </p:nvSpPr>
+        <p:spPr>
+          <a:xfrm>
+            <a:off x="3438144" y="5541264"/>
+            <a:ext cx="1685467" cy="146304"/>
+          </a:xfrm>
+          <a:prstGeom prst="rect">
+            <a:avLst/>
+          </a:prstGeom>
+          <a:noFill/>
+        </p:spPr>
+        <p:txBody>
+          <a:bodyPr wrap="square" anchor="ctr" lIns="0" tIns="0" rIns="0" bIns="0">
+            <a:noAutofit/>
+          </a:bodyPr>
+          <a:lstStyle/>
+          <a:p>
+            <a:pPr algn="l" latinLnBrk="0">
+              <a:lnSpc>
+                <a:spcPct val="100000"/>
+              </a:lnSpc>
+              <a:spcBef>
+                <a:spcPts val="0"/>
+              </a:spcBef>
+              <a:spcAft>
+                <a:spcPts val="0"/>
+              </a:spcAft>
+            </a:pPr>
+            <a:r>
+              <a:rPr sz="850" b="0">
+                <a:solidFill>
+                  <a:srgbClr val="8C96A1"/>
+                </a:solidFill>
+                <a:latin typeface="Consolas"/>
+                <a:ea typeface="Microsoft YaHei"/>
+                <a:cs typeface="Microsoft YaHei"/>
+              </a:rPr>
+              <a:t>__ → __ tok/s</a:t>
+            </a:r>
+          </a:p>
+        </p:txBody>
+      </p:sp>
+      <p:sp>
+        <p:nvSpPr>
+          <p:cNvPr id="94" name="Rectangle 93"/>
           <p:cNvSpPr/>
           <p:nvPr/>
         </p:nvSpPr>
         <p:spPr>
           <a:xfrm>
-            <a:off x="6215786" y="5084064"/>
-            <a:ext cx="2503322" cy="621792"/>
+            <a:off x="5416219" y="5084064"/>
+            <a:ext cx="1978075" cy="621792"/>
           </a:xfrm>
           <a:prstGeom prst="rect">
             <a:avLst/>
@@ -5526,14 +7196,14 @@
       </p:sp>
       <p:sp>
         <p:nvSpPr>
-          <p:cNvPr id="52" name="TextBox 51"/>
-          <p:cNvSpPr txBox="1"/>
-          <p:nvPr/>
-        </p:nvSpPr>
-        <p:spPr>
-          <a:xfrm>
-            <a:off x="6398666" y="5157216"/>
-            <a:ext cx="2137562" cy="201168"/>
+          <p:cNvPr id="95" name="TextBox 94"/>
+          <p:cNvSpPr txBox="1"/>
+          <p:nvPr/>
+        </p:nvSpPr>
+        <p:spPr>
+          <a:xfrm>
+            <a:off x="5562523" y="5120640"/>
+            <a:ext cx="1685467" cy="182880"/>
           </a:xfrm>
           <a:prstGeom prst="rect">
             <a:avLst/>
@@ -5562,25 +7232,25 @@
                 <a:solidFill>
                   <a:srgbClr val="66727F"/>
                 </a:solidFill>
-                <a:latin typeface="Microsoft YaHei"/>
-                <a:ea typeface="Microsoft YaHei"/>
-                <a:cs typeface="Microsoft YaHei"/>
-              </a:rPr>
-              <a:t>过三道门</a:t>
-            </a:r>
-          </a:p>
-        </p:txBody>
-      </p:sp>
-      <p:sp>
-        <p:nvSpPr>
-          <p:cNvPr id="53" name="TextBox 52"/>
-          <p:cNvSpPr txBox="1"/>
-          <p:nvPr/>
-        </p:nvSpPr>
-        <p:spPr>
-          <a:xfrm>
-            <a:off x="6398666" y="5376672"/>
-            <a:ext cx="2137562" cy="274320"/>
+                <a:latin typeface="Consolas"/>
+                <a:ea typeface="Microsoft YaHei"/>
+                <a:cs typeface="Microsoft YaHei"/>
+              </a:rPr>
+              <a:t>c__</a:t>
+            </a:r>
+          </a:p>
+        </p:txBody>
+      </p:sp>
+      <p:sp>
+        <p:nvSpPr>
+          <p:cNvPr id="96" name="TextBox 95"/>
+          <p:cNvSpPr txBox="1"/>
+          <p:nvPr/>
+        </p:nvSpPr>
+        <p:spPr>
+          <a:xfrm>
+            <a:off x="5562523" y="5312664"/>
+            <a:ext cx="1685467" cy="219456"/>
           </a:xfrm>
           <a:prstGeom prst="rect">
             <a:avLst/>
@@ -5605,51 +7275,248 @@
               </a:spcAft>
             </a:pPr>
             <a:r>
-              <a:rPr sz="1600" b="1">
-                <a:solidFill>
-                  <a:srgbClr val="16202A"/>
+              <a:rPr sz="1500" b="1">
+                <a:solidFill>
+                  <a:srgbClr val="8C96A1"/>
                 </a:solidFill>
                 <a:latin typeface="Arial"/>
                 <a:ea typeface="Microsoft YaHei"/>
                 <a:cs typeface="Microsoft YaHei"/>
               </a:rPr>
-              <a:t>5</a:t>
-            </a:r>
-          </a:p>
-        </p:txBody>
-      </p:sp>
-      <p:cxnSp>
-        <p:nvCxnSpPr>
-          <p:cNvPr id="54" name="Connector 53"/>
-          <p:cNvCxnSpPr/>
-          <p:nvPr/>
-        </p:nvCxnSpPr>
-        <p:spPr>
-          <a:xfrm>
-            <a:off x="5886602" y="5394959"/>
-            <a:ext cx="237744" cy="0"/>
-          </a:xfrm>
-          <a:prstGeom prst="line">
-            <a:avLst/>
-          </a:prstGeom>
-          <a:ln w="15875">
+              <a:t>+__%</a:t>
+            </a:r>
+          </a:p>
+        </p:txBody>
+      </p:sp>
+      <p:sp>
+        <p:nvSpPr>
+          <p:cNvPr id="97" name="TextBox 96"/>
+          <p:cNvSpPr txBox="1"/>
+          <p:nvPr/>
+        </p:nvSpPr>
+        <p:spPr>
+          <a:xfrm>
+            <a:off x="5562523" y="5541264"/>
+            <a:ext cx="1685467" cy="146304"/>
+          </a:xfrm>
+          <a:prstGeom prst="rect">
+            <a:avLst/>
+          </a:prstGeom>
+          <a:noFill/>
+        </p:spPr>
+        <p:txBody>
+          <a:bodyPr wrap="square" anchor="ctr" lIns="0" tIns="0" rIns="0" bIns="0">
+            <a:noAutofit/>
+          </a:bodyPr>
+          <a:lstStyle/>
+          <a:p>
+            <a:pPr algn="l" latinLnBrk="0">
+              <a:lnSpc>
+                <a:spcPct val="100000"/>
+              </a:lnSpc>
+              <a:spcBef>
+                <a:spcPts val="0"/>
+              </a:spcBef>
+              <a:spcAft>
+                <a:spcPts val="0"/>
+              </a:spcAft>
+            </a:pPr>
+            <a:r>
+              <a:rPr sz="850" b="0">
+                <a:solidFill>
+                  <a:srgbClr val="8C96A1"/>
+                </a:solidFill>
+                <a:latin typeface="Consolas"/>
+                <a:ea typeface="Microsoft YaHei"/>
+                <a:cs typeface="Microsoft YaHei"/>
+              </a:rPr>
+              <a:t>__ → __ tok/s</a:t>
+            </a:r>
+          </a:p>
+        </p:txBody>
+      </p:sp>
+      <p:sp>
+        <p:nvSpPr>
+          <p:cNvPr id="98" name="Rectangle 97"/>
+          <p:cNvSpPr/>
+          <p:nvPr/>
+        </p:nvSpPr>
+        <p:spPr>
+          <a:xfrm>
+            <a:off x="7540599" y="5084064"/>
+            <a:ext cx="1978075" cy="621792"/>
+          </a:xfrm>
+          <a:prstGeom prst="rect">
+            <a:avLst/>
+          </a:prstGeom>
+          <a:solidFill>
+            <a:srgbClr val="FFFFFF"/>
+          </a:solidFill>
+          <a:ln w="9525">
             <a:solidFill>
-              <a:srgbClr val="8C96A1"/>
+              <a:srgbClr val="DDE2E7"/>
             </a:solidFill>
-            <a:tailEnd type="triangle" w="med" len="med"/>
           </a:ln>
         </p:spPr>
-      </p:cxnSp>
-      <p:sp>
-        <p:nvSpPr>
-          <p:cNvPr id="55" name="Rectangle 54"/>
+        <p:txBody>
+          <a:bodyPr rtlCol="0" anchor="ctr"/>
+          <a:lstStyle/>
+          <a:p>
+            <a:pPr algn="ctr"/>
+          </a:p>
+        </p:txBody>
+      </p:sp>
+      <p:sp>
+        <p:nvSpPr>
+          <p:cNvPr id="99" name="TextBox 98"/>
+          <p:cNvSpPr txBox="1"/>
+          <p:nvPr/>
+        </p:nvSpPr>
+        <p:spPr>
+          <a:xfrm>
+            <a:off x="7686903" y="5120640"/>
+            <a:ext cx="1685467" cy="182880"/>
+          </a:xfrm>
+          <a:prstGeom prst="rect">
+            <a:avLst/>
+          </a:prstGeom>
+          <a:noFill/>
+        </p:spPr>
+        <p:txBody>
+          <a:bodyPr wrap="square" anchor="ctr" lIns="0" tIns="0" rIns="0" bIns="0">
+            <a:noAutofit/>
+          </a:bodyPr>
+          <a:lstStyle/>
+          <a:p>
+            <a:pPr algn="l" latinLnBrk="0">
+              <a:lnSpc>
+                <a:spcPct val="100000"/>
+              </a:lnSpc>
+              <a:spcBef>
+                <a:spcPts val="0"/>
+              </a:spcBef>
+              <a:spcAft>
+                <a:spcPts val="0"/>
+              </a:spcAft>
+            </a:pPr>
+            <a:r>
+              <a:rPr sz="950" b="0">
+                <a:solidFill>
+                  <a:srgbClr val="66727F"/>
+                </a:solidFill>
+                <a:latin typeface="Consolas"/>
+                <a:ea typeface="Microsoft YaHei"/>
+                <a:cs typeface="Microsoft YaHei"/>
+              </a:rPr>
+              <a:t>c__</a:t>
+            </a:r>
+          </a:p>
+        </p:txBody>
+      </p:sp>
+      <p:sp>
+        <p:nvSpPr>
+          <p:cNvPr id="100" name="TextBox 99"/>
+          <p:cNvSpPr txBox="1"/>
+          <p:nvPr/>
+        </p:nvSpPr>
+        <p:spPr>
+          <a:xfrm>
+            <a:off x="7686903" y="5312664"/>
+            <a:ext cx="1685467" cy="219456"/>
+          </a:xfrm>
+          <a:prstGeom prst="rect">
+            <a:avLst/>
+          </a:prstGeom>
+          <a:noFill/>
+        </p:spPr>
+        <p:txBody>
+          <a:bodyPr wrap="square" anchor="ctr" lIns="0" tIns="0" rIns="0" bIns="0">
+            <a:noAutofit/>
+          </a:bodyPr>
+          <a:lstStyle/>
+          <a:p>
+            <a:pPr algn="l" latinLnBrk="0">
+              <a:lnSpc>
+                <a:spcPct val="100000"/>
+              </a:lnSpc>
+              <a:spcBef>
+                <a:spcPts val="0"/>
+              </a:spcBef>
+              <a:spcAft>
+                <a:spcPts val="0"/>
+              </a:spcAft>
+            </a:pPr>
+            <a:r>
+              <a:rPr sz="1500" b="1">
+                <a:solidFill>
+                  <a:srgbClr val="8C96A1"/>
+                </a:solidFill>
+                <a:latin typeface="Arial"/>
+                <a:ea typeface="Microsoft YaHei"/>
+                <a:cs typeface="Microsoft YaHei"/>
+              </a:rPr>
+              <a:t>+__%</a:t>
+            </a:r>
+          </a:p>
+        </p:txBody>
+      </p:sp>
+      <p:sp>
+        <p:nvSpPr>
+          <p:cNvPr id="101" name="TextBox 100"/>
+          <p:cNvSpPr txBox="1"/>
+          <p:nvPr/>
+        </p:nvSpPr>
+        <p:spPr>
+          <a:xfrm>
+            <a:off x="7686903" y="5541264"/>
+            <a:ext cx="1685467" cy="146304"/>
+          </a:xfrm>
+          <a:prstGeom prst="rect">
+            <a:avLst/>
+          </a:prstGeom>
+          <a:noFill/>
+        </p:spPr>
+        <p:txBody>
+          <a:bodyPr wrap="square" anchor="ctr" lIns="0" tIns="0" rIns="0" bIns="0">
+            <a:noAutofit/>
+          </a:bodyPr>
+          <a:lstStyle/>
+          <a:p>
+            <a:pPr algn="l" latinLnBrk="0">
+              <a:lnSpc>
+                <a:spcPct val="100000"/>
+              </a:lnSpc>
+              <a:spcBef>
+                <a:spcPts val="0"/>
+              </a:spcBef>
+              <a:spcAft>
+                <a:spcPts val="0"/>
+              </a:spcAft>
+            </a:pPr>
+            <a:r>
+              <a:rPr sz="850" b="0">
+                <a:solidFill>
+                  <a:srgbClr val="8C96A1"/>
+                </a:solidFill>
+                <a:latin typeface="Consolas"/>
+                <a:ea typeface="Microsoft YaHei"/>
+                <a:cs typeface="Microsoft YaHei"/>
+              </a:rPr>
+              <a:t>__ → __ tok/s</a:t>
+            </a:r>
+          </a:p>
+        </p:txBody>
+      </p:sp>
+      <p:sp>
+        <p:nvSpPr>
+          <p:cNvPr id="102" name="Rectangle 101"/>
           <p:cNvSpPr/>
           <p:nvPr/>
         </p:nvSpPr>
         <p:spPr>
           <a:xfrm>
-            <a:off x="9139732" y="5084064"/>
-            <a:ext cx="2503322" cy="621792"/>
+            <a:off x="9664979" y="5084064"/>
+            <a:ext cx="1978075" cy="621792"/>
           </a:xfrm>
           <a:prstGeom prst="rect">
             <a:avLst/>
@@ -5671,14 +7538,14 @@
       </p:sp>
       <p:sp>
         <p:nvSpPr>
-          <p:cNvPr id="56" name="TextBox 55"/>
-          <p:cNvSpPr txBox="1"/>
-          <p:nvPr/>
-        </p:nvSpPr>
-        <p:spPr>
-          <a:xfrm>
-            <a:off x="9322612" y="5157216"/>
-            <a:ext cx="2137562" cy="201168"/>
+          <p:cNvPr id="103" name="TextBox 102"/>
+          <p:cNvSpPr txBox="1"/>
+          <p:nvPr/>
+        </p:nvSpPr>
+        <p:spPr>
+          <a:xfrm>
+            <a:off x="9811283" y="5120640"/>
+            <a:ext cx="1685467" cy="182880"/>
           </a:xfrm>
           <a:prstGeom prst="rect">
             <a:avLst/>
@@ -5707,25 +7574,25 @@
                 <a:solidFill>
                   <a:srgbClr val="C0612C"/>
                 </a:solidFill>
-                <a:latin typeface="Microsoft YaHei"/>
-                <a:ea typeface="Microsoft YaHei"/>
-                <a:cs typeface="Microsoft YaHei"/>
-              </a:rPr>
-              <a:t>交付</a:t>
-            </a:r>
-          </a:p>
-        </p:txBody>
-      </p:sp>
-      <p:sp>
-        <p:nvSpPr>
-          <p:cNvPr id="57" name="TextBox 56"/>
-          <p:cNvSpPr txBox="1"/>
-          <p:nvPr/>
-        </p:nvSpPr>
-        <p:spPr>
-          <a:xfrm>
-            <a:off x="9322612" y="5376672"/>
-            <a:ext cx="2137562" cy="274320"/>
+                <a:latin typeface="Consolas"/>
+                <a:ea typeface="Microsoft YaHei"/>
+                <a:cs typeface="Microsoft YaHei"/>
+              </a:rPr>
+              <a:t>c128</a:t>
+            </a:r>
+          </a:p>
+        </p:txBody>
+      </p:sp>
+      <p:sp>
+        <p:nvSpPr>
+          <p:cNvPr id="104" name="TextBox 103"/>
+          <p:cNvSpPr txBox="1"/>
+          <p:nvPr/>
+        </p:nvSpPr>
+        <p:spPr>
+          <a:xfrm>
+            <a:off x="9811283" y="5312664"/>
+            <a:ext cx="1685467" cy="219456"/>
           </a:xfrm>
           <a:prstGeom prst="rect">
             <a:avLst/>
@@ -5750,7 +7617,7 @@
               </a:spcAft>
             </a:pPr>
             <a:r>
-              <a:rPr sz="1600" b="1">
+              <a:rPr sz="1500" b="1">
                 <a:solidFill>
                   <a:srgbClr val="16202A"/>
                 </a:solidFill>
@@ -5758,36 +7625,61 @@
                 <a:ea typeface="Microsoft YaHei"/>
                 <a:cs typeface="Microsoft YaHei"/>
               </a:rPr>
-              <a:t>2</a:t>
-            </a:r>
-          </a:p>
-        </p:txBody>
-      </p:sp>
-      <p:cxnSp>
-        <p:nvCxnSpPr>
-          <p:cNvPr id="58" name="Connector 57"/>
-          <p:cNvCxnSpPr/>
-          <p:nvPr/>
-        </p:nvCxnSpPr>
-        <p:spPr>
-          <a:xfrm>
-            <a:off x="8810548" y="5394959"/>
-            <a:ext cx="237744" cy="0"/>
-          </a:xfrm>
-          <a:prstGeom prst="line">
-            <a:avLst/>
-          </a:prstGeom>
-          <a:ln w="15875">
-            <a:solidFill>
-              <a:srgbClr val="8C96A1"/>
-            </a:solidFill>
-            <a:tailEnd type="triangle" w="med" len="med"/>
-          </a:ln>
-        </p:spPr>
-      </p:cxnSp>
-      <p:sp>
-        <p:nvSpPr>
-          <p:cNvPr id="59" name="Rectangle 58"/>
+              <a:t>+37%</a:t>
+            </a:r>
+          </a:p>
+        </p:txBody>
+      </p:sp>
+      <p:sp>
+        <p:nvSpPr>
+          <p:cNvPr id="105" name="TextBox 104"/>
+          <p:cNvSpPr txBox="1"/>
+          <p:nvPr/>
+        </p:nvSpPr>
+        <p:spPr>
+          <a:xfrm>
+            <a:off x="9811283" y="5541264"/>
+            <a:ext cx="1685467" cy="146304"/>
+          </a:xfrm>
+          <a:prstGeom prst="rect">
+            <a:avLst/>
+          </a:prstGeom>
+          <a:noFill/>
+        </p:spPr>
+        <p:txBody>
+          <a:bodyPr wrap="square" anchor="ctr" lIns="0" tIns="0" rIns="0" bIns="0">
+            <a:noAutofit/>
+          </a:bodyPr>
+          <a:lstStyle/>
+          <a:p>
+            <a:pPr algn="l" latinLnBrk="0">
+              <a:lnSpc>
+                <a:spcPct val="100000"/>
+              </a:lnSpc>
+              <a:spcBef>
+                <a:spcPts val="0"/>
+              </a:spcBef>
+              <a:spcAft>
+                <a:spcPts val="0"/>
+              </a:spcAft>
+            </a:pPr>
+            <a:r>
+              <a:rPr sz="850" b="0">
+                <a:solidFill>
+                  <a:srgbClr val="66727F"/>
+                </a:solidFill>
+                <a:latin typeface="Consolas"/>
+                <a:ea typeface="Microsoft YaHei"/>
+                <a:cs typeface="Microsoft YaHei"/>
+              </a:rPr>
+              <a:t>1370 → 1883 tok/s</a:t>
+            </a:r>
+          </a:p>
+        </p:txBody>
+      </p:sp>
+      <p:sp>
+        <p:nvSpPr>
+          <p:cNvPr id="106" name="Rectangle 105"/>
           <p:cNvSpPr/>
           <p:nvPr/>
         </p:nvSpPr>
@@ -5816,7 +7708,7 @@
       </p:sp>
       <p:sp>
         <p:nvSpPr>
-          <p:cNvPr id="60" name="Rectangle 59"/>
+          <p:cNvPr id="107" name="Rectangle 106"/>
           <p:cNvSpPr/>
           <p:nvPr/>
         </p:nvSpPr>
@@ -5845,7 +7737,7 @@
       </p:sp>
       <p:sp>
         <p:nvSpPr>
-          <p:cNvPr id="61" name="TextBox 60"/>
+          <p:cNvPr id="108" name="TextBox 107"/>
           <p:cNvSpPr txBox="1"/>
           <p:nvPr/>
         </p:nvSpPr>
@@ -5896,14 +7788,14 @@
                 <a:ea typeface="Microsoft YaHei"/>
                 <a:cs typeface="Microsoft YaHei"/>
               </a:rPr>
-              <a:t>两个交付都在替换小核；闭源 grouped-GEMM 的旋钮调不动，占比不到 1% 的核再快也不接线</a:t>
-            </a:r>
-          </a:p>
-        </p:txBody>
-      </p:sp>
-      <p:sp>
-        <p:nvSpPr>
-          <p:cNvPr id="62" name="TextBox 61"/>
+              <a:t>待填：离上界最远、占比又大的是谁——五组候选是不是都打在它上面</a:t>
+            </a:r>
+          </a:p>
+        </p:txBody>
+      </p:sp>
+      <p:sp>
+        <p:nvSpPr>
+          <p:cNvPr id="109" name="TextBox 108"/>
           <p:cNvSpPr txBox="1"/>
           <p:nvPr/>
         </p:nvSpPr>
@@ -5935,6 +7827,17 @@
               </a:spcAft>
             </a:pPr>
             <a:r>
+              <a:rPr sz="1000" b="1">
+                <a:solidFill>
+                  <a:srgbClr val="C0612C"/>
+                </a:solidFill>
+                <a:latin typeface="Microsoft YaHei"/>
+                <a:ea typeface="Microsoft YaHei"/>
+                <a:cs typeface="Microsoft YaHei"/>
+              </a:rPr>
+              <a:t>合并版　</a:t>
+            </a:r>
+            <a:r>
               <a:rPr sz="1000" b="0">
                 <a:solidFill>
                   <a:srgbClr val="66727F"/>
@@ -5943,7 +7846,7 @@
                 <a:ea typeface="Microsoft YaHei"/>
                 <a:cs typeface="Microsoft YaHei"/>
               </a:rPr>
-              <a:t>C 列是内核或微基准读数，D 列是整步或端到端读数，两列口径不同、不能互相换算；表中全部为 M100 单卡 TP1</a:t>
+              <a:t>左图要一次 c128 decode 的 Trace 加每类 FLOP 与访存字节；右表沿用上一版；下排要吞吐全矩阵</a:t>
             </a:r>
           </a:p>
         </p:txBody>
@@ -5957,6 +7860,2883 @@
 </file>
 
 <file path=ppt/slides/slide2.xml><?xml version="1.0" encoding="utf-8"?>
+<p:sld xmlns:a="http://schemas.openxmlformats.org/drawingml/2006/main" xmlns:p="http://schemas.openxmlformats.org/presentationml/2006/main" xmlns:r="http://schemas.openxmlformats.org/officeDocument/2006/relationships">
+  <p:cSld>
+    <p:spTree>
+      <p:nvGrpSpPr>
+        <p:cNvPr id="1" name=""/>
+        <p:cNvGrpSpPr/>
+        <p:nvPr/>
+      </p:nvGrpSpPr>
+      <p:grpSpPr/>
+      <p:sp>
+        <p:nvSpPr>
+          <p:cNvPr id="2" name="TextBox 1"/>
+          <p:cNvSpPr txBox="1"/>
+          <p:nvPr/>
+        </p:nvSpPr>
+        <p:spPr>
+          <a:xfrm>
+            <a:off x="548640" y="384048"/>
+            <a:ext cx="8229600" cy="292608"/>
+          </a:xfrm>
+          <a:prstGeom prst="rect">
+            <a:avLst/>
+          </a:prstGeom>
+          <a:noFill/>
+        </p:spPr>
+        <p:txBody>
+          <a:bodyPr wrap="square" anchor="ctr" lIns="0" tIns="0" rIns="0" bIns="0">
+            <a:noAutofit/>
+          </a:bodyPr>
+          <a:lstStyle/>
+          <a:p>
+            <a:pPr algn="l" latinLnBrk="0">
+              <a:lnSpc>
+                <a:spcPct val="100000"/>
+              </a:lnSpc>
+              <a:spcBef>
+                <a:spcPts val="0"/>
+              </a:spcBef>
+              <a:spcAft>
+                <a:spcPts val="0"/>
+              </a:spcAft>
+            </a:pPr>
+            <a:r>
+              <a:rPr sz="1100" b="1">
+                <a:solidFill>
+                  <a:srgbClr val="C0612C"/>
+                </a:solidFill>
+                <a:latin typeface="Consolas"/>
+                <a:ea typeface="Microsoft YaHei"/>
+                <a:cs typeface="Microsoft YaHei"/>
+              </a:rPr>
+              <a:t>模型层 · 一次完整的候选迭代</a:t>
+            </a:r>
+          </a:p>
+        </p:txBody>
+      </p:sp>
+      <p:sp>
+        <p:nvSpPr>
+          <p:cNvPr id="3" name="TextBox 2"/>
+          <p:cNvSpPr txBox="1"/>
+          <p:nvPr/>
+        </p:nvSpPr>
+        <p:spPr>
+          <a:xfrm>
+            <a:off x="548640" y="731520"/>
+            <a:ext cx="11094415" cy="530352"/>
+          </a:xfrm>
+          <a:prstGeom prst="rect">
+            <a:avLst/>
+          </a:prstGeom>
+          <a:noFill/>
+        </p:spPr>
+        <p:txBody>
+          <a:bodyPr wrap="square" anchor="ctr" lIns="0" tIns="0" rIns="0" bIns="0">
+            <a:noAutofit/>
+          </a:bodyPr>
+          <a:lstStyle/>
+          <a:p>
+            <a:pPr algn="l" latinLnBrk="0">
+              <a:lnSpc>
+                <a:spcPct val="100000"/>
+              </a:lnSpc>
+              <a:spcBef>
+                <a:spcPts val="0"/>
+              </a:spcBef>
+              <a:spcAft>
+                <a:spcPts val="0"/>
+              </a:spcAft>
+            </a:pPr>
+            <a:r>
+              <a:rPr sz="2500" b="1">
+                <a:solidFill>
+                  <a:srgbClr val="16202A"/>
+                </a:solidFill>
+                <a:latin typeface="Microsoft YaHei"/>
+                <a:ea typeface="Microsoft YaHei"/>
+                <a:cs typeface="Microsoft YaHei"/>
+              </a:rPr>
+              <a:t>30B-A3B 单卡：10 个候选，5 个过三道门，峰值吞吐 +37%</a:t>
+            </a:r>
+          </a:p>
+        </p:txBody>
+      </p:sp>
+      <p:sp>
+        <p:nvSpPr>
+          <p:cNvPr id="4" name="TextBox 3"/>
+          <p:cNvSpPr txBox="1"/>
+          <p:nvPr/>
+        </p:nvSpPr>
+        <p:spPr>
+          <a:xfrm>
+            <a:off x="548640" y="1261872"/>
+            <a:ext cx="11094415" cy="329184"/>
+          </a:xfrm>
+          <a:prstGeom prst="rect">
+            <a:avLst/>
+          </a:prstGeom>
+          <a:noFill/>
+        </p:spPr>
+        <p:txBody>
+          <a:bodyPr wrap="square" anchor="ctr" lIns="0" tIns="0" rIns="0" bIns="0">
+            <a:noAutofit/>
+          </a:bodyPr>
+          <a:lstStyle/>
+          <a:p>
+            <a:pPr algn="l" latinLnBrk="0">
+              <a:lnSpc>
+                <a:spcPct val="100000"/>
+              </a:lnSpc>
+              <a:spcBef>
+                <a:spcPts val="0"/>
+              </a:spcBef>
+              <a:spcAft>
+                <a:spcPts val="0"/>
+              </a:spcAft>
+            </a:pPr>
+            <a:r>
+              <a:rPr sz="1300" b="0">
+                <a:solidFill>
+                  <a:srgbClr val="66727F"/>
+                </a:solidFill>
+                <a:latin typeface="Microsoft YaHei"/>
+                <a:ea typeface="Microsoft YaHei"/>
+                <a:cs typeface="Microsoft YaHei"/>
+              </a:rPr>
+              <a:t>判定全部来自 M100 真机——数值不对、更慢的当场挡掉，占比太小的不接线</a:t>
+            </a:r>
+          </a:p>
+        </p:txBody>
+      </p:sp>
+      <p:sp>
+        <p:nvSpPr>
+          <p:cNvPr id="5" name="Rectangle 4"/>
+          <p:cNvSpPr/>
+          <p:nvPr/>
+        </p:nvSpPr>
+        <p:spPr>
+          <a:xfrm>
+            <a:off x="548640" y="1627632"/>
+            <a:ext cx="11094415" cy="292608"/>
+          </a:xfrm>
+          <a:prstGeom prst="rect">
+            <a:avLst/>
+          </a:prstGeom>
+          <a:solidFill>
+            <a:srgbClr val="F6F7F9"/>
+          </a:solidFill>
+          <a:ln>
+            <a:noFill/>
+          </a:ln>
+        </p:spPr>
+        <p:txBody>
+          <a:bodyPr rtlCol="0" anchor="ctr"/>
+          <a:lstStyle/>
+          <a:p>
+            <a:pPr algn="ctr"/>
+          </a:p>
+        </p:txBody>
+      </p:sp>
+      <p:sp>
+        <p:nvSpPr>
+          <p:cNvPr id="6" name="TextBox 5"/>
+          <p:cNvSpPr txBox="1"/>
+          <p:nvPr/>
+        </p:nvSpPr>
+        <p:spPr>
+          <a:xfrm>
+            <a:off x="731520" y="1627632"/>
+            <a:ext cx="10728655" cy="292608"/>
+          </a:xfrm>
+          <a:prstGeom prst="rect">
+            <a:avLst/>
+          </a:prstGeom>
+          <a:noFill/>
+        </p:spPr>
+        <p:txBody>
+          <a:bodyPr wrap="square" anchor="ctr" lIns="0" tIns="0" rIns="0" bIns="0">
+            <a:noAutofit/>
+          </a:bodyPr>
+          <a:lstStyle/>
+          <a:p>
+            <a:pPr algn="l" latinLnBrk="0">
+              <a:lnSpc>
+                <a:spcPct val="100000"/>
+              </a:lnSpc>
+              <a:spcBef>
+                <a:spcPts val="0"/>
+              </a:spcBef>
+              <a:spcAft>
+                <a:spcPts val="0"/>
+              </a:spcAft>
+            </a:pPr>
+            <a:r>
+              <a:rPr sz="1000" b="1">
+                <a:solidFill>
+                  <a:srgbClr val="16202A"/>
+                </a:solidFill>
+                <a:latin typeface="Microsoft YaHei"/>
+                <a:ea typeface="Microsoft YaHei"/>
+                <a:cs typeface="Microsoft YaHei"/>
+              </a:rPr>
+              <a:t>冻结口径　</a:t>
+            </a:r>
+            <a:r>
+              <a:rPr sz="950" b="1">
+                <a:solidFill>
+                  <a:srgbClr val="C0612C"/>
+                </a:solidFill>
+                <a:latin typeface="Consolas"/>
+                <a:ea typeface="Microsoft YaHei"/>
+                <a:cs typeface="Microsoft YaHei"/>
+              </a:rPr>
+              <a:t>Qwen3-VL-30B-A3B-Instruct-channel-fp8</a:t>
+            </a:r>
+            <a:r>
+              <a:rPr sz="950" b="0">
+                <a:solidFill>
+                  <a:srgbClr val="35424F"/>
+                </a:solidFill>
+                <a:latin typeface="Microsoft YaHei"/>
+                <a:ea typeface="Microsoft YaHei"/>
+                <a:cs typeface="Microsoft YaHei"/>
+              </a:rPr>
+              <a:t>　128 专家 / top-8 · 48 层 · M100 单卡 TP1 · qsx8_lever2 env · 1K/1K · CG-on + overlap-on</a:t>
+            </a:r>
+            <a:r>
+              <a:rPr sz="1000" b="0">
+                <a:solidFill>
+                  <a:srgbClr val="66727F"/>
+                </a:solidFill>
+                <a:latin typeface="Microsoft YaHei"/>
+                <a:ea typeface="Microsoft YaHei"/>
+                <a:cs typeface="Microsoft YaHei"/>
+              </a:rPr>
+              <a:t>　主指标 持续输出 tok/s</a:t>
+            </a:r>
+          </a:p>
+        </p:txBody>
+      </p:sp>
+      <p:sp>
+        <p:nvSpPr>
+          <p:cNvPr id="7" name="Rectangle 6"/>
+          <p:cNvSpPr/>
+          <p:nvPr/>
+        </p:nvSpPr>
+        <p:spPr>
+          <a:xfrm>
+            <a:off x="548640" y="1975104"/>
+            <a:ext cx="2743200" cy="3017520"/>
+          </a:xfrm>
+          <a:prstGeom prst="rect">
+            <a:avLst/>
+          </a:prstGeom>
+          <a:solidFill>
+            <a:srgbClr val="F6F7F9"/>
+          </a:solidFill>
+          <a:ln>
+            <a:noFill/>
+          </a:ln>
+        </p:spPr>
+        <p:txBody>
+          <a:bodyPr rtlCol="0" anchor="ctr"/>
+          <a:lstStyle/>
+          <a:p>
+            <a:pPr algn="ctr"/>
+          </a:p>
+        </p:txBody>
+      </p:sp>
+      <p:sp>
+        <p:nvSpPr>
+          <p:cNvPr id="8" name="TextBox 7"/>
+          <p:cNvSpPr txBox="1"/>
+          <p:nvPr/>
+        </p:nvSpPr>
+        <p:spPr>
+          <a:xfrm>
+            <a:off x="749808" y="2048256"/>
+            <a:ext cx="2340864" cy="256032"/>
+          </a:xfrm>
+          <a:prstGeom prst="rect">
+            <a:avLst/>
+          </a:prstGeom>
+          <a:noFill/>
+        </p:spPr>
+        <p:txBody>
+          <a:bodyPr wrap="square" anchor="ctr" lIns="0" tIns="0" rIns="0" bIns="0">
+            <a:noAutofit/>
+          </a:bodyPr>
+          <a:lstStyle/>
+          <a:p>
+            <a:pPr algn="l" latinLnBrk="0">
+              <a:lnSpc>
+                <a:spcPct val="100000"/>
+              </a:lnSpc>
+              <a:spcBef>
+                <a:spcPts val="0"/>
+              </a:spcBef>
+              <a:spcAft>
+                <a:spcPts val="0"/>
+              </a:spcAft>
+            </a:pPr>
+            <a:r>
+              <a:rPr sz="1250" b="1">
+                <a:solidFill>
+                  <a:srgbClr val="16202A"/>
+                </a:solidFill>
+                <a:latin typeface="Microsoft YaHei"/>
+                <a:ea typeface="Microsoft YaHei"/>
+                <a:cs typeface="Microsoft YaHei"/>
+              </a:rPr>
+              <a:t>峰值吞吐</a:t>
+            </a:r>
+            <a:r>
+              <a:rPr sz="1000" b="0">
+                <a:solidFill>
+                  <a:srgbClr val="66727F"/>
+                </a:solidFill>
+                <a:latin typeface="Microsoft YaHei"/>
+                <a:ea typeface="Microsoft YaHei"/>
+                <a:cs typeface="Microsoft YaHei"/>
+              </a:rPr>
+              <a:t>　持续输出 tok/s</a:t>
+            </a:r>
+          </a:p>
+        </p:txBody>
+      </p:sp>
+      <p:sp>
+        <p:nvSpPr>
+          <p:cNvPr id="9" name="TextBox 8"/>
+          <p:cNvSpPr txBox="1"/>
+          <p:nvPr/>
+        </p:nvSpPr>
+        <p:spPr>
+          <a:xfrm>
+            <a:off x="749808" y="2340864"/>
+            <a:ext cx="2340864" cy="475488"/>
+          </a:xfrm>
+          <a:prstGeom prst="rect">
+            <a:avLst/>
+          </a:prstGeom>
+          <a:noFill/>
+        </p:spPr>
+        <p:txBody>
+          <a:bodyPr wrap="square" anchor="ctr" lIns="0" tIns="0" rIns="0" bIns="0">
+            <a:noAutofit/>
+          </a:bodyPr>
+          <a:lstStyle/>
+          <a:p>
+            <a:pPr algn="l" latinLnBrk="0">
+              <a:lnSpc>
+                <a:spcPct val="100000"/>
+              </a:lnSpc>
+              <a:spcBef>
+                <a:spcPts val="0"/>
+              </a:spcBef>
+              <a:spcAft>
+                <a:spcPts val="0"/>
+              </a:spcAft>
+            </a:pPr>
+            <a:r>
+              <a:rPr sz="2800" b="1">
+                <a:solidFill>
+                  <a:srgbClr val="3F63A8"/>
+                </a:solidFill>
+                <a:latin typeface="Arial"/>
+                <a:ea typeface="Microsoft YaHei"/>
+                <a:cs typeface="Microsoft YaHei"/>
+              </a:rPr>
+              <a:t>+37%</a:t>
+            </a:r>
+          </a:p>
+        </p:txBody>
+      </p:sp>
+      <p:sp>
+        <p:nvSpPr>
+          <p:cNvPr id="10" name="Rectangle 9"/>
+          <p:cNvSpPr/>
+          <p:nvPr/>
+        </p:nvSpPr>
+        <p:spPr>
+          <a:xfrm>
+            <a:off x="1005840" y="3416165"/>
+            <a:ext cx="640080" cy="918090"/>
+          </a:xfrm>
+          <a:prstGeom prst="rect">
+            <a:avLst/>
+          </a:prstGeom>
+          <a:solidFill>
+            <a:srgbClr val="C5CCD4"/>
+          </a:solidFill>
+          <a:ln>
+            <a:noFill/>
+          </a:ln>
+        </p:spPr>
+        <p:txBody>
+          <a:bodyPr rtlCol="0" anchor="ctr"/>
+          <a:lstStyle/>
+          <a:p>
+            <a:pPr algn="ctr"/>
+          </a:p>
+        </p:txBody>
+      </p:sp>
+      <p:sp>
+        <p:nvSpPr>
+          <p:cNvPr id="11" name="TextBox 10"/>
+          <p:cNvSpPr txBox="1"/>
+          <p:nvPr/>
+        </p:nvSpPr>
+        <p:spPr>
+          <a:xfrm>
+            <a:off x="777240" y="3160133"/>
+            <a:ext cx="1097280" cy="219456"/>
+          </a:xfrm>
+          <a:prstGeom prst="rect">
+            <a:avLst/>
+          </a:prstGeom>
+          <a:noFill/>
+        </p:spPr>
+        <p:txBody>
+          <a:bodyPr wrap="square" anchor="ctr" lIns="0" tIns="0" rIns="0" bIns="0">
+            <a:noAutofit/>
+          </a:bodyPr>
+          <a:lstStyle/>
+          <a:p>
+            <a:pPr algn="ctr" latinLnBrk="0">
+              <a:lnSpc>
+                <a:spcPct val="100000"/>
+              </a:lnSpc>
+              <a:spcBef>
+                <a:spcPts val="0"/>
+              </a:spcBef>
+              <a:spcAft>
+                <a:spcPts val="0"/>
+              </a:spcAft>
+            </a:pPr>
+            <a:r>
+              <a:rPr sz="1150" b="1">
+                <a:solidFill>
+                  <a:srgbClr val="16202A"/>
+                </a:solidFill>
+                <a:latin typeface="Arial"/>
+                <a:ea typeface="Microsoft YaHei"/>
+                <a:cs typeface="Microsoft YaHei"/>
+              </a:rPr>
+              <a:t>1370</a:t>
+            </a:r>
+          </a:p>
+        </p:txBody>
+      </p:sp>
+      <p:sp>
+        <p:nvSpPr>
+          <p:cNvPr id="12" name="TextBox 11"/>
+          <p:cNvSpPr txBox="1"/>
+          <p:nvPr/>
+        </p:nvSpPr>
+        <p:spPr>
+          <a:xfrm>
+            <a:off x="777240" y="4398264"/>
+            <a:ext cx="1097280" cy="201168"/>
+          </a:xfrm>
+          <a:prstGeom prst="rect">
+            <a:avLst/>
+          </a:prstGeom>
+          <a:noFill/>
+        </p:spPr>
+        <p:txBody>
+          <a:bodyPr wrap="square" anchor="ctr" lIns="0" tIns="0" rIns="0" bIns="0">
+            <a:noAutofit/>
+          </a:bodyPr>
+          <a:lstStyle/>
+          <a:p>
+            <a:pPr algn="ctr" latinLnBrk="0">
+              <a:lnSpc>
+                <a:spcPct val="100000"/>
+              </a:lnSpc>
+              <a:spcBef>
+                <a:spcPts val="0"/>
+              </a:spcBef>
+              <a:spcAft>
+                <a:spcPts val="0"/>
+              </a:spcAft>
+            </a:pPr>
+            <a:r>
+              <a:rPr sz="950" b="0">
+                <a:solidFill>
+                  <a:srgbClr val="35424F"/>
+                </a:solidFill>
+                <a:latin typeface="Microsoft YaHei"/>
+                <a:ea typeface="Microsoft YaHei"/>
+                <a:cs typeface="Microsoft YaHei"/>
+              </a:rPr>
+              <a:t>基线</a:t>
+            </a:r>
+          </a:p>
+        </p:txBody>
+      </p:sp>
+      <p:sp>
+        <p:nvSpPr>
+          <p:cNvPr id="13" name="Rectangle 12"/>
+          <p:cNvSpPr/>
+          <p:nvPr/>
+        </p:nvSpPr>
+        <p:spPr>
+          <a:xfrm>
+            <a:off x="2194560" y="3072384"/>
+            <a:ext cx="640080" cy="1261872"/>
+          </a:xfrm>
+          <a:prstGeom prst="rect">
+            <a:avLst/>
+          </a:prstGeom>
+          <a:solidFill>
+            <a:srgbClr val="3F63A8"/>
+          </a:solidFill>
+          <a:ln>
+            <a:noFill/>
+          </a:ln>
+        </p:spPr>
+        <p:txBody>
+          <a:bodyPr rtlCol="0" anchor="ctr"/>
+          <a:lstStyle/>
+          <a:p>
+            <a:pPr algn="ctr"/>
+          </a:p>
+        </p:txBody>
+      </p:sp>
+      <p:sp>
+        <p:nvSpPr>
+          <p:cNvPr id="14" name="TextBox 13"/>
+          <p:cNvSpPr txBox="1"/>
+          <p:nvPr/>
+        </p:nvSpPr>
+        <p:spPr>
+          <a:xfrm>
+            <a:off x="1965960" y="2816352"/>
+            <a:ext cx="1097280" cy="219456"/>
+          </a:xfrm>
+          <a:prstGeom prst="rect">
+            <a:avLst/>
+          </a:prstGeom>
+          <a:noFill/>
+        </p:spPr>
+        <p:txBody>
+          <a:bodyPr wrap="square" anchor="ctr" lIns="0" tIns="0" rIns="0" bIns="0">
+            <a:noAutofit/>
+          </a:bodyPr>
+          <a:lstStyle/>
+          <a:p>
+            <a:pPr algn="ctr" latinLnBrk="0">
+              <a:lnSpc>
+                <a:spcPct val="100000"/>
+              </a:lnSpc>
+              <a:spcBef>
+                <a:spcPts val="0"/>
+              </a:spcBef>
+              <a:spcAft>
+                <a:spcPts val="0"/>
+              </a:spcAft>
+            </a:pPr>
+            <a:r>
+              <a:rPr sz="1150" b="1">
+                <a:solidFill>
+                  <a:srgbClr val="16202A"/>
+                </a:solidFill>
+                <a:latin typeface="Arial"/>
+                <a:ea typeface="Microsoft YaHei"/>
+                <a:cs typeface="Microsoft YaHei"/>
+              </a:rPr>
+              <a:t>1883</a:t>
+            </a:r>
+          </a:p>
+        </p:txBody>
+      </p:sp>
+      <p:sp>
+        <p:nvSpPr>
+          <p:cNvPr id="15" name="TextBox 14"/>
+          <p:cNvSpPr txBox="1"/>
+          <p:nvPr/>
+        </p:nvSpPr>
+        <p:spPr>
+          <a:xfrm>
+            <a:off x="1965960" y="4398264"/>
+            <a:ext cx="1097280" cy="201168"/>
+          </a:xfrm>
+          <a:prstGeom prst="rect">
+            <a:avLst/>
+          </a:prstGeom>
+          <a:noFill/>
+        </p:spPr>
+        <p:txBody>
+          <a:bodyPr wrap="square" anchor="ctr" lIns="0" tIns="0" rIns="0" bIns="0">
+            <a:noAutofit/>
+          </a:bodyPr>
+          <a:lstStyle/>
+          <a:p>
+            <a:pPr algn="ctr" latinLnBrk="0">
+              <a:lnSpc>
+                <a:spcPct val="100000"/>
+              </a:lnSpc>
+              <a:spcBef>
+                <a:spcPts val="0"/>
+              </a:spcBef>
+              <a:spcAft>
+                <a:spcPts val="0"/>
+              </a:spcAft>
+            </a:pPr>
+            <a:r>
+              <a:rPr sz="950" b="0">
+                <a:solidFill>
+                  <a:srgbClr val="35424F"/>
+                </a:solidFill>
+                <a:latin typeface="Microsoft YaHei"/>
+                <a:ea typeface="Microsoft YaHei"/>
+                <a:cs typeface="Microsoft YaHei"/>
+              </a:rPr>
+              <a:t>交付</a:t>
+            </a:r>
+          </a:p>
+        </p:txBody>
+      </p:sp>
+      <p:cxnSp>
+        <p:nvCxnSpPr>
+          <p:cNvPr id="16" name="Connector 15"/>
+          <p:cNvCxnSpPr/>
+          <p:nvPr/>
+        </p:nvCxnSpPr>
+        <p:spPr>
+          <a:xfrm>
+            <a:off x="822959" y="4334256"/>
+            <a:ext cx="2194561" cy="0"/>
+          </a:xfrm>
+          <a:prstGeom prst="line">
+            <a:avLst/>
+          </a:prstGeom>
+          <a:ln w="12700">
+            <a:solidFill>
+              <a:srgbClr val="C5CCD4"/>
+            </a:solidFill>
+          </a:ln>
+        </p:spPr>
+      </p:cxnSp>
+      <p:sp>
+        <p:nvSpPr>
+          <p:cNvPr id="17" name="TextBox 16"/>
+          <p:cNvSpPr txBox="1"/>
+          <p:nvPr/>
+        </p:nvSpPr>
+        <p:spPr>
+          <a:xfrm>
+            <a:off x="749808" y="4681728"/>
+            <a:ext cx="2340864" cy="219456"/>
+          </a:xfrm>
+          <a:prstGeom prst="rect">
+            <a:avLst/>
+          </a:prstGeom>
+          <a:noFill/>
+        </p:spPr>
+        <p:txBody>
+          <a:bodyPr wrap="square" anchor="ctr" lIns="0" tIns="0" rIns="0" bIns="0">
+            <a:noAutofit/>
+          </a:bodyPr>
+          <a:lstStyle/>
+          <a:p>
+            <a:pPr algn="l" latinLnBrk="0">
+              <a:lnSpc>
+                <a:spcPct val="100000"/>
+              </a:lnSpc>
+              <a:spcBef>
+                <a:spcPts val="0"/>
+              </a:spcBef>
+              <a:spcAft>
+                <a:spcPts val="0"/>
+              </a:spcAft>
+            </a:pPr>
+            <a:r>
+              <a:rPr sz="900" b="0">
+                <a:solidFill>
+                  <a:srgbClr val="66727F"/>
+                </a:solidFill>
+                <a:latin typeface="Microsoft YaHei"/>
+                <a:ea typeface="Microsoft YaHei"/>
+                <a:cs typeface="Microsoft YaHei"/>
+              </a:rPr>
+              <a:t>基线峰值在 c128，1K/1K</a:t>
+            </a:r>
+          </a:p>
+        </p:txBody>
+      </p:sp>
+      <p:sp>
+        <p:nvSpPr>
+          <p:cNvPr id="18" name="Rectangle 17"/>
+          <p:cNvSpPr/>
+          <p:nvPr/>
+        </p:nvSpPr>
+        <p:spPr>
+          <a:xfrm>
+            <a:off x="3474720" y="1975104"/>
+            <a:ext cx="8168335" cy="3017520"/>
+          </a:xfrm>
+          <a:prstGeom prst="rect">
+            <a:avLst/>
+          </a:prstGeom>
+          <a:solidFill>
+            <a:srgbClr val="F6F7F9"/>
+          </a:solidFill>
+          <a:ln>
+            <a:noFill/>
+          </a:ln>
+        </p:spPr>
+        <p:txBody>
+          <a:bodyPr rtlCol="0" anchor="ctr"/>
+          <a:lstStyle/>
+          <a:p>
+            <a:pPr algn="ctr"/>
+          </a:p>
+        </p:txBody>
+      </p:sp>
+      <p:sp>
+        <p:nvSpPr>
+          <p:cNvPr id="19" name="TextBox 18"/>
+          <p:cNvSpPr txBox="1"/>
+          <p:nvPr/>
+        </p:nvSpPr>
+        <p:spPr>
+          <a:xfrm>
+            <a:off x="3675888" y="2048256"/>
+            <a:ext cx="7765999" cy="256032"/>
+          </a:xfrm>
+          <a:prstGeom prst="rect">
+            <a:avLst/>
+          </a:prstGeom>
+          <a:noFill/>
+        </p:spPr>
+        <p:txBody>
+          <a:bodyPr wrap="square" anchor="ctr" lIns="0" tIns="0" rIns="0" bIns="0">
+            <a:noAutofit/>
+          </a:bodyPr>
+          <a:lstStyle/>
+          <a:p>
+            <a:pPr algn="l" latinLnBrk="0">
+              <a:lnSpc>
+                <a:spcPct val="100000"/>
+              </a:lnSpc>
+              <a:spcBef>
+                <a:spcPts val="0"/>
+              </a:spcBef>
+              <a:spcAft>
+                <a:spcPts val="0"/>
+              </a:spcAft>
+            </a:pPr>
+            <a:r>
+              <a:rPr sz="1250" b="1">
+                <a:solidFill>
+                  <a:srgbClr val="16202A"/>
+                </a:solidFill>
+                <a:latin typeface="Microsoft YaHei"/>
+                <a:ea typeface="Microsoft YaHei"/>
+                <a:cs typeface="Microsoft YaHei"/>
+              </a:rPr>
+              <a:t>候选明细</a:t>
+            </a:r>
+            <a:r>
+              <a:rPr sz="1000" b="0">
+                <a:solidFill>
+                  <a:srgbClr val="66727F"/>
+                </a:solidFill>
+                <a:latin typeface="Microsoft YaHei"/>
+                <a:ea typeface="Microsoft YaHei"/>
+                <a:cs typeface="Microsoft YaHei"/>
+              </a:rPr>
+              <a:t>　五组，全部为单卡 TP1 口径</a:t>
+            </a:r>
+          </a:p>
+        </p:txBody>
+      </p:sp>
+      <p:sp>
+        <p:nvSpPr>
+          <p:cNvPr id="20" name="TextBox 19"/>
+          <p:cNvSpPr txBox="1"/>
+          <p:nvPr/>
+        </p:nvSpPr>
+        <p:spPr>
+          <a:xfrm>
+            <a:off x="3675888" y="2340864"/>
+            <a:ext cx="2651760" cy="219456"/>
+          </a:xfrm>
+          <a:prstGeom prst="rect">
+            <a:avLst/>
+          </a:prstGeom>
+          <a:noFill/>
+        </p:spPr>
+        <p:txBody>
+          <a:bodyPr wrap="square" anchor="ctr" lIns="0" tIns="0" rIns="0" bIns="0">
+            <a:noAutofit/>
+          </a:bodyPr>
+          <a:lstStyle/>
+          <a:p>
+            <a:pPr algn="l" latinLnBrk="0">
+              <a:lnSpc>
+                <a:spcPct val="100000"/>
+              </a:lnSpc>
+              <a:spcBef>
+                <a:spcPts val="0"/>
+              </a:spcBef>
+              <a:spcAft>
+                <a:spcPts val="0"/>
+              </a:spcAft>
+            </a:pPr>
+            <a:r>
+              <a:rPr sz="900" b="0">
+                <a:solidFill>
+                  <a:srgbClr val="8C96A1"/>
+                </a:solidFill>
+                <a:latin typeface="Microsoft YaHei"/>
+                <a:ea typeface="Microsoft YaHei"/>
+                <a:cs typeface="Microsoft YaHei"/>
+              </a:rPr>
+              <a:t>改动</a:t>
+            </a:r>
+          </a:p>
+        </p:txBody>
+      </p:sp>
+      <p:sp>
+        <p:nvSpPr>
+          <p:cNvPr id="21" name="TextBox 20"/>
+          <p:cNvSpPr txBox="1"/>
+          <p:nvPr/>
+        </p:nvSpPr>
+        <p:spPr>
+          <a:xfrm>
+            <a:off x="6419088" y="2340864"/>
+            <a:ext cx="2002536" cy="219456"/>
+          </a:xfrm>
+          <a:prstGeom prst="rect">
+            <a:avLst/>
+          </a:prstGeom>
+          <a:noFill/>
+        </p:spPr>
+        <p:txBody>
+          <a:bodyPr wrap="square" anchor="ctr" lIns="0" tIns="0" rIns="0" bIns="0">
+            <a:noAutofit/>
+          </a:bodyPr>
+          <a:lstStyle/>
+          <a:p>
+            <a:pPr algn="l" latinLnBrk="0">
+              <a:lnSpc>
+                <a:spcPct val="100000"/>
+              </a:lnSpc>
+              <a:spcBef>
+                <a:spcPts val="0"/>
+              </a:spcBef>
+              <a:spcAft>
+                <a:spcPts val="0"/>
+              </a:spcAft>
+            </a:pPr>
+            <a:r>
+              <a:rPr sz="900" b="0">
+                <a:solidFill>
+                  <a:srgbClr val="8C96A1"/>
+                </a:solidFill>
+                <a:latin typeface="Microsoft YaHei"/>
+                <a:ea typeface="Microsoft YaHei"/>
+                <a:cs typeface="Microsoft YaHei"/>
+              </a:rPr>
+              <a:t>C 筛选</a:t>
+            </a:r>
+          </a:p>
+        </p:txBody>
+      </p:sp>
+      <p:sp>
+        <p:nvSpPr>
+          <p:cNvPr id="22" name="TextBox 21"/>
+          <p:cNvSpPr txBox="1"/>
+          <p:nvPr/>
+        </p:nvSpPr>
+        <p:spPr>
+          <a:xfrm>
+            <a:off x="8513064" y="2340864"/>
+            <a:ext cx="1280160" cy="219456"/>
+          </a:xfrm>
+          <a:prstGeom prst="rect">
+            <a:avLst/>
+          </a:prstGeom>
+          <a:noFill/>
+        </p:spPr>
+        <p:txBody>
+          <a:bodyPr wrap="square" anchor="ctr" lIns="0" tIns="0" rIns="0" bIns="0">
+            <a:noAutofit/>
+          </a:bodyPr>
+          <a:lstStyle/>
+          <a:p>
+            <a:pPr algn="l" latinLnBrk="0">
+              <a:lnSpc>
+                <a:spcPct val="100000"/>
+              </a:lnSpc>
+              <a:spcBef>
+                <a:spcPts val="0"/>
+              </a:spcBef>
+              <a:spcAft>
+                <a:spcPts val="0"/>
+              </a:spcAft>
+            </a:pPr>
+            <a:r>
+              <a:rPr sz="900" b="0">
+                <a:solidFill>
+                  <a:srgbClr val="8C96A1"/>
+                </a:solidFill>
+                <a:latin typeface="Microsoft YaHei"/>
+                <a:ea typeface="Microsoft YaHei"/>
+                <a:cs typeface="Microsoft YaHei"/>
+              </a:rPr>
+              <a:t>D 复验</a:t>
+            </a:r>
+          </a:p>
+        </p:txBody>
+      </p:sp>
+      <p:sp>
+        <p:nvSpPr>
+          <p:cNvPr id="23" name="TextBox 22"/>
+          <p:cNvSpPr txBox="1"/>
+          <p:nvPr/>
+        </p:nvSpPr>
+        <p:spPr>
+          <a:xfrm>
+            <a:off x="9884664" y="2340864"/>
+            <a:ext cx="1554480" cy="219456"/>
+          </a:xfrm>
+          <a:prstGeom prst="rect">
+            <a:avLst/>
+          </a:prstGeom>
+          <a:noFill/>
+        </p:spPr>
+        <p:txBody>
+          <a:bodyPr wrap="square" anchor="ctr" lIns="0" tIns="0" rIns="0" bIns="0">
+            <a:noAutofit/>
+          </a:bodyPr>
+          <a:lstStyle/>
+          <a:p>
+            <a:pPr algn="l" latinLnBrk="0">
+              <a:lnSpc>
+                <a:spcPct val="100000"/>
+              </a:lnSpc>
+              <a:spcBef>
+                <a:spcPts val="0"/>
+              </a:spcBef>
+              <a:spcAft>
+                <a:spcPts val="0"/>
+              </a:spcAft>
+            </a:pPr>
+            <a:r>
+              <a:rPr sz="900" b="0">
+                <a:solidFill>
+                  <a:srgbClr val="8C96A1"/>
+                </a:solidFill>
+                <a:latin typeface="Microsoft YaHei"/>
+                <a:ea typeface="Microsoft YaHei"/>
+                <a:cs typeface="Microsoft YaHei"/>
+              </a:rPr>
+              <a:t>结论</a:t>
+            </a:r>
+          </a:p>
+        </p:txBody>
+      </p:sp>
+      <p:cxnSp>
+        <p:nvCxnSpPr>
+          <p:cNvPr id="24" name="Connector 23"/>
+          <p:cNvCxnSpPr/>
+          <p:nvPr/>
+        </p:nvCxnSpPr>
+        <p:spPr>
+          <a:xfrm>
+            <a:off x="3675888" y="2578608"/>
+            <a:ext cx="7765999" cy="0"/>
+          </a:xfrm>
+          <a:prstGeom prst="line">
+            <a:avLst/>
+          </a:prstGeom>
+          <a:ln w="9525">
+            <a:solidFill>
+              <a:srgbClr val="DDE2E7"/>
+            </a:solidFill>
+          </a:ln>
+        </p:spPr>
+      </p:cxnSp>
+      <p:sp>
+        <p:nvSpPr>
+          <p:cNvPr id="25" name="Rectangle 24"/>
+          <p:cNvSpPr/>
+          <p:nvPr/>
+        </p:nvSpPr>
+        <p:spPr>
+          <a:xfrm>
+            <a:off x="3602736" y="2633472"/>
+            <a:ext cx="7912303" cy="566928"/>
+          </a:xfrm>
+          <a:prstGeom prst="rect">
+            <a:avLst/>
+          </a:prstGeom>
+          <a:solidFill>
+            <a:srgbClr val="F8EADF"/>
+          </a:solidFill>
+          <a:ln>
+            <a:noFill/>
+          </a:ln>
+        </p:spPr>
+        <p:txBody>
+          <a:bodyPr rtlCol="0" anchor="ctr"/>
+          <a:lstStyle/>
+          <a:p>
+            <a:pPr algn="ctr"/>
+          </a:p>
+        </p:txBody>
+      </p:sp>
+      <p:sp>
+        <p:nvSpPr>
+          <p:cNvPr id="26" name="TextBox 25"/>
+          <p:cNvSpPr txBox="1"/>
+          <p:nvPr/>
+        </p:nvSpPr>
+        <p:spPr>
+          <a:xfrm>
+            <a:off x="3675888" y="2633472"/>
+            <a:ext cx="2651760" cy="566928"/>
+          </a:xfrm>
+          <a:prstGeom prst="rect">
+            <a:avLst/>
+          </a:prstGeom>
+          <a:noFill/>
+        </p:spPr>
+        <p:txBody>
+          <a:bodyPr wrap="square" anchor="ctr" lIns="0" tIns="0" rIns="0" bIns="0">
+            <a:noAutofit/>
+          </a:bodyPr>
+          <a:lstStyle/>
+          <a:p>
+            <a:pPr algn="l" latinLnBrk="0">
+              <a:lnSpc>
+                <a:spcPct val="100000"/>
+              </a:lnSpc>
+              <a:spcBef>
+                <a:spcPts val="0"/>
+              </a:spcBef>
+              <a:spcAft>
+                <a:spcPts val="0"/>
+              </a:spcAft>
+            </a:pPr>
+            <a:r>
+              <a:rPr sz="950" b="0">
+                <a:solidFill>
+                  <a:srgbClr val="16202A"/>
+                </a:solidFill>
+                <a:latin typeface="Microsoft YaHei"/>
+                <a:ea typeface="Microsoft YaHei"/>
+                <a:cs typeface="Microsoft YaHei"/>
+              </a:rPr>
+              <a:t>融合 swiglu + 动态量化</a:t>
+            </a:r>
+          </a:p>
+          <a:p>
+            <a:pPr algn="l" latinLnBrk="0">
+              <a:lnSpc>
+                <a:spcPct val="100000"/>
+              </a:lnSpc>
+              <a:spcBef>
+                <a:spcPts val="0"/>
+              </a:spcBef>
+              <a:spcAft>
+                <a:spcPts val="0"/>
+              </a:spcAft>
+            </a:pPr>
+            <a:r>
+              <a:rPr sz="950" b="0">
+                <a:solidFill>
+                  <a:srgbClr val="16202A"/>
+                </a:solidFill>
+                <a:latin typeface="Microsoft YaHei"/>
+                <a:ea typeface="Microsoft YaHei"/>
+                <a:cs typeface="Microsoft YaHei"/>
+              </a:rPr>
+              <a:t>替掉散点 elementwise 3.08 ms</a:t>
+            </a:r>
+          </a:p>
+          <a:p>
+            <a:pPr algn="l" latinLnBrk="0">
+              <a:lnSpc>
+                <a:spcPct val="100000"/>
+              </a:lnSpc>
+              <a:spcBef>
+                <a:spcPts val="0"/>
+              </a:spcBef>
+              <a:spcAft>
+                <a:spcPts val="0"/>
+              </a:spcAft>
+            </a:pPr>
+            <a:r>
+              <a:rPr sz="950" b="0">
+                <a:solidFill>
+                  <a:srgbClr val="16202A"/>
+                </a:solidFill>
+                <a:latin typeface="Microsoft YaHei"/>
+                <a:ea typeface="Microsoft YaHei"/>
+                <a:cs typeface="Microsoft YaHei"/>
+              </a:rPr>
+              <a:t>+ per-token quant 0.43 ms</a:t>
+            </a:r>
+          </a:p>
+        </p:txBody>
+      </p:sp>
+      <p:sp>
+        <p:nvSpPr>
+          <p:cNvPr id="27" name="TextBox 26"/>
+          <p:cNvSpPr txBox="1"/>
+          <p:nvPr/>
+        </p:nvSpPr>
+        <p:spPr>
+          <a:xfrm>
+            <a:off x="6419088" y="2633472"/>
+            <a:ext cx="2002536" cy="566928"/>
+          </a:xfrm>
+          <a:prstGeom prst="rect">
+            <a:avLst/>
+          </a:prstGeom>
+          <a:noFill/>
+        </p:spPr>
+        <p:txBody>
+          <a:bodyPr wrap="square" anchor="ctr" lIns="0" tIns="0" rIns="0" bIns="0">
+            <a:noAutofit/>
+          </a:bodyPr>
+          <a:lstStyle/>
+          <a:p>
+            <a:pPr algn="l" latinLnBrk="0">
+              <a:lnSpc>
+                <a:spcPct val="100000"/>
+              </a:lnSpc>
+              <a:spcBef>
+                <a:spcPts val="0"/>
+              </a:spcBef>
+              <a:spcAft>
+                <a:spcPts val="0"/>
+              </a:spcAft>
+            </a:pPr>
+            <a:r>
+              <a:rPr sz="950" b="0">
+                <a:solidFill>
+                  <a:srgbClr val="35424F"/>
+                </a:solidFill>
+                <a:latin typeface="Microsoft YaHei"/>
+                <a:ea typeface="Microsoft YaHei"/>
+                <a:cs typeface="Microsoft YaHei"/>
+              </a:rPr>
+              <a:t>单核 1.75 ms/步</a:t>
+            </a:r>
+          </a:p>
+        </p:txBody>
+      </p:sp>
+      <p:sp>
+        <p:nvSpPr>
+          <p:cNvPr id="28" name="TextBox 27"/>
+          <p:cNvSpPr txBox="1"/>
+          <p:nvPr/>
+        </p:nvSpPr>
+        <p:spPr>
+          <a:xfrm>
+            <a:off x="8513064" y="2633472"/>
+            <a:ext cx="1280160" cy="566928"/>
+          </a:xfrm>
+          <a:prstGeom prst="rect">
+            <a:avLst/>
+          </a:prstGeom>
+          <a:noFill/>
+        </p:spPr>
+        <p:txBody>
+          <a:bodyPr wrap="square" anchor="ctr" lIns="0" tIns="0" rIns="0" bIns="0">
+            <a:noAutofit/>
+          </a:bodyPr>
+          <a:lstStyle/>
+          <a:p>
+            <a:pPr algn="l" latinLnBrk="0">
+              <a:lnSpc>
+                <a:spcPct val="100000"/>
+              </a:lnSpc>
+              <a:spcBef>
+                <a:spcPts val="0"/>
+              </a:spcBef>
+              <a:spcAft>
+                <a:spcPts val="0"/>
+              </a:spcAft>
+            </a:pPr>
+            <a:r>
+              <a:rPr sz="950" b="0">
+                <a:solidFill>
+                  <a:srgbClr val="35424F"/>
+                </a:solidFill>
+                <a:latin typeface="Microsoft YaHei"/>
+                <a:ea typeface="Microsoft YaHei"/>
+                <a:cs typeface="Microsoft YaHei"/>
+              </a:rPr>
+              <a:t>device 单步时间</a:t>
+            </a:r>
+          </a:p>
+          <a:p>
+            <a:pPr algn="l" latinLnBrk="0">
+              <a:lnSpc>
+                <a:spcPct val="100000"/>
+              </a:lnSpc>
+              <a:spcBef>
+                <a:spcPts val="0"/>
+              </a:spcBef>
+              <a:spcAft>
+                <a:spcPts val="0"/>
+              </a:spcAft>
+            </a:pPr>
+            <a:r>
+              <a:rPr sz="950" b="0">
+                <a:solidFill>
+                  <a:srgbClr val="35424F"/>
+                </a:solidFill>
+                <a:latin typeface="Microsoft YaHei"/>
+                <a:ea typeface="Microsoft YaHei"/>
+                <a:cs typeface="Microsoft YaHei"/>
+              </a:rPr>
+              <a:t>24.7 → 22.2 ms</a:t>
+            </a:r>
+          </a:p>
+        </p:txBody>
+      </p:sp>
+      <p:sp>
+        <p:nvSpPr>
+          <p:cNvPr id="29" name="TextBox 28"/>
+          <p:cNvSpPr txBox="1"/>
+          <p:nvPr/>
+        </p:nvSpPr>
+        <p:spPr>
+          <a:xfrm>
+            <a:off x="9884664" y="2633472"/>
+            <a:ext cx="1554480" cy="566928"/>
+          </a:xfrm>
+          <a:prstGeom prst="rect">
+            <a:avLst/>
+          </a:prstGeom>
+          <a:noFill/>
+        </p:spPr>
+        <p:txBody>
+          <a:bodyPr wrap="square" anchor="ctr" lIns="0" tIns="0" rIns="0" bIns="0">
+            <a:noAutofit/>
+          </a:bodyPr>
+          <a:lstStyle/>
+          <a:p>
+            <a:pPr algn="l" latinLnBrk="0">
+              <a:lnSpc>
+                <a:spcPct val="100000"/>
+              </a:lnSpc>
+              <a:spcBef>
+                <a:spcPts val="0"/>
+              </a:spcBef>
+              <a:spcAft>
+                <a:spcPts val="0"/>
+              </a:spcAft>
+            </a:pPr>
+            <a:r>
+              <a:rPr sz="950" b="1">
+                <a:solidFill>
+                  <a:srgbClr val="3F63A8"/>
+                </a:solidFill>
+                <a:latin typeface="Microsoft YaHei"/>
+                <a:ea typeface="Microsoft YaHei"/>
+                <a:cs typeface="Microsoft YaHei"/>
+              </a:rPr>
+              <a:t>交付，全矩阵 +22~38%</a:t>
+            </a:r>
+          </a:p>
+        </p:txBody>
+      </p:sp>
+      <p:sp>
+        <p:nvSpPr>
+          <p:cNvPr id="30" name="Rectangle 29"/>
+          <p:cNvSpPr/>
+          <p:nvPr/>
+        </p:nvSpPr>
+        <p:spPr>
+          <a:xfrm>
+            <a:off x="3602736" y="3236976"/>
+            <a:ext cx="7912303" cy="420624"/>
+          </a:xfrm>
+          <a:prstGeom prst="rect">
+            <a:avLst/>
+          </a:prstGeom>
+          <a:solidFill>
+            <a:srgbClr val="F8EADF"/>
+          </a:solidFill>
+          <a:ln>
+            <a:noFill/>
+          </a:ln>
+        </p:spPr>
+        <p:txBody>
+          <a:bodyPr rtlCol="0" anchor="ctr"/>
+          <a:lstStyle/>
+          <a:p>
+            <a:pPr algn="ctr"/>
+          </a:p>
+        </p:txBody>
+      </p:sp>
+      <p:sp>
+        <p:nvSpPr>
+          <p:cNvPr id="31" name="TextBox 30"/>
+          <p:cNvSpPr txBox="1"/>
+          <p:nvPr/>
+        </p:nvSpPr>
+        <p:spPr>
+          <a:xfrm>
+            <a:off x="3675888" y="3236976"/>
+            <a:ext cx="2651760" cy="420624"/>
+          </a:xfrm>
+          <a:prstGeom prst="rect">
+            <a:avLst/>
+          </a:prstGeom>
+          <a:noFill/>
+        </p:spPr>
+        <p:txBody>
+          <a:bodyPr wrap="square" anchor="ctr" lIns="0" tIns="0" rIns="0" bIns="0">
+            <a:noAutofit/>
+          </a:bodyPr>
+          <a:lstStyle/>
+          <a:p>
+            <a:pPr algn="l" latinLnBrk="0">
+              <a:lnSpc>
+                <a:spcPct val="100000"/>
+              </a:lnSpc>
+              <a:spcBef>
+                <a:spcPts val="0"/>
+              </a:spcBef>
+              <a:spcAft>
+                <a:spcPts val="0"/>
+              </a:spcAft>
+            </a:pPr>
+            <a:r>
+              <a:rPr sz="950" b="0">
+                <a:solidFill>
+                  <a:srgbClr val="16202A"/>
+                </a:solidFill>
+                <a:latin typeface="Microsoft YaHei"/>
+                <a:ea typeface="Microsoft YaHei"/>
+                <a:cs typeface="Microsoft YaHei"/>
+              </a:rPr>
+              <a:t>量化 + shuffle 换 SDNN 恒定核</a:t>
+            </a:r>
+          </a:p>
+          <a:p>
+            <a:pPr algn="l" latinLnBrk="0">
+              <a:lnSpc>
+                <a:spcPct val="100000"/>
+              </a:lnSpc>
+              <a:spcBef>
+                <a:spcPts val="0"/>
+              </a:spcBef>
+              <a:spcAft>
+                <a:spcPts val="0"/>
+              </a:spcAft>
+            </a:pPr>
+            <a:r>
+              <a:rPr sz="950" b="0">
+                <a:solidFill>
+                  <a:srgbClr val="16202A"/>
+                </a:solidFill>
+                <a:latin typeface="Microsoft YaHei"/>
+                <a:ea typeface="Microsoft YaHei"/>
+                <a:cs typeface="Microsoft YaHei"/>
+              </a:rPr>
+              <a:t>现用核随 rows×hidden 从 20 涨到 141 µs</a:t>
+            </a:r>
+          </a:p>
+        </p:txBody>
+      </p:sp>
+      <p:sp>
+        <p:nvSpPr>
+          <p:cNvPr id="32" name="TextBox 31"/>
+          <p:cNvSpPr txBox="1"/>
+          <p:nvPr/>
+        </p:nvSpPr>
+        <p:spPr>
+          <a:xfrm>
+            <a:off x="6419088" y="3236976"/>
+            <a:ext cx="2002536" cy="420624"/>
+          </a:xfrm>
+          <a:prstGeom prst="rect">
+            <a:avLst/>
+          </a:prstGeom>
+          <a:noFill/>
+        </p:spPr>
+        <p:txBody>
+          <a:bodyPr wrap="square" anchor="ctr" lIns="0" tIns="0" rIns="0" bIns="0">
+            <a:noAutofit/>
+          </a:bodyPr>
+          <a:lstStyle/>
+          <a:p>
+            <a:pPr algn="l" latinLnBrk="0">
+              <a:lnSpc>
+                <a:spcPct val="100000"/>
+              </a:lnSpc>
+              <a:spcBef>
+                <a:spcPts val="0"/>
+              </a:spcBef>
+              <a:spcAft>
+                <a:spcPts val="0"/>
+              </a:spcAft>
+            </a:pPr>
+            <a:r>
+              <a:rPr sz="950" b="0">
+                <a:solidFill>
+                  <a:srgbClr val="35424F"/>
+                </a:solidFill>
+                <a:latin typeface="Microsoft YaHei"/>
+                <a:ea typeface="Microsoft YaHei"/>
+                <a:cs typeface="Microsoft YaHei"/>
+              </a:rPr>
+              <a:t>微基准 c128 5.43×，cos = 1.0</a:t>
+            </a:r>
+          </a:p>
+        </p:txBody>
+      </p:sp>
+      <p:sp>
+        <p:nvSpPr>
+          <p:cNvPr id="33" name="TextBox 32"/>
+          <p:cNvSpPr txBox="1"/>
+          <p:nvPr/>
+        </p:nvSpPr>
+        <p:spPr>
+          <a:xfrm>
+            <a:off x="8513064" y="3236976"/>
+            <a:ext cx="1280160" cy="420624"/>
+          </a:xfrm>
+          <a:prstGeom prst="rect">
+            <a:avLst/>
+          </a:prstGeom>
+          <a:noFill/>
+        </p:spPr>
+        <p:txBody>
+          <a:bodyPr wrap="square" anchor="ctr" lIns="0" tIns="0" rIns="0" bIns="0">
+            <a:noAutofit/>
+          </a:bodyPr>
+          <a:lstStyle/>
+          <a:p>
+            <a:pPr algn="l" latinLnBrk="0">
+              <a:lnSpc>
+                <a:spcPct val="100000"/>
+              </a:lnSpc>
+              <a:spcBef>
+                <a:spcPts val="0"/>
+              </a:spcBef>
+              <a:spcAft>
+                <a:spcPts val="0"/>
+              </a:spcAft>
+            </a:pPr>
+            <a:r>
+              <a:rPr sz="950" b="0">
+                <a:solidFill>
+                  <a:srgbClr val="35424F"/>
+                </a:solidFill>
+                <a:latin typeface="Microsoft YaHei"/>
+                <a:ea typeface="Microsoft YaHei"/>
+                <a:cs typeface="Microsoft YaHei"/>
+              </a:rPr>
+              <a:t>E2E 吞吐 +3%</a:t>
+            </a:r>
+          </a:p>
+          <a:p>
+            <a:pPr algn="l" latinLnBrk="0">
+              <a:lnSpc>
+                <a:spcPct val="100000"/>
+              </a:lnSpc>
+              <a:spcBef>
+                <a:spcPts val="0"/>
+              </a:spcBef>
+              <a:spcAft>
+                <a:spcPts val="0"/>
+              </a:spcAft>
+            </a:pPr>
+            <a:r>
+              <a:rPr sz="950" b="0">
+                <a:solidFill>
+                  <a:srgbClr val="35424F"/>
+                </a:solidFill>
+                <a:latin typeface="Microsoft YaHei"/>
+                <a:ea typeface="Microsoft YaHei"/>
+                <a:cs typeface="Microsoft YaHei"/>
+              </a:rPr>
+              <a:t>TPOT −3.4%</a:t>
+            </a:r>
+          </a:p>
+        </p:txBody>
+      </p:sp>
+      <p:sp>
+        <p:nvSpPr>
+          <p:cNvPr id="34" name="TextBox 33"/>
+          <p:cNvSpPr txBox="1"/>
+          <p:nvPr/>
+        </p:nvSpPr>
+        <p:spPr>
+          <a:xfrm>
+            <a:off x="9884664" y="3236976"/>
+            <a:ext cx="1554480" cy="420624"/>
+          </a:xfrm>
+          <a:prstGeom prst="rect">
+            <a:avLst/>
+          </a:prstGeom>
+          <a:noFill/>
+        </p:spPr>
+        <p:txBody>
+          <a:bodyPr wrap="square" anchor="ctr" lIns="0" tIns="0" rIns="0" bIns="0">
+            <a:noAutofit/>
+          </a:bodyPr>
+          <a:lstStyle/>
+          <a:p>
+            <a:pPr algn="l" latinLnBrk="0">
+              <a:lnSpc>
+                <a:spcPct val="100000"/>
+              </a:lnSpc>
+              <a:spcBef>
+                <a:spcPts val="0"/>
+              </a:spcBef>
+              <a:spcAft>
+                <a:spcPts val="0"/>
+              </a:spcAft>
+            </a:pPr>
+            <a:r>
+              <a:rPr sz="950" b="1">
+                <a:solidFill>
+                  <a:srgbClr val="3F63A8"/>
+                </a:solidFill>
+                <a:latin typeface="Microsoft YaHei"/>
+                <a:ea typeface="Microsoft YaHei"/>
+                <a:cs typeface="Microsoft YaHei"/>
+              </a:rPr>
+              <a:t>交付</a:t>
+            </a:r>
+          </a:p>
+        </p:txBody>
+      </p:sp>
+      <p:sp>
+        <p:nvSpPr>
+          <p:cNvPr id="35" name="TextBox 34"/>
+          <p:cNvSpPr txBox="1"/>
+          <p:nvPr/>
+        </p:nvSpPr>
+        <p:spPr>
+          <a:xfrm>
+            <a:off x="3675888" y="3694176"/>
+            <a:ext cx="2651760" cy="566928"/>
+          </a:xfrm>
+          <a:prstGeom prst="rect">
+            <a:avLst/>
+          </a:prstGeom>
+          <a:noFill/>
+        </p:spPr>
+        <p:txBody>
+          <a:bodyPr wrap="square" anchor="ctr" lIns="0" tIns="0" rIns="0" bIns="0">
+            <a:noAutofit/>
+          </a:bodyPr>
+          <a:lstStyle/>
+          <a:p>
+            <a:pPr algn="l" latinLnBrk="0">
+              <a:lnSpc>
+                <a:spcPct val="100000"/>
+              </a:lnSpc>
+              <a:spcBef>
+                <a:spcPts val="0"/>
+              </a:spcBef>
+              <a:spcAft>
+                <a:spcPts val="0"/>
+              </a:spcAft>
+            </a:pPr>
+            <a:r>
+              <a:rPr sz="950" b="0">
+                <a:solidFill>
+                  <a:srgbClr val="35424F"/>
+                </a:solidFill>
+                <a:latin typeface="Microsoft YaHei"/>
+                <a:ea typeface="Microsoft YaHei"/>
+                <a:cs typeface="Microsoft YaHei"/>
+              </a:rPr>
+              <a:t>grouped-GEMM group-mode 四个旋钮</a:t>
+            </a:r>
+          </a:p>
+        </p:txBody>
+      </p:sp>
+      <p:sp>
+        <p:nvSpPr>
+          <p:cNvPr id="36" name="TextBox 35"/>
+          <p:cNvSpPr txBox="1"/>
+          <p:nvPr/>
+        </p:nvSpPr>
+        <p:spPr>
+          <a:xfrm>
+            <a:off x="6419088" y="3694176"/>
+            <a:ext cx="2002536" cy="566928"/>
+          </a:xfrm>
+          <a:prstGeom prst="rect">
+            <a:avLst/>
+          </a:prstGeom>
+          <a:noFill/>
+        </p:spPr>
+        <p:txBody>
+          <a:bodyPr wrap="square" anchor="ctr" lIns="0" tIns="0" rIns="0" bIns="0">
+            <a:noAutofit/>
+          </a:bodyPr>
+          <a:lstStyle/>
+          <a:p>
+            <a:pPr algn="l" latinLnBrk="0">
+              <a:lnSpc>
+                <a:spcPct val="100000"/>
+              </a:lnSpc>
+              <a:spcBef>
+                <a:spcPts val="0"/>
+              </a:spcBef>
+              <a:spcAft>
+                <a:spcPts val="0"/>
+              </a:spcAft>
+            </a:pPr>
+            <a:r>
+              <a:rPr sz="950" b="0">
+                <a:solidFill>
+                  <a:srgbClr val="35424F"/>
+                </a:solidFill>
+                <a:latin typeface="Microsoft YaHei"/>
+                <a:ea typeface="Microsoft YaHei"/>
+                <a:cs typeface="Microsoft YaHei"/>
+              </a:rPr>
+              <a:t>四模式完全同速</a:t>
+            </a:r>
+          </a:p>
+          <a:p>
+            <a:pPr algn="l" latinLnBrk="0">
+              <a:lnSpc>
+                <a:spcPct val="100000"/>
+              </a:lnSpc>
+              <a:spcBef>
+                <a:spcPts val="0"/>
+              </a:spcBef>
+              <a:spcAft>
+                <a:spcPts val="0"/>
+              </a:spcAft>
+            </a:pPr>
+            <a:r>
+              <a:rPr sz="950" b="0">
+                <a:solidFill>
+                  <a:srgbClr val="35424F"/>
+                </a:solidFill>
+                <a:latin typeface="Microsoft YaHei"/>
+                <a:ea typeface="Microsoft YaHei"/>
+                <a:cs typeface="Microsoft YaHei"/>
+              </a:rPr>
+              <a:t>force_nogroup −20%</a:t>
+            </a:r>
+          </a:p>
+          <a:p>
+            <a:pPr algn="l" latinLnBrk="0">
+              <a:lnSpc>
+                <a:spcPct val="100000"/>
+              </a:lnSpc>
+              <a:spcBef>
+                <a:spcPts val="0"/>
+              </a:spcBef>
+              <a:spcAft>
+                <a:spcPts val="0"/>
+              </a:spcAft>
+            </a:pPr>
+            <a:r>
+              <a:rPr sz="950" b="0">
+                <a:solidFill>
+                  <a:srgbClr val="35424F"/>
+                </a:solidFill>
+                <a:latin typeface="Microsoft YaHei"/>
+                <a:ea typeface="Microsoft YaHei"/>
+                <a:cs typeface="Microsoft YaHei"/>
+              </a:rPr>
+              <a:t>no_group cos 0.000</a:t>
+            </a:r>
+          </a:p>
+        </p:txBody>
+      </p:sp>
+      <p:sp>
+        <p:nvSpPr>
+          <p:cNvPr id="37" name="TextBox 36"/>
+          <p:cNvSpPr txBox="1"/>
+          <p:nvPr/>
+        </p:nvSpPr>
+        <p:spPr>
+          <a:xfrm>
+            <a:off x="8513064" y="3694176"/>
+            <a:ext cx="1280160" cy="566928"/>
+          </a:xfrm>
+          <a:prstGeom prst="rect">
+            <a:avLst/>
+          </a:prstGeom>
+          <a:noFill/>
+        </p:spPr>
+        <p:txBody>
+          <a:bodyPr wrap="square" anchor="ctr" lIns="0" tIns="0" rIns="0" bIns="0">
+            <a:noAutofit/>
+          </a:bodyPr>
+          <a:lstStyle/>
+          <a:p>
+            <a:pPr algn="l" latinLnBrk="0">
+              <a:lnSpc>
+                <a:spcPct val="100000"/>
+              </a:lnSpc>
+              <a:spcBef>
+                <a:spcPts val="0"/>
+              </a:spcBef>
+              <a:spcAft>
+                <a:spcPts val="0"/>
+              </a:spcAft>
+            </a:pPr>
+            <a:r>
+              <a:rPr sz="950" b="0">
+                <a:solidFill>
+                  <a:srgbClr val="8C96A1"/>
+                </a:solidFill>
+                <a:latin typeface="Microsoft YaHei"/>
+                <a:ea typeface="Microsoft YaHei"/>
+                <a:cs typeface="Microsoft YaHei"/>
+              </a:rPr>
+              <a:t>—</a:t>
+            </a:r>
+          </a:p>
+        </p:txBody>
+      </p:sp>
+      <p:sp>
+        <p:nvSpPr>
+          <p:cNvPr id="38" name="TextBox 37"/>
+          <p:cNvSpPr txBox="1"/>
+          <p:nvPr/>
+        </p:nvSpPr>
+        <p:spPr>
+          <a:xfrm>
+            <a:off x="9884664" y="3694176"/>
+            <a:ext cx="1554480" cy="566928"/>
+          </a:xfrm>
+          <a:prstGeom prst="rect">
+            <a:avLst/>
+          </a:prstGeom>
+          <a:noFill/>
+        </p:spPr>
+        <p:txBody>
+          <a:bodyPr wrap="square" anchor="ctr" lIns="0" tIns="0" rIns="0" bIns="0">
+            <a:noAutofit/>
+          </a:bodyPr>
+          <a:lstStyle/>
+          <a:p>
+            <a:pPr algn="l" latinLnBrk="0">
+              <a:lnSpc>
+                <a:spcPct val="100000"/>
+              </a:lnSpc>
+              <a:spcBef>
+                <a:spcPts val="0"/>
+              </a:spcBef>
+              <a:spcAft>
+                <a:spcPts val="0"/>
+              </a:spcAft>
+            </a:pPr>
+            <a:r>
+              <a:rPr sz="950" b="0">
+                <a:solidFill>
+                  <a:srgbClr val="B4382F"/>
+                </a:solidFill>
+                <a:latin typeface="Microsoft YaHei"/>
+                <a:ea typeface="Microsoft YaHei"/>
+                <a:cs typeface="Microsoft YaHei"/>
+              </a:rPr>
+              <a:t>① 挡掉一个，③ 挡掉其余</a:t>
+            </a:r>
+          </a:p>
+          <a:p>
+            <a:pPr algn="l" latinLnBrk="0">
+              <a:lnSpc>
+                <a:spcPct val="100000"/>
+              </a:lnSpc>
+              <a:spcBef>
+                <a:spcPts val="0"/>
+              </a:spcBef>
+              <a:spcAft>
+                <a:spcPts val="0"/>
+              </a:spcAft>
+            </a:pPr>
+            <a:r>
+              <a:rPr sz="950" b="0">
+                <a:solidFill>
+                  <a:srgbClr val="B4382F"/>
+                </a:solidFill>
+                <a:latin typeface="Microsoft YaHei"/>
+                <a:ea typeface="Microsoft YaHei"/>
+                <a:cs typeface="Microsoft YaHei"/>
+              </a:rPr>
+              <a:t>判定为闭源核内在开销</a:t>
+            </a:r>
+          </a:p>
+        </p:txBody>
+      </p:sp>
+      <p:sp>
+        <p:nvSpPr>
+          <p:cNvPr id="39" name="TextBox 38"/>
+          <p:cNvSpPr txBox="1"/>
+          <p:nvPr/>
+        </p:nvSpPr>
+        <p:spPr>
+          <a:xfrm>
+            <a:off x="3675888" y="4297680"/>
+            <a:ext cx="2651760" cy="274320"/>
+          </a:xfrm>
+          <a:prstGeom prst="rect">
+            <a:avLst/>
+          </a:prstGeom>
+          <a:noFill/>
+        </p:spPr>
+        <p:txBody>
+          <a:bodyPr wrap="square" anchor="ctr" lIns="0" tIns="0" rIns="0" bIns="0">
+            <a:noAutofit/>
+          </a:bodyPr>
+          <a:lstStyle/>
+          <a:p>
+            <a:pPr algn="l" latinLnBrk="0">
+              <a:lnSpc>
+                <a:spcPct val="100000"/>
+              </a:lnSpc>
+              <a:spcBef>
+                <a:spcPts val="0"/>
+              </a:spcBef>
+              <a:spcAft>
+                <a:spcPts val="0"/>
+              </a:spcAft>
+            </a:pPr>
+            <a:r>
+              <a:rPr sz="950" b="0">
+                <a:solidFill>
+                  <a:srgbClr val="35424F"/>
+                </a:solidFill>
+                <a:latin typeface="Microsoft YaHei"/>
+                <a:ea typeface="Microsoft YaHei"/>
+                <a:cs typeface="Microsoft YaHei"/>
+              </a:rPr>
+              <a:t>FFN 输出合并换 shuffle_mul_sum_sdnn</a:t>
+            </a:r>
+          </a:p>
+        </p:txBody>
+      </p:sp>
+      <p:sp>
+        <p:nvSpPr>
+          <p:cNvPr id="40" name="TextBox 39"/>
+          <p:cNvSpPr txBox="1"/>
+          <p:nvPr/>
+        </p:nvSpPr>
+        <p:spPr>
+          <a:xfrm>
+            <a:off x="6419088" y="4297680"/>
+            <a:ext cx="2002536" cy="274320"/>
+          </a:xfrm>
+          <a:prstGeom prst="rect">
+            <a:avLst/>
+          </a:prstGeom>
+          <a:noFill/>
+        </p:spPr>
+        <p:txBody>
+          <a:bodyPr wrap="square" anchor="ctr" lIns="0" tIns="0" rIns="0" bIns="0">
+            <a:noAutofit/>
+          </a:bodyPr>
+          <a:lstStyle/>
+          <a:p>
+            <a:pPr algn="l" latinLnBrk="0">
+              <a:lnSpc>
+                <a:spcPct val="100000"/>
+              </a:lnSpc>
+              <a:spcBef>
+                <a:spcPts val="0"/>
+              </a:spcBef>
+              <a:spcAft>
+                <a:spcPts val="0"/>
+              </a:spcAft>
+            </a:pPr>
+            <a:r>
+              <a:rPr sz="950" b="0">
+                <a:solidFill>
+                  <a:srgbClr val="35424F"/>
+                </a:solidFill>
+                <a:latin typeface="Microsoft YaHei"/>
+                <a:ea typeface="Microsoft YaHei"/>
+                <a:cs typeface="Microsoft YaHei"/>
+              </a:rPr>
+              <a:t>0.61×，更慢</a:t>
+            </a:r>
+          </a:p>
+        </p:txBody>
+      </p:sp>
+      <p:sp>
+        <p:nvSpPr>
+          <p:cNvPr id="41" name="TextBox 40"/>
+          <p:cNvSpPr txBox="1"/>
+          <p:nvPr/>
+        </p:nvSpPr>
+        <p:spPr>
+          <a:xfrm>
+            <a:off x="8513064" y="4297680"/>
+            <a:ext cx="1280160" cy="274320"/>
+          </a:xfrm>
+          <a:prstGeom prst="rect">
+            <a:avLst/>
+          </a:prstGeom>
+          <a:noFill/>
+        </p:spPr>
+        <p:txBody>
+          <a:bodyPr wrap="square" anchor="ctr" lIns="0" tIns="0" rIns="0" bIns="0">
+            <a:noAutofit/>
+          </a:bodyPr>
+          <a:lstStyle/>
+          <a:p>
+            <a:pPr algn="l" latinLnBrk="0">
+              <a:lnSpc>
+                <a:spcPct val="100000"/>
+              </a:lnSpc>
+              <a:spcBef>
+                <a:spcPts val="0"/>
+              </a:spcBef>
+              <a:spcAft>
+                <a:spcPts val="0"/>
+              </a:spcAft>
+            </a:pPr>
+            <a:r>
+              <a:rPr sz="950" b="0">
+                <a:solidFill>
+                  <a:srgbClr val="8C96A1"/>
+                </a:solidFill>
+                <a:latin typeface="Microsoft YaHei"/>
+                <a:ea typeface="Microsoft YaHei"/>
+                <a:cs typeface="Microsoft YaHei"/>
+              </a:rPr>
+              <a:t>—</a:t>
+            </a:r>
+          </a:p>
+        </p:txBody>
+      </p:sp>
+      <p:sp>
+        <p:nvSpPr>
+          <p:cNvPr id="42" name="TextBox 41"/>
+          <p:cNvSpPr txBox="1"/>
+          <p:nvPr/>
+        </p:nvSpPr>
+        <p:spPr>
+          <a:xfrm>
+            <a:off x="9884664" y="4297680"/>
+            <a:ext cx="1554480" cy="274320"/>
+          </a:xfrm>
+          <a:prstGeom prst="rect">
+            <a:avLst/>
+          </a:prstGeom>
+          <a:noFill/>
+        </p:spPr>
+        <p:txBody>
+          <a:bodyPr wrap="square" anchor="ctr" lIns="0" tIns="0" rIns="0" bIns="0">
+            <a:noAutofit/>
+          </a:bodyPr>
+          <a:lstStyle/>
+          <a:p>
+            <a:pPr algn="l" latinLnBrk="0">
+              <a:lnSpc>
+                <a:spcPct val="100000"/>
+              </a:lnSpc>
+              <a:spcBef>
+                <a:spcPts val="0"/>
+              </a:spcBef>
+              <a:spcAft>
+                <a:spcPts val="0"/>
+              </a:spcAft>
+            </a:pPr>
+            <a:r>
+              <a:rPr sz="950" b="0">
+                <a:solidFill>
+                  <a:srgbClr val="B4382F"/>
+                </a:solidFill>
+                <a:latin typeface="Microsoft YaHei"/>
+                <a:ea typeface="Microsoft YaHei"/>
+                <a:cs typeface="Microsoft YaHei"/>
+              </a:rPr>
+              <a:t>③ 未过</a:t>
+            </a:r>
+          </a:p>
+        </p:txBody>
+      </p:sp>
+      <p:sp>
+        <p:nvSpPr>
+          <p:cNvPr id="43" name="TextBox 42"/>
+          <p:cNvSpPr txBox="1"/>
+          <p:nvPr/>
+        </p:nvSpPr>
+        <p:spPr>
+          <a:xfrm>
+            <a:off x="3675888" y="4608576"/>
+            <a:ext cx="2651760" cy="274320"/>
+          </a:xfrm>
+          <a:prstGeom prst="rect">
+            <a:avLst/>
+          </a:prstGeom>
+          <a:noFill/>
+        </p:spPr>
+        <p:txBody>
+          <a:bodyPr wrap="square" anchor="ctr" lIns="0" tIns="0" rIns="0" bIns="0">
+            <a:noAutofit/>
+          </a:bodyPr>
+          <a:lstStyle/>
+          <a:p>
+            <a:pPr algn="l" latinLnBrk="0">
+              <a:lnSpc>
+                <a:spcPct val="100000"/>
+              </a:lnSpc>
+              <a:spcBef>
+                <a:spcPts val="0"/>
+              </a:spcBef>
+              <a:spcAft>
+                <a:spcPts val="0"/>
+              </a:spcAft>
+            </a:pPr>
+            <a:r>
+              <a:rPr sz="950" b="0">
+                <a:solidFill>
+                  <a:srgbClr val="35424F"/>
+                </a:solidFill>
+                <a:latin typeface="Microsoft YaHei"/>
+                <a:ea typeface="Microsoft YaHei"/>
+                <a:cs typeface="Microsoft YaHei"/>
+              </a:rPr>
+              <a:t>路由 softmax + topk + renorm 融合</a:t>
+            </a:r>
+          </a:p>
+        </p:txBody>
+      </p:sp>
+      <p:sp>
+        <p:nvSpPr>
+          <p:cNvPr id="44" name="TextBox 43"/>
+          <p:cNvSpPr txBox="1"/>
+          <p:nvPr/>
+        </p:nvSpPr>
+        <p:spPr>
+          <a:xfrm>
+            <a:off x="6419088" y="4608576"/>
+            <a:ext cx="2002536" cy="274320"/>
+          </a:xfrm>
+          <a:prstGeom prst="rect">
+            <a:avLst/>
+          </a:prstGeom>
+          <a:noFill/>
+        </p:spPr>
+        <p:txBody>
+          <a:bodyPr wrap="square" anchor="ctr" lIns="0" tIns="0" rIns="0" bIns="0">
+            <a:noAutofit/>
+          </a:bodyPr>
+          <a:lstStyle/>
+          <a:p>
+            <a:pPr algn="l" latinLnBrk="0">
+              <a:lnSpc>
+                <a:spcPct val="100000"/>
+              </a:lnSpc>
+              <a:spcBef>
+                <a:spcPts val="0"/>
+              </a:spcBef>
+              <a:spcAft>
+                <a:spcPts val="0"/>
+              </a:spcAft>
+            </a:pPr>
+            <a:r>
+              <a:rPr sz="950" b="0">
+                <a:solidFill>
+                  <a:srgbClr val="35424F"/>
+                </a:solidFill>
+                <a:latin typeface="Microsoft YaHei"/>
+                <a:ea typeface="Microsoft YaHei"/>
+                <a:cs typeface="Microsoft YaHei"/>
+              </a:rPr>
+              <a:t>内核 2×，数值对（Δ 3e-8）</a:t>
+            </a:r>
+          </a:p>
+        </p:txBody>
+      </p:sp>
+      <p:sp>
+        <p:nvSpPr>
+          <p:cNvPr id="45" name="TextBox 44"/>
+          <p:cNvSpPr txBox="1"/>
+          <p:nvPr/>
+        </p:nvSpPr>
+        <p:spPr>
+          <a:xfrm>
+            <a:off x="8513064" y="4608576"/>
+            <a:ext cx="1280160" cy="274320"/>
+          </a:xfrm>
+          <a:prstGeom prst="rect">
+            <a:avLst/>
+          </a:prstGeom>
+          <a:noFill/>
+        </p:spPr>
+        <p:txBody>
+          <a:bodyPr wrap="square" anchor="ctr" lIns="0" tIns="0" rIns="0" bIns="0">
+            <a:noAutofit/>
+          </a:bodyPr>
+          <a:lstStyle/>
+          <a:p>
+            <a:pPr algn="l" latinLnBrk="0">
+              <a:lnSpc>
+                <a:spcPct val="100000"/>
+              </a:lnSpc>
+              <a:spcBef>
+                <a:spcPts val="0"/>
+              </a:spcBef>
+              <a:spcAft>
+                <a:spcPts val="0"/>
+              </a:spcAft>
+            </a:pPr>
+            <a:r>
+              <a:rPr sz="950" b="0">
+                <a:solidFill>
+                  <a:srgbClr val="35424F"/>
+                </a:solidFill>
+                <a:latin typeface="Microsoft YaHei"/>
+                <a:ea typeface="Microsoft YaHei"/>
+                <a:cs typeface="Microsoft YaHei"/>
+              </a:rPr>
+              <a:t>只占 ~0.9% TPOT</a:t>
+            </a:r>
+          </a:p>
+        </p:txBody>
+      </p:sp>
+      <p:sp>
+        <p:nvSpPr>
+          <p:cNvPr id="46" name="TextBox 45"/>
+          <p:cNvSpPr txBox="1"/>
+          <p:nvPr/>
+        </p:nvSpPr>
+        <p:spPr>
+          <a:xfrm>
+            <a:off x="9884664" y="4608576"/>
+            <a:ext cx="1554480" cy="274320"/>
+          </a:xfrm>
+          <a:prstGeom prst="rect">
+            <a:avLst/>
+          </a:prstGeom>
+          <a:noFill/>
+        </p:spPr>
+        <p:txBody>
+          <a:bodyPr wrap="square" anchor="ctr" lIns="0" tIns="0" rIns="0" bIns="0">
+            <a:noAutofit/>
+          </a:bodyPr>
+          <a:lstStyle/>
+          <a:p>
+            <a:pPr algn="l" latinLnBrk="0">
+              <a:lnSpc>
+                <a:spcPct val="100000"/>
+              </a:lnSpc>
+              <a:spcBef>
+                <a:spcPts val="0"/>
+              </a:spcBef>
+              <a:spcAft>
+                <a:spcPts val="0"/>
+              </a:spcAft>
+            </a:pPr>
+            <a:r>
+              <a:rPr sz="950" b="0">
+                <a:solidFill>
+                  <a:srgbClr val="66727F"/>
+                </a:solidFill>
+                <a:latin typeface="Microsoft YaHei"/>
+                <a:ea typeface="Microsoft YaHei"/>
+                <a:cs typeface="Microsoft YaHei"/>
+              </a:rPr>
+              <a:t>③ 过但不值当，未接线</a:t>
+            </a:r>
+          </a:p>
+        </p:txBody>
+      </p:sp>
+      <p:sp>
+        <p:nvSpPr>
+          <p:cNvPr id="47" name="TextBox 46"/>
+          <p:cNvSpPr txBox="1"/>
+          <p:nvPr/>
+        </p:nvSpPr>
+        <p:spPr>
+          <a:xfrm>
+            <a:off x="548640" y="5084064"/>
+            <a:ext cx="2651760" cy="621792"/>
+          </a:xfrm>
+          <a:prstGeom prst="rect">
+            <a:avLst/>
+          </a:prstGeom>
+          <a:noFill/>
+        </p:spPr>
+        <p:txBody>
+          <a:bodyPr wrap="square" anchor="ctr" lIns="0" tIns="0" rIns="0" bIns="0">
+            <a:noAutofit/>
+          </a:bodyPr>
+          <a:lstStyle/>
+          <a:p>
+            <a:pPr algn="l" latinLnBrk="0">
+              <a:lnSpc>
+                <a:spcPct val="100000"/>
+              </a:lnSpc>
+              <a:spcBef>
+                <a:spcPts val="0"/>
+              </a:spcBef>
+              <a:spcAft>
+                <a:spcPts val="200"/>
+              </a:spcAft>
+            </a:pPr>
+            <a:r>
+              <a:rPr sz="1150" b="1">
+                <a:solidFill>
+                  <a:srgbClr val="16202A"/>
+                </a:solidFill>
+                <a:latin typeface="Microsoft YaHei"/>
+                <a:ea typeface="Microsoft YaHei"/>
+                <a:cs typeface="Microsoft YaHei"/>
+              </a:rPr>
+              <a:t>三道门的漏斗</a:t>
+            </a:r>
+          </a:p>
+          <a:p>
+            <a:pPr algn="l" latinLnBrk="0">
+              <a:lnSpc>
+                <a:spcPct val="100000"/>
+              </a:lnSpc>
+              <a:spcBef>
+                <a:spcPts val="0"/>
+              </a:spcBef>
+              <a:spcAft>
+                <a:spcPts val="0"/>
+              </a:spcAft>
+            </a:pPr>
+            <a:r>
+              <a:rPr sz="950" b="0">
+                <a:solidFill>
+                  <a:srgbClr val="66727F"/>
+                </a:solidFill>
+                <a:latin typeface="Microsoft YaHei"/>
+                <a:ea typeface="Microsoft YaHei"/>
+                <a:cs typeface="Microsoft YaHei"/>
+              </a:rPr>
+              <a:t>由便宜到贵，任一道不过即停，</a:t>
+            </a:r>
+          </a:p>
+          <a:p>
+            <a:pPr algn="l" latinLnBrk="0">
+              <a:lnSpc>
+                <a:spcPct val="100000"/>
+              </a:lnSpc>
+              <a:spcBef>
+                <a:spcPts val="0"/>
+              </a:spcBef>
+              <a:spcAft>
+                <a:spcPts val="0"/>
+              </a:spcAft>
+            </a:pPr>
+            <a:r>
+              <a:rPr sz="950" b="0">
+                <a:solidFill>
+                  <a:srgbClr val="66727F"/>
+                </a:solidFill>
+                <a:latin typeface="Microsoft YaHei"/>
+                <a:ea typeface="Microsoft YaHei"/>
+                <a:cs typeface="Microsoft YaHei"/>
+              </a:rPr>
+              <a:t>数值不对、更慢的当场挡掉</a:t>
+            </a:r>
+          </a:p>
+        </p:txBody>
+      </p:sp>
+      <p:sp>
+        <p:nvSpPr>
+          <p:cNvPr id="48" name="Rectangle 47"/>
+          <p:cNvSpPr/>
+          <p:nvPr/>
+        </p:nvSpPr>
+        <p:spPr>
+          <a:xfrm>
+            <a:off x="3291840" y="5084064"/>
+            <a:ext cx="2503322" cy="621792"/>
+          </a:xfrm>
+          <a:prstGeom prst="rect">
+            <a:avLst/>
+          </a:prstGeom>
+          <a:solidFill>
+            <a:srgbClr val="FFFFFF"/>
+          </a:solidFill>
+          <a:ln w="9525">
+            <a:solidFill>
+              <a:srgbClr val="DDE2E7"/>
+            </a:solidFill>
+          </a:ln>
+        </p:spPr>
+        <p:txBody>
+          <a:bodyPr rtlCol="0" anchor="ctr"/>
+          <a:lstStyle/>
+          <a:p>
+            <a:pPr algn="ctr"/>
+          </a:p>
+        </p:txBody>
+      </p:sp>
+      <p:sp>
+        <p:nvSpPr>
+          <p:cNvPr id="49" name="TextBox 48"/>
+          <p:cNvSpPr txBox="1"/>
+          <p:nvPr/>
+        </p:nvSpPr>
+        <p:spPr>
+          <a:xfrm>
+            <a:off x="3474720" y="5157216"/>
+            <a:ext cx="2137562" cy="201168"/>
+          </a:xfrm>
+          <a:prstGeom prst="rect">
+            <a:avLst/>
+          </a:prstGeom>
+          <a:noFill/>
+        </p:spPr>
+        <p:txBody>
+          <a:bodyPr wrap="square" anchor="ctr" lIns="0" tIns="0" rIns="0" bIns="0">
+            <a:noAutofit/>
+          </a:bodyPr>
+          <a:lstStyle/>
+          <a:p>
+            <a:pPr algn="l" latinLnBrk="0">
+              <a:lnSpc>
+                <a:spcPct val="100000"/>
+              </a:lnSpc>
+              <a:spcBef>
+                <a:spcPts val="0"/>
+              </a:spcBef>
+              <a:spcAft>
+                <a:spcPts val="0"/>
+              </a:spcAft>
+            </a:pPr>
+            <a:r>
+              <a:rPr sz="950" b="0">
+                <a:solidFill>
+                  <a:srgbClr val="66727F"/>
+                </a:solidFill>
+                <a:latin typeface="Microsoft YaHei"/>
+                <a:ea typeface="Microsoft YaHei"/>
+                <a:cs typeface="Microsoft YaHei"/>
+              </a:rPr>
+              <a:t>候选</a:t>
+            </a:r>
+          </a:p>
+        </p:txBody>
+      </p:sp>
+      <p:sp>
+        <p:nvSpPr>
+          <p:cNvPr id="50" name="TextBox 49"/>
+          <p:cNvSpPr txBox="1"/>
+          <p:nvPr/>
+        </p:nvSpPr>
+        <p:spPr>
+          <a:xfrm>
+            <a:off x="3474720" y="5376672"/>
+            <a:ext cx="2137562" cy="274320"/>
+          </a:xfrm>
+          <a:prstGeom prst="rect">
+            <a:avLst/>
+          </a:prstGeom>
+          <a:noFill/>
+        </p:spPr>
+        <p:txBody>
+          <a:bodyPr wrap="square" anchor="ctr" lIns="0" tIns="0" rIns="0" bIns="0">
+            <a:noAutofit/>
+          </a:bodyPr>
+          <a:lstStyle/>
+          <a:p>
+            <a:pPr algn="l" latinLnBrk="0">
+              <a:lnSpc>
+                <a:spcPct val="100000"/>
+              </a:lnSpc>
+              <a:spcBef>
+                <a:spcPts val="0"/>
+              </a:spcBef>
+              <a:spcAft>
+                <a:spcPts val="0"/>
+              </a:spcAft>
+            </a:pPr>
+            <a:r>
+              <a:rPr sz="1600" b="1">
+                <a:solidFill>
+                  <a:srgbClr val="16202A"/>
+                </a:solidFill>
+                <a:latin typeface="Arial"/>
+                <a:ea typeface="Microsoft YaHei"/>
+                <a:cs typeface="Microsoft YaHei"/>
+              </a:rPr>
+              <a:t>10</a:t>
+            </a:r>
+          </a:p>
+        </p:txBody>
+      </p:sp>
+      <p:sp>
+        <p:nvSpPr>
+          <p:cNvPr id="51" name="Rectangle 50"/>
+          <p:cNvSpPr/>
+          <p:nvPr/>
+        </p:nvSpPr>
+        <p:spPr>
+          <a:xfrm>
+            <a:off x="6215786" y="5084064"/>
+            <a:ext cx="2503322" cy="621792"/>
+          </a:xfrm>
+          <a:prstGeom prst="rect">
+            <a:avLst/>
+          </a:prstGeom>
+          <a:solidFill>
+            <a:srgbClr val="FFFFFF"/>
+          </a:solidFill>
+          <a:ln w="9525">
+            <a:solidFill>
+              <a:srgbClr val="DDE2E7"/>
+            </a:solidFill>
+          </a:ln>
+        </p:spPr>
+        <p:txBody>
+          <a:bodyPr rtlCol="0" anchor="ctr"/>
+          <a:lstStyle/>
+          <a:p>
+            <a:pPr algn="ctr"/>
+          </a:p>
+        </p:txBody>
+      </p:sp>
+      <p:sp>
+        <p:nvSpPr>
+          <p:cNvPr id="52" name="TextBox 51"/>
+          <p:cNvSpPr txBox="1"/>
+          <p:nvPr/>
+        </p:nvSpPr>
+        <p:spPr>
+          <a:xfrm>
+            <a:off x="6398666" y="5157216"/>
+            <a:ext cx="2137562" cy="201168"/>
+          </a:xfrm>
+          <a:prstGeom prst="rect">
+            <a:avLst/>
+          </a:prstGeom>
+          <a:noFill/>
+        </p:spPr>
+        <p:txBody>
+          <a:bodyPr wrap="square" anchor="ctr" lIns="0" tIns="0" rIns="0" bIns="0">
+            <a:noAutofit/>
+          </a:bodyPr>
+          <a:lstStyle/>
+          <a:p>
+            <a:pPr algn="l" latinLnBrk="0">
+              <a:lnSpc>
+                <a:spcPct val="100000"/>
+              </a:lnSpc>
+              <a:spcBef>
+                <a:spcPts val="0"/>
+              </a:spcBef>
+              <a:spcAft>
+                <a:spcPts val="0"/>
+              </a:spcAft>
+            </a:pPr>
+            <a:r>
+              <a:rPr sz="950" b="0">
+                <a:solidFill>
+                  <a:srgbClr val="66727F"/>
+                </a:solidFill>
+                <a:latin typeface="Microsoft YaHei"/>
+                <a:ea typeface="Microsoft YaHei"/>
+                <a:cs typeface="Microsoft YaHei"/>
+              </a:rPr>
+              <a:t>过三道门</a:t>
+            </a:r>
+          </a:p>
+        </p:txBody>
+      </p:sp>
+      <p:sp>
+        <p:nvSpPr>
+          <p:cNvPr id="53" name="TextBox 52"/>
+          <p:cNvSpPr txBox="1"/>
+          <p:nvPr/>
+        </p:nvSpPr>
+        <p:spPr>
+          <a:xfrm>
+            <a:off x="6398666" y="5376672"/>
+            <a:ext cx="2137562" cy="274320"/>
+          </a:xfrm>
+          <a:prstGeom prst="rect">
+            <a:avLst/>
+          </a:prstGeom>
+          <a:noFill/>
+        </p:spPr>
+        <p:txBody>
+          <a:bodyPr wrap="square" anchor="ctr" lIns="0" tIns="0" rIns="0" bIns="0">
+            <a:noAutofit/>
+          </a:bodyPr>
+          <a:lstStyle/>
+          <a:p>
+            <a:pPr algn="l" latinLnBrk="0">
+              <a:lnSpc>
+                <a:spcPct val="100000"/>
+              </a:lnSpc>
+              <a:spcBef>
+                <a:spcPts val="0"/>
+              </a:spcBef>
+              <a:spcAft>
+                <a:spcPts val="0"/>
+              </a:spcAft>
+            </a:pPr>
+            <a:r>
+              <a:rPr sz="1600" b="1">
+                <a:solidFill>
+                  <a:srgbClr val="16202A"/>
+                </a:solidFill>
+                <a:latin typeface="Arial"/>
+                <a:ea typeface="Microsoft YaHei"/>
+                <a:cs typeface="Microsoft YaHei"/>
+              </a:rPr>
+              <a:t>5</a:t>
+            </a:r>
+          </a:p>
+        </p:txBody>
+      </p:sp>
+      <p:cxnSp>
+        <p:nvCxnSpPr>
+          <p:cNvPr id="54" name="Connector 53"/>
+          <p:cNvCxnSpPr/>
+          <p:nvPr/>
+        </p:nvCxnSpPr>
+        <p:spPr>
+          <a:xfrm>
+            <a:off x="5886602" y="5394959"/>
+            <a:ext cx="237744" cy="0"/>
+          </a:xfrm>
+          <a:prstGeom prst="line">
+            <a:avLst/>
+          </a:prstGeom>
+          <a:ln w="15875">
+            <a:solidFill>
+              <a:srgbClr val="8C96A1"/>
+            </a:solidFill>
+            <a:tailEnd type="triangle" w="med" len="med"/>
+          </a:ln>
+        </p:spPr>
+      </p:cxnSp>
+      <p:sp>
+        <p:nvSpPr>
+          <p:cNvPr id="55" name="Rectangle 54"/>
+          <p:cNvSpPr/>
+          <p:nvPr/>
+        </p:nvSpPr>
+        <p:spPr>
+          <a:xfrm>
+            <a:off x="9139732" y="5084064"/>
+            <a:ext cx="2503322" cy="621792"/>
+          </a:xfrm>
+          <a:prstGeom prst="rect">
+            <a:avLst/>
+          </a:prstGeom>
+          <a:solidFill>
+            <a:srgbClr val="F8EADF"/>
+          </a:solidFill>
+          <a:ln>
+            <a:noFill/>
+          </a:ln>
+        </p:spPr>
+        <p:txBody>
+          <a:bodyPr rtlCol="0" anchor="ctr"/>
+          <a:lstStyle/>
+          <a:p>
+            <a:pPr algn="ctr"/>
+          </a:p>
+        </p:txBody>
+      </p:sp>
+      <p:sp>
+        <p:nvSpPr>
+          <p:cNvPr id="56" name="TextBox 55"/>
+          <p:cNvSpPr txBox="1"/>
+          <p:nvPr/>
+        </p:nvSpPr>
+        <p:spPr>
+          <a:xfrm>
+            <a:off x="9322612" y="5157216"/>
+            <a:ext cx="2137562" cy="201168"/>
+          </a:xfrm>
+          <a:prstGeom prst="rect">
+            <a:avLst/>
+          </a:prstGeom>
+          <a:noFill/>
+        </p:spPr>
+        <p:txBody>
+          <a:bodyPr wrap="square" anchor="ctr" lIns="0" tIns="0" rIns="0" bIns="0">
+            <a:noAutofit/>
+          </a:bodyPr>
+          <a:lstStyle/>
+          <a:p>
+            <a:pPr algn="l" latinLnBrk="0">
+              <a:lnSpc>
+                <a:spcPct val="100000"/>
+              </a:lnSpc>
+              <a:spcBef>
+                <a:spcPts val="0"/>
+              </a:spcBef>
+              <a:spcAft>
+                <a:spcPts val="0"/>
+              </a:spcAft>
+            </a:pPr>
+            <a:r>
+              <a:rPr sz="950" b="1">
+                <a:solidFill>
+                  <a:srgbClr val="C0612C"/>
+                </a:solidFill>
+                <a:latin typeface="Microsoft YaHei"/>
+                <a:ea typeface="Microsoft YaHei"/>
+                <a:cs typeface="Microsoft YaHei"/>
+              </a:rPr>
+              <a:t>交付</a:t>
+            </a:r>
+          </a:p>
+        </p:txBody>
+      </p:sp>
+      <p:sp>
+        <p:nvSpPr>
+          <p:cNvPr id="57" name="TextBox 56"/>
+          <p:cNvSpPr txBox="1"/>
+          <p:nvPr/>
+        </p:nvSpPr>
+        <p:spPr>
+          <a:xfrm>
+            <a:off x="9322612" y="5376672"/>
+            <a:ext cx="2137562" cy="274320"/>
+          </a:xfrm>
+          <a:prstGeom prst="rect">
+            <a:avLst/>
+          </a:prstGeom>
+          <a:noFill/>
+        </p:spPr>
+        <p:txBody>
+          <a:bodyPr wrap="square" anchor="ctr" lIns="0" tIns="0" rIns="0" bIns="0">
+            <a:noAutofit/>
+          </a:bodyPr>
+          <a:lstStyle/>
+          <a:p>
+            <a:pPr algn="l" latinLnBrk="0">
+              <a:lnSpc>
+                <a:spcPct val="100000"/>
+              </a:lnSpc>
+              <a:spcBef>
+                <a:spcPts val="0"/>
+              </a:spcBef>
+              <a:spcAft>
+                <a:spcPts val="0"/>
+              </a:spcAft>
+            </a:pPr>
+            <a:r>
+              <a:rPr sz="1600" b="1">
+                <a:solidFill>
+                  <a:srgbClr val="16202A"/>
+                </a:solidFill>
+                <a:latin typeface="Arial"/>
+                <a:ea typeface="Microsoft YaHei"/>
+                <a:cs typeface="Microsoft YaHei"/>
+              </a:rPr>
+              <a:t>2</a:t>
+            </a:r>
+          </a:p>
+        </p:txBody>
+      </p:sp>
+      <p:cxnSp>
+        <p:nvCxnSpPr>
+          <p:cNvPr id="58" name="Connector 57"/>
+          <p:cNvCxnSpPr/>
+          <p:nvPr/>
+        </p:nvCxnSpPr>
+        <p:spPr>
+          <a:xfrm>
+            <a:off x="8810548" y="5394959"/>
+            <a:ext cx="237744" cy="0"/>
+          </a:xfrm>
+          <a:prstGeom prst="line">
+            <a:avLst/>
+          </a:prstGeom>
+          <a:ln w="15875">
+            <a:solidFill>
+              <a:srgbClr val="8C96A1"/>
+            </a:solidFill>
+            <a:tailEnd type="triangle" w="med" len="med"/>
+          </a:ln>
+        </p:spPr>
+      </p:cxnSp>
+      <p:sp>
+        <p:nvSpPr>
+          <p:cNvPr id="59" name="Rectangle 58"/>
+          <p:cNvSpPr/>
+          <p:nvPr/>
+        </p:nvSpPr>
+        <p:spPr>
+          <a:xfrm>
+            <a:off x="548640" y="5797296"/>
+            <a:ext cx="11094415" cy="475488"/>
+          </a:xfrm>
+          <a:prstGeom prst="rect">
+            <a:avLst/>
+          </a:prstGeom>
+          <a:solidFill>
+            <a:srgbClr val="F8EADF"/>
+          </a:solidFill>
+          <a:ln>
+            <a:noFill/>
+          </a:ln>
+        </p:spPr>
+        <p:txBody>
+          <a:bodyPr rtlCol="0" anchor="ctr"/>
+          <a:lstStyle/>
+          <a:p>
+            <a:pPr algn="ctr"/>
+          </a:p>
+        </p:txBody>
+      </p:sp>
+      <p:sp>
+        <p:nvSpPr>
+          <p:cNvPr id="60" name="Rectangle 59"/>
+          <p:cNvSpPr/>
+          <p:nvPr/>
+        </p:nvSpPr>
+        <p:spPr>
+          <a:xfrm>
+            <a:off x="548640" y="5797296"/>
+            <a:ext cx="64008" cy="475488"/>
+          </a:xfrm>
+          <a:prstGeom prst="rect">
+            <a:avLst/>
+          </a:prstGeom>
+          <a:solidFill>
+            <a:srgbClr val="C0612C"/>
+          </a:solidFill>
+          <a:ln>
+            <a:noFill/>
+          </a:ln>
+        </p:spPr>
+        <p:txBody>
+          <a:bodyPr rtlCol="0" anchor="ctr"/>
+          <a:lstStyle/>
+          <a:p>
+            <a:pPr algn="ctr"/>
+          </a:p>
+        </p:txBody>
+      </p:sp>
+      <p:sp>
+        <p:nvSpPr>
+          <p:cNvPr id="61" name="TextBox 60"/>
+          <p:cNvSpPr txBox="1"/>
+          <p:nvPr/>
+        </p:nvSpPr>
+        <p:spPr>
+          <a:xfrm>
+            <a:off x="859536" y="5797296"/>
+            <a:ext cx="10454335" cy="475488"/>
+          </a:xfrm>
+          <a:prstGeom prst="rect">
+            <a:avLst/>
+          </a:prstGeom>
+          <a:noFill/>
+        </p:spPr>
+        <p:txBody>
+          <a:bodyPr wrap="square" anchor="ctr" lIns="0" tIns="0" rIns="0" bIns="0">
+            <a:noAutofit/>
+          </a:bodyPr>
+          <a:lstStyle/>
+          <a:p>
+            <a:pPr algn="l" latinLnBrk="0">
+              <a:lnSpc>
+                <a:spcPct val="100000"/>
+              </a:lnSpc>
+              <a:spcBef>
+                <a:spcPts val="0"/>
+              </a:spcBef>
+              <a:spcAft>
+                <a:spcPts val="0"/>
+              </a:spcAft>
+            </a:pPr>
+            <a:r>
+              <a:rPr sz="1200" b="1">
+                <a:solidFill>
+                  <a:srgbClr val="C0612C"/>
+                </a:solidFill>
+                <a:latin typeface="Consolas"/>
+                <a:ea typeface="Microsoft YaHei"/>
+                <a:cs typeface="Microsoft YaHei"/>
+              </a:rPr>
+              <a:t>读数　</a:t>
+            </a:r>
+            <a:r>
+              <a:rPr sz="1600" b="1">
+                <a:solidFill>
+                  <a:srgbClr val="16202A"/>
+                </a:solidFill>
+                <a:latin typeface="Microsoft YaHei"/>
+                <a:ea typeface="Microsoft YaHei"/>
+                <a:cs typeface="Microsoft YaHei"/>
+              </a:rPr>
+              <a:t>两个交付都在替换小核；闭源 grouped-GEMM 的旋钮调不动，占比不到 1% 的核再快也不接线</a:t>
+            </a:r>
+          </a:p>
+        </p:txBody>
+      </p:sp>
+      <p:sp>
+        <p:nvSpPr>
+          <p:cNvPr id="62" name="TextBox 61"/>
+          <p:cNvSpPr txBox="1"/>
+          <p:nvPr/>
+        </p:nvSpPr>
+        <p:spPr>
+          <a:xfrm>
+            <a:off x="548640" y="6382512"/>
+            <a:ext cx="11094415" cy="256032"/>
+          </a:xfrm>
+          <a:prstGeom prst="rect">
+            <a:avLst/>
+          </a:prstGeom>
+          <a:noFill/>
+        </p:spPr>
+        <p:txBody>
+          <a:bodyPr wrap="square" anchor="ctr" lIns="0" tIns="0" rIns="0" bIns="0">
+            <a:noAutofit/>
+          </a:bodyPr>
+          <a:lstStyle/>
+          <a:p>
+            <a:pPr algn="l" latinLnBrk="0">
+              <a:lnSpc>
+                <a:spcPct val="100000"/>
+              </a:lnSpc>
+              <a:spcBef>
+                <a:spcPts val="0"/>
+              </a:spcBef>
+              <a:spcAft>
+                <a:spcPts val="0"/>
+              </a:spcAft>
+            </a:pPr>
+            <a:r>
+              <a:rPr sz="1000" b="0">
+                <a:solidFill>
+                  <a:srgbClr val="66727F"/>
+                </a:solidFill>
+                <a:latin typeface="Microsoft YaHei"/>
+                <a:ea typeface="Microsoft YaHei"/>
+                <a:cs typeface="Microsoft YaHei"/>
+              </a:rPr>
+              <a:t>C 列是内核或微基准读数，D 列是整步或端到端读数，两列口径不同、不能互相换算；表中全部为 M100 单卡 TP1</a:t>
+            </a:r>
+          </a:p>
+        </p:txBody>
+      </p:sp>
+    </p:spTree>
+  </p:cSld>
+  <p:clrMapOvr>
+    <a:masterClrMapping/>
+  </p:clrMapOvr>
+</p:sld>
+</file>
+
+<file path=ppt/slides/slide3.xml><?xml version="1.0" encoding="utf-8"?>
 <p:sld xmlns:a="http://schemas.openxmlformats.org/drawingml/2006/main" xmlns:p="http://schemas.openxmlformats.org/presentationml/2006/main" xmlns:r="http://schemas.openxmlformats.org/officeDocument/2006/relationships">
   <p:cSld>
     <p:spTree>
